--- a/docs/fmva/packs/day7-slides.pptx
+++ b/docs/fmva/packs/day7-slides.pptx
@@ -17,9 +17,11 @@
     <p:sldId id="265" r:id="rId11"/>
     <p:sldId id="266" r:id="rId12"/>
     <p:sldId id="267" r:id="rId13"/>
+    <p:sldId id="268" r:id="rId14"/>
+    <p:sldId id="269" r:id="rId15"/>
   </p:sldIdLst>
   <p:notesMasterIdLst>
-    <p:notesMasterId r:id="rId14"/>
+    <p:notesMasterId r:id="rId16"/>
   </p:notesMasterIdLst>
   <p:sldSz cx="9144000" cy="5148072"/>
   <p:notesSz cx="5148072" cy="9144000"/>
@@ -801,6 +803,182 @@
             <a:fld id="{F7021451-1387-4CA6-816F-3879F97B5CBC}" type="slidenum">
               <a:rPr lang="en-US"/>
               <a:t>12</a:t>
+            </a:fld>
+            <a:endParaRPr lang="en-US"/>
+          </a:p>
+        </p:txBody>
+      </p:sp>
+    </p:spTree>
+    <p:extLst>
+      <p:ext uri="{BB962C8B-B14F-4D97-AF65-F5344CB8AC3E}">
+        <p14:creationId xmlns:p14="http://schemas.microsoft.com/office/powerpoint/2010/main" val="1024086991"/>
+      </p:ext>
+    </p:extLst>
+  </p:cSld>
+  <p:clrMapOvr>
+    <a:masterClrMapping/>
+  </p:clrMapOvr>
+</p:notes>
+</file>
+
+<file path=ppt/notesSlides/notesSlide13.xml><?xml version="1.0" encoding="utf-8"?>
+<p:notes xmlns:a="http://schemas.openxmlformats.org/drawingml/2006/main" xmlns:r="http://schemas.openxmlformats.org/officeDocument/2006/relationships" xmlns:p="http://schemas.openxmlformats.org/presentationml/2006/main">
+  <p:cSld>
+    <p:spTree>
+      <p:nvGrpSpPr>
+        <p:cNvPr id="1" name=""/>
+        <p:cNvGrpSpPr/>
+        <p:nvPr/>
+      </p:nvGrpSpPr>
+      <p:grpSpPr>
+        <a:xfrm>
+          <a:off x="0" y="0"/>
+          <a:ext cx="0" cy="0"/>
+          <a:chOff x="0" y="0"/>
+          <a:chExt cx="0" cy="0"/>
+        </a:xfrm>
+      </p:grpSpPr>
+      <p:sp>
+        <p:nvSpPr>
+          <p:cNvPr id="2" name="Slide Image Placeholder 1"/>
+          <p:cNvSpPr>
+            <a:spLocks noGrp="1" noRot="1" noChangeAspect="1"/>
+          </p:cNvSpPr>
+          <p:nvPr>
+            <p:ph type="sldImg"/>
+          </p:nvPr>
+        </p:nvSpPr>
+        <p:spPr/>
+      </p:sp>
+      <p:sp>
+        <p:nvSpPr>
+          <p:cNvPr id="3" name="Notes Placeholder 2"/>
+          <p:cNvSpPr>
+            <a:spLocks noGrp="1"/>
+          </p:cNvSpPr>
+          <p:nvPr>
+            <p:ph type="body" idx="1"/>
+          </p:nvPr>
+        </p:nvSpPr>
+        <p:spPr/>
+        <p:txBody>
+          <a:bodyPr/>
+          <a:lstStyle/>
+          <a:p>
+            <a:r>
+              <a:rPr lang="en-US" dirty="0"/>
+              <a:t/>
+            </a:r>
+            <a:endParaRPr lang="en-US" dirty="0"/>
+          </a:p>
+        </p:txBody>
+      </p:sp>
+      <p:sp>
+        <p:nvSpPr>
+          <p:cNvPr id="4" name="Slide Number Placeholder 3"/>
+          <p:cNvSpPr>
+            <a:spLocks noGrp="1"/>
+          </p:cNvSpPr>
+          <p:nvPr>
+            <p:ph type="sldNum" sz="quarter" idx="10"/>
+          </p:nvPr>
+        </p:nvSpPr>
+        <p:spPr/>
+        <p:txBody>
+          <a:bodyPr/>
+          <a:lstStyle/>
+          <a:p>
+            <a:fld id="{F7021451-1387-4CA6-816F-3879F97B5CBC}" type="slidenum">
+              <a:rPr lang="en-US"/>
+              <a:t>13</a:t>
+            </a:fld>
+            <a:endParaRPr lang="en-US"/>
+          </a:p>
+        </p:txBody>
+      </p:sp>
+    </p:spTree>
+    <p:extLst>
+      <p:ext uri="{BB962C8B-B14F-4D97-AF65-F5344CB8AC3E}">
+        <p14:creationId xmlns:p14="http://schemas.microsoft.com/office/powerpoint/2010/main" val="1024086991"/>
+      </p:ext>
+    </p:extLst>
+  </p:cSld>
+  <p:clrMapOvr>
+    <a:masterClrMapping/>
+  </p:clrMapOvr>
+</p:notes>
+</file>
+
+<file path=ppt/notesSlides/notesSlide14.xml><?xml version="1.0" encoding="utf-8"?>
+<p:notes xmlns:a="http://schemas.openxmlformats.org/drawingml/2006/main" xmlns:r="http://schemas.openxmlformats.org/officeDocument/2006/relationships" xmlns:p="http://schemas.openxmlformats.org/presentationml/2006/main">
+  <p:cSld>
+    <p:spTree>
+      <p:nvGrpSpPr>
+        <p:cNvPr id="1" name=""/>
+        <p:cNvGrpSpPr/>
+        <p:nvPr/>
+      </p:nvGrpSpPr>
+      <p:grpSpPr>
+        <a:xfrm>
+          <a:off x="0" y="0"/>
+          <a:ext cx="0" cy="0"/>
+          <a:chOff x="0" y="0"/>
+          <a:chExt cx="0" cy="0"/>
+        </a:xfrm>
+      </p:grpSpPr>
+      <p:sp>
+        <p:nvSpPr>
+          <p:cNvPr id="2" name="Slide Image Placeholder 1"/>
+          <p:cNvSpPr>
+            <a:spLocks noGrp="1" noRot="1" noChangeAspect="1"/>
+          </p:cNvSpPr>
+          <p:nvPr>
+            <p:ph type="sldImg"/>
+          </p:nvPr>
+        </p:nvSpPr>
+        <p:spPr/>
+      </p:sp>
+      <p:sp>
+        <p:nvSpPr>
+          <p:cNvPr id="3" name="Notes Placeholder 2"/>
+          <p:cNvSpPr>
+            <a:spLocks noGrp="1"/>
+          </p:cNvSpPr>
+          <p:nvPr>
+            <p:ph type="body" idx="1"/>
+          </p:nvPr>
+        </p:nvSpPr>
+        <p:spPr/>
+        <p:txBody>
+          <a:bodyPr/>
+          <a:lstStyle/>
+          <a:p>
+            <a:r>
+              <a:rPr lang="en-US" dirty="0"/>
+              <a:t/>
+            </a:r>
+            <a:endParaRPr lang="en-US" dirty="0"/>
+          </a:p>
+        </p:txBody>
+      </p:sp>
+      <p:sp>
+        <p:nvSpPr>
+          <p:cNvPr id="4" name="Slide Number Placeholder 3"/>
+          <p:cNvSpPr>
+            <a:spLocks noGrp="1"/>
+          </p:cNvSpPr>
+          <p:nvPr>
+            <p:ph type="sldNum" sz="quarter" idx="10"/>
+          </p:nvPr>
+        </p:nvSpPr>
+        <p:spPr/>
+        <p:txBody>
+          <a:bodyPr/>
+          <a:lstStyle/>
+          <a:p>
+            <a:fld id="{F7021451-1387-4CA6-816F-3879F97B5CBC}" type="slidenum">
+              <a:rPr lang="en-US"/>
+              <a:t>14</a:t>
             </a:fld>
             <a:endParaRPr lang="en-US"/>
           </a:p>
@@ -1833,6 +2011,13 @@
 <file path=ppt/slides/slide1.xml><?xml version="1.0" encoding="utf-8"?>
 <p:sld xmlns:a="http://schemas.openxmlformats.org/drawingml/2006/main" xmlns:r="http://schemas.openxmlformats.org/officeDocument/2006/relationships" xmlns:p="http://schemas.openxmlformats.org/presentationml/2006/main">
   <p:cSld name="Slide 1">
+    <p:bg>
+      <p:bgPr>
+        <a:solidFill>
+          <a:srgbClr val="FFFFFF"/>
+        </a:solidFill>
+      </p:bgPr>
+    </p:bg>
     <p:spTree>
       <p:nvGrpSpPr>
         <p:cNvPr id="1" name=""/>
@@ -1849,14 +2034,56 @@
       </p:grpSpPr>
       <p:sp>
         <p:nvSpPr>
-          <p:cNvPr id="2" name="Text 0"/>
-          <p:cNvSpPr/>
-          <p:nvPr/>
-        </p:nvSpPr>
-        <p:spPr>
-          <a:xfrm>
-            <a:off x="548640" y="1828800"/>
-            <a:ext cx="8046720" cy="1097280"/>
+          <p:cNvPr id="2" name="Shape 0"/>
+          <p:cNvSpPr/>
+          <p:nvPr/>
+        </p:nvSpPr>
+        <p:spPr>
+          <a:xfrm>
+            <a:off x="0" y="0"/>
+            <a:ext cx="256032" cy="5148072"/>
+          </a:xfrm>
+          <a:prstGeom prst="rect">
+            <a:avLst/>
+          </a:prstGeom>
+          <a:solidFill>
+            <a:srgbClr val="B45309"/>
+          </a:solidFill>
+          <a:ln/>
+        </p:spPr>
+      </p:sp>
+      <p:sp>
+        <p:nvSpPr>
+          <p:cNvPr id="3" name="Shape 1"/>
+          <p:cNvSpPr/>
+          <p:nvPr/>
+        </p:nvSpPr>
+        <p:spPr>
+          <a:xfrm>
+            <a:off x="256032" y="0"/>
+            <a:ext cx="8887968" cy="109728"/>
+          </a:xfrm>
+          <a:prstGeom prst="rect">
+            <a:avLst/>
+          </a:prstGeom>
+          <a:solidFill>
+            <a:srgbClr val="B45309">
+              <a:alpha val="40000"/>
+            </a:srgbClr>
+          </a:solidFill>
+          <a:ln/>
+        </p:spPr>
+      </p:sp>
+      <p:sp>
+        <p:nvSpPr>
+          <p:cNvPr id="4" name="Text 2"/>
+          <p:cNvSpPr/>
+          <p:nvPr/>
+        </p:nvSpPr>
+        <p:spPr>
+          <a:xfrm>
+            <a:off x="685800" y="1051560"/>
+            <a:ext cx="7863840" cy="365760"/>
           </a:xfrm>
           <a:prstGeom prst="rect">
             <a:avLst/>
@@ -1872,27 +2099,30 @@
               <a:buNone/>
             </a:pPr>
             <a:r>
-              <a:rPr lang="en-US" sz="3200" b="1" dirty="0">
+              <a:rPr lang="en-US" sz="1300" b="1" spc="300" kern="0" dirty="0">
                 <a:solidFill>
                   <a:srgbClr val="B45309"/>
                 </a:solidFill>
-              </a:rPr>
-              <a:t>Case Studies and Final Project Presentations</a:t>
-            </a:r>
-            <a:endParaRPr lang="en-US" sz="3200" dirty="0"/>
-          </a:p>
-        </p:txBody>
-      </p:sp>
-      <p:sp>
-        <p:nvSpPr>
-          <p:cNvPr id="3" name="Text 1"/>
-          <p:cNvSpPr/>
-          <p:nvPr/>
-        </p:nvSpPr>
-        <p:spPr>
-          <a:xfrm>
-            <a:off x="548640" y="3017520"/>
-            <a:ext cx="8046720" cy="457200"/>
+                <a:latin typeface="Arial" pitchFamily="34" charset="0"/>
+                <a:ea typeface="Arial" pitchFamily="34" charset="-122"/>
+                <a:cs typeface="Arial" pitchFamily="34" charset="-120"/>
+              </a:rPr>
+              <a:t>DAY 7</a:t>
+            </a:r>
+            <a:endParaRPr lang="en-US" sz="1300" dirty="0"/>
+          </a:p>
+        </p:txBody>
+      </p:sp>
+      <p:sp>
+        <p:nvSpPr>
+          <p:cNvPr id="5" name="Text 3"/>
+          <p:cNvSpPr/>
+          <p:nvPr/>
+        </p:nvSpPr>
+        <p:spPr>
+          <a:xfrm>
+            <a:off x="685800" y="1417320"/>
+            <a:ext cx="7863840" cy="1463040"/>
           </a:xfrm>
           <a:prstGeom prst="rect">
             <a:avLst/>
@@ -1908,27 +2138,30 @@
               <a:buNone/>
             </a:pPr>
             <a:r>
-              <a:rPr lang="en-US" sz="1400" dirty="0">
-                <a:solidFill>
-                  <a:srgbClr val="666666"/>
-                </a:solidFill>
-              </a:rPr>
-              <a:t>Lesson Forge Pro (owner)</a:t>
-            </a:r>
-            <a:endParaRPr lang="en-US" sz="1400" dirty="0"/>
-          </a:p>
-        </p:txBody>
-      </p:sp>
-      <p:sp>
-        <p:nvSpPr>
-          <p:cNvPr id="4" name="Text 2"/>
-          <p:cNvSpPr/>
-          <p:nvPr/>
-        </p:nvSpPr>
-        <p:spPr>
-          <a:xfrm>
-            <a:off x="548640" y="4389120"/>
-            <a:ext cx="8046720" cy="548640"/>
+              <a:rPr lang="en-US" sz="3300" b="1" dirty="0">
+                <a:solidFill>
+                  <a:srgbClr val="1C1917"/>
+                </a:solidFill>
+                <a:latin typeface="Arial" pitchFamily="34" charset="0"/>
+                <a:ea typeface="Arial" pitchFamily="34" charset="-122"/>
+                <a:cs typeface="Arial" pitchFamily="34" charset="-120"/>
+              </a:rPr>
+              <a:t>Case Studies and Final Project Presentations</a:t>
+            </a:r>
+            <a:endParaRPr lang="en-US" sz="3300" dirty="0"/>
+          </a:p>
+        </p:txBody>
+      </p:sp>
+      <p:sp>
+        <p:nvSpPr>
+          <p:cNvPr id="6" name="Text 4"/>
+          <p:cNvSpPr/>
+          <p:nvPr/>
+        </p:nvSpPr>
+        <p:spPr>
+          <a:xfrm>
+            <a:off x="685800" y="2971800"/>
+            <a:ext cx="7863840" cy="411480"/>
           </a:xfrm>
           <a:prstGeom prst="rect">
             <a:avLst/>
@@ -1944,14 +2177,95 @@
               <a:buNone/>
             </a:pPr>
             <a:r>
-              <a:rPr lang="en-US" sz="1000" dirty="0">
-                <a:solidFill>
-                  <a:srgbClr val="888888"/>
-                </a:solidFill>
+              <a:rPr lang="en-US" sz="1400" dirty="0">
+                <a:solidFill>
+                  <a:srgbClr val="78716C"/>
+                </a:solidFill>
+                <a:latin typeface="Arial" pitchFamily="34" charset="0"/>
+                <a:ea typeface="Arial" pitchFamily="34" charset="-122"/>
+                <a:cs typeface="Arial" pitchFamily="34" charset="-120"/>
+              </a:rPr>
+              <a:t>FMVA Certification Prep: Financial Modeling and Valuation Bootcamp</a:t>
+            </a:r>
+            <a:endParaRPr lang="en-US" sz="1400" dirty="0"/>
+          </a:p>
+        </p:txBody>
+      </p:sp>
+      <p:sp>
+        <p:nvSpPr>
+          <p:cNvPr id="7" name="Text 5"/>
+          <p:cNvSpPr/>
+          <p:nvPr/>
+        </p:nvSpPr>
+        <p:spPr>
+          <a:xfrm>
+            <a:off x="685800" y="4343400"/>
+            <a:ext cx="7863840" cy="365760"/>
+          </a:xfrm>
+          <a:prstGeom prst="rect">
+            <a:avLst/>
+          </a:prstGeom>
+          <a:noFill/>
+          <a:ln/>
+        </p:spPr>
+        <p:txBody>
+          <a:bodyPr wrap="square" rtlCol="0" anchor="ctr"/>
+          <a:lstStyle/>
+          <a:p>
+            <a:pPr indent="0" marL="0">
+              <a:buNone/>
+            </a:pPr>
+            <a:r>
+              <a:rPr lang="en-US" sz="1200" b="1" dirty="0">
+                <a:solidFill>
+                  <a:srgbClr val="B45309"/>
+                </a:solidFill>
+                <a:latin typeface="Arial" pitchFamily="34" charset="0"/>
+                <a:ea typeface="Arial" pitchFamily="34" charset="-122"/>
+                <a:cs typeface="Arial" pitchFamily="34" charset="-120"/>
+              </a:rPr>
+              <a:t>Lesson Forge Pro (owner)</a:t>
+            </a:r>
+            <a:endParaRPr lang="en-US" sz="1200" dirty="0"/>
+          </a:p>
+        </p:txBody>
+      </p:sp>
+      <p:sp>
+        <p:nvSpPr>
+          <p:cNvPr id="8" name="Text 6"/>
+          <p:cNvSpPr/>
+          <p:nvPr/>
+        </p:nvSpPr>
+        <p:spPr>
+          <a:xfrm>
+            <a:off x="685800" y="4709160"/>
+            <a:ext cx="7863840" cy="320040"/>
+          </a:xfrm>
+          <a:prstGeom prst="rect">
+            <a:avLst/>
+          </a:prstGeom>
+          <a:noFill/>
+          <a:ln/>
+        </p:spPr>
+        <p:txBody>
+          <a:bodyPr wrap="square" rtlCol="0" anchor="ctr"/>
+          <a:lstStyle/>
+          <a:p>
+            <a:pPr indent="0" marL="0">
+              <a:buNone/>
+            </a:pPr>
+            <a:r>
+              <a:rPr lang="en-US" sz="850" dirty="0">
+                <a:solidFill>
+                  <a:srgbClr val="AAAAAA"/>
+                </a:solidFill>
+                <a:latin typeface="Arial" pitchFamily="34" charset="0"/>
+                <a:ea typeface="Arial" pitchFamily="34" charset="-122"/>
+                <a:cs typeface="Arial" pitchFamily="34" charset="-120"/>
               </a:rPr>
               <a:t>This content is educational material only and does not constitute financial, investment, or trading advice.</a:t>
             </a:r>
-            <a:endParaRPr lang="en-US" sz="1000" dirty="0"/>
+            <a:endParaRPr lang="en-US" sz="850" dirty="0"/>
           </a:p>
         </p:txBody>
       </p:sp>
@@ -1966,6 +2280,13 @@
 <file path=ppt/slides/slide10.xml><?xml version="1.0" encoding="utf-8"?>
 <p:sld xmlns:a="http://schemas.openxmlformats.org/drawingml/2006/main" xmlns:r="http://schemas.openxmlformats.org/officeDocument/2006/relationships" xmlns:p="http://schemas.openxmlformats.org/presentationml/2006/main">
   <p:cSld name="Slide 10">
+    <p:bg>
+      <p:bgPr>
+        <a:solidFill>
+          <a:srgbClr val="FFFFFF"/>
+        </a:solidFill>
+      </p:bgPr>
+    </p:bg>
     <p:spTree>
       <p:nvGrpSpPr>
         <p:cNvPr id="1" name=""/>
@@ -1982,14 +2303,34 @@
       </p:grpSpPr>
       <p:sp>
         <p:nvSpPr>
-          <p:cNvPr id="2" name="Text 0"/>
-          <p:cNvSpPr/>
-          <p:nvPr/>
-        </p:nvSpPr>
-        <p:spPr>
-          <a:xfrm>
-            <a:off x="457200" y="320040"/>
-            <a:ext cx="8229600" cy="731520"/>
+          <p:cNvPr id="2" name="Shape 0"/>
+          <p:cNvSpPr/>
+          <p:nvPr/>
+        </p:nvSpPr>
+        <p:spPr>
+          <a:xfrm>
+            <a:off x="411480" y="402336"/>
+            <a:ext cx="82296" cy="329184"/>
+          </a:xfrm>
+          <a:prstGeom prst="rect">
+            <a:avLst/>
+          </a:prstGeom>
+          <a:solidFill>
+            <a:srgbClr val="B45309"/>
+          </a:solidFill>
+          <a:ln/>
+        </p:spPr>
+      </p:sp>
+      <p:sp>
+        <p:nvSpPr>
+          <p:cNvPr id="3" name="Text 1"/>
+          <p:cNvSpPr/>
+          <p:nvPr/>
+        </p:nvSpPr>
+        <p:spPr>
+          <a:xfrm>
+            <a:off x="566928" y="292608"/>
+            <a:ext cx="8138160" cy="548640"/>
           </a:xfrm>
           <a:prstGeom prst="rect">
             <a:avLst/>
@@ -2005,27 +2346,92 @@
               <a:buNone/>
             </a:pPr>
             <a:r>
-              <a:rPr lang="en-US" sz="2400" b="1" dirty="0">
-                <a:solidFill>
-                  <a:srgbClr val="B45309"/>
-                </a:solidFill>
-              </a:rPr>
-              <a:t>Break and Energizer (10 minutes)</a:t>
-            </a:r>
-            <a:endParaRPr lang="en-US" sz="2400" dirty="0"/>
-          </a:p>
-        </p:txBody>
-      </p:sp>
-      <p:sp>
-        <p:nvSpPr>
-          <p:cNvPr id="3" name="Text 1"/>
-          <p:cNvSpPr/>
-          <p:nvPr/>
-        </p:nvSpPr>
-        <p:spPr>
-          <a:xfrm>
-            <a:off x="640080" y="1188720"/>
-            <a:ext cx="7863840" cy="3291840"/>
+              <a:rPr lang="en-US" sz="2100" b="1" dirty="0">
+                <a:solidFill>
+                  <a:srgbClr val="1C1917"/>
+                </a:solidFill>
+                <a:latin typeface="Arial" pitchFamily="34" charset="0"/>
+                <a:ea typeface="Arial" pitchFamily="34" charset="-122"/>
+                <a:cs typeface="Arial" pitchFamily="34" charset="-120"/>
+              </a:rPr>
+              <a:t>The standard procedure</a:t>
+            </a:r>
+            <a:endParaRPr lang="en-US" sz="2100" dirty="0"/>
+          </a:p>
+        </p:txBody>
+      </p:sp>
+      <p:sp>
+        <p:nvSpPr>
+          <p:cNvPr id="4" name="Shape 2"/>
+          <p:cNvSpPr/>
+          <p:nvPr/>
+        </p:nvSpPr>
+        <p:spPr>
+          <a:xfrm>
+            <a:off x="411480" y="960120"/>
+            <a:ext cx="8321040" cy="0"/>
+          </a:xfrm>
+          <a:prstGeom prst="line">
+            <a:avLst/>
+          </a:prstGeom>
+          <a:noFill/>
+          <a:ln w="12700">
+            <a:solidFill>
+              <a:srgbClr val="E7E5E4"/>
+            </a:solidFill>
+            <a:prstDash val="solid"/>
+          </a:ln>
+        </p:spPr>
+      </p:sp>
+      <p:sp>
+        <p:nvSpPr>
+          <p:cNvPr id="5" name="Text 3"/>
+          <p:cNvSpPr/>
+          <p:nvPr/>
+        </p:nvSpPr>
+        <p:spPr>
+          <a:xfrm>
+            <a:off x="411480" y="4864608"/>
+            <a:ext cx="8321040" cy="237744"/>
+          </a:xfrm>
+          <a:prstGeom prst="rect">
+            <a:avLst/>
+          </a:prstGeom>
+          <a:noFill/>
+          <a:ln/>
+        </p:spPr>
+        <p:txBody>
+          <a:bodyPr wrap="square" rtlCol="0" anchor="ctr"/>
+          <a:lstStyle/>
+          <a:p>
+            <a:pPr indent="0" marL="0">
+              <a:buNone/>
+            </a:pPr>
+            <a:r>
+              <a:rPr lang="en-US" sz="750" dirty="0">
+                <a:solidFill>
+                  <a:srgbClr val="AAAAAA"/>
+                </a:solidFill>
+                <a:latin typeface="Arial" pitchFamily="34" charset="0"/>
+                <a:ea typeface="Arial" pitchFamily="34" charset="-122"/>
+                <a:cs typeface="Arial" pitchFamily="34" charset="-120"/>
+              </a:rPr>
+              <a:t>Lesson Forge Pro (owner) — This content is educational material only and does not constitute financial, investment, or trading advice.</a:t>
+            </a:r>
+            <a:endParaRPr lang="en-US" sz="750" dirty="0"/>
+          </a:p>
+        </p:txBody>
+      </p:sp>
+      <p:sp>
+        <p:nvSpPr>
+          <p:cNvPr id="6" name="Text 4"/>
+          <p:cNvSpPr/>
+          <p:nvPr/>
+        </p:nvSpPr>
+        <p:spPr>
+          <a:xfrm>
+            <a:off x="731520" y="1188720"/>
+            <a:ext cx="7680960" cy="3383280"/>
           </a:xfrm>
           <a:prstGeom prst="rect">
             <a:avLst/>
@@ -2037,55 +2443,46 @@
           <a:bodyPr wrap="square" rtlCol="0" anchor="t"/>
           <a:lstStyle/>
           <a:p>
-            <a:pPr marL="342900" indent="-342900">
+            <a:pPr marL="152400" indent="-152400">
+              <a:spcAft>
+                <a:spcPts val="800"/>
+              </a:spcAft>
               <a:buSzPct val="100000"/>
               <a:buChar char="•"/>
             </a:pPr>
             <a:r>
-              <a:rPr lang="en-US" sz="1600" dirty="0">
-                <a:solidFill>
-                  <a:srgbClr val="333333"/>
-                </a:solidFill>
-              </a:rPr>
-              <a:t>Take a break and have students participate in an energizer activity, such as a financial modeling-themed game or a group discussion on a current event related t</a:t>
-            </a:r>
-            <a:endParaRPr lang="en-US" sz="1600" dirty="0"/>
-          </a:p>
-        </p:txBody>
-      </p:sp>
-      <p:sp>
-        <p:nvSpPr>
-          <p:cNvPr id="4" name="Text 2"/>
-          <p:cNvSpPr/>
-          <p:nvPr/>
-        </p:nvSpPr>
-        <p:spPr>
-          <a:xfrm>
-            <a:off x="457200" y="4709160"/>
-            <a:ext cx="8229600" cy="320040"/>
-          </a:xfrm>
-          <a:prstGeom prst="rect">
-            <a:avLst/>
-          </a:prstGeom>
-          <a:noFill/>
-          <a:ln/>
-        </p:spPr>
-        <p:txBody>
-          <a:bodyPr wrap="square" rtlCol="0" anchor="ctr"/>
-          <a:lstStyle/>
-          <a:p>
-            <a:pPr indent="0" marL="0">
-              <a:buNone/>
-            </a:pPr>
-            <a:r>
-              <a:rPr lang="en-US" sz="800" dirty="0">
-                <a:solidFill>
-                  <a:srgbClr val="AAAAAA"/>
-                </a:solidFill>
-              </a:rPr>
-              <a:t>Lesson Forge Pro (owner) — This content is educational material only and does not constitute financial, investment, or trading advice.</a:t>
-            </a:r>
-            <a:endParaRPr lang="en-US" sz="800" dirty="0"/>
+              <a:rPr lang="en-US" sz="1500" dirty="0">
+                <a:solidFill>
+                  <a:srgbClr val="1C1917"/>
+                </a:solidFill>
+                <a:latin typeface="Arial" pitchFamily="34" charset="0"/>
+                <a:ea typeface="Arial" pitchFamily="34" charset="-122"/>
+                <a:cs typeface="Arial" pitchFamily="34" charset="-120"/>
+              </a:rPr>
+              <a:t>Every well-built financial model follows a repeatable, auditable procedure. Mastering that procedure—inputs, s</a:t>
+            </a:r>
+            <a:endParaRPr lang="en-US" sz="1500" dirty="0"/>
+          </a:p>
+          <a:p>
+            <a:pPr marL="152400" indent="-152400">
+              <a:spcAft>
+                <a:spcPts val="800"/>
+              </a:spcAft>
+              <a:buSzPct val="100000"/>
+              <a:buChar char="•"/>
+            </a:pPr>
+            <a:r>
+              <a:rPr lang="en-US" sz="1500" dirty="0">
+                <a:solidFill>
+                  <a:srgbClr val="1C1917"/>
+                </a:solidFill>
+                <a:latin typeface="Arial" pitchFamily="34" charset="0"/>
+                <a:ea typeface="Arial" pitchFamily="34" charset="-122"/>
+                <a:cs typeface="Arial" pitchFamily="34" charset="-120"/>
+              </a:rPr>
+              <a:t>---</a:t>
+            </a:r>
+            <a:endParaRPr lang="en-US" sz="1500" dirty="0"/>
           </a:p>
         </p:txBody>
       </p:sp>
@@ -2100,6 +2497,13 @@
 <file path=ppt/slides/slide11.xml><?xml version="1.0" encoding="utf-8"?>
 <p:sld xmlns:a="http://schemas.openxmlformats.org/drawingml/2006/main" xmlns:r="http://schemas.openxmlformats.org/officeDocument/2006/relationships" xmlns:p="http://schemas.openxmlformats.org/presentationml/2006/main">
   <p:cSld name="Slide 11">
+    <p:bg>
+      <p:bgPr>
+        <a:solidFill>
+          <a:srgbClr val="FFFFFF"/>
+        </a:solidFill>
+      </p:bgPr>
+    </p:bg>
     <p:spTree>
       <p:nvGrpSpPr>
         <p:cNvPr id="1" name=""/>
@@ -2116,14 +2520,34 @@
       </p:grpSpPr>
       <p:sp>
         <p:nvSpPr>
-          <p:cNvPr id="2" name="Text 0"/>
-          <p:cNvSpPr/>
-          <p:nvPr/>
-        </p:nvSpPr>
-        <p:spPr>
-          <a:xfrm>
-            <a:off x="457200" y="320040"/>
-            <a:ext cx="8229600" cy="731520"/>
+          <p:cNvPr id="2" name="Shape 0"/>
+          <p:cNvSpPr/>
+          <p:nvPr/>
+        </p:nvSpPr>
+        <p:spPr>
+          <a:xfrm>
+            <a:off x="411480" y="402336"/>
+            <a:ext cx="82296" cy="329184"/>
+          </a:xfrm>
+          <a:prstGeom prst="rect">
+            <a:avLst/>
+          </a:prstGeom>
+          <a:solidFill>
+            <a:srgbClr val="B45309"/>
+          </a:solidFill>
+          <a:ln/>
+        </p:spPr>
+      </p:sp>
+      <p:sp>
+        <p:nvSpPr>
+          <p:cNvPr id="3" name="Text 1"/>
+          <p:cNvSpPr/>
+          <p:nvPr/>
+        </p:nvSpPr>
+        <p:spPr>
+          <a:xfrm>
+            <a:off x="566928" y="292608"/>
+            <a:ext cx="8138160" cy="548640"/>
           </a:xfrm>
           <a:prstGeom prst="rect">
             <a:avLst/>
@@ -2139,27 +2563,92 @@
               <a:buNone/>
             </a:pPr>
             <a:r>
-              <a:rPr lang="en-US" sz="2400" b="1" dirty="0">
-                <a:solidFill>
-                  <a:srgbClr val="B45309"/>
-                </a:solidFill>
-              </a:rPr>
-              <a:t>Group Discussion and Feedback (50 minutes)</a:t>
-            </a:r>
-            <a:endParaRPr lang="en-US" sz="2400" dirty="0"/>
-          </a:p>
-        </p:txBody>
-      </p:sp>
-      <p:sp>
-        <p:nvSpPr>
-          <p:cNvPr id="3" name="Text 1"/>
-          <p:cNvSpPr/>
-          <p:nvPr/>
-        </p:nvSpPr>
-        <p:spPr>
-          <a:xfrm>
-            <a:off x="640080" y="1188720"/>
-            <a:ext cx="7863840" cy="3291840"/>
+              <a:rPr lang="en-US" sz="2100" b="1" dirty="0">
+                <a:solidFill>
+                  <a:srgbClr val="1C1917"/>
+                </a:solidFill>
+                <a:latin typeface="Arial" pitchFamily="34" charset="0"/>
+                <a:ea typeface="Arial" pitchFamily="34" charset="-122"/>
+                <a:cs typeface="Arial" pitchFamily="34" charset="-120"/>
+              </a:rPr>
+              <a:t>Inputs</a:t>
+            </a:r>
+            <a:endParaRPr lang="en-US" sz="2100" dirty="0"/>
+          </a:p>
+        </p:txBody>
+      </p:sp>
+      <p:sp>
+        <p:nvSpPr>
+          <p:cNvPr id="4" name="Shape 2"/>
+          <p:cNvSpPr/>
+          <p:nvPr/>
+        </p:nvSpPr>
+        <p:spPr>
+          <a:xfrm>
+            <a:off x="411480" y="960120"/>
+            <a:ext cx="8321040" cy="0"/>
+          </a:xfrm>
+          <a:prstGeom prst="line">
+            <a:avLst/>
+          </a:prstGeom>
+          <a:noFill/>
+          <a:ln w="12700">
+            <a:solidFill>
+              <a:srgbClr val="E7E5E4"/>
+            </a:solidFill>
+            <a:prstDash val="solid"/>
+          </a:ln>
+        </p:spPr>
+      </p:sp>
+      <p:sp>
+        <p:nvSpPr>
+          <p:cNvPr id="5" name="Text 3"/>
+          <p:cNvSpPr/>
+          <p:nvPr/>
+        </p:nvSpPr>
+        <p:spPr>
+          <a:xfrm>
+            <a:off x="411480" y="4864608"/>
+            <a:ext cx="8321040" cy="237744"/>
+          </a:xfrm>
+          <a:prstGeom prst="rect">
+            <a:avLst/>
+          </a:prstGeom>
+          <a:noFill/>
+          <a:ln/>
+        </p:spPr>
+        <p:txBody>
+          <a:bodyPr wrap="square" rtlCol="0" anchor="ctr"/>
+          <a:lstStyle/>
+          <a:p>
+            <a:pPr indent="0" marL="0">
+              <a:buNone/>
+            </a:pPr>
+            <a:r>
+              <a:rPr lang="en-US" sz="750" dirty="0">
+                <a:solidFill>
+                  <a:srgbClr val="AAAAAA"/>
+                </a:solidFill>
+                <a:latin typeface="Arial" pitchFamily="34" charset="0"/>
+                <a:ea typeface="Arial" pitchFamily="34" charset="-122"/>
+                <a:cs typeface="Arial" pitchFamily="34" charset="-120"/>
+              </a:rPr>
+              <a:t>Lesson Forge Pro (owner) — This content is educational material only and does not constitute financial, investment, or trading advice.</a:t>
+            </a:r>
+            <a:endParaRPr lang="en-US" sz="750" dirty="0"/>
+          </a:p>
+        </p:txBody>
+      </p:sp>
+      <p:sp>
+        <p:nvSpPr>
+          <p:cNvPr id="6" name="Text 4"/>
+          <p:cNvSpPr/>
+          <p:nvPr/>
+        </p:nvSpPr>
+        <p:spPr>
+          <a:xfrm>
+            <a:off x="731520" y="1188720"/>
+            <a:ext cx="7680960" cy="3383280"/>
           </a:xfrm>
           <a:prstGeom prst="rect">
             <a:avLst/>
@@ -2171,220 +2660,88 @@
           <a:bodyPr wrap="square" rtlCol="0" anchor="t"/>
           <a:lstStyle/>
           <a:p>
-            <a:pPr marL="342900" indent="-342900">
+            <a:pPr marL="152400" indent="-152400">
+              <a:spcAft>
+                <a:spcPts val="800"/>
+              </a:spcAft>
               <a:buSzPct val="100000"/>
               <a:buChar char="•"/>
             </a:pPr>
             <a:r>
-              <a:rPr lang="en-US" sz="1600" dirty="0">
-                <a:solidFill>
-                  <a:srgbClr val="333333"/>
-                </a:solidFill>
-              </a:rPr>
-              <a:t>Have students participate in a group discussion on the case studies and final project presentations. Encourage students to provide feedback to their peers and d</a:t>
-            </a:r>
-            <a:endParaRPr lang="en-US" sz="1600" dirty="0"/>
-          </a:p>
-          <a:p>
-            <a:pPr marL="342900" indent="-342900">
+              <a:rPr lang="en-US" sz="1500" dirty="0">
+                <a:solidFill>
+                  <a:srgbClr val="1C1917"/>
+                </a:solidFill>
+                <a:latin typeface="Arial" pitchFamily="34" charset="0"/>
+                <a:ea typeface="Arial" pitchFamily="34" charset="-122"/>
+                <a:cs typeface="Arial" pitchFamily="34" charset="-120"/>
+              </a:rPr>
+              <a:t>Before a single formula is written, gather and document every assumption explicitly. Best practice separates i</a:t>
+            </a:r>
+            <a:endParaRPr lang="en-US" sz="1500" dirty="0"/>
+          </a:p>
+          <a:p>
+            <a:pPr marL="152400" indent="-152400">
+              <a:spcAft>
+                <a:spcPts val="800"/>
+              </a:spcAft>
               <a:buSzPct val="100000"/>
               <a:buChar char="•"/>
             </a:pPr>
             <a:r>
-              <a:rPr lang="en-US" sz="1600" dirty="0">
-                <a:solidFill>
-                  <a:srgbClr val="333333"/>
-                </a:solidFill>
-              </a:rPr>
-              <a:t>Challenges and limitations of financial modeling</a:t>
-            </a:r>
-            <a:endParaRPr lang="en-US" sz="1600" dirty="0"/>
-          </a:p>
-          <a:p>
-            <a:pPr marL="342900" indent="-342900">
+              <a:rPr lang="en-US" sz="1500" dirty="0">
+                <a:solidFill>
+                  <a:srgbClr val="1C1917"/>
+                </a:solidFill>
+                <a:latin typeface="Arial" pitchFamily="34" charset="0"/>
+                <a:ea typeface="Arial" pitchFamily="34" charset="-122"/>
+                <a:cs typeface="Arial" pitchFamily="34" charset="-120"/>
+              </a:rPr>
+              <a:t>For a discounted cash flow (DCF) valuation, the standard inputs are:</a:t>
+            </a:r>
+            <a:endParaRPr lang="en-US" sz="1500" dirty="0"/>
+          </a:p>
+          <a:p>
+            <a:pPr marL="152400" indent="-152400">
+              <a:spcAft>
+                <a:spcPts val="800"/>
+              </a:spcAft>
               <a:buSzPct val="100000"/>
               <a:buChar char="•"/>
             </a:pPr>
             <a:r>
-              <a:rPr lang="en-US" sz="1600" dirty="0">
-                <a:solidFill>
-                  <a:srgbClr val="333333"/>
-                </a:solidFill>
-              </a:rPr>
-              <a:t>Best practices for financial modeling and presentation</a:t>
-            </a:r>
-            <a:endParaRPr lang="en-US" sz="1600" dirty="0"/>
-          </a:p>
-          <a:p>
-            <a:pPr marL="342900" indent="-342900">
+              <a:rPr lang="en-US" sz="1500" dirty="0">
+                <a:solidFill>
+                  <a:srgbClr val="1C1917"/>
+                </a:solidFill>
+                <a:latin typeface="Arial" pitchFamily="34" charset="0"/>
+                <a:ea typeface="Arial" pitchFamily="34" charset="-122"/>
+                <a:cs typeface="Arial" pitchFamily="34" charset="-120"/>
+              </a:rPr>
+              <a:t>Revenue base and growth rates (historical actuals plus forward assumptions)</a:t>
+            </a:r>
+            <a:endParaRPr lang="en-US" sz="1500" dirty="0"/>
+          </a:p>
+          <a:p>
+            <a:pPr marL="152400" indent="-152400">
+              <a:spcAft>
+                <a:spcPts val="800"/>
+              </a:spcAft>
               <a:buSzPct val="100000"/>
               <a:buChar char="•"/>
             </a:pPr>
             <a:r>
-              <a:rPr lang="en-US" sz="1600" dirty="0">
-                <a:solidFill>
-                  <a:srgbClr val="333333"/>
-                </a:solidFill>
-              </a:rPr>
-              <a:t>Use an analogy to explain the concept of feedback: "Just like a sports team uses feedback from coaches and players to improve their performance, we use feedback</a:t>
-            </a:r>
-            <a:endParaRPr lang="en-US" sz="1600" dirty="0"/>
-          </a:p>
-          <a:p>
-            <a:pPr marL="342900" indent="-342900">
-              <a:buSzPct val="100000"/>
-              <a:buChar char="•"/>
-            </a:pPr>
-            <a:r>
-              <a:rPr lang="en-US" sz="1600" dirty="0">
-                <a:solidFill>
-                  <a:srgbClr val="333333"/>
-                </a:solidFill>
-              </a:rPr>
-              <a:t>Key points to cover:</a:t>
-            </a:r>
-            <a:endParaRPr lang="en-US" sz="1600" dirty="0"/>
-          </a:p>
-          <a:p>
-            <a:pPr marL="342900" indent="-342900">
-              <a:buSzPct val="100000"/>
-              <a:buChar char="•"/>
-            </a:pPr>
-            <a:r>
-              <a:rPr lang="en-US" sz="1600" dirty="0">
-                <a:solidFill>
-                  <a:srgbClr val="333333"/>
-                </a:solidFill>
-              </a:rPr>
-              <a:t>Importance of feedback and peer review</a:t>
-            </a:r>
-            <a:endParaRPr lang="en-US" sz="1600" dirty="0"/>
-          </a:p>
-          <a:p>
-            <a:pPr marL="342900" indent="-342900">
-              <a:buSzPct val="100000"/>
-              <a:buChar char="•"/>
-            </a:pPr>
-            <a:r>
-              <a:rPr lang="en-US" sz="1600" dirty="0">
-                <a:solidFill>
-                  <a:srgbClr val="333333"/>
-                </a:solidFill>
-              </a:rPr>
-              <a:t>Best practices for financial modeling and presentation</a:t>
-            </a:r>
-            <a:endParaRPr lang="en-US" sz="1600" dirty="0"/>
-          </a:p>
-          <a:p>
-            <a:pPr marL="342900" indent="-342900">
-              <a:buSzPct val="100000"/>
-              <a:buChar char="•"/>
-            </a:pPr>
-            <a:r>
-              <a:rPr lang="en-US" sz="1600" dirty="0">
-                <a:solidFill>
-                  <a:srgbClr val="333333"/>
-                </a:solidFill>
-              </a:rPr>
-              <a:t>Anticipated learner questions:</a:t>
-            </a:r>
-            <a:endParaRPr lang="en-US" sz="1600" dirty="0"/>
-          </a:p>
-          <a:p>
-            <a:pPr marL="342900" indent="-342900">
-              <a:buSzPct val="100000"/>
-              <a:buChar char="•"/>
-            </a:pPr>
-            <a:r>
-              <a:rPr lang="en-US" sz="1600" dirty="0">
-                <a:solidFill>
-                  <a:srgbClr val="333333"/>
-                </a:solidFill>
-              </a:rPr>
-              <a:t>How do we handle feedback and criticism?</a:t>
-            </a:r>
-            <a:endParaRPr lang="en-US" sz="1600" dirty="0"/>
-          </a:p>
-          <a:p>
-            <a:pPr marL="342900" indent="-342900">
-              <a:buSzPct val="100000"/>
-              <a:buChar char="•"/>
-            </a:pPr>
-            <a:r>
-              <a:rPr lang="en-US" sz="1600" dirty="0">
-                <a:solidFill>
-                  <a:srgbClr val="333333"/>
-                </a:solidFill>
-              </a:rPr>
-              <a:t>What are the key takeaways from the case studies and final project presentations?</a:t>
-            </a:r>
-            <a:endParaRPr lang="en-US" sz="1600" dirty="0"/>
-          </a:p>
-          <a:p>
-            <a:pPr marL="342900" indent="-342900">
-              <a:buSzPct val="100000"/>
-              <a:buChar char="•"/>
-            </a:pPr>
-            <a:r>
-              <a:rPr lang="en-US" sz="1600" dirty="0">
-                <a:solidFill>
-                  <a:srgbClr val="333333"/>
-                </a:solidFill>
-              </a:rPr>
-              <a:t>We handle feedback and criticism by being open-minded, asking questions, and using it as an opportunity to learn and improve.</a:t>
-            </a:r>
-            <a:endParaRPr lang="en-US" sz="1600" dirty="0"/>
-          </a:p>
-          <a:p>
-            <a:pPr marL="342900" indent="-342900">
-              <a:buSzPct val="100000"/>
-              <a:buChar char="•"/>
-            </a:pPr>
-            <a:r>
-              <a:rPr lang="en-US" sz="1600" dirty="0">
-                <a:solidFill>
-                  <a:srgbClr val="333333"/>
-                </a:solidFill>
-              </a:rPr>
-              <a:t>The key takeaways from the case studies and final project presentations include the application of financial modeling concepts to real-world scenarios, the importance of considering multiple scenarios and uncertainties, and the need for clear communication and presentation skills.</a:t>
-            </a:r>
-            <a:endParaRPr lang="en-US" sz="1600" dirty="0"/>
-          </a:p>
-        </p:txBody>
-      </p:sp>
-      <p:sp>
-        <p:nvSpPr>
-          <p:cNvPr id="4" name="Text 2"/>
-          <p:cNvSpPr/>
-          <p:nvPr/>
-        </p:nvSpPr>
-        <p:spPr>
-          <a:xfrm>
-            <a:off x="457200" y="4709160"/>
-            <a:ext cx="8229600" cy="320040"/>
-          </a:xfrm>
-          <a:prstGeom prst="rect">
-            <a:avLst/>
-          </a:prstGeom>
-          <a:noFill/>
-          <a:ln/>
-        </p:spPr>
-        <p:txBody>
-          <a:bodyPr wrap="square" rtlCol="0" anchor="ctr"/>
-          <a:lstStyle/>
-          <a:p>
-            <a:pPr indent="0" marL="0">
-              <a:buNone/>
-            </a:pPr>
-            <a:r>
-              <a:rPr lang="en-US" sz="800" dirty="0">
-                <a:solidFill>
-                  <a:srgbClr val="AAAAAA"/>
-                </a:solidFill>
-              </a:rPr>
-              <a:t>Lesson Forge Pro (owner) — This content is educational material only and does not constitute financial, investment, or trading advice.</a:t>
-            </a:r>
-            <a:endParaRPr lang="en-US" sz="800" dirty="0"/>
+              <a:rPr lang="en-US" sz="1500" dirty="0">
+                <a:solidFill>
+                  <a:srgbClr val="1C1917"/>
+                </a:solidFill>
+                <a:latin typeface="Arial" pitchFamily="34" charset="0"/>
+                <a:ea typeface="Arial" pitchFamily="34" charset="-122"/>
+                <a:cs typeface="Arial" pitchFamily="34" charset="-120"/>
+              </a:rPr>
+              <a:t>Operating margin (EBIT or EBITDA margin, sourced from management guidance or industry benchmarks)</a:t>
+            </a:r>
+            <a:endParaRPr lang="en-US" sz="1500" dirty="0"/>
           </a:p>
         </p:txBody>
       </p:sp>
@@ -2399,6 +2756,13 @@
 <file path=ppt/slides/slide12.xml><?xml version="1.0" encoding="utf-8"?>
 <p:sld xmlns:a="http://schemas.openxmlformats.org/drawingml/2006/main" xmlns:r="http://schemas.openxmlformats.org/officeDocument/2006/relationships" xmlns:p="http://schemas.openxmlformats.org/presentationml/2006/main">
   <p:cSld name="Slide 12">
+    <p:bg>
+      <p:bgPr>
+        <a:solidFill>
+          <a:srgbClr val="FFFFFF"/>
+        </a:solidFill>
+      </p:bgPr>
+    </p:bg>
     <p:spTree>
       <p:nvGrpSpPr>
         <p:cNvPr id="1" name=""/>
@@ -2415,14 +2779,34 @@
       </p:grpSpPr>
       <p:sp>
         <p:nvSpPr>
-          <p:cNvPr id="2" name="Text 0"/>
-          <p:cNvSpPr/>
-          <p:nvPr/>
-        </p:nvSpPr>
-        <p:spPr>
-          <a:xfrm>
-            <a:off x="457200" y="320040"/>
-            <a:ext cx="8229600" cy="731520"/>
+          <p:cNvPr id="2" name="Shape 0"/>
+          <p:cNvSpPr/>
+          <p:nvPr/>
+        </p:nvSpPr>
+        <p:spPr>
+          <a:xfrm>
+            <a:off x="411480" y="384048"/>
+            <a:ext cx="82296" cy="310896"/>
+          </a:xfrm>
+          <a:prstGeom prst="rect">
+            <a:avLst/>
+          </a:prstGeom>
+          <a:solidFill>
+            <a:srgbClr val="B45309"/>
+          </a:solidFill>
+          <a:ln/>
+        </p:spPr>
+      </p:sp>
+      <p:sp>
+        <p:nvSpPr>
+          <p:cNvPr id="3" name="Text 1"/>
+          <p:cNvSpPr/>
+          <p:nvPr/>
+        </p:nvSpPr>
+        <p:spPr>
+          <a:xfrm>
+            <a:off x="566928" y="292608"/>
+            <a:ext cx="8138160" cy="502920"/>
           </a:xfrm>
           <a:prstGeom prst="rect">
             <a:avLst/>
@@ -2438,96 +2822,17 @@
               <a:buNone/>
             </a:pPr>
             <a:r>
-              <a:rPr lang="en-US" sz="2400" b="1" dirty="0">
-                <a:solidFill>
-                  <a:srgbClr val="B45309"/>
-                </a:solidFill>
-              </a:rPr>
-              <a:t>Conclusion and Next Steps (10 minutes)</a:t>
-            </a:r>
-            <a:endParaRPr lang="en-US" sz="2400" dirty="0"/>
-          </a:p>
-        </p:txBody>
-      </p:sp>
-      <p:sp>
-        <p:nvSpPr>
-          <p:cNvPr id="3" name="Text 1"/>
-          <p:cNvSpPr/>
-          <p:nvPr/>
-        </p:nvSpPr>
-        <p:spPr>
-          <a:xfrm>
-            <a:off x="640080" y="1188720"/>
-            <a:ext cx="7863840" cy="3291840"/>
-          </a:xfrm>
-          <a:prstGeom prst="rect">
-            <a:avLst/>
-          </a:prstGeom>
-          <a:noFill/>
-          <a:ln/>
-        </p:spPr>
-        <p:txBody>
-          <a:bodyPr wrap="square" rtlCol="0" anchor="t"/>
-          <a:lstStyle/>
-          <a:p>
-            <a:pPr marL="342900" indent="-342900">
-              <a:buSzPct val="100000"/>
-              <a:buChar char="•"/>
-            </a:pPr>
-            <a:r>
-              <a:rPr lang="en-US" sz="1600" dirty="0">
-                <a:solidFill>
-                  <a:srgbClr val="333333"/>
-                </a:solidFill>
-              </a:rPr>
-              <a:t>Summarize the key points covered in the session and provide next steps for students. Use an analogy to conclude the session: "Just like a financial model provid</a:t>
-            </a:r>
-            <a:endParaRPr lang="en-US" sz="1600" dirty="0"/>
-          </a:p>
-          <a:p>
-            <a:pPr marL="342900" indent="-342900">
-              <a:buSzPct val="100000"/>
-              <a:buChar char="•"/>
-            </a:pPr>
-            <a:r>
-              <a:rPr lang="en-US" sz="1600" dirty="0">
-                <a:solidFill>
-                  <a:srgbClr val="333333"/>
-                </a:solidFill>
-              </a:rPr>
-              <a:t>Key points to cover:</a:t>
-            </a:r>
-            <a:endParaRPr lang="en-US" sz="1600" dirty="0"/>
-          </a:p>
-          <a:p>
-            <a:pPr marL="342900" indent="-342900">
-              <a:buSzPct val="100000"/>
-              <a:buChar char="•"/>
-            </a:pPr>
-            <a:r>
-              <a:rPr lang="en-US" sz="1600" dirty="0">
-                <a:solidFill>
-                  <a:srgbClr val="333333"/>
-                </a:solidFill>
-              </a:rPr>
-              <a:t>Recap of key concepts and takeaways</a:t>
-            </a:r>
-            <a:endParaRPr lang="en-US" sz="1600" dirty="0"/>
-          </a:p>
-          <a:p>
-            <a:pPr marL="342900" indent="-342900">
-              <a:buSzPct val="100000"/>
-              <a:buChar char="•"/>
-            </a:pPr>
-            <a:r>
-              <a:rPr lang="en-US" sz="1600" dirty="0">
-                <a:solidFill>
-                  <a:srgbClr val="333333"/>
-                </a:solidFill>
-              </a:rPr>
-              <a:t>Next steps for students, including additional resources and support.</a:t>
-            </a:r>
-            <a:endParaRPr lang="en-US" sz="1600" dirty="0"/>
+              <a:rPr lang="en-US" sz="2000" b="1" dirty="0">
+                <a:solidFill>
+                  <a:srgbClr val="1C1917"/>
+                </a:solidFill>
+                <a:latin typeface="Arial" pitchFamily="34" charset="0"/>
+                <a:ea typeface="Arial" pitchFamily="34" charset="-122"/>
+                <a:cs typeface="Arial" pitchFamily="34" charset="-120"/>
+              </a:rPr>
+              <a:t>Financial Model Vocabulary Hierarchy</a:t>
+            </a:r>
+            <a:endParaRPr lang="en-US" sz="2000" dirty="0"/>
           </a:p>
         </p:txBody>
       </p:sp>
@@ -2539,8 +2844,8 @@
         </p:nvSpPr>
         <p:spPr>
           <a:xfrm>
-            <a:off x="457200" y="4709160"/>
-            <a:ext cx="8229600" cy="320040"/>
+            <a:off x="566928" y="4681728"/>
+            <a:ext cx="8138160" cy="320040"/>
           </a:xfrm>
           <a:prstGeom prst="rect">
             <a:avLst/>
@@ -2556,14 +2861,556 @@
               <a:buNone/>
             </a:pPr>
             <a:r>
-              <a:rPr lang="en-US" sz="800" dirty="0">
+              <a:rPr lang="en-US" sz="1000" i="1" dirty="0">
+                <a:solidFill>
+                  <a:srgbClr val="78716C"/>
+                </a:solidFill>
+                <a:latin typeface="Arial" pitchFamily="34" charset="0"/>
+                <a:ea typeface="Arial" pitchFamily="34" charset="-122"/>
+                <a:cs typeface="Arial" pitchFamily="34" charset="-120"/>
+              </a:rPr>
+              <a:t>Assumptions underpin everything; outputs are only as reliable as inputs below</a:t>
+            </a:r>
+            <a:endParaRPr lang="en-US" sz="1000" dirty="0"/>
+          </a:p>
+        </p:txBody>
+      </p:sp>
+      <p:sp>
+        <p:nvSpPr>
+          <p:cNvPr id="5" name="Text 3"/>
+          <p:cNvSpPr/>
+          <p:nvPr/>
+        </p:nvSpPr>
+        <p:spPr>
+          <a:xfrm>
+            <a:off x="411480" y="4919472"/>
+            <a:ext cx="8321040" cy="219456"/>
+          </a:xfrm>
+          <a:prstGeom prst="rect">
+            <a:avLst/>
+          </a:prstGeom>
+          <a:noFill/>
+          <a:ln/>
+        </p:spPr>
+        <p:txBody>
+          <a:bodyPr wrap="square" rtlCol="0" anchor="ctr"/>
+          <a:lstStyle/>
+          <a:p>
+            <a:pPr indent="0" marL="0">
+              <a:buNone/>
+            </a:pPr>
+            <a:r>
+              <a:rPr lang="en-US" sz="750" dirty="0">
                 <a:solidFill>
                   <a:srgbClr val="AAAAAA"/>
                 </a:solidFill>
+                <a:latin typeface="Arial" pitchFamily="34" charset="0"/>
+                <a:ea typeface="Arial" pitchFamily="34" charset="-122"/>
+                <a:cs typeface="Arial" pitchFamily="34" charset="-120"/>
               </a:rPr>
               <a:t>Lesson Forge Pro (owner) — This content is educational material only and does not constitute financial, investment, or trading advice.</a:t>
             </a:r>
-            <a:endParaRPr lang="en-US" sz="800" dirty="0"/>
+            <a:endParaRPr lang="en-US" sz="750" dirty="0"/>
+          </a:p>
+        </p:txBody>
+      </p:sp>
+      <p:sp>
+        <p:nvSpPr>
+          <p:cNvPr id="6" name="Shape 4"/>
+          <p:cNvSpPr/>
+          <p:nvPr/>
+        </p:nvSpPr>
+        <p:spPr>
+          <a:xfrm flipV="1">
+            <a:off x="2084832" y="1234440"/>
+            <a:ext cx="2048256" cy="658368"/>
+          </a:xfrm>
+          <a:prstGeom prst="trapezoid">
+            <a:avLst/>
+          </a:prstGeom>
+          <a:solidFill>
+            <a:srgbClr val="B45309">
+              <a:alpha val="40000"/>
+            </a:srgbClr>
+          </a:solidFill>
+          <a:ln/>
+        </p:spPr>
+      </p:sp>
+      <p:sp>
+        <p:nvSpPr>
+          <p:cNvPr id="7" name="Text 5"/>
+          <p:cNvSpPr/>
+          <p:nvPr/>
+        </p:nvSpPr>
+        <p:spPr>
+          <a:xfrm>
+            <a:off x="2084832" y="1289304"/>
+            <a:ext cx="2048256" cy="566928"/>
+          </a:xfrm>
+          <a:prstGeom prst="rect">
+            <a:avLst/>
+          </a:prstGeom>
+          <a:noFill/>
+          <a:ln/>
+        </p:spPr>
+        <p:txBody>
+          <a:bodyPr wrap="square" rtlCol="0" anchor="ctr"/>
+          <a:lstStyle/>
+          <a:p>
+            <a:pPr algn="ctr" indent="0" marL="0">
+              <a:buNone/>
+            </a:pPr>
+            <a:r>
+              <a:rPr lang="en-US" sz="1200" b="1" dirty="0">
+                <a:solidFill>
+                  <a:srgbClr val="FFFFFF"/>
+                </a:solidFill>
+                <a:latin typeface="Arial" pitchFamily="34" charset="0"/>
+                <a:ea typeface="Arial" pitchFamily="34" charset="-122"/>
+                <a:cs typeface="Arial" pitchFamily="34" charset="-120"/>
+              </a:rPr>
+              <a:t>Output (NPV/Value)</a:t>
+            </a:r>
+            <a:endParaRPr lang="en-US" sz="1200" dirty="0"/>
+          </a:p>
+        </p:txBody>
+      </p:sp>
+      <p:sp>
+        <p:nvSpPr>
+          <p:cNvPr id="8" name="Text 6"/>
+          <p:cNvSpPr/>
+          <p:nvPr/>
+        </p:nvSpPr>
+        <p:spPr>
+          <a:xfrm>
+            <a:off x="5760720" y="1417320"/>
+            <a:ext cx="2926080" cy="310896"/>
+          </a:xfrm>
+          <a:prstGeom prst="rect">
+            <a:avLst/>
+          </a:prstGeom>
+          <a:noFill/>
+          <a:ln/>
+        </p:spPr>
+        <p:txBody>
+          <a:bodyPr wrap="square" rtlCol="0" anchor="ctr"/>
+          <a:lstStyle/>
+          <a:p>
+            <a:pPr indent="0" marL="0">
+              <a:buNone/>
+            </a:pPr>
+            <a:r>
+              <a:rPr lang="en-US" sz="1000" dirty="0">
+                <a:solidFill>
+                  <a:srgbClr val="78716C"/>
+                </a:solidFill>
+                <a:latin typeface="Arial" pitchFamily="34" charset="0"/>
+                <a:ea typeface="Arial" pitchFamily="34" charset="-122"/>
+                <a:cs typeface="Arial" pitchFamily="34" charset="-120"/>
+              </a:rPr>
+              <a:t>Final decision metric the model produces</a:t>
+            </a:r>
+            <a:endParaRPr lang="en-US" sz="1000" dirty="0"/>
+          </a:p>
+        </p:txBody>
+      </p:sp>
+      <p:sp>
+        <p:nvSpPr>
+          <p:cNvPr id="9" name="Shape 7"/>
+          <p:cNvSpPr/>
+          <p:nvPr/>
+        </p:nvSpPr>
+        <p:spPr>
+          <a:xfrm flipV="1">
+            <a:off x="1700784" y="1984248"/>
+            <a:ext cx="2816352" cy="658368"/>
+          </a:xfrm>
+          <a:prstGeom prst="trapezoid">
+            <a:avLst/>
+          </a:prstGeom>
+          <a:solidFill>
+            <a:srgbClr val="B45309">
+              <a:alpha val="54000"/>
+            </a:srgbClr>
+          </a:solidFill>
+          <a:ln/>
+        </p:spPr>
+      </p:sp>
+      <p:sp>
+        <p:nvSpPr>
+          <p:cNvPr id="10" name="Text 8"/>
+          <p:cNvSpPr/>
+          <p:nvPr/>
+        </p:nvSpPr>
+        <p:spPr>
+          <a:xfrm>
+            <a:off x="1700784" y="2039112"/>
+            <a:ext cx="2816352" cy="566928"/>
+          </a:xfrm>
+          <a:prstGeom prst="rect">
+            <a:avLst/>
+          </a:prstGeom>
+          <a:noFill/>
+          <a:ln/>
+        </p:spPr>
+        <p:txBody>
+          <a:bodyPr wrap="square" rtlCol="0" anchor="ctr"/>
+          <a:lstStyle/>
+          <a:p>
+            <a:pPr algn="ctr" indent="0" marL="0">
+              <a:buNone/>
+            </a:pPr>
+            <a:r>
+              <a:rPr lang="en-US" sz="1200" b="1" dirty="0">
+                <a:solidFill>
+                  <a:srgbClr val="FFFFFF"/>
+                </a:solidFill>
+                <a:latin typeface="Arial" pitchFamily="34" charset="0"/>
+                <a:ea typeface="Arial" pitchFamily="34" charset="-122"/>
+                <a:cs typeface="Arial" pitchFamily="34" charset="-120"/>
+              </a:rPr>
+              <a:t>Scenario Analysis</a:t>
+            </a:r>
+            <a:endParaRPr lang="en-US" sz="1200" dirty="0"/>
+          </a:p>
+        </p:txBody>
+      </p:sp>
+      <p:sp>
+        <p:nvSpPr>
+          <p:cNvPr id="11" name="Text 9"/>
+          <p:cNvSpPr/>
+          <p:nvPr/>
+        </p:nvSpPr>
+        <p:spPr>
+          <a:xfrm>
+            <a:off x="5760720" y="2167128"/>
+            <a:ext cx="2926080" cy="310896"/>
+          </a:xfrm>
+          <a:prstGeom prst="rect">
+            <a:avLst/>
+          </a:prstGeom>
+          <a:noFill/>
+          <a:ln/>
+        </p:spPr>
+        <p:txBody>
+          <a:bodyPr wrap="square" rtlCol="0" anchor="ctr"/>
+          <a:lstStyle/>
+          <a:p>
+            <a:pPr indent="0" marL="0">
+              <a:buNone/>
+            </a:pPr>
+            <a:r>
+              <a:rPr lang="en-US" sz="1000" dirty="0">
+                <a:solidFill>
+                  <a:srgbClr val="78716C"/>
+                </a:solidFill>
+                <a:latin typeface="Arial" pitchFamily="34" charset="0"/>
+                <a:ea typeface="Arial" pitchFamily="34" charset="-122"/>
+                <a:cs typeface="Arial" pitchFamily="34" charset="-120"/>
+              </a:rPr>
+              <a:t>Base, upside, downside coherent assumption sets</a:t>
+            </a:r>
+            <a:endParaRPr lang="en-US" sz="1000" dirty="0"/>
+          </a:p>
+        </p:txBody>
+      </p:sp>
+      <p:sp>
+        <p:nvSpPr>
+          <p:cNvPr id="12" name="Shape 10"/>
+          <p:cNvSpPr/>
+          <p:nvPr/>
+        </p:nvSpPr>
+        <p:spPr>
+          <a:xfrm flipV="1">
+            <a:off x="1316736" y="2734056"/>
+            <a:ext cx="3584448" cy="658368"/>
+          </a:xfrm>
+          <a:prstGeom prst="trapezoid">
+            <a:avLst/>
+          </a:prstGeom>
+          <a:solidFill>
+            <a:srgbClr val="B45309">
+              <a:alpha val="67000"/>
+            </a:srgbClr>
+          </a:solidFill>
+          <a:ln/>
+        </p:spPr>
+      </p:sp>
+      <p:sp>
+        <p:nvSpPr>
+          <p:cNvPr id="13" name="Text 11"/>
+          <p:cNvSpPr/>
+          <p:nvPr/>
+        </p:nvSpPr>
+        <p:spPr>
+          <a:xfrm>
+            <a:off x="1316736" y="2788920"/>
+            <a:ext cx="3584448" cy="566928"/>
+          </a:xfrm>
+          <a:prstGeom prst="rect">
+            <a:avLst/>
+          </a:prstGeom>
+          <a:noFill/>
+          <a:ln/>
+        </p:spPr>
+        <p:txBody>
+          <a:bodyPr wrap="square" rtlCol="0" anchor="ctr"/>
+          <a:lstStyle/>
+          <a:p>
+            <a:pPr algn="ctr" indent="0" marL="0">
+              <a:buNone/>
+            </a:pPr>
+            <a:r>
+              <a:rPr lang="en-US" sz="1200" b="1" dirty="0">
+                <a:solidFill>
+                  <a:srgbClr val="FFFFFF"/>
+                </a:solidFill>
+                <a:latin typeface="Arial" pitchFamily="34" charset="0"/>
+                <a:ea typeface="Arial" pitchFamily="34" charset="-122"/>
+                <a:cs typeface="Arial" pitchFamily="34" charset="-120"/>
+              </a:rPr>
+              <a:t>Sensitivity Analysis</a:t>
+            </a:r>
+            <a:endParaRPr lang="en-US" sz="1200" dirty="0"/>
+          </a:p>
+        </p:txBody>
+      </p:sp>
+      <p:sp>
+        <p:nvSpPr>
+          <p:cNvPr id="14" name="Text 12"/>
+          <p:cNvSpPr/>
+          <p:nvPr/>
+        </p:nvSpPr>
+        <p:spPr>
+          <a:xfrm>
+            <a:off x="5760720" y="2916936"/>
+            <a:ext cx="2926080" cy="310896"/>
+          </a:xfrm>
+          <a:prstGeom prst="rect">
+            <a:avLst/>
+          </a:prstGeom>
+          <a:noFill/>
+          <a:ln/>
+        </p:spPr>
+        <p:txBody>
+          <a:bodyPr wrap="square" rtlCol="0" anchor="ctr"/>
+          <a:lstStyle/>
+          <a:p>
+            <a:pPr indent="0" marL="0">
+              <a:buNone/>
+            </a:pPr>
+            <a:r>
+              <a:rPr lang="en-US" sz="1000" dirty="0">
+                <a:solidFill>
+                  <a:srgbClr val="78716C"/>
+                </a:solidFill>
+                <a:latin typeface="Arial" pitchFamily="34" charset="0"/>
+                <a:ea typeface="Arial" pitchFamily="34" charset="-122"/>
+                <a:cs typeface="Arial" pitchFamily="34" charset="-120"/>
+              </a:rPr>
+              <a:t>Isolate one driver's effect on output</a:t>
+            </a:r>
+            <a:endParaRPr lang="en-US" sz="1000" dirty="0"/>
+          </a:p>
+        </p:txBody>
+      </p:sp>
+      <p:sp>
+        <p:nvSpPr>
+          <p:cNvPr id="15" name="Shape 13"/>
+          <p:cNvSpPr/>
+          <p:nvPr/>
+        </p:nvSpPr>
+        <p:spPr>
+          <a:xfrm flipV="1">
+            <a:off x="932688" y="3483864"/>
+            <a:ext cx="4352544" cy="658368"/>
+          </a:xfrm>
+          <a:prstGeom prst="trapezoid">
+            <a:avLst/>
+          </a:prstGeom>
+          <a:solidFill>
+            <a:srgbClr val="B45309">
+              <a:alpha val="81000"/>
+            </a:srgbClr>
+          </a:solidFill>
+          <a:ln/>
+        </p:spPr>
+      </p:sp>
+      <p:sp>
+        <p:nvSpPr>
+          <p:cNvPr id="16" name="Text 14"/>
+          <p:cNvSpPr/>
+          <p:nvPr/>
+        </p:nvSpPr>
+        <p:spPr>
+          <a:xfrm>
+            <a:off x="932688" y="3538728"/>
+            <a:ext cx="4352544" cy="566928"/>
+          </a:xfrm>
+          <a:prstGeom prst="rect">
+            <a:avLst/>
+          </a:prstGeom>
+          <a:noFill/>
+          <a:ln/>
+        </p:spPr>
+        <p:txBody>
+          <a:bodyPr wrap="square" rtlCol="0" anchor="ctr"/>
+          <a:lstStyle/>
+          <a:p>
+            <a:pPr algn="ctr" indent="0" marL="0">
+              <a:buNone/>
+            </a:pPr>
+            <a:r>
+              <a:rPr lang="en-US" sz="1200" b="1" dirty="0">
+                <a:solidFill>
+                  <a:srgbClr val="FFFFFF"/>
+                </a:solidFill>
+                <a:latin typeface="Arial" pitchFamily="34" charset="0"/>
+                <a:ea typeface="Arial" pitchFamily="34" charset="-122"/>
+                <a:cs typeface="Arial" pitchFamily="34" charset="-120"/>
+              </a:rPr>
+              <a:t>Drivers</a:t>
+            </a:r>
+            <a:endParaRPr lang="en-US" sz="1200" dirty="0"/>
+          </a:p>
+        </p:txBody>
+      </p:sp>
+      <p:sp>
+        <p:nvSpPr>
+          <p:cNvPr id="17" name="Text 15"/>
+          <p:cNvSpPr/>
+          <p:nvPr/>
+        </p:nvSpPr>
+        <p:spPr>
+          <a:xfrm>
+            <a:off x="5760720" y="3666744"/>
+            <a:ext cx="2926080" cy="310896"/>
+          </a:xfrm>
+          <a:prstGeom prst="rect">
+            <a:avLst/>
+          </a:prstGeom>
+          <a:noFill/>
+          <a:ln/>
+        </p:spPr>
+        <p:txBody>
+          <a:bodyPr wrap="square" rtlCol="0" anchor="ctr"/>
+          <a:lstStyle/>
+          <a:p>
+            <a:pPr indent="0" marL="0">
+              <a:buNone/>
+            </a:pPr>
+            <a:r>
+              <a:rPr lang="en-US" sz="1000" dirty="0">
+                <a:solidFill>
+                  <a:srgbClr val="78716C"/>
+                </a:solidFill>
+                <a:latin typeface="Arial" pitchFamily="34" charset="0"/>
+                <a:ea typeface="Arial" pitchFamily="34" charset="-122"/>
+                <a:cs typeface="Arial" pitchFamily="34" charset="-120"/>
+              </a:rPr>
+              <a:t>Variables that meaningfully move the output</a:t>
+            </a:r>
+            <a:endParaRPr lang="en-US" sz="1000" dirty="0"/>
+          </a:p>
+        </p:txBody>
+      </p:sp>
+      <p:sp>
+        <p:nvSpPr>
+          <p:cNvPr id="18" name="Shape 16"/>
+          <p:cNvSpPr/>
+          <p:nvPr/>
+        </p:nvSpPr>
+        <p:spPr>
+          <a:xfrm flipV="1">
+            <a:off x="548640" y="4233672"/>
+            <a:ext cx="5120640" cy="658368"/>
+          </a:xfrm>
+          <a:prstGeom prst="trapezoid">
+            <a:avLst/>
+          </a:prstGeom>
+          <a:solidFill>
+            <a:srgbClr val="B45309">
+              <a:alpha val="95000"/>
+            </a:srgbClr>
+          </a:solidFill>
+          <a:ln/>
+        </p:spPr>
+      </p:sp>
+      <p:sp>
+        <p:nvSpPr>
+          <p:cNvPr id="19" name="Text 17"/>
+          <p:cNvSpPr/>
+          <p:nvPr/>
+        </p:nvSpPr>
+        <p:spPr>
+          <a:xfrm>
+            <a:off x="548640" y="4288536"/>
+            <a:ext cx="5120640" cy="566928"/>
+          </a:xfrm>
+          <a:prstGeom prst="rect">
+            <a:avLst/>
+          </a:prstGeom>
+          <a:noFill/>
+          <a:ln/>
+        </p:spPr>
+        <p:txBody>
+          <a:bodyPr wrap="square" rtlCol="0" anchor="ctr"/>
+          <a:lstStyle/>
+          <a:p>
+            <a:pPr algn="ctr" indent="0" marL="0">
+              <a:buNone/>
+            </a:pPr>
+            <a:r>
+              <a:rPr lang="en-US" sz="1200" b="1" dirty="0">
+                <a:solidFill>
+                  <a:srgbClr val="FFFFFF"/>
+                </a:solidFill>
+                <a:latin typeface="Arial" pitchFamily="34" charset="0"/>
+                <a:ea typeface="Arial" pitchFamily="34" charset="-122"/>
+                <a:cs typeface="Arial" pitchFamily="34" charset="-120"/>
+              </a:rPr>
+              <a:t>Assumptions</a:t>
+            </a:r>
+            <a:endParaRPr lang="en-US" sz="1200" dirty="0"/>
+          </a:p>
+        </p:txBody>
+      </p:sp>
+      <p:sp>
+        <p:nvSpPr>
+          <p:cNvPr id="20" name="Text 18"/>
+          <p:cNvSpPr/>
+          <p:nvPr/>
+        </p:nvSpPr>
+        <p:spPr>
+          <a:xfrm>
+            <a:off x="5760720" y="4416552"/>
+            <a:ext cx="2926080" cy="310896"/>
+          </a:xfrm>
+          <a:prstGeom prst="rect">
+            <a:avLst/>
+          </a:prstGeom>
+          <a:noFill/>
+          <a:ln/>
+        </p:spPr>
+        <p:txBody>
+          <a:bodyPr wrap="square" rtlCol="0" anchor="ctr"/>
+          <a:lstStyle/>
+          <a:p>
+            <a:pPr indent="0" marL="0">
+              <a:buNone/>
+            </a:pPr>
+            <a:r>
+              <a:rPr lang="en-US" sz="1000" dirty="0">
+                <a:solidFill>
+                  <a:srgbClr val="78716C"/>
+                </a:solidFill>
+                <a:latin typeface="Arial" pitchFamily="34" charset="0"/>
+                <a:ea typeface="Arial" pitchFamily="34" charset="-122"/>
+                <a:cs typeface="Arial" pitchFamily="34" charset="-120"/>
+              </a:rPr>
+              <a:t>Foundation inputs accepted as true for modeling</a:t>
+            </a:r>
+            <a:endParaRPr lang="en-US" sz="1000" dirty="0"/>
           </a:p>
         </p:txBody>
       </p:sp>
@@ -2575,9 +3422,16 @@
 </p:sld>
 </file>
 
-<file path=ppt/slides/slide2.xml><?xml version="1.0" encoding="utf-8"?>
+<file path=ppt/slides/slide13.xml><?xml version="1.0" encoding="utf-8"?>
 <p:sld xmlns:a="http://schemas.openxmlformats.org/drawingml/2006/main" xmlns:r="http://schemas.openxmlformats.org/officeDocument/2006/relationships" xmlns:p="http://schemas.openxmlformats.org/presentationml/2006/main">
-  <p:cSld name="Slide 2">
+  <p:cSld name="Slide 13">
+    <p:bg>
+      <p:bgPr>
+        <a:solidFill>
+          <a:srgbClr val="FFFFFF"/>
+        </a:solidFill>
+      </p:bgPr>
+    </p:bg>
     <p:spTree>
       <p:nvGrpSpPr>
         <p:cNvPr id="1" name=""/>
@@ -2594,14 +3448,34 @@
       </p:grpSpPr>
       <p:sp>
         <p:nvSpPr>
-          <p:cNvPr id="2" name="Text 0"/>
-          <p:cNvSpPr/>
-          <p:nvPr/>
-        </p:nvSpPr>
-        <p:spPr>
-          <a:xfrm>
-            <a:off x="457200" y="320040"/>
-            <a:ext cx="8229600" cy="731520"/>
+          <p:cNvPr id="2" name="Shape 0"/>
+          <p:cNvSpPr/>
+          <p:nvPr/>
+        </p:nvSpPr>
+        <p:spPr>
+          <a:xfrm>
+            <a:off x="411480" y="402336"/>
+            <a:ext cx="82296" cy="329184"/>
+          </a:xfrm>
+          <a:prstGeom prst="rect">
+            <a:avLst/>
+          </a:prstGeom>
+          <a:solidFill>
+            <a:srgbClr val="B45309"/>
+          </a:solidFill>
+          <a:ln/>
+        </p:spPr>
+      </p:sp>
+      <p:sp>
+        <p:nvSpPr>
+          <p:cNvPr id="3" name="Text 1"/>
+          <p:cNvSpPr/>
+          <p:nvPr/>
+        </p:nvSpPr>
+        <p:spPr>
+          <a:xfrm>
+            <a:off x="566928" y="292608"/>
+            <a:ext cx="8138160" cy="548640"/>
           </a:xfrm>
           <a:prstGeom prst="rect">
             <a:avLst/>
@@ -2617,27 +3491,53 @@
               <a:buNone/>
             </a:pPr>
             <a:r>
-              <a:rPr lang="en-US" sz="2400" b="1" dirty="0">
-                <a:solidFill>
-                  <a:srgbClr val="B45309"/>
-                </a:solidFill>
-              </a:rPr>
-              <a:t>Case Studies and Final Project Presentations</a:t>
-            </a:r>
-            <a:endParaRPr lang="en-US" sz="2400" dirty="0"/>
-          </a:p>
-        </p:txBody>
-      </p:sp>
-      <p:sp>
-        <p:nvSpPr>
-          <p:cNvPr id="3" name="Text 1"/>
-          <p:cNvSpPr/>
-          <p:nvPr/>
-        </p:nvSpPr>
-        <p:spPr>
-          <a:xfrm>
-            <a:off x="457200" y="4709160"/>
-            <a:ext cx="8229600" cy="320040"/>
+              <a:rPr lang="en-US" sz="2100" b="1" dirty="0">
+                <a:solidFill>
+                  <a:srgbClr val="1C1917"/>
+                </a:solidFill>
+                <a:latin typeface="Arial" pitchFamily="34" charset="0"/>
+                <a:ea typeface="Arial" pitchFamily="34" charset="-122"/>
+                <a:cs typeface="Arial" pitchFamily="34" charset="-120"/>
+              </a:rPr>
+              <a:t>Steps</a:t>
+            </a:r>
+            <a:endParaRPr lang="en-US" sz="2100" dirty="0"/>
+          </a:p>
+        </p:txBody>
+      </p:sp>
+      <p:sp>
+        <p:nvSpPr>
+          <p:cNvPr id="4" name="Shape 2"/>
+          <p:cNvSpPr/>
+          <p:nvPr/>
+        </p:nvSpPr>
+        <p:spPr>
+          <a:xfrm>
+            <a:off x="411480" y="960120"/>
+            <a:ext cx="8321040" cy="0"/>
+          </a:xfrm>
+          <a:prstGeom prst="line">
+            <a:avLst/>
+          </a:prstGeom>
+          <a:noFill/>
+          <a:ln w="12700">
+            <a:solidFill>
+              <a:srgbClr val="E7E5E4"/>
+            </a:solidFill>
+            <a:prstDash val="solid"/>
+          </a:ln>
+        </p:spPr>
+      </p:sp>
+      <p:sp>
+        <p:nvSpPr>
+          <p:cNvPr id="5" name="Text 3"/>
+          <p:cNvSpPr/>
+          <p:nvPr/>
+        </p:nvSpPr>
+        <p:spPr>
+          <a:xfrm>
+            <a:off x="411480" y="4864608"/>
+            <a:ext cx="8321040" cy="237744"/>
           </a:xfrm>
           <a:prstGeom prst="rect">
             <a:avLst/>
@@ -2653,14 +3553,123 @@
               <a:buNone/>
             </a:pPr>
             <a:r>
-              <a:rPr lang="en-US" sz="800" dirty="0">
+              <a:rPr lang="en-US" sz="750" dirty="0">
                 <a:solidFill>
                   <a:srgbClr val="AAAAAA"/>
                 </a:solidFill>
+                <a:latin typeface="Arial" pitchFamily="34" charset="0"/>
+                <a:ea typeface="Arial" pitchFamily="34" charset="-122"/>
+                <a:cs typeface="Arial" pitchFamily="34" charset="-120"/>
               </a:rPr>
               <a:t>Lesson Forge Pro (owner) — This content is educational material only and does not constitute financial, investment, or trading advice.</a:t>
             </a:r>
-            <a:endParaRPr lang="en-US" sz="800" dirty="0"/>
+            <a:endParaRPr lang="en-US" sz="750" dirty="0"/>
+          </a:p>
+        </p:txBody>
+      </p:sp>
+      <p:sp>
+        <p:nvSpPr>
+          <p:cNvPr id="6" name="Text 4"/>
+          <p:cNvSpPr/>
+          <p:nvPr/>
+        </p:nvSpPr>
+        <p:spPr>
+          <a:xfrm>
+            <a:off x="731520" y="1188720"/>
+            <a:ext cx="7680960" cy="3383280"/>
+          </a:xfrm>
+          <a:prstGeom prst="rect">
+            <a:avLst/>
+          </a:prstGeom>
+          <a:noFill/>
+          <a:ln/>
+        </p:spPr>
+        <p:txBody>
+          <a:bodyPr wrap="square" rtlCol="0" anchor="t"/>
+          <a:lstStyle/>
+          <a:p>
+            <a:pPr marL="152400" indent="-152400">
+              <a:spcAft>
+                <a:spcPts val="800"/>
+              </a:spcAft>
+              <a:buSzPct val="100000"/>
+              <a:buChar char="•"/>
+            </a:pPr>
+            <a:r>
+              <a:rPr lang="en-US" sz="1500" dirty="0">
+                <a:solidFill>
+                  <a:srgbClr val="1C1917"/>
+                </a:solidFill>
+                <a:latin typeface="Arial" pitchFamily="34" charset="0"/>
+                <a:ea typeface="Arial" pitchFamily="34" charset="-122"/>
+                <a:cs typeface="Arial" pitchFamily="34" charset="-120"/>
+              </a:rPr>
+              <a:t>Build the income statement projection. Start with revenue, apply the growth rate, then layer in costs using th</a:t>
+            </a:r>
+            <a:endParaRPr lang="en-US" sz="1500" dirty="0"/>
+          </a:p>
+          <a:p>
+            <a:pPr marL="152400" indent="-152400">
+              <a:spcAft>
+                <a:spcPts val="800"/>
+              </a:spcAft>
+              <a:buSzPct val="100000"/>
+              <a:buChar char="•"/>
+            </a:pPr>
+            <a:r>
+              <a:rPr lang="en-US" sz="1500" dirty="0">
+                <a:solidFill>
+                  <a:srgbClr val="1C1917"/>
+                </a:solidFill>
+                <a:latin typeface="Arial" pitchFamily="34" charset="0"/>
+                <a:ea typeface="Arial" pitchFamily="34" charset="-122"/>
+                <a:cs typeface="Arial" pitchFamily="34" charset="-120"/>
+              </a:rPr>
+              <a:t>Calculate taxes and NOPAT. Apply the effective tax rate to EBIT to get Net Operating Profit After Tax.</a:t>
+            </a:r>
+            <a:endParaRPr lang="en-US" sz="1500" dirty="0"/>
+          </a:p>
+          <a:p>
+            <a:pPr marL="152400" indent="-152400">
+              <a:spcAft>
+                <a:spcPts val="800"/>
+              </a:spcAft>
+              <a:buSzPct val="100000"/>
+              <a:buChar char="•"/>
+            </a:pPr>
+            <a:r>
+              <a:rPr lang="en-US" sz="1500" dirty="0">
+                <a:solidFill>
+                  <a:srgbClr val="1C1917"/>
+                </a:solidFill>
+                <a:latin typeface="Arial" pitchFamily="34" charset="0"/>
+                <a:ea typeface="Arial" pitchFamily="34" charset="-122"/>
+                <a:cs typeface="Arial" pitchFamily="34" charset="-120"/>
+              </a:rPr>
+              <a:t>Derive free cash flow (FCF). Add back non-cash charges (depreciation), subtract capital expenditure, and adjus</a:t>
+            </a:r>
+            <a:endParaRPr lang="en-US" sz="1500" dirty="0"/>
+          </a:p>
+          <a:p>
+            <a:pPr marL="152400" indent="-152400">
+              <a:spcAft>
+                <a:spcPts val="800"/>
+              </a:spcAft>
+              <a:buSzPct val="100000"/>
+              <a:buChar char="•"/>
+            </a:pPr>
+            <a:r>
+              <a:rPr lang="en-US" sz="1500" dirty="0">
+                <a:solidFill>
+                  <a:srgbClr val="1C1917"/>
+                </a:solidFill>
+                <a:latin typeface="Arial" pitchFamily="34" charset="0"/>
+                <a:ea typeface="Arial" pitchFamily="34" charset="-122"/>
+                <a:cs typeface="Arial" pitchFamily="34" charset="-120"/>
+              </a:rPr>
+              <a:t>Discount each FCF to present value. Apply the WACC as the discount rate across the forecast horizon.</a:t>
+            </a:r>
+            <a:endParaRPr lang="en-US" sz="1500" dirty="0"/>
           </a:p>
         </p:txBody>
       </p:sp>
@@ -2672,9 +3681,16 @@
 </p:sld>
 </file>
 
-<file path=ppt/slides/slide3.xml><?xml version="1.0" encoding="utf-8"?>
+<file path=ppt/slides/slide14.xml><?xml version="1.0" encoding="utf-8"?>
 <p:sld xmlns:a="http://schemas.openxmlformats.org/drawingml/2006/main" xmlns:r="http://schemas.openxmlformats.org/officeDocument/2006/relationships" xmlns:p="http://schemas.openxmlformats.org/presentationml/2006/main">
-  <p:cSld name="Slide 3">
+  <p:cSld name="Slide 14">
+    <p:bg>
+      <p:bgPr>
+        <a:solidFill>
+          <a:srgbClr val="FFFFFF"/>
+        </a:solidFill>
+      </p:bgPr>
+    </p:bg>
     <p:spTree>
       <p:nvGrpSpPr>
         <p:cNvPr id="1" name=""/>
@@ -2691,14 +3707,34 @@
       </p:grpSpPr>
       <p:sp>
         <p:nvSpPr>
-          <p:cNvPr id="2" name="Text 0"/>
-          <p:cNvSpPr/>
-          <p:nvPr/>
-        </p:nvSpPr>
-        <p:spPr>
-          <a:xfrm>
-            <a:off x="457200" y="320040"/>
-            <a:ext cx="8229600" cy="731520"/>
+          <p:cNvPr id="2" name="Shape 0"/>
+          <p:cNvSpPr/>
+          <p:nvPr/>
+        </p:nvSpPr>
+        <p:spPr>
+          <a:xfrm>
+            <a:off x="0" y="4480560"/>
+            <a:ext cx="9144000" cy="667512"/>
+          </a:xfrm>
+          <a:prstGeom prst="rect">
+            <a:avLst/>
+          </a:prstGeom>
+          <a:solidFill>
+            <a:srgbClr val="B45309"/>
+          </a:solidFill>
+          <a:ln/>
+        </p:spPr>
+      </p:sp>
+      <p:sp>
+        <p:nvSpPr>
+          <p:cNvPr id="3" name="Text 1"/>
+          <p:cNvSpPr/>
+          <p:nvPr/>
+        </p:nvSpPr>
+        <p:spPr>
+          <a:xfrm>
+            <a:off x="685800" y="2148840"/>
+            <a:ext cx="7863840" cy="548640"/>
           </a:xfrm>
           <a:prstGeom prst="rect">
             <a:avLst/>
@@ -2714,51 +3750,17 @@
               <a:buNone/>
             </a:pPr>
             <a:r>
-              <a:rPr lang="en-US" sz="2400" b="1" dirty="0">
-                <a:solidFill>
-                  <a:srgbClr val="B45309"/>
-                </a:solidFill>
-              </a:rPr>
-              <a:t>Duration: 180 minutes</a:t>
-            </a:r>
-            <a:endParaRPr lang="en-US" sz="2400" dirty="0"/>
-          </a:p>
-        </p:txBody>
-      </p:sp>
-      <p:sp>
-        <p:nvSpPr>
-          <p:cNvPr id="3" name="Text 1"/>
-          <p:cNvSpPr/>
-          <p:nvPr/>
-        </p:nvSpPr>
-        <p:spPr>
-          <a:xfrm>
-            <a:off x="640080" y="1188720"/>
-            <a:ext cx="7863840" cy="3291840"/>
-          </a:xfrm>
-          <a:prstGeom prst="rect">
-            <a:avLst/>
-          </a:prstGeom>
-          <a:noFill/>
-          <a:ln/>
-        </p:spPr>
-        <p:txBody>
-          <a:bodyPr wrap="square" rtlCol="0" anchor="t"/>
-          <a:lstStyle/>
-          <a:p>
-            <a:pPr marL="342900" indent="-342900">
-              <a:buSzPct val="100000"/>
-              <a:buChar char="•"/>
-            </a:pPr>
-            <a:r>
-              <a:rPr lang="en-US" sz="1600" dirty="0">
-                <a:solidFill>
-                  <a:srgbClr val="333333"/>
-                </a:solidFill>
-              </a:rPr>
-              <a:t>Bloom's levels: Create, Evaluate</a:t>
-            </a:r>
-            <a:endParaRPr lang="en-US" sz="1600" dirty="0"/>
+              <a:rPr lang="en-US" sz="2000" b="1" dirty="0">
+                <a:solidFill>
+                  <a:srgbClr val="1C1917"/>
+                </a:solidFill>
+                <a:latin typeface="Arial" pitchFamily="34" charset="0"/>
+                <a:ea typeface="Arial" pitchFamily="34" charset="-122"/>
+                <a:cs typeface="Arial" pitchFamily="34" charset="-120"/>
+              </a:rPr>
+              <a:t>Next: practice problems in your textbook chapter</a:t>
+            </a:r>
+            <a:endParaRPr lang="en-US" sz="2000" dirty="0"/>
           </a:p>
         </p:txBody>
       </p:sp>
@@ -2770,8 +3772,8 @@
         </p:nvSpPr>
         <p:spPr>
           <a:xfrm>
-            <a:off x="457200" y="4709160"/>
-            <a:ext cx="8229600" cy="320040"/>
+            <a:off x="685800" y="4599432"/>
+            <a:ext cx="7863840" cy="411480"/>
           </a:xfrm>
           <a:prstGeom prst="rect">
             <a:avLst/>
@@ -2787,14 +3789,17 @@
               <a:buNone/>
             </a:pPr>
             <a:r>
-              <a:rPr lang="en-US" sz="800" dirty="0">
-                <a:solidFill>
-                  <a:srgbClr val="AAAAAA"/>
-                </a:solidFill>
+              <a:rPr lang="en-US" sz="1100" dirty="0">
+                <a:solidFill>
+                  <a:srgbClr val="FFFFFF"/>
+                </a:solidFill>
+                <a:latin typeface="Arial" pitchFamily="34" charset="0"/>
+                <a:ea typeface="Arial" pitchFamily="34" charset="-122"/>
+                <a:cs typeface="Arial" pitchFamily="34" charset="-120"/>
               </a:rPr>
               <a:t>Lesson Forge Pro (owner) — This content is educational material only and does not constitute financial, investment, or trading advice.</a:t>
             </a:r>
-            <a:endParaRPr lang="en-US" sz="800" dirty="0"/>
+            <a:endParaRPr lang="en-US" sz="1100" dirty="0"/>
           </a:p>
         </p:txBody>
       </p:sp>
@@ -2806,9 +3811,16 @@
 </p:sld>
 </file>
 
-<file path=ppt/slides/slide4.xml><?xml version="1.0" encoding="utf-8"?>
+<file path=ppt/slides/slide2.xml><?xml version="1.0" encoding="utf-8"?>
 <p:sld xmlns:a="http://schemas.openxmlformats.org/drawingml/2006/main" xmlns:r="http://schemas.openxmlformats.org/officeDocument/2006/relationships" xmlns:p="http://schemas.openxmlformats.org/presentationml/2006/main">
-  <p:cSld name="Slide 4">
+  <p:cSld name="Slide 2">
+    <p:bg>
+      <p:bgPr>
+        <a:solidFill>
+          <a:srgbClr val="FFFFFF"/>
+        </a:solidFill>
+      </p:bgPr>
+    </p:bg>
     <p:spTree>
       <p:nvGrpSpPr>
         <p:cNvPr id="1" name=""/>
@@ -2825,14 +3837,34 @@
       </p:grpSpPr>
       <p:sp>
         <p:nvSpPr>
-          <p:cNvPr id="2" name="Text 0"/>
-          <p:cNvSpPr/>
-          <p:nvPr/>
-        </p:nvSpPr>
-        <p:spPr>
-          <a:xfrm>
-            <a:off x="457200" y="320040"/>
-            <a:ext cx="8229600" cy="731520"/>
+          <p:cNvPr id="2" name="Shape 0"/>
+          <p:cNvSpPr/>
+          <p:nvPr/>
+        </p:nvSpPr>
+        <p:spPr>
+          <a:xfrm>
+            <a:off x="411480" y="402336"/>
+            <a:ext cx="82296" cy="329184"/>
+          </a:xfrm>
+          <a:prstGeom prst="rect">
+            <a:avLst/>
+          </a:prstGeom>
+          <a:solidFill>
+            <a:srgbClr val="B45309"/>
+          </a:solidFill>
+          <a:ln/>
+        </p:spPr>
+      </p:sp>
+      <p:sp>
+        <p:nvSpPr>
+          <p:cNvPr id="3" name="Text 1"/>
+          <p:cNvSpPr/>
+          <p:nvPr/>
+        </p:nvSpPr>
+        <p:spPr>
+          <a:xfrm>
+            <a:off x="566928" y="292608"/>
+            <a:ext cx="8138160" cy="548640"/>
           </a:xfrm>
           <a:prstGeom prst="rect">
             <a:avLst/>
@@ -2848,94 +3880,53 @@
               <a:buNone/>
             </a:pPr>
             <a:r>
-              <a:rPr lang="en-US" sz="2400" b="1" dirty="0">
-                <a:solidFill>
-                  <a:srgbClr val="B45309"/>
-                </a:solidFill>
-              </a:rPr>
-              <a:t>Objectives</a:t>
-            </a:r>
-            <a:endParaRPr lang="en-US" sz="2400" dirty="0"/>
-          </a:p>
-        </p:txBody>
-      </p:sp>
-      <p:sp>
-        <p:nvSpPr>
-          <p:cNvPr id="3" name="Text 1"/>
-          <p:cNvSpPr/>
-          <p:nvPr/>
-        </p:nvSpPr>
-        <p:spPr>
-          <a:xfrm>
-            <a:off x="640080" y="1188720"/>
-            <a:ext cx="7863840" cy="3291840"/>
-          </a:xfrm>
-          <a:prstGeom prst="rect">
-            <a:avLst/>
-          </a:prstGeom>
-          <a:noFill/>
-          <a:ln/>
-        </p:spPr>
-        <p:txBody>
-          <a:bodyPr wrap="square" rtlCol="0" anchor="t"/>
-          <a:lstStyle/>
-          <a:p>
-            <a:pPr marL="342900" indent="-342900">
-              <a:buSzPct val="100000"/>
-              <a:buChar char="•"/>
-            </a:pPr>
-            <a:r>
-              <a:rPr lang="en-US" sz="1600" dirty="0">
-                <a:solidFill>
-                  <a:srgbClr val="333333"/>
-                </a:solidFill>
-              </a:rPr>
-              <a:t>Apply financial modeling skills to real-world case studies</a:t>
-            </a:r>
-            <a:endParaRPr lang="en-US" sz="1600" dirty="0"/>
-          </a:p>
-          <a:p>
-            <a:pPr marL="342900" indent="-342900">
-              <a:buSzPct val="100000"/>
-              <a:buChar char="•"/>
-            </a:pPr>
-            <a:r>
-              <a:rPr lang="en-US" sz="1600" dirty="0">
-                <a:solidFill>
-                  <a:srgbClr val="333333"/>
-                </a:solidFill>
-              </a:rPr>
-              <a:t>Develop and present a final project that demonstrates mastery of financial modeling concepts</a:t>
-            </a:r>
-            <a:endParaRPr lang="en-US" sz="1600" dirty="0"/>
-          </a:p>
-          <a:p>
-            <a:pPr marL="342900" indent="-342900">
-              <a:buSzPct val="100000"/>
-              <a:buChar char="•"/>
-            </a:pPr>
-            <a:r>
-              <a:rPr lang="en-US" sz="1600" dirty="0">
-                <a:solidFill>
-                  <a:srgbClr val="333333"/>
-                </a:solidFill>
-              </a:rPr>
-              <a:t>Receive feedback and evaluation from instructors and peers</a:t>
-            </a:r>
-            <a:endParaRPr lang="en-US" sz="1600" dirty="0"/>
-          </a:p>
-        </p:txBody>
-      </p:sp>
-      <p:sp>
-        <p:nvSpPr>
-          <p:cNvPr id="4" name="Text 2"/>
-          <p:cNvSpPr/>
-          <p:nvPr/>
-        </p:nvSpPr>
-        <p:spPr>
-          <a:xfrm>
-            <a:off x="457200" y="4709160"/>
-            <a:ext cx="8229600" cy="320040"/>
+              <a:rPr lang="en-US" sz="2100" b="1" dirty="0">
+                <a:solidFill>
+                  <a:srgbClr val="1C1917"/>
+                </a:solidFill>
+                <a:latin typeface="Arial" pitchFamily="34" charset="0"/>
+                <a:ea typeface="Arial" pitchFamily="34" charset="-122"/>
+                <a:cs typeface="Arial" pitchFamily="34" charset="-120"/>
+              </a:rPr>
+              <a:t>Today's agenda</a:t>
+            </a:r>
+            <a:endParaRPr lang="en-US" sz="2100" dirty="0"/>
+          </a:p>
+        </p:txBody>
+      </p:sp>
+      <p:sp>
+        <p:nvSpPr>
+          <p:cNvPr id="4" name="Shape 2"/>
+          <p:cNvSpPr/>
+          <p:nvPr/>
+        </p:nvSpPr>
+        <p:spPr>
+          <a:xfrm>
+            <a:off x="411480" y="960120"/>
+            <a:ext cx="8321040" cy="0"/>
+          </a:xfrm>
+          <a:prstGeom prst="line">
+            <a:avLst/>
+          </a:prstGeom>
+          <a:noFill/>
+          <a:ln w="12700">
+            <a:solidFill>
+              <a:srgbClr val="E7E5E4"/>
+            </a:solidFill>
+            <a:prstDash val="solid"/>
+          </a:ln>
+        </p:spPr>
+      </p:sp>
+      <p:sp>
+        <p:nvSpPr>
+          <p:cNvPr id="5" name="Text 3"/>
+          <p:cNvSpPr/>
+          <p:nvPr/>
+        </p:nvSpPr>
+        <p:spPr>
+          <a:xfrm>
+            <a:off x="411480" y="4864608"/>
+            <a:ext cx="8321040" cy="237744"/>
           </a:xfrm>
           <a:prstGeom prst="rect">
             <a:avLst/>
@@ -2951,14 +3942,207 @@
               <a:buNone/>
             </a:pPr>
             <a:r>
-              <a:rPr lang="en-US" sz="800" dirty="0">
+              <a:rPr lang="en-US" sz="750" dirty="0">
                 <a:solidFill>
                   <a:srgbClr val="AAAAAA"/>
                 </a:solidFill>
+                <a:latin typeface="Arial" pitchFamily="34" charset="0"/>
+                <a:ea typeface="Arial" pitchFamily="34" charset="-122"/>
+                <a:cs typeface="Arial" pitchFamily="34" charset="-120"/>
               </a:rPr>
               <a:t>Lesson Forge Pro (owner) — This content is educational material only and does not constitute financial, investment, or trading advice.</a:t>
             </a:r>
-            <a:endParaRPr lang="en-US" sz="800" dirty="0"/>
+            <a:endParaRPr lang="en-US" sz="750" dirty="0"/>
+          </a:p>
+        </p:txBody>
+      </p:sp>
+      <p:sp>
+        <p:nvSpPr>
+          <p:cNvPr id="6" name="Text 4"/>
+          <p:cNvSpPr/>
+          <p:nvPr/>
+        </p:nvSpPr>
+        <p:spPr>
+          <a:xfrm>
+            <a:off x="731520" y="1234440"/>
+            <a:ext cx="7680960" cy="3383280"/>
+          </a:xfrm>
+          <a:prstGeom prst="rect">
+            <a:avLst/>
+          </a:prstGeom>
+          <a:noFill/>
+          <a:ln/>
+        </p:spPr>
+        <p:txBody>
+          <a:bodyPr wrap="square" rtlCol="0" anchor="t"/>
+          <a:lstStyle/>
+          <a:p>
+            <a:pPr marL="177800" indent="-177800">
+              <a:spcAft>
+                <a:spcPts val="1000"/>
+              </a:spcAft>
+              <a:buSzPct val="100000"/>
+              <a:buChar char="▪"/>
+            </a:pPr>
+            <a:r>
+              <a:rPr lang="en-US" sz="1600" dirty="0">
+                <a:solidFill>
+                  <a:srgbClr val="1C1917"/>
+                </a:solidFill>
+                <a:latin typeface="Arial" pitchFamily="34" charset="0"/>
+                <a:ea typeface="Arial" pitchFamily="34" charset="-122"/>
+                <a:cs typeface="Arial" pitchFamily="34" charset="-120"/>
+              </a:rPr>
+              <a:t>Concepts and vocabulary</a:t>
+            </a:r>
+            <a:endParaRPr lang="en-US" sz="1600" dirty="0"/>
+          </a:p>
+          <a:p>
+            <a:pPr marL="177800" indent="-177800">
+              <a:spcAft>
+                <a:spcPts val="1000"/>
+              </a:spcAft>
+              <a:buSzPct val="100000"/>
+              <a:buChar char="▪"/>
+            </a:pPr>
+            <a:r>
+              <a:rPr lang="en-US" sz="1600" dirty="0">
+                <a:solidFill>
+                  <a:srgbClr val="1C1917"/>
+                </a:solidFill>
+                <a:latin typeface="Arial" pitchFamily="34" charset="0"/>
+                <a:ea typeface="Arial" pitchFamily="34" charset="-122"/>
+                <a:cs typeface="Arial" pitchFamily="34" charset="-120"/>
+              </a:rPr>
+              <a:t>Core Definitions</a:t>
+            </a:r>
+            <a:endParaRPr lang="en-US" sz="1600" dirty="0"/>
+          </a:p>
+          <a:p>
+            <a:pPr marL="177800" indent="-177800">
+              <a:spcAft>
+                <a:spcPts val="1000"/>
+              </a:spcAft>
+              <a:buSzPct val="100000"/>
+              <a:buChar char="▪"/>
+            </a:pPr>
+            <a:r>
+              <a:rPr lang="en-US" sz="1600" dirty="0">
+                <a:solidFill>
+                  <a:srgbClr val="1C1917"/>
+                </a:solidFill>
+                <a:latin typeface="Arial" pitchFamily="34" charset="0"/>
+                <a:ea typeface="Arial" pitchFamily="34" charset="-122"/>
+                <a:cs typeface="Arial" pitchFamily="34" charset="-120"/>
+              </a:rPr>
+              <a:t>Where It Fits in Practice</a:t>
+            </a:r>
+            <a:endParaRPr lang="en-US" sz="1600" dirty="0"/>
+          </a:p>
+          <a:p>
+            <a:pPr marL="177800" indent="-177800">
+              <a:spcAft>
+                <a:spcPts val="1000"/>
+              </a:spcAft>
+              <a:buSzPct val="100000"/>
+              <a:buChar char="▪"/>
+            </a:pPr>
+            <a:r>
+              <a:rPr lang="en-US" sz="1600" dirty="0">
+                <a:solidFill>
+                  <a:srgbClr val="1C1917"/>
+                </a:solidFill>
+                <a:latin typeface="Arial" pitchFamily="34" charset="0"/>
+                <a:ea typeface="Arial" pitchFamily="34" charset="-122"/>
+                <a:cs typeface="Arial" pitchFamily="34" charset="-120"/>
+              </a:rPr>
+              <a:t>Notation</a:t>
+            </a:r>
+            <a:endParaRPr lang="en-US" sz="1600" dirty="0"/>
+          </a:p>
+          <a:p>
+            <a:pPr marL="177800" indent="-177800">
+              <a:spcAft>
+                <a:spcPts val="1000"/>
+              </a:spcAft>
+              <a:buSzPct val="100000"/>
+              <a:buChar char="▪"/>
+            </a:pPr>
+            <a:r>
+              <a:rPr lang="en-US" sz="1600" dirty="0">
+                <a:solidFill>
+                  <a:srgbClr val="1C1917"/>
+                </a:solidFill>
+                <a:latin typeface="Arial" pitchFamily="34" charset="0"/>
+                <a:ea typeface="Arial" pitchFamily="34" charset="-122"/>
+                <a:cs typeface="Arial" pitchFamily="34" charset="-120"/>
+              </a:rPr>
+              <a:t>Worked Example — Terminology Applied to a Mini Scenario</a:t>
+            </a:r>
+            <a:endParaRPr lang="en-US" sz="1600" dirty="0"/>
+          </a:p>
+          <a:p>
+            <a:pPr marL="177800" indent="-177800">
+              <a:spcAft>
+                <a:spcPts val="1000"/>
+              </a:spcAft>
+              <a:buSzPct val="100000"/>
+              <a:buChar char="▪"/>
+            </a:pPr>
+            <a:r>
+              <a:rPr lang="en-US" sz="1600" dirty="0">
+                <a:solidFill>
+                  <a:srgbClr val="1C1917"/>
+                </a:solidFill>
+                <a:latin typeface="Arial" pitchFamily="34" charset="0"/>
+                <a:ea typeface="Arial" pitchFamily="34" charset="-122"/>
+                <a:cs typeface="Arial" pitchFamily="34" charset="-120"/>
+              </a:rPr>
+              <a:t>The standard procedure</a:t>
+            </a:r>
+            <a:endParaRPr lang="en-US" sz="1600" dirty="0"/>
+          </a:p>
+          <a:p>
+            <a:pPr marL="177800" indent="-177800">
+              <a:spcAft>
+                <a:spcPts val="1000"/>
+              </a:spcAft>
+              <a:buSzPct val="100000"/>
+              <a:buChar char="▪"/>
+            </a:pPr>
+            <a:r>
+              <a:rPr lang="en-US" sz="1600" dirty="0">
+                <a:solidFill>
+                  <a:srgbClr val="1C1917"/>
+                </a:solidFill>
+                <a:latin typeface="Arial" pitchFamily="34" charset="0"/>
+                <a:ea typeface="Arial" pitchFamily="34" charset="-122"/>
+                <a:cs typeface="Arial" pitchFamily="34" charset="-120"/>
+              </a:rPr>
+              <a:t>Inputs</a:t>
+            </a:r>
+            <a:endParaRPr lang="en-US" sz="1600" dirty="0"/>
+          </a:p>
+          <a:p>
+            <a:pPr marL="177800" indent="-177800">
+              <a:spcAft>
+                <a:spcPts val="1000"/>
+              </a:spcAft>
+              <a:buSzPct val="100000"/>
+              <a:buChar char="▪"/>
+            </a:pPr>
+            <a:r>
+              <a:rPr lang="en-US" sz="1600" dirty="0">
+                <a:solidFill>
+                  <a:srgbClr val="1C1917"/>
+                </a:solidFill>
+                <a:latin typeface="Arial" pitchFamily="34" charset="0"/>
+                <a:ea typeface="Arial" pitchFamily="34" charset="-122"/>
+                <a:cs typeface="Arial" pitchFamily="34" charset="-120"/>
+              </a:rPr>
+              <a:t>Steps</a:t>
+            </a:r>
+            <a:endParaRPr lang="en-US" sz="1600" dirty="0"/>
           </a:p>
         </p:txBody>
       </p:sp>
@@ -2970,9 +4154,16 @@
 </p:sld>
 </file>
 
-<file path=ppt/slides/slide5.xml><?xml version="1.0" encoding="utf-8"?>
+<file path=ppt/slides/slide3.xml><?xml version="1.0" encoding="utf-8"?>
 <p:sld xmlns:a="http://schemas.openxmlformats.org/drawingml/2006/main" xmlns:r="http://schemas.openxmlformats.org/officeDocument/2006/relationships" xmlns:p="http://schemas.openxmlformats.org/presentationml/2006/main">
-  <p:cSld name="Slide 5">
+  <p:cSld name="Slide 3">
+    <p:bg>
+      <p:bgPr>
+        <a:solidFill>
+          <a:srgbClr val="FFFFFF"/>
+        </a:solidFill>
+      </p:bgPr>
+    </p:bg>
     <p:spTree>
       <p:nvGrpSpPr>
         <p:cNvPr id="1" name=""/>
@@ -2989,14 +4180,34 @@
       </p:grpSpPr>
       <p:sp>
         <p:nvSpPr>
-          <p:cNvPr id="2" name="Text 0"/>
-          <p:cNvSpPr/>
-          <p:nvPr/>
-        </p:nvSpPr>
-        <p:spPr>
-          <a:xfrm>
-            <a:off x="457200" y="320040"/>
-            <a:ext cx="8229600" cy="731520"/>
+          <p:cNvPr id="2" name="Shape 0"/>
+          <p:cNvSpPr/>
+          <p:nvPr/>
+        </p:nvSpPr>
+        <p:spPr>
+          <a:xfrm>
+            <a:off x="411480" y="402336"/>
+            <a:ext cx="82296" cy="329184"/>
+          </a:xfrm>
+          <a:prstGeom prst="rect">
+            <a:avLst/>
+          </a:prstGeom>
+          <a:solidFill>
+            <a:srgbClr val="B45309"/>
+          </a:solidFill>
+          <a:ln/>
+        </p:spPr>
+      </p:sp>
+      <p:sp>
+        <p:nvSpPr>
+          <p:cNvPr id="3" name="Text 1"/>
+          <p:cNvSpPr/>
+          <p:nvPr/>
+        </p:nvSpPr>
+        <p:spPr>
+          <a:xfrm>
+            <a:off x="566928" y="292608"/>
+            <a:ext cx="8138160" cy="548640"/>
           </a:xfrm>
           <a:prstGeom prst="rect">
             <a:avLst/>
@@ -3012,27 +4223,92 @@
               <a:buNone/>
             </a:pPr>
             <a:r>
-              <a:rPr lang="en-US" sz="2400" b="1" dirty="0">
-                <a:solidFill>
-                  <a:srgbClr val="B45309"/>
-                </a:solidFill>
-              </a:rPr>
-              <a:t>Prerequisites</a:t>
-            </a:r>
-            <a:endParaRPr lang="en-US" sz="2400" dirty="0"/>
-          </a:p>
-        </p:txBody>
-      </p:sp>
-      <p:sp>
-        <p:nvSpPr>
-          <p:cNvPr id="3" name="Text 1"/>
-          <p:cNvSpPr/>
-          <p:nvPr/>
-        </p:nvSpPr>
-        <p:spPr>
-          <a:xfrm>
-            <a:off x="640080" y="1188720"/>
-            <a:ext cx="7863840" cy="3291840"/>
+              <a:rPr lang="en-US" sz="2100" b="1" dirty="0">
+                <a:solidFill>
+                  <a:srgbClr val="1C1917"/>
+                </a:solidFill>
+                <a:latin typeface="Arial" pitchFamily="34" charset="0"/>
+                <a:ea typeface="Arial" pitchFamily="34" charset="-122"/>
+                <a:cs typeface="Arial" pitchFamily="34" charset="-120"/>
+              </a:rPr>
+              <a:t>Concepts and vocabulary</a:t>
+            </a:r>
+            <a:endParaRPr lang="en-US" sz="2100" dirty="0"/>
+          </a:p>
+        </p:txBody>
+      </p:sp>
+      <p:sp>
+        <p:nvSpPr>
+          <p:cNvPr id="4" name="Shape 2"/>
+          <p:cNvSpPr/>
+          <p:nvPr/>
+        </p:nvSpPr>
+        <p:spPr>
+          <a:xfrm>
+            <a:off x="411480" y="960120"/>
+            <a:ext cx="8321040" cy="0"/>
+          </a:xfrm>
+          <a:prstGeom prst="line">
+            <a:avLst/>
+          </a:prstGeom>
+          <a:noFill/>
+          <a:ln w="12700">
+            <a:solidFill>
+              <a:srgbClr val="E7E5E4"/>
+            </a:solidFill>
+            <a:prstDash val="solid"/>
+          </a:ln>
+        </p:spPr>
+      </p:sp>
+      <p:sp>
+        <p:nvSpPr>
+          <p:cNvPr id="5" name="Text 3"/>
+          <p:cNvSpPr/>
+          <p:nvPr/>
+        </p:nvSpPr>
+        <p:spPr>
+          <a:xfrm>
+            <a:off x="411480" y="4864608"/>
+            <a:ext cx="8321040" cy="237744"/>
+          </a:xfrm>
+          <a:prstGeom prst="rect">
+            <a:avLst/>
+          </a:prstGeom>
+          <a:noFill/>
+          <a:ln/>
+        </p:spPr>
+        <p:txBody>
+          <a:bodyPr wrap="square" rtlCol="0" anchor="ctr"/>
+          <a:lstStyle/>
+          <a:p>
+            <a:pPr indent="0" marL="0">
+              <a:buNone/>
+            </a:pPr>
+            <a:r>
+              <a:rPr lang="en-US" sz="750" dirty="0">
+                <a:solidFill>
+                  <a:srgbClr val="AAAAAA"/>
+                </a:solidFill>
+                <a:latin typeface="Arial" pitchFamily="34" charset="0"/>
+                <a:ea typeface="Arial" pitchFamily="34" charset="-122"/>
+                <a:cs typeface="Arial" pitchFamily="34" charset="-120"/>
+              </a:rPr>
+              <a:t>Lesson Forge Pro (owner) — This content is educational material only and does not constitute financial, investment, or trading advice.</a:t>
+            </a:r>
+            <a:endParaRPr lang="en-US" sz="750" dirty="0"/>
+          </a:p>
+        </p:txBody>
+      </p:sp>
+      <p:sp>
+        <p:nvSpPr>
+          <p:cNvPr id="6" name="Text 4"/>
+          <p:cNvSpPr/>
+          <p:nvPr/>
+        </p:nvSpPr>
+        <p:spPr>
+          <a:xfrm>
+            <a:off x="731520" y="1188720"/>
+            <a:ext cx="7680960" cy="3383280"/>
           </a:xfrm>
           <a:prstGeom prst="rect">
             <a:avLst/>
@@ -3044,55 +4320,46 @@
           <a:bodyPr wrap="square" rtlCol="0" anchor="t"/>
           <a:lstStyle/>
           <a:p>
-            <a:pPr marL="342900" indent="-342900">
+            <a:pPr marL="152400" indent="-152400">
+              <a:spcAft>
+                <a:spcPts val="800"/>
+              </a:spcAft>
               <a:buSzPct val="100000"/>
               <a:buChar char="•"/>
             </a:pPr>
             <a:r>
-              <a:rPr lang="en-US" sz="1600" dirty="0">
-                <a:solidFill>
-                  <a:srgbClr val="333333"/>
-                </a:solidFill>
-              </a:rPr>
-              <a:t>Model Audit and Risk Management</a:t>
-            </a:r>
-            <a:endParaRPr lang="en-US" sz="1600" dirty="0"/>
-          </a:p>
-        </p:txBody>
-      </p:sp>
-      <p:sp>
-        <p:nvSpPr>
-          <p:cNvPr id="4" name="Text 2"/>
-          <p:cNvSpPr/>
-          <p:nvPr/>
-        </p:nvSpPr>
-        <p:spPr>
-          <a:xfrm>
-            <a:off x="457200" y="4709160"/>
-            <a:ext cx="8229600" cy="320040"/>
-          </a:xfrm>
-          <a:prstGeom prst="rect">
-            <a:avLst/>
-          </a:prstGeom>
-          <a:noFill/>
-          <a:ln/>
-        </p:spPr>
-        <p:txBody>
-          <a:bodyPr wrap="square" rtlCol="0" anchor="ctr"/>
-          <a:lstStyle/>
-          <a:p>
-            <a:pPr indent="0" marL="0">
-              <a:buNone/>
-            </a:pPr>
-            <a:r>
-              <a:rPr lang="en-US" sz="800" dirty="0">
-                <a:solidFill>
-                  <a:srgbClr val="AAAAAA"/>
-                </a:solidFill>
-              </a:rPr>
-              <a:t>Lesson Forge Pro (owner) — This content is educational material only and does not constitute financial, investment, or trading advice.</a:t>
-            </a:r>
-            <a:endParaRPr lang="en-US" sz="800" dirty="0"/>
+              <a:rPr lang="en-US" sz="1500" dirty="0">
+                <a:solidFill>
+                  <a:srgbClr val="1C1917"/>
+                </a:solidFill>
+                <a:latin typeface="Arial" pitchFamily="34" charset="0"/>
+                <a:ea typeface="Arial" pitchFamily="34" charset="-122"/>
+                <a:cs typeface="Arial" pitchFamily="34" charset="-120"/>
+              </a:rPr>
+              <a:t>Financial modeling sits at the intersection of accounting, finance, and analytical reasoning. Before you can b</a:t>
+            </a:r>
+            <a:endParaRPr lang="en-US" sz="1500" dirty="0"/>
+          </a:p>
+          <a:p>
+            <a:pPr marL="152400" indent="-152400">
+              <a:spcAft>
+                <a:spcPts val="800"/>
+              </a:spcAft>
+              <a:buSzPct val="100000"/>
+              <a:buChar char="•"/>
+            </a:pPr>
+            <a:r>
+              <a:rPr lang="en-US" sz="1500" dirty="0">
+                <a:solidFill>
+                  <a:srgbClr val="1C1917"/>
+                </a:solidFill>
+                <a:latin typeface="Arial" pitchFamily="34" charset="0"/>
+                <a:ea typeface="Arial" pitchFamily="34" charset="-122"/>
+                <a:cs typeface="Arial" pitchFamily="34" charset="-120"/>
+              </a:rPr>
+              <a:t>---</a:t>
+            </a:r>
+            <a:endParaRPr lang="en-US" sz="1500" dirty="0"/>
           </a:p>
         </p:txBody>
       </p:sp>
@@ -3104,9 +4371,16 @@
 </p:sld>
 </file>
 
-<file path=ppt/slides/slide6.xml><?xml version="1.0" encoding="utf-8"?>
+<file path=ppt/slides/slide4.xml><?xml version="1.0" encoding="utf-8"?>
 <p:sld xmlns:a="http://schemas.openxmlformats.org/drawingml/2006/main" xmlns:r="http://schemas.openxmlformats.org/officeDocument/2006/relationships" xmlns:p="http://schemas.openxmlformats.org/presentationml/2006/main">
-  <p:cSld name="Slide 6">
+  <p:cSld name="Slide 4">
+    <p:bg>
+      <p:bgPr>
+        <a:solidFill>
+          <a:srgbClr val="FFFFFF"/>
+        </a:solidFill>
+      </p:bgPr>
+    </p:bg>
     <p:spTree>
       <p:nvGrpSpPr>
         <p:cNvPr id="1" name=""/>
@@ -3123,14 +4397,34 @@
       </p:grpSpPr>
       <p:sp>
         <p:nvSpPr>
-          <p:cNvPr id="2" name="Text 0"/>
-          <p:cNvSpPr/>
-          <p:nvPr/>
-        </p:nvSpPr>
-        <p:spPr>
-          <a:xfrm>
-            <a:off x="457200" y="320040"/>
-            <a:ext cx="8229600" cy="731520"/>
+          <p:cNvPr id="2" name="Shape 0"/>
+          <p:cNvSpPr/>
+          <p:nvPr/>
+        </p:nvSpPr>
+        <p:spPr>
+          <a:xfrm>
+            <a:off x="411480" y="402336"/>
+            <a:ext cx="82296" cy="329184"/>
+          </a:xfrm>
+          <a:prstGeom prst="rect">
+            <a:avLst/>
+          </a:prstGeom>
+          <a:solidFill>
+            <a:srgbClr val="B45309"/>
+          </a:solidFill>
+          <a:ln/>
+        </p:spPr>
+      </p:sp>
+      <p:sp>
+        <p:nvSpPr>
+          <p:cNvPr id="3" name="Text 1"/>
+          <p:cNvSpPr/>
+          <p:nvPr/>
+        </p:nvSpPr>
+        <p:spPr>
+          <a:xfrm>
+            <a:off x="566928" y="292608"/>
+            <a:ext cx="8138160" cy="548640"/>
           </a:xfrm>
           <a:prstGeom prst="rect">
             <a:avLst/>
@@ -3146,27 +4440,92 @@
               <a:buNone/>
             </a:pPr>
             <a:r>
-              <a:rPr lang="en-US" sz="2400" b="1" dirty="0">
-                <a:solidFill>
-                  <a:srgbClr val="B45309"/>
-                </a:solidFill>
-              </a:rPr>
-              <a:t>Agenda</a:t>
-            </a:r>
-            <a:endParaRPr lang="en-US" sz="2400" dirty="0"/>
-          </a:p>
-        </p:txBody>
-      </p:sp>
-      <p:sp>
-        <p:nvSpPr>
-          <p:cNvPr id="3" name="Text 1"/>
-          <p:cNvSpPr/>
-          <p:nvPr/>
-        </p:nvSpPr>
-        <p:spPr>
-          <a:xfrm>
-            <a:off x="640080" y="1188720"/>
-            <a:ext cx="7863840" cy="3291840"/>
+              <a:rPr lang="en-US" sz="2100" b="1" dirty="0">
+                <a:solidFill>
+                  <a:srgbClr val="1C1917"/>
+                </a:solidFill>
+                <a:latin typeface="Arial" pitchFamily="34" charset="0"/>
+                <a:ea typeface="Arial" pitchFamily="34" charset="-122"/>
+                <a:cs typeface="Arial" pitchFamily="34" charset="-120"/>
+              </a:rPr>
+              <a:t>Core Definitions</a:t>
+            </a:r>
+            <a:endParaRPr lang="en-US" sz="2100" dirty="0"/>
+          </a:p>
+        </p:txBody>
+      </p:sp>
+      <p:sp>
+        <p:nvSpPr>
+          <p:cNvPr id="4" name="Shape 2"/>
+          <p:cNvSpPr/>
+          <p:nvPr/>
+        </p:nvSpPr>
+        <p:spPr>
+          <a:xfrm>
+            <a:off x="411480" y="960120"/>
+            <a:ext cx="8321040" cy="0"/>
+          </a:xfrm>
+          <a:prstGeom prst="line">
+            <a:avLst/>
+          </a:prstGeom>
+          <a:noFill/>
+          <a:ln w="12700">
+            <a:solidFill>
+              <a:srgbClr val="E7E5E4"/>
+            </a:solidFill>
+            <a:prstDash val="solid"/>
+          </a:ln>
+        </p:spPr>
+      </p:sp>
+      <p:sp>
+        <p:nvSpPr>
+          <p:cNvPr id="5" name="Text 3"/>
+          <p:cNvSpPr/>
+          <p:nvPr/>
+        </p:nvSpPr>
+        <p:spPr>
+          <a:xfrm>
+            <a:off x="411480" y="4864608"/>
+            <a:ext cx="8321040" cy="237744"/>
+          </a:xfrm>
+          <a:prstGeom prst="rect">
+            <a:avLst/>
+          </a:prstGeom>
+          <a:noFill/>
+          <a:ln/>
+        </p:spPr>
+        <p:txBody>
+          <a:bodyPr wrap="square" rtlCol="0" anchor="ctr"/>
+          <a:lstStyle/>
+          <a:p>
+            <a:pPr indent="0" marL="0">
+              <a:buNone/>
+            </a:pPr>
+            <a:r>
+              <a:rPr lang="en-US" sz="750" dirty="0">
+                <a:solidFill>
+                  <a:srgbClr val="AAAAAA"/>
+                </a:solidFill>
+                <a:latin typeface="Arial" pitchFamily="34" charset="0"/>
+                <a:ea typeface="Arial" pitchFamily="34" charset="-122"/>
+                <a:cs typeface="Arial" pitchFamily="34" charset="-120"/>
+              </a:rPr>
+              <a:t>Lesson Forge Pro (owner) — This content is educational material only and does not constitute financial, investment, or trading advice.</a:t>
+            </a:r>
+            <a:endParaRPr lang="en-US" sz="750" dirty="0"/>
+          </a:p>
+        </p:txBody>
+      </p:sp>
+      <p:sp>
+        <p:nvSpPr>
+          <p:cNvPr id="6" name="Text 4"/>
+          <p:cNvSpPr/>
+          <p:nvPr/>
+        </p:nvSpPr>
+        <p:spPr>
+          <a:xfrm>
+            <a:off x="731520" y="1188720"/>
+            <a:ext cx="7680960" cy="3383280"/>
           </a:xfrm>
           <a:prstGeom prst="rect">
             <a:avLst/>
@@ -3178,130 +4537,88 @@
           <a:bodyPr wrap="square" rtlCol="0" anchor="t"/>
           <a:lstStyle/>
           <a:p>
-            <a:pPr marL="342900" indent="-342900">
+            <a:pPr marL="152400" indent="-152400">
+              <a:spcAft>
+                <a:spcPts val="800"/>
+              </a:spcAft>
               <a:buSzPct val="100000"/>
               <a:buChar char="•"/>
             </a:pPr>
             <a:r>
-              <a:rPr lang="en-US" sz="1600" dirty="0">
-                <a:solidFill>
-                  <a:srgbClr val="333333"/>
-                </a:solidFill>
-              </a:rPr>
-              <a:t>1. Introduction and Review (10 minutes)</a:t>
-            </a:r>
-            <a:endParaRPr lang="en-US" sz="1600" dirty="0"/>
-          </a:p>
-          <a:p>
-            <a:pPr marL="342900" indent="-342900">
+              <a:rPr lang="en-US" sz="1500" dirty="0">
+                <a:solidFill>
+                  <a:srgbClr val="1C1917"/>
+                </a:solidFill>
+                <a:latin typeface="Arial" pitchFamily="34" charset="0"/>
+                <a:ea typeface="Arial" pitchFamily="34" charset="-122"/>
+                <a:cs typeface="Arial" pitchFamily="34" charset="-120"/>
+              </a:rPr>
+              <a:t>A financial model is a structured, quantitative representation of a business, project, or transaction, built t</a:t>
+            </a:r>
+            <a:endParaRPr lang="en-US" sz="1500" dirty="0"/>
+          </a:p>
+          <a:p>
+            <a:pPr marL="152400" indent="-152400">
+              <a:spcAft>
+                <a:spcPts val="800"/>
+              </a:spcAft>
               <a:buSzPct val="100000"/>
               <a:buChar char="•"/>
             </a:pPr>
             <a:r>
-              <a:rPr lang="en-US" sz="1600" dirty="0">
-                <a:solidFill>
-                  <a:srgbClr val="333333"/>
-                </a:solidFill>
-              </a:rPr>
-              <a:t>2. Case Studies (40 minutes)</a:t>
-            </a:r>
-            <a:endParaRPr lang="en-US" sz="1600" dirty="0"/>
-          </a:p>
-          <a:p>
-            <a:pPr marL="342900" indent="-342900">
+              <a:rPr lang="en-US" sz="1500" dirty="0">
+                <a:solidFill>
+                  <a:srgbClr val="1C1917"/>
+                </a:solidFill>
+                <a:latin typeface="Arial" pitchFamily="34" charset="0"/>
+                <a:ea typeface="Arial" pitchFamily="34" charset="-122"/>
+                <a:cs typeface="Arial" pitchFamily="34" charset="-120"/>
+              </a:rPr>
+              <a:t>Key vocabulary you must own:</a:t>
+            </a:r>
+            <a:endParaRPr lang="en-US" sz="1500" dirty="0"/>
+          </a:p>
+          <a:p>
+            <a:pPr marL="152400" indent="-152400">
+              <a:spcAft>
+                <a:spcPts val="800"/>
+              </a:spcAft>
               <a:buSzPct val="100000"/>
               <a:buChar char="•"/>
             </a:pPr>
             <a:r>
-              <a:rPr lang="en-US" sz="1600" dirty="0">
-                <a:solidFill>
-                  <a:srgbClr val="333333"/>
-                </a:solidFill>
-              </a:rPr>
-              <a:t>3. Final Project Presentations (60 minutes)</a:t>
-            </a:r>
-            <a:endParaRPr lang="en-US" sz="1600" dirty="0"/>
-          </a:p>
-          <a:p>
-            <a:pPr marL="342900" indent="-342900">
+              <a:rPr lang="en-US" sz="1500" dirty="0">
+                <a:solidFill>
+                  <a:srgbClr val="1C1917"/>
+                </a:solidFill>
+                <a:latin typeface="Arial" pitchFamily="34" charset="0"/>
+                <a:ea typeface="Arial" pitchFamily="34" charset="-122"/>
+                <a:cs typeface="Arial" pitchFamily="34" charset="-120"/>
+              </a:rPr>
+              <a:t>Assumption — an input value or relationship accepted as true for modeling purposes (e.g., revenue growth rate </a:t>
+            </a:r>
+            <a:endParaRPr lang="en-US" sz="1500" dirty="0"/>
+          </a:p>
+          <a:p>
+            <a:pPr marL="152400" indent="-152400">
+              <a:spcAft>
+                <a:spcPts val="800"/>
+              </a:spcAft>
               <a:buSzPct val="100000"/>
               <a:buChar char="•"/>
             </a:pPr>
             <a:r>
-              <a:rPr lang="en-US" sz="1600" dirty="0">
-                <a:solidFill>
-                  <a:srgbClr val="333333"/>
-                </a:solidFill>
-              </a:rPr>
-              <a:t>4. Break and Energizer (10 minutes)</a:t>
-            </a:r>
-            <a:endParaRPr lang="en-US" sz="1600" dirty="0"/>
-          </a:p>
-          <a:p>
-            <a:pPr marL="342900" indent="-342900">
-              <a:buSzPct val="100000"/>
-              <a:buChar char="•"/>
-            </a:pPr>
-            <a:r>
-              <a:rPr lang="en-US" sz="1600" dirty="0">
-                <a:solidFill>
-                  <a:srgbClr val="333333"/>
-                </a:solidFill>
-              </a:rPr>
-              <a:t>5. Group Discussion and Feedback (50 minutes)</a:t>
-            </a:r>
-            <a:endParaRPr lang="en-US" sz="1600" dirty="0"/>
-          </a:p>
-          <a:p>
-            <a:pPr marL="342900" indent="-342900">
-              <a:buSzPct val="100000"/>
-              <a:buChar char="•"/>
-            </a:pPr>
-            <a:r>
-              <a:rPr lang="en-US" sz="1600" dirty="0">
-                <a:solidFill>
-                  <a:srgbClr val="333333"/>
-                </a:solidFill>
-              </a:rPr>
-              <a:t>6. Conclusion and Next Steps (10 minutes)</a:t>
-            </a:r>
-            <a:endParaRPr lang="en-US" sz="1600" dirty="0"/>
-          </a:p>
-        </p:txBody>
-      </p:sp>
-      <p:sp>
-        <p:nvSpPr>
-          <p:cNvPr id="4" name="Text 2"/>
-          <p:cNvSpPr/>
-          <p:nvPr/>
-        </p:nvSpPr>
-        <p:spPr>
-          <a:xfrm>
-            <a:off x="457200" y="4709160"/>
-            <a:ext cx="8229600" cy="320040"/>
-          </a:xfrm>
-          <a:prstGeom prst="rect">
-            <a:avLst/>
-          </a:prstGeom>
-          <a:noFill/>
-          <a:ln/>
-        </p:spPr>
-        <p:txBody>
-          <a:bodyPr wrap="square" rtlCol="0" anchor="ctr"/>
-          <a:lstStyle/>
-          <a:p>
-            <a:pPr indent="0" marL="0">
-              <a:buNone/>
-            </a:pPr>
-            <a:r>
-              <a:rPr lang="en-US" sz="800" dirty="0">
-                <a:solidFill>
-                  <a:srgbClr val="AAAAAA"/>
-                </a:solidFill>
-              </a:rPr>
-              <a:t>Lesson Forge Pro (owner) — This content is educational material only and does not constitute financial, investment, or trading advice.</a:t>
-            </a:r>
-            <a:endParaRPr lang="en-US" sz="800" dirty="0"/>
+              <a:rPr lang="en-US" sz="1500" dirty="0">
+                <a:solidFill>
+                  <a:srgbClr val="1C1917"/>
+                </a:solidFill>
+                <a:latin typeface="Arial" pitchFamily="34" charset="0"/>
+                <a:ea typeface="Arial" pitchFamily="34" charset="-122"/>
+                <a:cs typeface="Arial" pitchFamily="34" charset="-120"/>
+              </a:rPr>
+              <a:t>Driver — a variable whose change meaningfully moves an output (e.g., unit volume is a revenue driver).</a:t>
+            </a:r>
+            <a:endParaRPr lang="en-US" sz="1500" dirty="0"/>
           </a:p>
         </p:txBody>
       </p:sp>
@@ -3313,9 +4630,16 @@
 </p:sld>
 </file>
 
-<file path=ppt/slides/slide7.xml><?xml version="1.0" encoding="utf-8"?>
+<file path=ppt/slides/slide5.xml><?xml version="1.0" encoding="utf-8"?>
 <p:sld xmlns:a="http://schemas.openxmlformats.org/drawingml/2006/main" xmlns:r="http://schemas.openxmlformats.org/officeDocument/2006/relationships" xmlns:p="http://schemas.openxmlformats.org/presentationml/2006/main">
-  <p:cSld name="Slide 7">
+  <p:cSld name="Slide 5">
+    <p:bg>
+      <p:bgPr>
+        <a:solidFill>
+          <a:srgbClr val="FFFFFF"/>
+        </a:solidFill>
+      </p:bgPr>
+    </p:bg>
     <p:spTree>
       <p:nvGrpSpPr>
         <p:cNvPr id="1" name=""/>
@@ -3332,14 +4656,34 @@
       </p:grpSpPr>
       <p:sp>
         <p:nvSpPr>
-          <p:cNvPr id="2" name="Text 0"/>
-          <p:cNvSpPr/>
-          <p:nvPr/>
-        </p:nvSpPr>
-        <p:spPr>
-          <a:xfrm>
-            <a:off x="457200" y="320040"/>
-            <a:ext cx="8229600" cy="731520"/>
+          <p:cNvPr id="2" name="Shape 0"/>
+          <p:cNvSpPr/>
+          <p:nvPr/>
+        </p:nvSpPr>
+        <p:spPr>
+          <a:xfrm>
+            <a:off x="411480" y="402336"/>
+            <a:ext cx="82296" cy="329184"/>
+          </a:xfrm>
+          <a:prstGeom prst="rect">
+            <a:avLst/>
+          </a:prstGeom>
+          <a:solidFill>
+            <a:srgbClr val="B45309"/>
+          </a:solidFill>
+          <a:ln/>
+        </p:spPr>
+      </p:sp>
+      <p:sp>
+        <p:nvSpPr>
+          <p:cNvPr id="3" name="Text 1"/>
+          <p:cNvSpPr/>
+          <p:nvPr/>
+        </p:nvSpPr>
+        <p:spPr>
+          <a:xfrm>
+            <a:off x="566928" y="292608"/>
+            <a:ext cx="8138160" cy="548640"/>
           </a:xfrm>
           <a:prstGeom prst="rect">
             <a:avLst/>
@@ -3355,27 +4699,92 @@
               <a:buNone/>
             </a:pPr>
             <a:r>
-              <a:rPr lang="en-US" sz="2400" b="1" dirty="0">
-                <a:solidFill>
-                  <a:srgbClr val="B45309"/>
-                </a:solidFill>
-              </a:rPr>
-              <a:t>Introduction and Review (10 minutes)</a:t>
-            </a:r>
-            <a:endParaRPr lang="en-US" sz="2400" dirty="0"/>
-          </a:p>
-        </p:txBody>
-      </p:sp>
-      <p:sp>
-        <p:nvSpPr>
-          <p:cNvPr id="3" name="Text 1"/>
-          <p:cNvSpPr/>
-          <p:nvPr/>
-        </p:nvSpPr>
-        <p:spPr>
-          <a:xfrm>
-            <a:off x="640080" y="1188720"/>
-            <a:ext cx="7863840" cy="3291840"/>
+              <a:rPr lang="en-US" sz="2100" b="1" dirty="0">
+                <a:solidFill>
+                  <a:srgbClr val="1C1917"/>
+                </a:solidFill>
+                <a:latin typeface="Arial" pitchFamily="34" charset="0"/>
+                <a:ea typeface="Arial" pitchFamily="34" charset="-122"/>
+                <a:cs typeface="Arial" pitchFamily="34" charset="-120"/>
+              </a:rPr>
+              <a:t>Where It Fits in Practice</a:t>
+            </a:r>
+            <a:endParaRPr lang="en-US" sz="2100" dirty="0"/>
+          </a:p>
+        </p:txBody>
+      </p:sp>
+      <p:sp>
+        <p:nvSpPr>
+          <p:cNvPr id="4" name="Shape 2"/>
+          <p:cNvSpPr/>
+          <p:nvPr/>
+        </p:nvSpPr>
+        <p:spPr>
+          <a:xfrm>
+            <a:off x="411480" y="960120"/>
+            <a:ext cx="8321040" cy="0"/>
+          </a:xfrm>
+          <a:prstGeom prst="line">
+            <a:avLst/>
+          </a:prstGeom>
+          <a:noFill/>
+          <a:ln w="12700">
+            <a:solidFill>
+              <a:srgbClr val="E7E5E4"/>
+            </a:solidFill>
+            <a:prstDash val="solid"/>
+          </a:ln>
+        </p:spPr>
+      </p:sp>
+      <p:sp>
+        <p:nvSpPr>
+          <p:cNvPr id="5" name="Text 3"/>
+          <p:cNvSpPr/>
+          <p:nvPr/>
+        </p:nvSpPr>
+        <p:spPr>
+          <a:xfrm>
+            <a:off x="411480" y="4864608"/>
+            <a:ext cx="8321040" cy="237744"/>
+          </a:xfrm>
+          <a:prstGeom prst="rect">
+            <a:avLst/>
+          </a:prstGeom>
+          <a:noFill/>
+          <a:ln/>
+        </p:spPr>
+        <p:txBody>
+          <a:bodyPr wrap="square" rtlCol="0" anchor="ctr"/>
+          <a:lstStyle/>
+          <a:p>
+            <a:pPr indent="0" marL="0">
+              <a:buNone/>
+            </a:pPr>
+            <a:r>
+              <a:rPr lang="en-US" sz="750" dirty="0">
+                <a:solidFill>
+                  <a:srgbClr val="AAAAAA"/>
+                </a:solidFill>
+                <a:latin typeface="Arial" pitchFamily="34" charset="0"/>
+                <a:ea typeface="Arial" pitchFamily="34" charset="-122"/>
+                <a:cs typeface="Arial" pitchFamily="34" charset="-120"/>
+              </a:rPr>
+              <a:t>Lesson Forge Pro (owner) — This content is educational material only and does not constitute financial, investment, or trading advice.</a:t>
+            </a:r>
+            <a:endParaRPr lang="en-US" sz="750" dirty="0"/>
+          </a:p>
+        </p:txBody>
+      </p:sp>
+      <p:sp>
+        <p:nvSpPr>
+          <p:cNvPr id="6" name="Text 4"/>
+          <p:cNvSpPr/>
+          <p:nvPr/>
+        </p:nvSpPr>
+        <p:spPr>
+          <a:xfrm>
+            <a:off x="731520" y="1188720"/>
+            <a:ext cx="7680960" cy="3383280"/>
           </a:xfrm>
           <a:prstGeom prst="rect">
             <a:avLst/>
@@ -3387,100 +4796,46 @@
           <a:bodyPr wrap="square" rtlCol="0" anchor="t"/>
           <a:lstStyle/>
           <a:p>
-            <a:pPr marL="342900" indent="-342900">
+            <a:pPr marL="152400" indent="-152400">
+              <a:spcAft>
+                <a:spcPts val="800"/>
+              </a:spcAft>
               <a:buSzPct val="100000"/>
               <a:buChar char="•"/>
             </a:pPr>
             <a:r>
-              <a:rPr lang="en-US" sz="1600" dirty="0">
-                <a:solidFill>
-                  <a:srgbClr val="333333"/>
-                </a:solidFill>
-              </a:rPr>
-              <a:t>Welcome students and briefly review the objectives and prerequisites for the session. Use an analogy to introduce the concept of financial modeling: "Just like </a:t>
-            </a:r>
-            <a:endParaRPr lang="en-US" sz="1600" dirty="0"/>
-          </a:p>
-          <a:p>
-            <a:pPr marL="342900" indent="-342900">
+              <a:rPr lang="en-US" sz="1500" dirty="0">
+                <a:solidFill>
+                  <a:srgbClr val="1C1917"/>
+                </a:solidFill>
+                <a:latin typeface="Arial" pitchFamily="34" charset="0"/>
+                <a:ea typeface="Arial" pitchFamily="34" charset="-122"/>
+                <a:cs typeface="Arial" pitchFamily="34" charset="-120"/>
+              </a:rPr>
+              <a:t>Financial models appear across virtually every finance function: business and project valuation, M&amp;A transacti</a:t>
+            </a:r>
+            <a:endParaRPr lang="en-US" sz="1500" dirty="0"/>
+          </a:p>
+          <a:p>
+            <a:pPr marL="152400" indent="-152400">
+              <a:spcAft>
+                <a:spcPts val="800"/>
+              </a:spcAft>
               <a:buSzPct val="100000"/>
               <a:buChar char="•"/>
             </a:pPr>
             <a:r>
-              <a:rPr lang="en-US" sz="1600" dirty="0">
-                <a:solidFill>
-                  <a:srgbClr val="333333"/>
-                </a:solidFill>
-              </a:rPr>
-              <a:t>Key points to cover:</a:t>
-            </a:r>
-            <a:endParaRPr lang="en-US" sz="1600" dirty="0"/>
-          </a:p>
-          <a:p>
-            <a:pPr marL="342900" indent="-342900">
-              <a:buSzPct val="100000"/>
-              <a:buChar char="•"/>
-            </a:pPr>
-            <a:r>
-              <a:rPr lang="en-US" sz="1600" dirty="0">
-                <a:solidFill>
-                  <a:srgbClr val="333333"/>
-                </a:solidFill>
-              </a:rPr>
-              <a:t>Recap of financial modeling concepts</a:t>
-            </a:r>
-            <a:endParaRPr lang="en-US" sz="1600" dirty="0"/>
-          </a:p>
-          <a:p>
-            <a:pPr marL="342900" indent="-342900">
-              <a:buSzPct val="100000"/>
-              <a:buChar char="•"/>
-            </a:pPr>
-            <a:r>
-              <a:rPr lang="en-US" sz="1600" dirty="0">
-                <a:solidFill>
-                  <a:srgbClr val="333333"/>
-                </a:solidFill>
-              </a:rPr>
-              <a:t>Importance of case studies and final project presentations</a:t>
-            </a:r>
-            <a:endParaRPr lang="en-US" sz="1600" dirty="0"/>
-          </a:p>
-        </p:txBody>
-      </p:sp>
-      <p:sp>
-        <p:nvSpPr>
-          <p:cNvPr id="4" name="Text 2"/>
-          <p:cNvSpPr/>
-          <p:nvPr/>
-        </p:nvSpPr>
-        <p:spPr>
-          <a:xfrm>
-            <a:off x="457200" y="4709160"/>
-            <a:ext cx="8229600" cy="320040"/>
-          </a:xfrm>
-          <a:prstGeom prst="rect">
-            <a:avLst/>
-          </a:prstGeom>
-          <a:noFill/>
-          <a:ln/>
-        </p:spPr>
-        <p:txBody>
-          <a:bodyPr wrap="square" rtlCol="0" anchor="ctr"/>
-          <a:lstStyle/>
-          <a:p>
-            <a:pPr indent="0" marL="0">
-              <a:buNone/>
-            </a:pPr>
-            <a:r>
-              <a:rPr lang="en-US" sz="800" dirty="0">
-                <a:solidFill>
-                  <a:srgbClr val="AAAAAA"/>
-                </a:solidFill>
-              </a:rPr>
-              <a:t>Lesson Forge Pro (owner) — This content is educational material only and does not constitute financial, investment, or trading advice.</a:t>
-            </a:r>
-            <a:endParaRPr lang="en-US" sz="800" dirty="0"/>
+              <a:rPr lang="en-US" sz="1500" dirty="0">
+                <a:solidFill>
+                  <a:srgbClr val="1C1917"/>
+                </a:solidFill>
+                <a:latin typeface="Arial" pitchFamily="34" charset="0"/>
+                <a:ea typeface="Arial" pitchFamily="34" charset="-122"/>
+                <a:cs typeface="Arial" pitchFamily="34" charset="-120"/>
+              </a:rPr>
+              <a:t>---</a:t>
+            </a:r>
+            <a:endParaRPr lang="en-US" sz="1500" dirty="0"/>
           </a:p>
         </p:txBody>
       </p:sp>
@@ -3492,9 +4847,16 @@
 </p:sld>
 </file>
 
-<file path=ppt/slides/slide8.xml><?xml version="1.0" encoding="utf-8"?>
+<file path=ppt/slides/slide6.xml><?xml version="1.0" encoding="utf-8"?>
 <p:sld xmlns:a="http://schemas.openxmlformats.org/drawingml/2006/main" xmlns:r="http://schemas.openxmlformats.org/officeDocument/2006/relationships" xmlns:p="http://schemas.openxmlformats.org/presentationml/2006/main">
-  <p:cSld name="Slide 8">
+  <p:cSld name="Slide 6">
+    <p:bg>
+      <p:bgPr>
+        <a:solidFill>
+          <a:srgbClr val="FFFFFF"/>
+        </a:solidFill>
+      </p:bgPr>
+    </p:bg>
     <p:spTree>
       <p:nvGrpSpPr>
         <p:cNvPr id="1" name=""/>
@@ -3511,14 +4873,34 @@
       </p:grpSpPr>
       <p:sp>
         <p:nvSpPr>
-          <p:cNvPr id="2" name="Text 0"/>
-          <p:cNvSpPr/>
-          <p:nvPr/>
-        </p:nvSpPr>
-        <p:spPr>
-          <a:xfrm>
-            <a:off x="457200" y="320040"/>
-            <a:ext cx="8229600" cy="731520"/>
+          <p:cNvPr id="2" name="Shape 0"/>
+          <p:cNvSpPr/>
+          <p:nvPr/>
+        </p:nvSpPr>
+        <p:spPr>
+          <a:xfrm>
+            <a:off x="411480" y="384048"/>
+            <a:ext cx="82296" cy="310896"/>
+          </a:xfrm>
+          <a:prstGeom prst="rect">
+            <a:avLst/>
+          </a:prstGeom>
+          <a:solidFill>
+            <a:srgbClr val="B45309"/>
+          </a:solidFill>
+          <a:ln/>
+        </p:spPr>
+      </p:sp>
+      <p:sp>
+        <p:nvSpPr>
+          <p:cNvPr id="3" name="Text 1"/>
+          <p:cNvSpPr/>
+          <p:nvPr/>
+        </p:nvSpPr>
+        <p:spPr>
+          <a:xfrm>
+            <a:off x="566928" y="292608"/>
+            <a:ext cx="8138160" cy="502920"/>
           </a:xfrm>
           <a:prstGeom prst="rect">
             <a:avLst/>
@@ -3534,216 +4916,17 @@
               <a:buNone/>
             </a:pPr>
             <a:r>
-              <a:rPr lang="en-US" sz="2400" b="1" dirty="0">
-                <a:solidFill>
-                  <a:srgbClr val="B45309"/>
-                </a:solidFill>
-              </a:rPr>
-              <a:t>Case Studies (40 minutes)</a:t>
-            </a:r>
-            <a:endParaRPr lang="en-US" sz="2400" dirty="0"/>
-          </a:p>
-        </p:txBody>
-      </p:sp>
-      <p:sp>
-        <p:nvSpPr>
-          <p:cNvPr id="3" name="Text 1"/>
-          <p:cNvSpPr/>
-          <p:nvPr/>
-        </p:nvSpPr>
-        <p:spPr>
-          <a:xfrm>
-            <a:off x="640080" y="1188720"/>
-            <a:ext cx="7863840" cy="3291840"/>
-          </a:xfrm>
-          <a:prstGeom prst="rect">
-            <a:avLst/>
-          </a:prstGeom>
-          <a:noFill/>
-          <a:ln/>
-        </p:spPr>
-        <p:txBody>
-          <a:bodyPr wrap="square" rtlCol="0" anchor="t"/>
-          <a:lstStyle/>
-          <a:p>
-            <a:pPr marL="342900" indent="-342900">
-              <a:buSzPct val="100000"/>
-              <a:buChar char="•"/>
-            </a:pPr>
-            <a:r>
-              <a:rPr lang="en-US" sz="1600" dirty="0">
-                <a:solidFill>
-                  <a:srgbClr val="333333"/>
-                </a:solidFill>
-              </a:rPr>
-              <a:t>Present 2-3 real-world case studies that demonstrate the application of financial modeling concepts. Use examples such as:</a:t>
-            </a:r>
-            <a:endParaRPr lang="en-US" sz="1600" dirty="0"/>
-          </a:p>
-          <a:p>
-            <a:pPr marL="342900" indent="-342900">
-              <a:buSzPct val="100000"/>
-              <a:buChar char="•"/>
-            </a:pPr>
-            <a:r>
-              <a:rPr lang="en-US" sz="1600" dirty="0">
-                <a:solidFill>
-                  <a:srgbClr val="333333"/>
-                </a:solidFill>
-              </a:rPr>
-              <a:t>Business valuation using discounted cash flow</a:t>
-            </a:r>
-            <a:endParaRPr lang="en-US" sz="1600" dirty="0"/>
-          </a:p>
-          <a:p>
-            <a:pPr marL="342900" indent="-342900">
-              <a:buSzPct val="100000"/>
-              <a:buChar char="•"/>
-            </a:pPr>
-            <a:r>
-              <a:rPr lang="en-US" sz="1600" dirty="0">
-                <a:solidFill>
-                  <a:srgbClr val="333333"/>
-                </a:solidFill>
-              </a:rPr>
-              <a:t>Scenario planning for a company's expansion</a:t>
-            </a:r>
-            <a:endParaRPr lang="en-US" sz="1600" dirty="0"/>
-          </a:p>
-          <a:p>
-            <a:pPr marL="342900" indent="-342900">
-              <a:buSzPct val="100000"/>
-              <a:buChar char="•"/>
-            </a:pPr>
-            <a:r>
-              <a:rPr lang="en-US" sz="1600" dirty="0">
-                <a:solidFill>
-                  <a:srgbClr val="333333"/>
-                </a:solidFill>
-              </a:rPr>
-              <a:t>Use an analogy to explain the concept of scenario planning: "Just like a GPS navigation system provides different routes to a destination, scenario planning pro</a:t>
-            </a:r>
-            <a:endParaRPr lang="en-US" sz="1600" dirty="0"/>
-          </a:p>
-          <a:p>
-            <a:pPr marL="342900" indent="-342900">
-              <a:buSzPct val="100000"/>
-              <a:buChar char="•"/>
-            </a:pPr>
-            <a:r>
-              <a:rPr lang="en-US" sz="1600" dirty="0">
-                <a:solidFill>
-                  <a:srgbClr val="333333"/>
-                </a:solidFill>
-              </a:rPr>
-              <a:t>Key points to cover:</a:t>
-            </a:r>
-            <a:endParaRPr lang="en-US" sz="1600" dirty="0"/>
-          </a:p>
-          <a:p>
-            <a:pPr marL="342900" indent="-342900">
-              <a:buSzPct val="100000"/>
-              <a:buChar char="•"/>
-            </a:pPr>
-            <a:r>
-              <a:rPr lang="en-US" sz="1600" dirty="0">
-                <a:solidFill>
-                  <a:srgbClr val="333333"/>
-                </a:solidFill>
-              </a:rPr>
-              <a:t>Application of financial modeling concepts to real-world scenarios</a:t>
-            </a:r>
-            <a:endParaRPr lang="en-US" sz="1600" dirty="0"/>
-          </a:p>
-          <a:p>
-            <a:pPr marL="342900" indent="-342900">
-              <a:buSzPct val="100000"/>
-              <a:buChar char="•"/>
-            </a:pPr>
-            <a:r>
-              <a:rPr lang="en-US" sz="1600" dirty="0">
-                <a:solidFill>
-                  <a:srgbClr val="333333"/>
-                </a:solidFill>
-              </a:rPr>
-              <a:t>Importance of considering multiple scenarios and uncertainties</a:t>
-            </a:r>
-            <a:endParaRPr lang="en-US" sz="1600" dirty="0"/>
-          </a:p>
-          <a:p>
-            <a:pPr marL="342900" indent="-342900">
-              <a:buSzPct val="100000"/>
-              <a:buChar char="•"/>
-            </a:pPr>
-            <a:r>
-              <a:rPr lang="en-US" sz="1600" dirty="0">
-                <a:solidFill>
-                  <a:srgbClr val="333333"/>
-                </a:solidFill>
-              </a:rPr>
-              <a:t>Anticipated learner questions:</a:t>
-            </a:r>
-            <a:endParaRPr lang="en-US" sz="1600" dirty="0"/>
-          </a:p>
-          <a:p>
-            <a:pPr marL="342900" indent="-342900">
-              <a:buSzPct val="100000"/>
-              <a:buChar char="•"/>
-            </a:pPr>
-            <a:r>
-              <a:rPr lang="en-US" sz="1600" dirty="0">
-                <a:solidFill>
-                  <a:srgbClr val="333333"/>
-                </a:solidFill>
-              </a:rPr>
-              <a:t>How do we handle uncertainty in financial modeling?</a:t>
-            </a:r>
-            <a:endParaRPr lang="en-US" sz="1600" dirty="0"/>
-          </a:p>
-          <a:p>
-            <a:pPr marL="342900" indent="-342900">
-              <a:buSzPct val="100000"/>
-              <a:buChar char="•"/>
-            </a:pPr>
-            <a:r>
-              <a:rPr lang="en-US" sz="1600" dirty="0">
-                <a:solidFill>
-                  <a:srgbClr val="333333"/>
-                </a:solidFill>
-              </a:rPr>
-              <a:t>What are the limitations of financial modeling in real-world scenarios?</a:t>
-            </a:r>
-            <a:endParaRPr lang="en-US" sz="1600" dirty="0"/>
-          </a:p>
-          <a:p>
-            <a:pPr marL="342900" indent="-342900">
-              <a:buSzPct val="100000"/>
-              <a:buChar char="•"/>
-            </a:pPr>
-            <a:r>
-              <a:rPr lang="en-US" sz="1600" dirty="0">
-                <a:solidFill>
-                  <a:srgbClr val="333333"/>
-                </a:solidFill>
-              </a:rPr>
-              <a:t>We handle uncertainty by using probability distributions and sensitivity analysis.</a:t>
-            </a:r>
-            <a:endParaRPr lang="en-US" sz="1600" dirty="0"/>
-          </a:p>
-          <a:p>
-            <a:pPr marL="342900" indent="-342900">
-              <a:buSzPct val="100000"/>
-              <a:buChar char="•"/>
-            </a:pPr>
-            <a:r>
-              <a:rPr lang="en-US" sz="1600" dirty="0">
-                <a:solidFill>
-                  <a:srgbClr val="333333"/>
-                </a:solidFill>
-              </a:rPr>
-              <a:t>Financial modeling has limitations, such as assumptions and data quality, but it provides a framework for making informed decisions.</a:t>
-            </a:r>
-            <a:endParaRPr lang="en-US" sz="1600" dirty="0"/>
+              <a:rPr lang="en-US" sz="2000" b="1" dirty="0">
+                <a:solidFill>
+                  <a:srgbClr val="1C1917"/>
+                </a:solidFill>
+                <a:latin typeface="Arial" pitchFamily="34" charset="0"/>
+                <a:ea typeface="Arial" pitchFamily="34" charset="-122"/>
+                <a:cs typeface="Arial" pitchFamily="34" charset="-120"/>
+              </a:rPr>
+              <a:t>DCF Model Standard Procedure</a:t>
+            </a:r>
+            <a:endParaRPr lang="en-US" sz="2000" dirty="0"/>
           </a:p>
         </p:txBody>
       </p:sp>
@@ -3755,8 +4938,8 @@
         </p:nvSpPr>
         <p:spPr>
           <a:xfrm>
-            <a:off x="457200" y="4709160"/>
-            <a:ext cx="8229600" cy="320040"/>
+            <a:off x="566928" y="4681728"/>
+            <a:ext cx="8138160" cy="320040"/>
           </a:xfrm>
           <a:prstGeom prst="rect">
             <a:avLst/>
@@ -3772,14 +4955,1032 @@
               <a:buNone/>
             </a:pPr>
             <a:r>
-              <a:rPr lang="en-US" sz="800" dirty="0">
+              <a:rPr lang="en-US" sz="1000" i="1" dirty="0">
+                <a:solidFill>
+                  <a:srgbClr val="78716C"/>
+                </a:solidFill>
+                <a:latin typeface="Arial" pitchFamily="34" charset="0"/>
+                <a:ea typeface="Arial" pitchFamily="34" charset="-122"/>
+                <a:cs typeface="Arial" pitchFamily="34" charset="-120"/>
+              </a:rPr>
+              <a:t>Follow steps in order; each output feeds the next calculation layer</a:t>
+            </a:r>
+            <a:endParaRPr lang="en-US" sz="1000" dirty="0"/>
+          </a:p>
+        </p:txBody>
+      </p:sp>
+      <p:sp>
+        <p:nvSpPr>
+          <p:cNvPr id="5" name="Text 3"/>
+          <p:cNvSpPr/>
+          <p:nvPr/>
+        </p:nvSpPr>
+        <p:spPr>
+          <a:xfrm>
+            <a:off x="411480" y="4919472"/>
+            <a:ext cx="8321040" cy="219456"/>
+          </a:xfrm>
+          <a:prstGeom prst="rect">
+            <a:avLst/>
+          </a:prstGeom>
+          <a:noFill/>
+          <a:ln/>
+        </p:spPr>
+        <p:txBody>
+          <a:bodyPr wrap="square" rtlCol="0" anchor="ctr"/>
+          <a:lstStyle/>
+          <a:p>
+            <a:pPr indent="0" marL="0">
+              <a:buNone/>
+            </a:pPr>
+            <a:r>
+              <a:rPr lang="en-US" sz="750" dirty="0">
                 <a:solidFill>
                   <a:srgbClr val="AAAAAA"/>
                 </a:solidFill>
+                <a:latin typeface="Arial" pitchFamily="34" charset="0"/>
+                <a:ea typeface="Arial" pitchFamily="34" charset="-122"/>
+                <a:cs typeface="Arial" pitchFamily="34" charset="-120"/>
               </a:rPr>
               <a:t>Lesson Forge Pro (owner) — This content is educational material only and does not constitute financial, investment, or trading advice.</a:t>
             </a:r>
-            <a:endParaRPr lang="en-US" sz="800" dirty="0"/>
+            <a:endParaRPr lang="en-US" sz="750" dirty="0"/>
+          </a:p>
+        </p:txBody>
+      </p:sp>
+      <p:sp>
+        <p:nvSpPr>
+          <p:cNvPr id="6" name="Shape 4"/>
+          <p:cNvSpPr/>
+          <p:nvPr/>
+        </p:nvSpPr>
+        <p:spPr>
+          <a:xfrm>
+            <a:off x="411480" y="1463040"/>
+            <a:ext cx="2011680" cy="960120"/>
+          </a:xfrm>
+          <a:prstGeom prst="roundRect">
+            <a:avLst>
+              <a:gd name="adj" fmla="val 7619"/>
+            </a:avLst>
+          </a:prstGeom>
+          <a:solidFill>
+            <a:srgbClr val="F5F5F4"/>
+          </a:solidFill>
+          <a:ln w="15240">
+            <a:solidFill>
+              <a:srgbClr val="B45309"/>
+            </a:solidFill>
+            <a:prstDash val="solid"/>
+          </a:ln>
+        </p:spPr>
+      </p:sp>
+      <p:sp>
+        <p:nvSpPr>
+          <p:cNvPr id="7" name="Text 5"/>
+          <p:cNvSpPr/>
+          <p:nvPr/>
+        </p:nvSpPr>
+        <p:spPr>
+          <a:xfrm>
+            <a:off x="484632" y="1536192"/>
+            <a:ext cx="310896" cy="274320"/>
+          </a:xfrm>
+          <a:prstGeom prst="rect">
+            <a:avLst/>
+          </a:prstGeom>
+          <a:solidFill>
+            <a:srgbClr val="B45309"/>
+          </a:solidFill>
+          <a:ln/>
+        </p:spPr>
+        <p:txBody>
+          <a:bodyPr wrap="square" rtlCol="0" anchor="ctr"/>
+          <a:lstStyle/>
+          <a:p>
+            <a:pPr algn="ctr" indent="0" marL="0">
+              <a:buNone/>
+            </a:pPr>
+            <a:r>
+              <a:rPr lang="en-US" sz="1000" b="1" dirty="0">
+                <a:solidFill>
+                  <a:srgbClr val="FFFFFF"/>
+                </a:solidFill>
+                <a:latin typeface="Arial" pitchFamily="34" charset="0"/>
+                <a:ea typeface="Arial" pitchFamily="34" charset="-122"/>
+                <a:cs typeface="Arial" pitchFamily="34" charset="-120"/>
+              </a:rPr>
+              <a:t>1</a:t>
+            </a:r>
+            <a:endParaRPr lang="en-US" sz="1000" dirty="0"/>
+          </a:p>
+        </p:txBody>
+      </p:sp>
+      <p:sp>
+        <p:nvSpPr>
+          <p:cNvPr id="8" name="Text 6"/>
+          <p:cNvSpPr/>
+          <p:nvPr/>
+        </p:nvSpPr>
+        <p:spPr>
+          <a:xfrm>
+            <a:off x="411480" y="1737360"/>
+            <a:ext cx="2011680" cy="384048"/>
+          </a:xfrm>
+          <a:prstGeom prst="rect">
+            <a:avLst/>
+          </a:prstGeom>
+          <a:noFill/>
+          <a:ln/>
+        </p:spPr>
+        <p:txBody>
+          <a:bodyPr wrap="square" rtlCol="0" anchor="ctr"/>
+          <a:lstStyle/>
+          <a:p>
+            <a:pPr algn="ctr" indent="0" marL="0">
+              <a:buNone/>
+            </a:pPr>
+            <a:r>
+              <a:rPr lang="en-US" sz="1200" b="1" dirty="0">
+                <a:solidFill>
+                  <a:srgbClr val="1C1917"/>
+                </a:solidFill>
+                <a:latin typeface="Arial" pitchFamily="34" charset="0"/>
+                <a:ea typeface="Arial" pitchFamily="34" charset="-122"/>
+                <a:cs typeface="Arial" pitchFamily="34" charset="-120"/>
+              </a:rPr>
+              <a:t>Document Inputs</a:t>
+            </a:r>
+            <a:endParaRPr lang="en-US" sz="1200" dirty="0"/>
+          </a:p>
+        </p:txBody>
+      </p:sp>
+      <p:sp>
+        <p:nvSpPr>
+          <p:cNvPr id="9" name="Text 7"/>
+          <p:cNvSpPr/>
+          <p:nvPr/>
+        </p:nvSpPr>
+        <p:spPr>
+          <a:xfrm>
+            <a:off x="411480" y="2084832"/>
+            <a:ext cx="2011680" cy="310896"/>
+          </a:xfrm>
+          <a:prstGeom prst="rect">
+            <a:avLst/>
+          </a:prstGeom>
+          <a:noFill/>
+          <a:ln/>
+        </p:spPr>
+        <p:txBody>
+          <a:bodyPr wrap="square" rtlCol="0" anchor="ctr"/>
+          <a:lstStyle/>
+          <a:p>
+            <a:pPr algn="ctr" indent="0" marL="0">
+              <a:buNone/>
+            </a:pPr>
+            <a:r>
+              <a:rPr lang="en-US" sz="900" dirty="0">
+                <a:solidFill>
+                  <a:srgbClr val="78716C"/>
+                </a:solidFill>
+                <a:latin typeface="Arial" pitchFamily="34" charset="0"/>
+                <a:ea typeface="Arial" pitchFamily="34" charset="-122"/>
+                <a:cs typeface="Arial" pitchFamily="34" charset="-120"/>
+              </a:rPr>
+              <a:t>Revenue, margins, WACC, growth rates</a:t>
+            </a:r>
+            <a:endParaRPr lang="en-US" sz="900" dirty="0"/>
+          </a:p>
+        </p:txBody>
+      </p:sp>
+      <p:sp>
+        <p:nvSpPr>
+          <p:cNvPr id="10" name="Shape 8"/>
+          <p:cNvSpPr/>
+          <p:nvPr/>
+        </p:nvSpPr>
+        <p:spPr>
+          <a:xfrm>
+            <a:off x="2478024" y="1842516"/>
+            <a:ext cx="301752" cy="201168"/>
+          </a:xfrm>
+          <a:prstGeom prst="rightArrow">
+            <a:avLst/>
+          </a:prstGeom>
+          <a:solidFill>
+            <a:srgbClr val="B45309"/>
+          </a:solidFill>
+          <a:ln/>
+        </p:spPr>
+      </p:sp>
+      <p:sp>
+        <p:nvSpPr>
+          <p:cNvPr id="11" name="Shape 9"/>
+          <p:cNvSpPr/>
+          <p:nvPr/>
+        </p:nvSpPr>
+        <p:spPr>
+          <a:xfrm>
+            <a:off x="2834640" y="1463040"/>
+            <a:ext cx="2011680" cy="960120"/>
+          </a:xfrm>
+          <a:prstGeom prst="roundRect">
+            <a:avLst>
+              <a:gd name="adj" fmla="val 7619"/>
+            </a:avLst>
+          </a:prstGeom>
+          <a:solidFill>
+            <a:srgbClr val="F5F5F4"/>
+          </a:solidFill>
+          <a:ln w="15240">
+            <a:solidFill>
+              <a:srgbClr val="B45309"/>
+            </a:solidFill>
+            <a:prstDash val="solid"/>
+          </a:ln>
+        </p:spPr>
+      </p:sp>
+      <p:sp>
+        <p:nvSpPr>
+          <p:cNvPr id="12" name="Text 10"/>
+          <p:cNvSpPr/>
+          <p:nvPr/>
+        </p:nvSpPr>
+        <p:spPr>
+          <a:xfrm>
+            <a:off x="2907792" y="1536192"/>
+            <a:ext cx="310896" cy="274320"/>
+          </a:xfrm>
+          <a:prstGeom prst="rect">
+            <a:avLst/>
+          </a:prstGeom>
+          <a:solidFill>
+            <a:srgbClr val="B45309"/>
+          </a:solidFill>
+          <a:ln/>
+        </p:spPr>
+        <p:txBody>
+          <a:bodyPr wrap="square" rtlCol="0" anchor="ctr"/>
+          <a:lstStyle/>
+          <a:p>
+            <a:pPr algn="ctr" indent="0" marL="0">
+              <a:buNone/>
+            </a:pPr>
+            <a:r>
+              <a:rPr lang="en-US" sz="1000" b="1" dirty="0">
+                <a:solidFill>
+                  <a:srgbClr val="FFFFFF"/>
+                </a:solidFill>
+                <a:latin typeface="Arial" pitchFamily="34" charset="0"/>
+                <a:ea typeface="Arial" pitchFamily="34" charset="-122"/>
+                <a:cs typeface="Arial" pitchFamily="34" charset="-120"/>
+              </a:rPr>
+              <a:t>2</a:t>
+            </a:r>
+            <a:endParaRPr lang="en-US" sz="1000" dirty="0"/>
+          </a:p>
+        </p:txBody>
+      </p:sp>
+      <p:sp>
+        <p:nvSpPr>
+          <p:cNvPr id="13" name="Text 11"/>
+          <p:cNvSpPr/>
+          <p:nvPr/>
+        </p:nvSpPr>
+        <p:spPr>
+          <a:xfrm>
+            <a:off x="2834640" y="1737360"/>
+            <a:ext cx="2011680" cy="384048"/>
+          </a:xfrm>
+          <a:prstGeom prst="rect">
+            <a:avLst/>
+          </a:prstGeom>
+          <a:noFill/>
+          <a:ln/>
+        </p:spPr>
+        <p:txBody>
+          <a:bodyPr wrap="square" rtlCol="0" anchor="ctr"/>
+          <a:lstStyle/>
+          <a:p>
+            <a:pPr algn="ctr" indent="0" marL="0">
+              <a:buNone/>
+            </a:pPr>
+            <a:r>
+              <a:rPr lang="en-US" sz="1200" b="1" dirty="0">
+                <a:solidFill>
+                  <a:srgbClr val="1C1917"/>
+                </a:solidFill>
+                <a:latin typeface="Arial" pitchFamily="34" charset="0"/>
+                <a:ea typeface="Arial" pitchFamily="34" charset="-122"/>
+                <a:cs typeface="Arial" pitchFamily="34" charset="-120"/>
+              </a:rPr>
+              <a:t>Build Income Statement</a:t>
+            </a:r>
+            <a:endParaRPr lang="en-US" sz="1200" dirty="0"/>
+          </a:p>
+        </p:txBody>
+      </p:sp>
+      <p:sp>
+        <p:nvSpPr>
+          <p:cNvPr id="14" name="Text 12"/>
+          <p:cNvSpPr/>
+          <p:nvPr/>
+        </p:nvSpPr>
+        <p:spPr>
+          <a:xfrm>
+            <a:off x="2834640" y="2084832"/>
+            <a:ext cx="2011680" cy="310896"/>
+          </a:xfrm>
+          <a:prstGeom prst="rect">
+            <a:avLst/>
+          </a:prstGeom>
+          <a:noFill/>
+          <a:ln/>
+        </p:spPr>
+        <p:txBody>
+          <a:bodyPr wrap="square" rtlCol="0" anchor="ctr"/>
+          <a:lstStyle/>
+          <a:p>
+            <a:pPr algn="ctr" indent="0" marL="0">
+              <a:buNone/>
+            </a:pPr>
+            <a:r>
+              <a:rPr lang="en-US" sz="900" dirty="0">
+                <a:solidFill>
+                  <a:srgbClr val="78716C"/>
+                </a:solidFill>
+                <a:latin typeface="Arial" pitchFamily="34" charset="0"/>
+                <a:ea typeface="Arial" pitchFamily="34" charset="-122"/>
+                <a:cs typeface="Arial" pitchFamily="34" charset="-120"/>
+              </a:rPr>
+              <a:t>Revenue × growth, apply margin to get EBIT</a:t>
+            </a:r>
+            <a:endParaRPr lang="en-US" sz="900" dirty="0"/>
+          </a:p>
+        </p:txBody>
+      </p:sp>
+      <p:sp>
+        <p:nvSpPr>
+          <p:cNvPr id="15" name="Shape 13"/>
+          <p:cNvSpPr/>
+          <p:nvPr/>
+        </p:nvSpPr>
+        <p:spPr>
+          <a:xfrm>
+            <a:off x="4901184" y="1842516"/>
+            <a:ext cx="301752" cy="201168"/>
+          </a:xfrm>
+          <a:prstGeom prst="rightArrow">
+            <a:avLst/>
+          </a:prstGeom>
+          <a:solidFill>
+            <a:srgbClr val="B45309"/>
+          </a:solidFill>
+          <a:ln/>
+        </p:spPr>
+      </p:sp>
+      <p:sp>
+        <p:nvSpPr>
+          <p:cNvPr id="16" name="Shape 14"/>
+          <p:cNvSpPr/>
+          <p:nvPr/>
+        </p:nvSpPr>
+        <p:spPr>
+          <a:xfrm>
+            <a:off x="5257800" y="1463040"/>
+            <a:ext cx="2011680" cy="960120"/>
+          </a:xfrm>
+          <a:prstGeom prst="roundRect">
+            <a:avLst>
+              <a:gd name="adj" fmla="val 7619"/>
+            </a:avLst>
+          </a:prstGeom>
+          <a:solidFill>
+            <a:srgbClr val="F5F5F4"/>
+          </a:solidFill>
+          <a:ln w="15240">
+            <a:solidFill>
+              <a:srgbClr val="B45309"/>
+            </a:solidFill>
+            <a:prstDash val="solid"/>
+          </a:ln>
+        </p:spPr>
+      </p:sp>
+      <p:sp>
+        <p:nvSpPr>
+          <p:cNvPr id="17" name="Text 15"/>
+          <p:cNvSpPr/>
+          <p:nvPr/>
+        </p:nvSpPr>
+        <p:spPr>
+          <a:xfrm>
+            <a:off x="5330952" y="1536192"/>
+            <a:ext cx="310896" cy="274320"/>
+          </a:xfrm>
+          <a:prstGeom prst="rect">
+            <a:avLst/>
+          </a:prstGeom>
+          <a:solidFill>
+            <a:srgbClr val="B45309"/>
+          </a:solidFill>
+          <a:ln/>
+        </p:spPr>
+        <p:txBody>
+          <a:bodyPr wrap="square" rtlCol="0" anchor="ctr"/>
+          <a:lstStyle/>
+          <a:p>
+            <a:pPr algn="ctr" indent="0" marL="0">
+              <a:buNone/>
+            </a:pPr>
+            <a:r>
+              <a:rPr lang="en-US" sz="1000" b="1" dirty="0">
+                <a:solidFill>
+                  <a:srgbClr val="FFFFFF"/>
+                </a:solidFill>
+                <a:latin typeface="Arial" pitchFamily="34" charset="0"/>
+                <a:ea typeface="Arial" pitchFamily="34" charset="-122"/>
+                <a:cs typeface="Arial" pitchFamily="34" charset="-120"/>
+              </a:rPr>
+              <a:t>3</a:t>
+            </a:r>
+            <a:endParaRPr lang="en-US" sz="1000" dirty="0"/>
+          </a:p>
+        </p:txBody>
+      </p:sp>
+      <p:sp>
+        <p:nvSpPr>
+          <p:cNvPr id="18" name="Text 16"/>
+          <p:cNvSpPr/>
+          <p:nvPr/>
+        </p:nvSpPr>
+        <p:spPr>
+          <a:xfrm>
+            <a:off x="5257800" y="1737360"/>
+            <a:ext cx="2011680" cy="384048"/>
+          </a:xfrm>
+          <a:prstGeom prst="rect">
+            <a:avLst/>
+          </a:prstGeom>
+          <a:noFill/>
+          <a:ln/>
+        </p:spPr>
+        <p:txBody>
+          <a:bodyPr wrap="square" rtlCol="0" anchor="ctr"/>
+          <a:lstStyle/>
+          <a:p>
+            <a:pPr algn="ctr" indent="0" marL="0">
+              <a:buNone/>
+            </a:pPr>
+            <a:r>
+              <a:rPr lang="en-US" sz="1200" b="1" dirty="0">
+                <a:solidFill>
+                  <a:srgbClr val="1C1917"/>
+                </a:solidFill>
+                <a:latin typeface="Arial" pitchFamily="34" charset="0"/>
+                <a:ea typeface="Arial" pitchFamily="34" charset="-122"/>
+                <a:cs typeface="Arial" pitchFamily="34" charset="-120"/>
+              </a:rPr>
+              <a:t>Derive Free Cash Flow</a:t>
+            </a:r>
+            <a:endParaRPr lang="en-US" sz="1200" dirty="0"/>
+          </a:p>
+        </p:txBody>
+      </p:sp>
+      <p:sp>
+        <p:nvSpPr>
+          <p:cNvPr id="19" name="Text 17"/>
+          <p:cNvSpPr/>
+          <p:nvPr/>
+        </p:nvSpPr>
+        <p:spPr>
+          <a:xfrm>
+            <a:off x="5257800" y="2084832"/>
+            <a:ext cx="2011680" cy="310896"/>
+          </a:xfrm>
+          <a:prstGeom prst="rect">
+            <a:avLst/>
+          </a:prstGeom>
+          <a:noFill/>
+          <a:ln/>
+        </p:spPr>
+        <p:txBody>
+          <a:bodyPr wrap="square" rtlCol="0" anchor="ctr"/>
+          <a:lstStyle/>
+          <a:p>
+            <a:pPr algn="ctr" indent="0" marL="0">
+              <a:buNone/>
+            </a:pPr>
+            <a:r>
+              <a:rPr lang="en-US" sz="900" dirty="0">
+                <a:solidFill>
+                  <a:srgbClr val="78716C"/>
+                </a:solidFill>
+                <a:latin typeface="Arial" pitchFamily="34" charset="0"/>
+                <a:ea typeface="Arial" pitchFamily="34" charset="-122"/>
+                <a:cs typeface="Arial" pitchFamily="34" charset="-120"/>
+              </a:rPr>
+              <a:t>NOPAT + depreciation − capex ± NWC</a:t>
+            </a:r>
+            <a:endParaRPr lang="en-US" sz="900" dirty="0"/>
+          </a:p>
+        </p:txBody>
+      </p:sp>
+      <p:sp>
+        <p:nvSpPr>
+          <p:cNvPr id="20" name="Shape 18"/>
+          <p:cNvSpPr/>
+          <p:nvPr/>
+        </p:nvSpPr>
+        <p:spPr>
+          <a:xfrm>
+            <a:off x="6163056" y="2496312"/>
+            <a:ext cx="201168" cy="548640"/>
+          </a:xfrm>
+          <a:prstGeom prst="downArrow">
+            <a:avLst/>
+          </a:prstGeom>
+          <a:solidFill>
+            <a:srgbClr val="B45309"/>
+          </a:solidFill>
+          <a:ln/>
+        </p:spPr>
+      </p:sp>
+      <p:sp>
+        <p:nvSpPr>
+          <p:cNvPr id="21" name="Shape 19"/>
+          <p:cNvSpPr/>
+          <p:nvPr/>
+        </p:nvSpPr>
+        <p:spPr>
+          <a:xfrm>
+            <a:off x="5257800" y="3108960"/>
+            <a:ext cx="2011680" cy="960120"/>
+          </a:xfrm>
+          <a:prstGeom prst="roundRect">
+            <a:avLst>
+              <a:gd name="adj" fmla="val 7619"/>
+            </a:avLst>
+          </a:prstGeom>
+          <a:solidFill>
+            <a:srgbClr val="F5F5F4"/>
+          </a:solidFill>
+          <a:ln w="15240">
+            <a:solidFill>
+              <a:srgbClr val="B45309"/>
+            </a:solidFill>
+            <a:prstDash val="solid"/>
+          </a:ln>
+        </p:spPr>
+      </p:sp>
+      <p:sp>
+        <p:nvSpPr>
+          <p:cNvPr id="22" name="Text 20"/>
+          <p:cNvSpPr/>
+          <p:nvPr/>
+        </p:nvSpPr>
+        <p:spPr>
+          <a:xfrm>
+            <a:off x="5330952" y="3182112"/>
+            <a:ext cx="310896" cy="274320"/>
+          </a:xfrm>
+          <a:prstGeom prst="rect">
+            <a:avLst/>
+          </a:prstGeom>
+          <a:solidFill>
+            <a:srgbClr val="B45309"/>
+          </a:solidFill>
+          <a:ln/>
+        </p:spPr>
+        <p:txBody>
+          <a:bodyPr wrap="square" rtlCol="0" anchor="ctr"/>
+          <a:lstStyle/>
+          <a:p>
+            <a:pPr algn="ctr" indent="0" marL="0">
+              <a:buNone/>
+            </a:pPr>
+            <a:r>
+              <a:rPr lang="en-US" sz="1000" b="1" dirty="0">
+                <a:solidFill>
+                  <a:srgbClr val="FFFFFF"/>
+                </a:solidFill>
+                <a:latin typeface="Arial" pitchFamily="34" charset="0"/>
+                <a:ea typeface="Arial" pitchFamily="34" charset="-122"/>
+                <a:cs typeface="Arial" pitchFamily="34" charset="-120"/>
+              </a:rPr>
+              <a:t>4</a:t>
+            </a:r>
+            <a:endParaRPr lang="en-US" sz="1000" dirty="0"/>
+          </a:p>
+        </p:txBody>
+      </p:sp>
+      <p:sp>
+        <p:nvSpPr>
+          <p:cNvPr id="23" name="Text 21"/>
+          <p:cNvSpPr/>
+          <p:nvPr/>
+        </p:nvSpPr>
+        <p:spPr>
+          <a:xfrm>
+            <a:off x="5257800" y="3383280"/>
+            <a:ext cx="2011680" cy="384048"/>
+          </a:xfrm>
+          <a:prstGeom prst="rect">
+            <a:avLst/>
+          </a:prstGeom>
+          <a:noFill/>
+          <a:ln/>
+        </p:spPr>
+        <p:txBody>
+          <a:bodyPr wrap="square" rtlCol="0" anchor="ctr"/>
+          <a:lstStyle/>
+          <a:p>
+            <a:pPr algn="ctr" indent="0" marL="0">
+              <a:buNone/>
+            </a:pPr>
+            <a:r>
+              <a:rPr lang="en-US" sz="1200" b="1" dirty="0">
+                <a:solidFill>
+                  <a:srgbClr val="1C1917"/>
+                </a:solidFill>
+                <a:latin typeface="Arial" pitchFamily="34" charset="0"/>
+                <a:ea typeface="Arial" pitchFamily="34" charset="-122"/>
+                <a:cs typeface="Arial" pitchFamily="34" charset="-120"/>
+              </a:rPr>
+              <a:t>Discount Cash Flows</a:t>
+            </a:r>
+            <a:endParaRPr lang="en-US" sz="1200" dirty="0"/>
+          </a:p>
+        </p:txBody>
+      </p:sp>
+      <p:sp>
+        <p:nvSpPr>
+          <p:cNvPr id="24" name="Text 22"/>
+          <p:cNvSpPr/>
+          <p:nvPr/>
+        </p:nvSpPr>
+        <p:spPr>
+          <a:xfrm>
+            <a:off x="5257800" y="3730752"/>
+            <a:ext cx="2011680" cy="310896"/>
+          </a:xfrm>
+          <a:prstGeom prst="rect">
+            <a:avLst/>
+          </a:prstGeom>
+          <a:noFill/>
+          <a:ln/>
+        </p:spPr>
+        <p:txBody>
+          <a:bodyPr wrap="square" rtlCol="0" anchor="ctr"/>
+          <a:lstStyle/>
+          <a:p>
+            <a:pPr algn="ctr" indent="0" marL="0">
+              <a:buNone/>
+            </a:pPr>
+            <a:r>
+              <a:rPr lang="en-US" sz="900" dirty="0">
+                <a:solidFill>
+                  <a:srgbClr val="78716C"/>
+                </a:solidFill>
+                <a:latin typeface="Arial" pitchFamily="34" charset="0"/>
+                <a:ea typeface="Arial" pitchFamily="34" charset="-122"/>
+                <a:cs typeface="Arial" pitchFamily="34" charset="-120"/>
+              </a:rPr>
+              <a:t>Divide each FCF by (1+WACC)^t</a:t>
+            </a:r>
+            <a:endParaRPr lang="en-US" sz="900" dirty="0"/>
+          </a:p>
+        </p:txBody>
+      </p:sp>
+      <p:sp>
+        <p:nvSpPr>
+          <p:cNvPr id="25" name="Shape 23"/>
+          <p:cNvSpPr/>
+          <p:nvPr/>
+        </p:nvSpPr>
+        <p:spPr>
+          <a:xfrm>
+            <a:off x="4901184" y="3488436"/>
+            <a:ext cx="301752" cy="201168"/>
+          </a:xfrm>
+          <a:prstGeom prst="leftArrow">
+            <a:avLst/>
+          </a:prstGeom>
+          <a:solidFill>
+            <a:srgbClr val="B45309"/>
+          </a:solidFill>
+          <a:ln/>
+        </p:spPr>
+      </p:sp>
+      <p:sp>
+        <p:nvSpPr>
+          <p:cNvPr id="26" name="Shape 24"/>
+          <p:cNvSpPr/>
+          <p:nvPr/>
+        </p:nvSpPr>
+        <p:spPr>
+          <a:xfrm>
+            <a:off x="2834640" y="3108960"/>
+            <a:ext cx="2011680" cy="960120"/>
+          </a:xfrm>
+          <a:prstGeom prst="roundRect">
+            <a:avLst>
+              <a:gd name="adj" fmla="val 7619"/>
+            </a:avLst>
+          </a:prstGeom>
+          <a:solidFill>
+            <a:srgbClr val="F5F5F4"/>
+          </a:solidFill>
+          <a:ln w="15240">
+            <a:solidFill>
+              <a:srgbClr val="B45309"/>
+            </a:solidFill>
+            <a:prstDash val="solid"/>
+          </a:ln>
+        </p:spPr>
+      </p:sp>
+      <p:sp>
+        <p:nvSpPr>
+          <p:cNvPr id="27" name="Text 25"/>
+          <p:cNvSpPr/>
+          <p:nvPr/>
+        </p:nvSpPr>
+        <p:spPr>
+          <a:xfrm>
+            <a:off x="2907792" y="3182112"/>
+            <a:ext cx="310896" cy="274320"/>
+          </a:xfrm>
+          <a:prstGeom prst="rect">
+            <a:avLst/>
+          </a:prstGeom>
+          <a:solidFill>
+            <a:srgbClr val="B45309"/>
+          </a:solidFill>
+          <a:ln/>
+        </p:spPr>
+        <p:txBody>
+          <a:bodyPr wrap="square" rtlCol="0" anchor="ctr"/>
+          <a:lstStyle/>
+          <a:p>
+            <a:pPr algn="ctr" indent="0" marL="0">
+              <a:buNone/>
+            </a:pPr>
+            <a:r>
+              <a:rPr lang="en-US" sz="1000" b="1" dirty="0">
+                <a:solidFill>
+                  <a:srgbClr val="FFFFFF"/>
+                </a:solidFill>
+                <a:latin typeface="Arial" pitchFamily="34" charset="0"/>
+                <a:ea typeface="Arial" pitchFamily="34" charset="-122"/>
+                <a:cs typeface="Arial" pitchFamily="34" charset="-120"/>
+              </a:rPr>
+              <a:t>5</a:t>
+            </a:r>
+            <a:endParaRPr lang="en-US" sz="1000" dirty="0"/>
+          </a:p>
+        </p:txBody>
+      </p:sp>
+      <p:sp>
+        <p:nvSpPr>
+          <p:cNvPr id="28" name="Text 26"/>
+          <p:cNvSpPr/>
+          <p:nvPr/>
+        </p:nvSpPr>
+        <p:spPr>
+          <a:xfrm>
+            <a:off x="2834640" y="3383280"/>
+            <a:ext cx="2011680" cy="384048"/>
+          </a:xfrm>
+          <a:prstGeom prst="rect">
+            <a:avLst/>
+          </a:prstGeom>
+          <a:noFill/>
+          <a:ln/>
+        </p:spPr>
+        <p:txBody>
+          <a:bodyPr wrap="square" rtlCol="0" anchor="ctr"/>
+          <a:lstStyle/>
+          <a:p>
+            <a:pPr algn="ctr" indent="0" marL="0">
+              <a:buNone/>
+            </a:pPr>
+            <a:r>
+              <a:rPr lang="en-US" sz="1200" b="1" dirty="0">
+                <a:solidFill>
+                  <a:srgbClr val="1C1917"/>
+                </a:solidFill>
+                <a:latin typeface="Arial" pitchFamily="34" charset="0"/>
+                <a:ea typeface="Arial" pitchFamily="34" charset="-122"/>
+                <a:cs typeface="Arial" pitchFamily="34" charset="-120"/>
+              </a:rPr>
+              <a:t>Add Terminal Value</a:t>
+            </a:r>
+            <a:endParaRPr lang="en-US" sz="1200" dirty="0"/>
+          </a:p>
+        </p:txBody>
+      </p:sp>
+      <p:sp>
+        <p:nvSpPr>
+          <p:cNvPr id="29" name="Text 27"/>
+          <p:cNvSpPr/>
+          <p:nvPr/>
+        </p:nvSpPr>
+        <p:spPr>
+          <a:xfrm>
+            <a:off x="2834640" y="3730752"/>
+            <a:ext cx="2011680" cy="310896"/>
+          </a:xfrm>
+          <a:prstGeom prst="rect">
+            <a:avLst/>
+          </a:prstGeom>
+          <a:noFill/>
+          <a:ln/>
+        </p:spPr>
+        <p:txBody>
+          <a:bodyPr wrap="square" rtlCol="0" anchor="ctr"/>
+          <a:lstStyle/>
+          <a:p>
+            <a:pPr algn="ctr" indent="0" marL="0">
+              <a:buNone/>
+            </a:pPr>
+            <a:r>
+              <a:rPr lang="en-US" sz="900" dirty="0">
+                <a:solidFill>
+                  <a:srgbClr val="78716C"/>
+                </a:solidFill>
+                <a:latin typeface="Arial" pitchFamily="34" charset="0"/>
+                <a:ea typeface="Arial" pitchFamily="34" charset="-122"/>
+                <a:cs typeface="Arial" pitchFamily="34" charset="-120"/>
+              </a:rPr>
+              <a:t>Gordon Growth or exit-multiple approach</a:t>
+            </a:r>
+            <a:endParaRPr lang="en-US" sz="900" dirty="0"/>
+          </a:p>
+        </p:txBody>
+      </p:sp>
+      <p:sp>
+        <p:nvSpPr>
+          <p:cNvPr id="30" name="Shape 28"/>
+          <p:cNvSpPr/>
+          <p:nvPr/>
+        </p:nvSpPr>
+        <p:spPr>
+          <a:xfrm>
+            <a:off x="2478024" y="3488436"/>
+            <a:ext cx="301752" cy="201168"/>
+          </a:xfrm>
+          <a:prstGeom prst="leftArrow">
+            <a:avLst/>
+          </a:prstGeom>
+          <a:solidFill>
+            <a:srgbClr val="B45309"/>
+          </a:solidFill>
+          <a:ln/>
+        </p:spPr>
+      </p:sp>
+      <p:sp>
+        <p:nvSpPr>
+          <p:cNvPr id="31" name="Shape 29"/>
+          <p:cNvSpPr/>
+          <p:nvPr/>
+        </p:nvSpPr>
+        <p:spPr>
+          <a:xfrm>
+            <a:off x="411480" y="3108960"/>
+            <a:ext cx="2011680" cy="960120"/>
+          </a:xfrm>
+          <a:prstGeom prst="roundRect">
+            <a:avLst>
+              <a:gd name="adj" fmla="val 7619"/>
+            </a:avLst>
+          </a:prstGeom>
+          <a:solidFill>
+            <a:srgbClr val="F5F5F4"/>
+          </a:solidFill>
+          <a:ln w="15240">
+            <a:solidFill>
+              <a:srgbClr val="B45309"/>
+            </a:solidFill>
+            <a:prstDash val="solid"/>
+          </a:ln>
+        </p:spPr>
+      </p:sp>
+      <p:sp>
+        <p:nvSpPr>
+          <p:cNvPr id="32" name="Text 30"/>
+          <p:cNvSpPr/>
+          <p:nvPr/>
+        </p:nvSpPr>
+        <p:spPr>
+          <a:xfrm>
+            <a:off x="484632" y="3182112"/>
+            <a:ext cx="310896" cy="274320"/>
+          </a:xfrm>
+          <a:prstGeom prst="rect">
+            <a:avLst/>
+          </a:prstGeom>
+          <a:solidFill>
+            <a:srgbClr val="B45309"/>
+          </a:solidFill>
+          <a:ln/>
+        </p:spPr>
+        <p:txBody>
+          <a:bodyPr wrap="square" rtlCol="0" anchor="ctr"/>
+          <a:lstStyle/>
+          <a:p>
+            <a:pPr algn="ctr" indent="0" marL="0">
+              <a:buNone/>
+            </a:pPr>
+            <a:r>
+              <a:rPr lang="en-US" sz="1000" b="1" dirty="0">
+                <a:solidFill>
+                  <a:srgbClr val="FFFFFF"/>
+                </a:solidFill>
+                <a:latin typeface="Arial" pitchFamily="34" charset="0"/>
+                <a:ea typeface="Arial" pitchFamily="34" charset="-122"/>
+                <a:cs typeface="Arial" pitchFamily="34" charset="-120"/>
+              </a:rPr>
+              <a:t>6</a:t>
+            </a:r>
+            <a:endParaRPr lang="en-US" sz="1000" dirty="0"/>
+          </a:p>
+        </p:txBody>
+      </p:sp>
+      <p:sp>
+        <p:nvSpPr>
+          <p:cNvPr id="33" name="Text 31"/>
+          <p:cNvSpPr/>
+          <p:nvPr/>
+        </p:nvSpPr>
+        <p:spPr>
+          <a:xfrm>
+            <a:off x="411480" y="3383280"/>
+            <a:ext cx="2011680" cy="384048"/>
+          </a:xfrm>
+          <a:prstGeom prst="rect">
+            <a:avLst/>
+          </a:prstGeom>
+          <a:noFill/>
+          <a:ln/>
+        </p:spPr>
+        <p:txBody>
+          <a:bodyPr wrap="square" rtlCol="0" anchor="ctr"/>
+          <a:lstStyle/>
+          <a:p>
+            <a:pPr algn="ctr" indent="0" marL="0">
+              <a:buNone/>
+            </a:pPr>
+            <a:r>
+              <a:rPr lang="en-US" sz="1200" b="1" dirty="0">
+                <a:solidFill>
+                  <a:srgbClr val="1C1917"/>
+                </a:solidFill>
+                <a:latin typeface="Arial" pitchFamily="34" charset="0"/>
+                <a:ea typeface="Arial" pitchFamily="34" charset="-122"/>
+                <a:cs typeface="Arial" pitchFamily="34" charset="-120"/>
+              </a:rPr>
+              <a:t>Bridge to Equity Value</a:t>
+            </a:r>
+            <a:endParaRPr lang="en-US" sz="1200" dirty="0"/>
+          </a:p>
+        </p:txBody>
+      </p:sp>
+      <p:sp>
+        <p:nvSpPr>
+          <p:cNvPr id="34" name="Text 32"/>
+          <p:cNvSpPr/>
+          <p:nvPr/>
+        </p:nvSpPr>
+        <p:spPr>
+          <a:xfrm>
+            <a:off x="411480" y="3730752"/>
+            <a:ext cx="2011680" cy="310896"/>
+          </a:xfrm>
+          <a:prstGeom prst="rect">
+            <a:avLst/>
+          </a:prstGeom>
+          <a:noFill/>
+          <a:ln/>
+        </p:spPr>
+        <p:txBody>
+          <a:bodyPr wrap="square" rtlCol="0" anchor="ctr"/>
+          <a:lstStyle/>
+          <a:p>
+            <a:pPr algn="ctr" indent="0" marL="0">
+              <a:buNone/>
+            </a:pPr>
+            <a:r>
+              <a:rPr lang="en-US" sz="900" dirty="0">
+                <a:solidFill>
+                  <a:srgbClr val="78716C"/>
+                </a:solidFill>
+                <a:latin typeface="Arial" pitchFamily="34" charset="0"/>
+                <a:ea typeface="Arial" pitchFamily="34" charset="-122"/>
+                <a:cs typeface="Arial" pitchFamily="34" charset="-120"/>
+              </a:rPr>
+              <a:t>Enterprise value minus net debt</a:t>
+            </a:r>
+            <a:endParaRPr lang="en-US" sz="900" dirty="0"/>
           </a:p>
         </p:txBody>
       </p:sp>
@@ -3791,9 +5992,16 @@
 </p:sld>
 </file>
 
-<file path=ppt/slides/slide9.xml><?xml version="1.0" encoding="utf-8"?>
+<file path=ppt/slides/slide7.xml><?xml version="1.0" encoding="utf-8"?>
 <p:sld xmlns:a="http://schemas.openxmlformats.org/drawingml/2006/main" xmlns:r="http://schemas.openxmlformats.org/officeDocument/2006/relationships" xmlns:p="http://schemas.openxmlformats.org/presentationml/2006/main">
-  <p:cSld name="Slide 9">
+  <p:cSld name="Slide 7">
+    <p:bg>
+      <p:bgPr>
+        <a:solidFill>
+          <a:srgbClr val="FFFFFF"/>
+        </a:solidFill>
+      </p:bgPr>
+    </p:bg>
     <p:spTree>
       <p:nvGrpSpPr>
         <p:cNvPr id="1" name=""/>
@@ -3810,14 +6018,34 @@
       </p:grpSpPr>
       <p:sp>
         <p:nvSpPr>
-          <p:cNvPr id="2" name="Text 0"/>
-          <p:cNvSpPr/>
-          <p:nvPr/>
-        </p:nvSpPr>
-        <p:spPr>
-          <a:xfrm>
-            <a:off x="457200" y="320040"/>
-            <a:ext cx="8229600" cy="731520"/>
+          <p:cNvPr id="2" name="Shape 0"/>
+          <p:cNvSpPr/>
+          <p:nvPr/>
+        </p:nvSpPr>
+        <p:spPr>
+          <a:xfrm>
+            <a:off x="411480" y="402336"/>
+            <a:ext cx="82296" cy="329184"/>
+          </a:xfrm>
+          <a:prstGeom prst="rect">
+            <a:avLst/>
+          </a:prstGeom>
+          <a:solidFill>
+            <a:srgbClr val="B45309"/>
+          </a:solidFill>
+          <a:ln/>
+        </p:spPr>
+      </p:sp>
+      <p:sp>
+        <p:nvSpPr>
+          <p:cNvPr id="3" name="Text 1"/>
+          <p:cNvSpPr/>
+          <p:nvPr/>
+        </p:nvSpPr>
+        <p:spPr>
+          <a:xfrm>
+            <a:off x="566928" y="292608"/>
+            <a:ext cx="8138160" cy="548640"/>
           </a:xfrm>
           <a:prstGeom prst="rect">
             <a:avLst/>
@@ -3833,27 +6061,92 @@
               <a:buNone/>
             </a:pPr>
             <a:r>
-              <a:rPr lang="en-US" sz="2400" b="1" dirty="0">
-                <a:solidFill>
-                  <a:srgbClr val="B45309"/>
-                </a:solidFill>
-              </a:rPr>
-              <a:t>Final Project Presentations (60 minutes)</a:t>
-            </a:r>
-            <a:endParaRPr lang="en-US" sz="2400" dirty="0"/>
-          </a:p>
-        </p:txBody>
-      </p:sp>
-      <p:sp>
-        <p:nvSpPr>
-          <p:cNvPr id="3" name="Text 1"/>
-          <p:cNvSpPr/>
-          <p:nvPr/>
-        </p:nvSpPr>
-        <p:spPr>
-          <a:xfrm>
-            <a:off x="640080" y="1188720"/>
-            <a:ext cx="7863840" cy="3291840"/>
+              <a:rPr lang="en-US" sz="2100" b="1" dirty="0">
+                <a:solidFill>
+                  <a:srgbClr val="1C1917"/>
+                </a:solidFill>
+                <a:latin typeface="Arial" pitchFamily="34" charset="0"/>
+                <a:ea typeface="Arial" pitchFamily="34" charset="-122"/>
+                <a:cs typeface="Arial" pitchFamily="34" charset="-120"/>
+              </a:rPr>
+              <a:t>Notation</a:t>
+            </a:r>
+            <a:endParaRPr lang="en-US" sz="2100" dirty="0"/>
+          </a:p>
+        </p:txBody>
+      </p:sp>
+      <p:sp>
+        <p:nvSpPr>
+          <p:cNvPr id="4" name="Shape 2"/>
+          <p:cNvSpPr/>
+          <p:nvPr/>
+        </p:nvSpPr>
+        <p:spPr>
+          <a:xfrm>
+            <a:off x="411480" y="960120"/>
+            <a:ext cx="8321040" cy="0"/>
+          </a:xfrm>
+          <a:prstGeom prst="line">
+            <a:avLst/>
+          </a:prstGeom>
+          <a:noFill/>
+          <a:ln w="12700">
+            <a:solidFill>
+              <a:srgbClr val="E7E5E4"/>
+            </a:solidFill>
+            <a:prstDash val="solid"/>
+          </a:ln>
+        </p:spPr>
+      </p:sp>
+      <p:sp>
+        <p:nvSpPr>
+          <p:cNvPr id="5" name="Text 3"/>
+          <p:cNvSpPr/>
+          <p:nvPr/>
+        </p:nvSpPr>
+        <p:spPr>
+          <a:xfrm>
+            <a:off x="411480" y="4864608"/>
+            <a:ext cx="8321040" cy="237744"/>
+          </a:xfrm>
+          <a:prstGeom prst="rect">
+            <a:avLst/>
+          </a:prstGeom>
+          <a:noFill/>
+          <a:ln/>
+        </p:spPr>
+        <p:txBody>
+          <a:bodyPr wrap="square" rtlCol="0" anchor="ctr"/>
+          <a:lstStyle/>
+          <a:p>
+            <a:pPr indent="0" marL="0">
+              <a:buNone/>
+            </a:pPr>
+            <a:r>
+              <a:rPr lang="en-US" sz="750" dirty="0">
+                <a:solidFill>
+                  <a:srgbClr val="AAAAAA"/>
+                </a:solidFill>
+                <a:latin typeface="Arial" pitchFamily="34" charset="0"/>
+                <a:ea typeface="Arial" pitchFamily="34" charset="-122"/>
+                <a:cs typeface="Arial" pitchFamily="34" charset="-120"/>
+              </a:rPr>
+              <a:t>Lesson Forge Pro (owner) — This content is educational material only and does not constitute financial, investment, or trading advice.</a:t>
+            </a:r>
+            <a:endParaRPr lang="en-US" sz="750" dirty="0"/>
+          </a:p>
+        </p:txBody>
+      </p:sp>
+      <p:sp>
+        <p:nvSpPr>
+          <p:cNvPr id="6" name="Text 4"/>
+          <p:cNvSpPr/>
+          <p:nvPr/>
+        </p:nvSpPr>
+        <p:spPr>
+          <a:xfrm>
+            <a:off x="731520" y="1188720"/>
+            <a:ext cx="7680960" cy="3383280"/>
           </a:xfrm>
           <a:prstGeom prst="rect">
             <a:avLst/>
@@ -3865,167 +6158,412 @@
           <a:bodyPr wrap="square" rtlCol="0" anchor="t"/>
           <a:lstStyle/>
           <a:p>
-            <a:pPr marL="342900" indent="-342900">
+            <a:pPr marL="152400" indent="-152400">
+              <a:spcAft>
+                <a:spcPts val="800"/>
+              </a:spcAft>
               <a:buSzPct val="100000"/>
               <a:buChar char="•"/>
             </a:pPr>
             <a:r>
-              <a:rPr lang="en-US" sz="1600" dirty="0">
-                <a:solidFill>
-                  <a:srgbClr val="333333"/>
-                </a:solidFill>
-              </a:rPr>
-              <a:t>Have students present their final projects, which demonstrate their mastery of financial modeling concepts. Encourage students to use visual aids and provide fe</a:t>
-            </a:r>
-            <a:endParaRPr lang="en-US" sz="1600" dirty="0"/>
-          </a:p>
-          <a:p>
-            <a:pPr marL="342900" indent="-342900">
+              <a:rPr lang="en-US" sz="1500" dirty="0">
+                <a:solidFill>
+                  <a:srgbClr val="1C1917"/>
+                </a:solidFill>
+                <a:latin typeface="Arial" pitchFamily="34" charset="0"/>
+                <a:ea typeface="Arial" pitchFamily="34" charset="-122"/>
+                <a:cs typeface="Arial" pitchFamily="34" charset="-120"/>
+              </a:rPr>
+              <a:t>Standard notation you will see in case studies:</a:t>
+            </a:r>
+            <a:endParaRPr lang="en-US" sz="1500" dirty="0"/>
+          </a:p>
+          <a:p>
+            <a:pPr marL="152400" indent="-152400">
+              <a:spcAft>
+                <a:spcPts val="800"/>
+              </a:spcAft>
               <a:buSzPct val="100000"/>
               <a:buChar char="•"/>
             </a:pPr>
             <a:r>
-              <a:rPr lang="en-US" sz="1600" dirty="0">
-                <a:solidFill>
-                  <a:srgbClr val="333333"/>
-                </a:solidFill>
-              </a:rPr>
-              <a:t>Key points to cover:</a:t>
-            </a:r>
-            <a:endParaRPr lang="en-US" sz="1600" dirty="0"/>
-          </a:p>
-          <a:p>
-            <a:pPr marL="342900" indent="-342900">
+              <a:rPr lang="en-US" sz="1500" dirty="0">
+                <a:solidFill>
+                  <a:srgbClr val="1C1917"/>
+                </a:solidFill>
+                <a:latin typeface="Arial" pitchFamily="34" charset="0"/>
+                <a:ea typeface="Arial" pitchFamily="34" charset="-122"/>
+                <a:cs typeface="Arial" pitchFamily="34" charset="-120"/>
+              </a:rPr>
+              <a:t>`</a:t>
+            </a:r>
+            <a:endParaRPr lang="en-US" sz="1500" dirty="0"/>
+          </a:p>
+          <a:p>
+            <a:pPr marL="152400" indent="-152400">
+              <a:spcAft>
+                <a:spcPts val="800"/>
+              </a:spcAft>
               <a:buSzPct val="100000"/>
               <a:buChar char="•"/>
             </a:pPr>
             <a:r>
-              <a:rPr lang="en-US" sz="1600" dirty="0">
-                <a:solidFill>
-                  <a:srgbClr val="333333"/>
-                </a:solidFill>
-              </a:rPr>
-              <a:t>Application of financial modeling concepts to a real-world project</a:t>
-            </a:r>
-            <a:endParaRPr lang="en-US" sz="1600" dirty="0"/>
-          </a:p>
-          <a:p>
-            <a:pPr marL="342900" indent="-342900">
+              <a:rPr lang="en-US" sz="1500" dirty="0">
+                <a:solidFill>
+                  <a:srgbClr val="1C1917"/>
+                </a:solidFill>
+                <a:latin typeface="Arial" pitchFamily="34" charset="0"/>
+                <a:ea typeface="Arial" pitchFamily="34" charset="-122"/>
+                <a:cs typeface="Arial" pitchFamily="34" charset="-120"/>
+              </a:rPr>
+              <a:t>NPV = Σ [FCFt / (1 + WACC)^t]  for t = 1 to n,  minus Initial Investment</a:t>
+            </a:r>
+            <a:endParaRPr lang="en-US" sz="1500" dirty="0"/>
+          </a:p>
+          <a:p>
+            <a:pPr marL="152400" indent="-152400">
+              <a:spcAft>
+                <a:spcPts val="800"/>
+              </a:spcAft>
               <a:buSzPct val="100000"/>
               <a:buChar char="•"/>
             </a:pPr>
             <a:r>
-              <a:rPr lang="en-US" sz="1600" dirty="0">
-                <a:solidFill>
-                  <a:srgbClr val="333333"/>
-                </a:solidFill>
-              </a:rPr>
-              <a:t>Importance of clear communication and presentation skills</a:t>
-            </a:r>
-            <a:endParaRPr lang="en-US" sz="1600" dirty="0"/>
-          </a:p>
-          <a:p>
-            <a:pPr marL="342900" indent="-342900">
+              <a:rPr lang="en-US" sz="1500" dirty="0">
+                <a:solidFill>
+                  <a:srgbClr val="1C1917"/>
+                </a:solidFill>
+                <a:latin typeface="Arial" pitchFamily="34" charset="0"/>
+                <a:ea typeface="Arial" pitchFamily="34" charset="-122"/>
+                <a:cs typeface="Arial" pitchFamily="34" charset="-120"/>
+              </a:rPr>
+              <a:t>`</a:t>
+            </a:r>
+            <a:endParaRPr lang="en-US" sz="1500" dirty="0"/>
+          </a:p>
+        </p:txBody>
+      </p:sp>
+    </p:spTree>
+  </p:cSld>
+  <p:clrMapOvr>
+    <a:masterClrMapping/>
+  </p:clrMapOvr>
+</p:sld>
+</file>
+
+<file path=ppt/slides/slide8.xml><?xml version="1.0" encoding="utf-8"?>
+<p:sld xmlns:a="http://schemas.openxmlformats.org/drawingml/2006/main" xmlns:r="http://schemas.openxmlformats.org/officeDocument/2006/relationships" xmlns:p="http://schemas.openxmlformats.org/presentationml/2006/main">
+  <p:cSld name="Slide 8">
+    <p:bg>
+      <p:bgPr>
+        <a:solidFill>
+          <a:srgbClr val="FFFFFF"/>
+        </a:solidFill>
+      </p:bgPr>
+    </p:bg>
+    <p:spTree>
+      <p:nvGrpSpPr>
+        <p:cNvPr id="1" name=""/>
+        <p:cNvGrpSpPr/>
+        <p:nvPr/>
+      </p:nvGrpSpPr>
+      <p:grpSpPr>
+        <a:xfrm>
+          <a:off x="0" y="0"/>
+          <a:ext cx="0" cy="0"/>
+          <a:chOff x="0" y="0"/>
+          <a:chExt cx="0" cy="0"/>
+        </a:xfrm>
+      </p:grpSpPr>
+      <p:sp>
+        <p:nvSpPr>
+          <p:cNvPr id="2" name="Shape 0"/>
+          <p:cNvSpPr/>
+          <p:nvPr/>
+        </p:nvSpPr>
+        <p:spPr>
+          <a:xfrm>
+            <a:off x="411480" y="402336"/>
+            <a:ext cx="82296" cy="329184"/>
+          </a:xfrm>
+          <a:prstGeom prst="rect">
+            <a:avLst/>
+          </a:prstGeom>
+          <a:solidFill>
+            <a:srgbClr val="B45309"/>
+          </a:solidFill>
+          <a:ln/>
+        </p:spPr>
+      </p:sp>
+      <p:sp>
+        <p:nvSpPr>
+          <p:cNvPr id="3" name="Text 1"/>
+          <p:cNvSpPr/>
+          <p:nvPr/>
+        </p:nvSpPr>
+        <p:spPr>
+          <a:xfrm>
+            <a:off x="566928" y="292608"/>
+            <a:ext cx="8138160" cy="548640"/>
+          </a:xfrm>
+          <a:prstGeom prst="rect">
+            <a:avLst/>
+          </a:prstGeom>
+          <a:noFill/>
+          <a:ln/>
+        </p:spPr>
+        <p:txBody>
+          <a:bodyPr wrap="square" rtlCol="0" anchor="ctr"/>
+          <a:lstStyle/>
+          <a:p>
+            <a:pPr indent="0" marL="0">
+              <a:buNone/>
+            </a:pPr>
+            <a:r>
+              <a:rPr lang="en-US" sz="2100" b="1" dirty="0">
+                <a:solidFill>
+                  <a:srgbClr val="1C1917"/>
+                </a:solidFill>
+                <a:latin typeface="Arial" pitchFamily="34" charset="0"/>
+                <a:ea typeface="Arial" pitchFamily="34" charset="-122"/>
+                <a:cs typeface="Arial" pitchFamily="34" charset="-120"/>
+              </a:rPr>
+              <a:t>Worked Example — Terminology Applied to a Mini Scenario</a:t>
+            </a:r>
+            <a:endParaRPr lang="en-US" sz="2100" dirty="0"/>
+          </a:p>
+        </p:txBody>
+      </p:sp>
+      <p:sp>
+        <p:nvSpPr>
+          <p:cNvPr id="4" name="Shape 2"/>
+          <p:cNvSpPr/>
+          <p:nvPr/>
+        </p:nvSpPr>
+        <p:spPr>
+          <a:xfrm>
+            <a:off x="411480" y="960120"/>
+            <a:ext cx="8321040" cy="0"/>
+          </a:xfrm>
+          <a:prstGeom prst="line">
+            <a:avLst/>
+          </a:prstGeom>
+          <a:noFill/>
+          <a:ln w="12700">
+            <a:solidFill>
+              <a:srgbClr val="E7E5E4"/>
+            </a:solidFill>
+            <a:prstDash val="solid"/>
+          </a:ln>
+        </p:spPr>
+      </p:sp>
+      <p:sp>
+        <p:nvSpPr>
+          <p:cNvPr id="5" name="Text 3"/>
+          <p:cNvSpPr/>
+          <p:nvPr/>
+        </p:nvSpPr>
+        <p:spPr>
+          <a:xfrm>
+            <a:off x="411480" y="4864608"/>
+            <a:ext cx="8321040" cy="237744"/>
+          </a:xfrm>
+          <a:prstGeom prst="rect">
+            <a:avLst/>
+          </a:prstGeom>
+          <a:noFill/>
+          <a:ln/>
+        </p:spPr>
+        <p:txBody>
+          <a:bodyPr wrap="square" rtlCol="0" anchor="ctr"/>
+          <a:lstStyle/>
+          <a:p>
+            <a:pPr indent="0" marL="0">
+              <a:buNone/>
+            </a:pPr>
+            <a:r>
+              <a:rPr lang="en-US" sz="750" dirty="0">
+                <a:solidFill>
+                  <a:srgbClr val="AAAAAA"/>
+                </a:solidFill>
+                <a:latin typeface="Arial" pitchFamily="34" charset="0"/>
+                <a:ea typeface="Arial" pitchFamily="34" charset="-122"/>
+                <a:cs typeface="Arial" pitchFamily="34" charset="-120"/>
+              </a:rPr>
+              <a:t>Lesson Forge Pro (owner) — This content is educational material only and does not constitute financial, investment, or trading advice.</a:t>
+            </a:r>
+            <a:endParaRPr lang="en-US" sz="750" dirty="0"/>
+          </a:p>
+        </p:txBody>
+      </p:sp>
+      <p:sp>
+        <p:nvSpPr>
+          <p:cNvPr id="6" name="Text 4"/>
+          <p:cNvSpPr/>
+          <p:nvPr/>
+        </p:nvSpPr>
+        <p:spPr>
+          <a:xfrm>
+            <a:off x="731520" y="1188720"/>
+            <a:ext cx="7680960" cy="3383280"/>
+          </a:xfrm>
+          <a:prstGeom prst="rect">
+            <a:avLst/>
+          </a:prstGeom>
+          <a:noFill/>
+          <a:ln/>
+        </p:spPr>
+        <p:txBody>
+          <a:bodyPr wrap="square" rtlCol="0" anchor="t"/>
+          <a:lstStyle/>
+          <a:p>
+            <a:pPr marL="152400" indent="-152400">
+              <a:spcAft>
+                <a:spcPts val="800"/>
+              </a:spcAft>
               <a:buSzPct val="100000"/>
               <a:buChar char="•"/>
             </a:pPr>
             <a:r>
-              <a:rPr lang="en-US" sz="1600" dirty="0">
-                <a:solidFill>
-                  <a:srgbClr val="333333"/>
-                </a:solidFill>
-              </a:rPr>
-              <a:t>Anticipated learner questions:</a:t>
-            </a:r>
-            <a:endParaRPr lang="en-US" sz="1600" dirty="0"/>
-          </a:p>
-          <a:p>
-            <a:pPr marL="342900" indent="-342900">
+              <a:rPr lang="en-US" sz="1500" dirty="0">
+                <a:solidFill>
+                  <a:srgbClr val="1C1917"/>
+                </a:solidFill>
+                <a:latin typeface="Arial" pitchFamily="34" charset="0"/>
+                <a:ea typeface="Arial" pitchFamily="34" charset="-122"/>
+                <a:cs typeface="Arial" pitchFamily="34" charset="-120"/>
+              </a:rPr>
+              <a:t>Scenario: A small logistics firm is evaluating a new delivery route requiring a $200,000 upfront investment. T</a:t>
+            </a:r>
+            <a:endParaRPr lang="en-US" sz="1500" dirty="0"/>
+          </a:p>
+          <a:p>
+            <a:pPr marL="152400" indent="-152400">
+              <a:spcAft>
+                <a:spcPts val="800"/>
+              </a:spcAft>
               <a:buSzPct val="100000"/>
               <a:buChar char="•"/>
             </a:pPr>
             <a:r>
-              <a:rPr lang="en-US" sz="1600" dirty="0">
-                <a:solidFill>
-                  <a:srgbClr val="333333"/>
-                </a:solidFill>
-              </a:rPr>
-              <a:t>How do we evaluate the success of a financial model?</a:t>
-            </a:r>
-            <a:endParaRPr lang="en-US" sz="1600" dirty="0"/>
-          </a:p>
-          <a:p>
-            <a:pPr marL="342900" indent="-342900">
+              <a:rPr lang="en-US" sz="1500" dirty="0">
+                <a:solidFill>
+                  <a:srgbClr val="1C1917"/>
+                </a:solidFill>
+                <a:latin typeface="Arial" pitchFamily="34" charset="0"/>
+                <a:ea typeface="Arial" pitchFamily="34" charset="-122"/>
+                <a:cs typeface="Arial" pitchFamily="34" charset="-120"/>
+              </a:rPr>
+              <a:t>Step 1 — Identify the assumption.</a:t>
+            </a:r>
+            <a:endParaRPr lang="en-US" sz="1500" dirty="0"/>
+          </a:p>
+          <a:p>
+            <a:pPr marL="152400" indent="-152400">
+              <a:spcAft>
+                <a:spcPts val="800"/>
+              </a:spcAft>
               <a:buSzPct val="100000"/>
               <a:buChar char="•"/>
             </a:pPr>
             <a:r>
-              <a:rPr lang="en-US" sz="1600" dirty="0">
-                <a:solidFill>
-                  <a:srgbClr val="333333"/>
-                </a:solidFill>
-              </a:rPr>
-              <a:t>What are the key components of a good final project presentation?</a:t>
-            </a:r>
-            <a:endParaRPr lang="en-US" sz="1600" dirty="0"/>
-          </a:p>
-          <a:p>
-            <a:pPr marL="342900" indent="-342900">
+              <a:rPr lang="en-US" sz="1500" dirty="0">
+                <a:solidFill>
+                  <a:srgbClr val="1C1917"/>
+                </a:solidFill>
+                <a:latin typeface="Arial" pitchFamily="34" charset="0"/>
+                <a:ea typeface="Arial" pitchFamily="34" charset="-122"/>
+                <a:cs typeface="Arial" pitchFamily="34" charset="-120"/>
+              </a:rPr>
+              <a:t>The growth in cash flows (from $70K to $80K to $90K) and the 10% WACC are the model's assumptions. If either c</a:t>
+            </a:r>
+            <a:endParaRPr lang="en-US" sz="1500" dirty="0"/>
+          </a:p>
+          <a:p>
+            <a:pPr marL="152400" indent="-152400">
+              <a:spcAft>
+                <a:spcPts val="800"/>
+              </a:spcAft>
               <a:buSzPct val="100000"/>
               <a:buChar char="•"/>
             </a:pPr>
             <a:r>
-              <a:rPr lang="en-US" sz="1600" dirty="0">
-                <a:solidFill>
-                  <a:srgbClr val="333333"/>
-                </a:solidFill>
-              </a:rPr>
-              <a:t>Answers:</a:t>
-            </a:r>
-            <a:endParaRPr lang="en-US" sz="1600" dirty="0"/>
-          </a:p>
-          <a:p>
-            <a:pPr marL="342900" indent="-342900">
-              <a:buSzPct val="100000"/>
-              <a:buChar char="•"/>
-            </a:pPr>
-            <a:r>
-              <a:rPr lang="en-US" sz="1600" dirty="0">
-                <a:solidFill>
-                  <a:srgbClr val="333333"/>
-                </a:solidFill>
-              </a:rPr>
-              <a:t>We evaluate the success of a financial model by comparing its outputs to actual results and assessing its limitations.</a:t>
-            </a:r>
-            <a:endParaRPr lang="en-US" sz="1600" dirty="0"/>
-          </a:p>
-          <a:p>
-            <a:pPr marL="342900" indent="-342900">
-              <a:buSzPct val="100000"/>
-              <a:buChar char="•"/>
-            </a:pPr>
-            <a:r>
-              <a:rPr lang="en-US" sz="1600" dirty="0">
-                <a:solidFill>
-                  <a:srgbClr val="333333"/>
-                </a:solidFill>
-              </a:rPr>
-              <a:t>A good final project presentation includes clear communication, visual aids, and a demonstration of financial modeling concepts.</a:t>
-            </a:r>
-            <a:endParaRPr lang="en-US" sz="1600" dirty="0"/>
-          </a:p>
-        </p:txBody>
-      </p:sp>
-      <p:sp>
-        <p:nvSpPr>
-          <p:cNvPr id="4" name="Text 2"/>
-          <p:cNvSpPr/>
-          <p:nvPr/>
-        </p:nvSpPr>
-        <p:spPr>
-          <a:xfrm>
-            <a:off x="457200" y="4709160"/>
-            <a:ext cx="8229600" cy="320040"/>
+              <a:rPr lang="en-US" sz="1500" dirty="0">
+                <a:solidFill>
+                  <a:srgbClr val="1C1917"/>
+                </a:solidFill>
+                <a:latin typeface="Arial" pitchFamily="34" charset="0"/>
+                <a:ea typeface="Arial" pitchFamily="34" charset="-122"/>
+                <a:cs typeface="Arial" pitchFamily="34" charset="-120"/>
+              </a:rPr>
+              <a:t>Step 2 — Identify the drivers.</a:t>
+            </a:r>
+            <a:endParaRPr lang="en-US" sz="1500" dirty="0"/>
+          </a:p>
+        </p:txBody>
+      </p:sp>
+    </p:spTree>
+  </p:cSld>
+  <p:clrMapOvr>
+    <a:masterClrMapping/>
+  </p:clrMapOvr>
+</p:sld>
+</file>
+
+<file path=ppt/slides/slide9.xml><?xml version="1.0" encoding="utf-8"?>
+<p:sld xmlns:a="http://schemas.openxmlformats.org/drawingml/2006/main" xmlns:r="http://schemas.openxmlformats.org/officeDocument/2006/relationships" xmlns:p="http://schemas.openxmlformats.org/presentationml/2006/main">
+  <p:cSld name="Slide 9">
+    <p:bg>
+      <p:bgPr>
+        <a:solidFill>
+          <a:srgbClr val="FFFFFF"/>
+        </a:solidFill>
+      </p:bgPr>
+    </p:bg>
+    <p:spTree>
+      <p:nvGrpSpPr>
+        <p:cNvPr id="1" name=""/>
+        <p:cNvGrpSpPr/>
+        <p:nvPr/>
+      </p:nvGrpSpPr>
+      <p:grpSpPr>
+        <a:xfrm>
+          <a:off x="0" y="0"/>
+          <a:ext cx="0" cy="0"/>
+          <a:chOff x="0" y="0"/>
+          <a:chExt cx="0" cy="0"/>
+        </a:xfrm>
+      </p:grpSpPr>
+      <p:sp>
+        <p:nvSpPr>
+          <p:cNvPr id="2" name="Shape 0"/>
+          <p:cNvSpPr/>
+          <p:nvPr/>
+        </p:nvSpPr>
+        <p:spPr>
+          <a:xfrm>
+            <a:off x="411480" y="384048"/>
+            <a:ext cx="82296" cy="310896"/>
+          </a:xfrm>
+          <a:prstGeom prst="rect">
+            <a:avLst/>
+          </a:prstGeom>
+          <a:solidFill>
+            <a:srgbClr val="B45309"/>
+          </a:solidFill>
+          <a:ln/>
+        </p:spPr>
+      </p:sp>
+      <p:sp>
+        <p:nvSpPr>
+          <p:cNvPr id="3" name="Text 1"/>
+          <p:cNvSpPr/>
+          <p:nvPr/>
+        </p:nvSpPr>
+        <p:spPr>
+          <a:xfrm>
+            <a:off x="566928" y="292608"/>
+            <a:ext cx="8138160" cy="502920"/>
           </a:xfrm>
           <a:prstGeom prst="rect">
             <a:avLst/>
@@ -4041,14 +6579,608 @@
               <a:buNone/>
             </a:pPr>
             <a:r>
-              <a:rPr lang="en-US" sz="800" dirty="0">
+              <a:rPr lang="en-US" sz="2000" b="1" dirty="0">
+                <a:solidFill>
+                  <a:srgbClr val="1C1917"/>
+                </a:solidFill>
+                <a:latin typeface="Arial" pitchFamily="34" charset="0"/>
+                <a:ea typeface="Arial" pitchFamily="34" charset="-122"/>
+                <a:cs typeface="Arial" pitchFamily="34" charset="-120"/>
+              </a:rPr>
+              <a:t>DCF Example: Cash Flow Present Values</a:t>
+            </a:r>
+            <a:endParaRPr lang="en-US" sz="2000" dirty="0"/>
+          </a:p>
+        </p:txBody>
+      </p:sp>
+      <p:sp>
+        <p:nvSpPr>
+          <p:cNvPr id="4" name="Text 2"/>
+          <p:cNvSpPr/>
+          <p:nvPr/>
+        </p:nvSpPr>
+        <p:spPr>
+          <a:xfrm>
+            <a:off x="566928" y="4681728"/>
+            <a:ext cx="8138160" cy="320040"/>
+          </a:xfrm>
+          <a:prstGeom prst="rect">
+            <a:avLst/>
+          </a:prstGeom>
+          <a:noFill/>
+          <a:ln/>
+        </p:spPr>
+        <p:txBody>
+          <a:bodyPr wrap="square" rtlCol="0" anchor="ctr"/>
+          <a:lstStyle/>
+          <a:p>
+            <a:pPr indent="0" marL="0">
+              <a:buNone/>
+            </a:pPr>
+            <a:r>
+              <a:rPr lang="en-US" sz="1000" i="1" dirty="0">
+                <a:solidFill>
+                  <a:srgbClr val="78716C"/>
+                </a:solidFill>
+                <a:latin typeface="Arial" pitchFamily="34" charset="0"/>
+                <a:ea typeface="Arial" pitchFamily="34" charset="-122"/>
+                <a:cs typeface="Arial" pitchFamily="34" charset="-120"/>
+              </a:rPr>
+              <a:t>Total PV $197,370 minus $200,000 investment yields NPV of −$2,630</a:t>
+            </a:r>
+            <a:endParaRPr lang="en-US" sz="1000" dirty="0"/>
+          </a:p>
+        </p:txBody>
+      </p:sp>
+      <p:sp>
+        <p:nvSpPr>
+          <p:cNvPr id="5" name="Text 3"/>
+          <p:cNvSpPr/>
+          <p:nvPr/>
+        </p:nvSpPr>
+        <p:spPr>
+          <a:xfrm>
+            <a:off x="411480" y="4919472"/>
+            <a:ext cx="8321040" cy="219456"/>
+          </a:xfrm>
+          <a:prstGeom prst="rect">
+            <a:avLst/>
+          </a:prstGeom>
+          <a:noFill/>
+          <a:ln/>
+        </p:spPr>
+        <p:txBody>
+          <a:bodyPr wrap="square" rtlCol="0" anchor="ctr"/>
+          <a:lstStyle/>
+          <a:p>
+            <a:pPr indent="0" marL="0">
+              <a:buNone/>
+            </a:pPr>
+            <a:r>
+              <a:rPr lang="en-US" sz="750" dirty="0">
                 <a:solidFill>
                   <a:srgbClr val="AAAAAA"/>
                 </a:solidFill>
+                <a:latin typeface="Arial" pitchFamily="34" charset="0"/>
+                <a:ea typeface="Arial" pitchFamily="34" charset="-122"/>
+                <a:cs typeface="Arial" pitchFamily="34" charset="-120"/>
               </a:rPr>
               <a:t>Lesson Forge Pro (owner) — This content is educational material only and does not constitute financial, investment, or trading advice.</a:t>
             </a:r>
-            <a:endParaRPr lang="en-US" sz="800" dirty="0"/>
+            <a:endParaRPr lang="en-US" sz="750" dirty="0"/>
+          </a:p>
+        </p:txBody>
+      </p:sp>
+      <p:sp>
+        <p:nvSpPr>
+          <p:cNvPr id="6" name="Shape 4"/>
+          <p:cNvSpPr/>
+          <p:nvPr/>
+        </p:nvSpPr>
+        <p:spPr>
+          <a:xfrm>
+            <a:off x="685800" y="4206240"/>
+            <a:ext cx="7772400" cy="0"/>
+          </a:xfrm>
+          <a:prstGeom prst="line">
+            <a:avLst/>
+          </a:prstGeom>
+          <a:noFill/>
+          <a:ln w="12700">
+            <a:solidFill>
+              <a:srgbClr val="1C1917"/>
+            </a:solidFill>
+            <a:prstDash val="solid"/>
+          </a:ln>
+        </p:spPr>
+      </p:sp>
+      <p:sp>
+        <p:nvSpPr>
+          <p:cNvPr id="7" name="Shape 5"/>
+          <p:cNvSpPr/>
+          <p:nvPr/>
+        </p:nvSpPr>
+        <p:spPr>
+          <a:xfrm>
+            <a:off x="1184148" y="3275220"/>
+            <a:ext cx="777240" cy="931020"/>
+          </a:xfrm>
+          <a:prstGeom prst="rect">
+            <a:avLst/>
+          </a:prstGeom>
+          <a:solidFill>
+            <a:srgbClr val="B45309"/>
+          </a:solidFill>
+          <a:ln/>
+        </p:spPr>
+      </p:sp>
+      <p:sp>
+        <p:nvSpPr>
+          <p:cNvPr id="8" name="Text 6"/>
+          <p:cNvSpPr/>
+          <p:nvPr/>
+        </p:nvSpPr>
+        <p:spPr>
+          <a:xfrm>
+            <a:off x="1001268" y="3000900"/>
+            <a:ext cx="1143000" cy="237744"/>
+          </a:xfrm>
+          <a:prstGeom prst="rect">
+            <a:avLst/>
+          </a:prstGeom>
+          <a:noFill/>
+          <a:ln/>
+        </p:spPr>
+        <p:txBody>
+          <a:bodyPr wrap="square" rtlCol="0" anchor="ctr"/>
+          <a:lstStyle/>
+          <a:p>
+            <a:pPr algn="ctr" indent="0" marL="0">
+              <a:buNone/>
+            </a:pPr>
+            <a:r>
+              <a:rPr lang="en-US" sz="950" b="1" dirty="0">
+                <a:solidFill>
+                  <a:srgbClr val="1C1917"/>
+                </a:solidFill>
+                <a:latin typeface="Arial" pitchFamily="34" charset="0"/>
+                <a:ea typeface="Arial" pitchFamily="34" charset="-122"/>
+                <a:cs typeface="Arial" pitchFamily="34" charset="-120"/>
+              </a:rPr>
+              <a:t>63636</a:t>
+            </a:r>
+            <a:endParaRPr lang="en-US" sz="950" dirty="0"/>
+          </a:p>
+        </p:txBody>
+      </p:sp>
+      <p:sp>
+        <p:nvSpPr>
+          <p:cNvPr id="9" name="Text 7"/>
+          <p:cNvSpPr/>
+          <p:nvPr/>
+        </p:nvSpPr>
+        <p:spPr>
+          <a:xfrm>
+            <a:off x="955548" y="4315968"/>
+            <a:ext cx="1234440" cy="502920"/>
+          </a:xfrm>
+          <a:prstGeom prst="rect">
+            <a:avLst/>
+          </a:prstGeom>
+          <a:noFill/>
+          <a:ln/>
+        </p:spPr>
+        <p:txBody>
+          <a:bodyPr wrap="square" rtlCol="0" anchor="ctr"/>
+          <a:lstStyle/>
+          <a:p>
+            <a:pPr algn="ctr" indent="0" marL="0">
+              <a:buNone/>
+            </a:pPr>
+            <a:r>
+              <a:rPr lang="en-US" sz="850" dirty="0">
+                <a:solidFill>
+                  <a:srgbClr val="78716C"/>
+                </a:solidFill>
+                <a:latin typeface="Arial" pitchFamily="34" charset="0"/>
+                <a:ea typeface="Arial" pitchFamily="34" charset="-122"/>
+                <a:cs typeface="Arial" pitchFamily="34" charset="-120"/>
+              </a:rPr>
+              <a:t>Year 1 FCF</a:t>
+            </a:r>
+            <a:endParaRPr lang="en-US" sz="850" dirty="0"/>
+          </a:p>
+        </p:txBody>
+      </p:sp>
+      <p:sp>
+        <p:nvSpPr>
+          <p:cNvPr id="10" name="Shape 8"/>
+          <p:cNvSpPr/>
+          <p:nvPr/>
+        </p:nvSpPr>
+        <p:spPr>
+          <a:xfrm>
+            <a:off x="2683764" y="3238936"/>
+            <a:ext cx="777240" cy="967304"/>
+          </a:xfrm>
+          <a:prstGeom prst="rect">
+            <a:avLst/>
+          </a:prstGeom>
+          <a:solidFill>
+            <a:srgbClr val="B45309"/>
+          </a:solidFill>
+          <a:ln/>
+        </p:spPr>
+      </p:sp>
+      <p:sp>
+        <p:nvSpPr>
+          <p:cNvPr id="11" name="Text 9"/>
+          <p:cNvSpPr/>
+          <p:nvPr/>
+        </p:nvSpPr>
+        <p:spPr>
+          <a:xfrm>
+            <a:off x="2500884" y="2964616"/>
+            <a:ext cx="1143000" cy="237744"/>
+          </a:xfrm>
+          <a:prstGeom prst="rect">
+            <a:avLst/>
+          </a:prstGeom>
+          <a:noFill/>
+          <a:ln/>
+        </p:spPr>
+        <p:txBody>
+          <a:bodyPr wrap="square" rtlCol="0" anchor="ctr"/>
+          <a:lstStyle/>
+          <a:p>
+            <a:pPr algn="ctr" indent="0" marL="0">
+              <a:buNone/>
+            </a:pPr>
+            <a:r>
+              <a:rPr lang="en-US" sz="950" b="1" dirty="0">
+                <a:solidFill>
+                  <a:srgbClr val="1C1917"/>
+                </a:solidFill>
+                <a:latin typeface="Arial" pitchFamily="34" charset="0"/>
+                <a:ea typeface="Arial" pitchFamily="34" charset="-122"/>
+                <a:cs typeface="Arial" pitchFamily="34" charset="-120"/>
+              </a:rPr>
+              <a:t>66116</a:t>
+            </a:r>
+            <a:endParaRPr lang="en-US" sz="950" dirty="0"/>
+          </a:p>
+        </p:txBody>
+      </p:sp>
+      <p:sp>
+        <p:nvSpPr>
+          <p:cNvPr id="12" name="Text 10"/>
+          <p:cNvSpPr/>
+          <p:nvPr/>
+        </p:nvSpPr>
+        <p:spPr>
+          <a:xfrm>
+            <a:off x="2455164" y="4315968"/>
+            <a:ext cx="1234440" cy="502920"/>
+          </a:xfrm>
+          <a:prstGeom prst="rect">
+            <a:avLst/>
+          </a:prstGeom>
+          <a:noFill/>
+          <a:ln/>
+        </p:spPr>
+        <p:txBody>
+          <a:bodyPr wrap="square" rtlCol="0" anchor="ctr"/>
+          <a:lstStyle/>
+          <a:p>
+            <a:pPr algn="ctr" indent="0" marL="0">
+              <a:buNone/>
+            </a:pPr>
+            <a:r>
+              <a:rPr lang="en-US" sz="850" dirty="0">
+                <a:solidFill>
+                  <a:srgbClr val="78716C"/>
+                </a:solidFill>
+                <a:latin typeface="Arial" pitchFamily="34" charset="0"/>
+                <a:ea typeface="Arial" pitchFamily="34" charset="-122"/>
+                <a:cs typeface="Arial" pitchFamily="34" charset="-120"/>
+              </a:rPr>
+              <a:t>Year 2 FCF</a:t>
+            </a:r>
+            <a:endParaRPr lang="en-US" sz="850" dirty="0"/>
+          </a:p>
+        </p:txBody>
+      </p:sp>
+      <p:sp>
+        <p:nvSpPr>
+          <p:cNvPr id="13" name="Shape 11"/>
+          <p:cNvSpPr/>
+          <p:nvPr/>
+        </p:nvSpPr>
+        <p:spPr>
+          <a:xfrm>
+            <a:off x="4183380" y="3216962"/>
+            <a:ext cx="777240" cy="989278"/>
+          </a:xfrm>
+          <a:prstGeom prst="rect">
+            <a:avLst/>
+          </a:prstGeom>
+          <a:solidFill>
+            <a:srgbClr val="B45309"/>
+          </a:solidFill>
+          <a:ln/>
+        </p:spPr>
+      </p:sp>
+      <p:sp>
+        <p:nvSpPr>
+          <p:cNvPr id="14" name="Text 12"/>
+          <p:cNvSpPr/>
+          <p:nvPr/>
+        </p:nvSpPr>
+        <p:spPr>
+          <a:xfrm>
+            <a:off x="4000500" y="2942642"/>
+            <a:ext cx="1143000" cy="237744"/>
+          </a:xfrm>
+          <a:prstGeom prst="rect">
+            <a:avLst/>
+          </a:prstGeom>
+          <a:noFill/>
+          <a:ln/>
+        </p:spPr>
+        <p:txBody>
+          <a:bodyPr wrap="square" rtlCol="0" anchor="ctr"/>
+          <a:lstStyle/>
+          <a:p>
+            <a:pPr algn="ctr" indent="0" marL="0">
+              <a:buNone/>
+            </a:pPr>
+            <a:r>
+              <a:rPr lang="en-US" sz="950" b="1" dirty="0">
+                <a:solidFill>
+                  <a:srgbClr val="1C1917"/>
+                </a:solidFill>
+                <a:latin typeface="Arial" pitchFamily="34" charset="0"/>
+                <a:ea typeface="Arial" pitchFamily="34" charset="-122"/>
+                <a:cs typeface="Arial" pitchFamily="34" charset="-120"/>
+              </a:rPr>
+              <a:t>67618</a:t>
+            </a:r>
+            <a:endParaRPr lang="en-US" sz="950" dirty="0"/>
+          </a:p>
+        </p:txBody>
+      </p:sp>
+      <p:sp>
+        <p:nvSpPr>
+          <p:cNvPr id="15" name="Text 13"/>
+          <p:cNvSpPr/>
+          <p:nvPr/>
+        </p:nvSpPr>
+        <p:spPr>
+          <a:xfrm>
+            <a:off x="3954780" y="4315968"/>
+            <a:ext cx="1234440" cy="502920"/>
+          </a:xfrm>
+          <a:prstGeom prst="rect">
+            <a:avLst/>
+          </a:prstGeom>
+          <a:noFill/>
+          <a:ln/>
+        </p:spPr>
+        <p:txBody>
+          <a:bodyPr wrap="square" rtlCol="0" anchor="ctr"/>
+          <a:lstStyle/>
+          <a:p>
+            <a:pPr algn="ctr" indent="0" marL="0">
+              <a:buNone/>
+            </a:pPr>
+            <a:r>
+              <a:rPr lang="en-US" sz="850" dirty="0">
+                <a:solidFill>
+                  <a:srgbClr val="78716C"/>
+                </a:solidFill>
+                <a:latin typeface="Arial" pitchFamily="34" charset="0"/>
+                <a:ea typeface="Arial" pitchFamily="34" charset="-122"/>
+                <a:cs typeface="Arial" pitchFamily="34" charset="-120"/>
+              </a:rPr>
+              <a:t>Year 3 FCF</a:t>
+            </a:r>
+            <a:endParaRPr lang="en-US" sz="850" dirty="0"/>
+          </a:p>
+        </p:txBody>
+      </p:sp>
+      <p:sp>
+        <p:nvSpPr>
+          <p:cNvPr id="16" name="Shape 14"/>
+          <p:cNvSpPr/>
+          <p:nvPr/>
+        </p:nvSpPr>
+        <p:spPr>
+          <a:xfrm>
+            <a:off x="5682996" y="1318638"/>
+            <a:ext cx="777240" cy="2887602"/>
+          </a:xfrm>
+          <a:prstGeom prst="rect">
+            <a:avLst/>
+          </a:prstGeom>
+          <a:solidFill>
+            <a:srgbClr val="B45309"/>
+          </a:solidFill>
+          <a:ln/>
+        </p:spPr>
+      </p:sp>
+      <p:sp>
+        <p:nvSpPr>
+          <p:cNvPr id="17" name="Text 15"/>
+          <p:cNvSpPr/>
+          <p:nvPr/>
+        </p:nvSpPr>
+        <p:spPr>
+          <a:xfrm>
+            <a:off x="5500116" y="1044318"/>
+            <a:ext cx="1143000" cy="237744"/>
+          </a:xfrm>
+          <a:prstGeom prst="rect">
+            <a:avLst/>
+          </a:prstGeom>
+          <a:noFill/>
+          <a:ln/>
+        </p:spPr>
+        <p:txBody>
+          <a:bodyPr wrap="square" rtlCol="0" anchor="ctr"/>
+          <a:lstStyle/>
+          <a:p>
+            <a:pPr algn="ctr" indent="0" marL="0">
+              <a:buNone/>
+            </a:pPr>
+            <a:r>
+              <a:rPr lang="en-US" sz="950" b="1" dirty="0">
+                <a:solidFill>
+                  <a:srgbClr val="1C1917"/>
+                </a:solidFill>
+                <a:latin typeface="Arial" pitchFamily="34" charset="0"/>
+                <a:ea typeface="Arial" pitchFamily="34" charset="-122"/>
+                <a:cs typeface="Arial" pitchFamily="34" charset="-120"/>
+              </a:rPr>
+              <a:t>197370</a:t>
+            </a:r>
+            <a:endParaRPr lang="en-US" sz="950" dirty="0"/>
+          </a:p>
+        </p:txBody>
+      </p:sp>
+      <p:sp>
+        <p:nvSpPr>
+          <p:cNvPr id="18" name="Text 16"/>
+          <p:cNvSpPr/>
+          <p:nvPr/>
+        </p:nvSpPr>
+        <p:spPr>
+          <a:xfrm>
+            <a:off x="5454396" y="4315968"/>
+            <a:ext cx="1234440" cy="502920"/>
+          </a:xfrm>
+          <a:prstGeom prst="rect">
+            <a:avLst/>
+          </a:prstGeom>
+          <a:noFill/>
+          <a:ln/>
+        </p:spPr>
+        <p:txBody>
+          <a:bodyPr wrap="square" rtlCol="0" anchor="ctr"/>
+          <a:lstStyle/>
+          <a:p>
+            <a:pPr algn="ctr" indent="0" marL="0">
+              <a:buNone/>
+            </a:pPr>
+            <a:r>
+              <a:rPr lang="en-US" sz="850" dirty="0">
+                <a:solidFill>
+                  <a:srgbClr val="78716C"/>
+                </a:solidFill>
+                <a:latin typeface="Arial" pitchFamily="34" charset="0"/>
+                <a:ea typeface="Arial" pitchFamily="34" charset="-122"/>
+                <a:cs typeface="Arial" pitchFamily="34" charset="-120"/>
+              </a:rPr>
+              <a:t>Total PV</a:t>
+            </a:r>
+            <a:endParaRPr lang="en-US" sz="850" dirty="0"/>
+          </a:p>
+        </p:txBody>
+      </p:sp>
+      <p:sp>
+        <p:nvSpPr>
+          <p:cNvPr id="19" name="Shape 17"/>
+          <p:cNvSpPr/>
+          <p:nvPr/>
+        </p:nvSpPr>
+        <p:spPr>
+          <a:xfrm>
+            <a:off x="7182612" y="1280160"/>
+            <a:ext cx="777240" cy="2926080"/>
+          </a:xfrm>
+          <a:prstGeom prst="rect">
+            <a:avLst/>
+          </a:prstGeom>
+          <a:solidFill>
+            <a:srgbClr val="B45309"/>
+          </a:solidFill>
+          <a:ln/>
+        </p:spPr>
+      </p:sp>
+      <p:sp>
+        <p:nvSpPr>
+          <p:cNvPr id="20" name="Text 18"/>
+          <p:cNvSpPr/>
+          <p:nvPr/>
+        </p:nvSpPr>
+        <p:spPr>
+          <a:xfrm>
+            <a:off x="6999732" y="1005840"/>
+            <a:ext cx="1143000" cy="237744"/>
+          </a:xfrm>
+          <a:prstGeom prst="rect">
+            <a:avLst/>
+          </a:prstGeom>
+          <a:noFill/>
+          <a:ln/>
+        </p:spPr>
+        <p:txBody>
+          <a:bodyPr wrap="square" rtlCol="0" anchor="ctr"/>
+          <a:lstStyle/>
+          <a:p>
+            <a:pPr algn="ctr" indent="0" marL="0">
+              <a:buNone/>
+            </a:pPr>
+            <a:r>
+              <a:rPr lang="en-US" sz="950" b="1" dirty="0">
+                <a:solidFill>
+                  <a:srgbClr val="1C1917"/>
+                </a:solidFill>
+                <a:latin typeface="Arial" pitchFamily="34" charset="0"/>
+                <a:ea typeface="Arial" pitchFamily="34" charset="-122"/>
+                <a:cs typeface="Arial" pitchFamily="34" charset="-120"/>
+              </a:rPr>
+              <a:t>200000</a:t>
+            </a:r>
+            <a:endParaRPr lang="en-US" sz="950" dirty="0"/>
+          </a:p>
+        </p:txBody>
+      </p:sp>
+      <p:sp>
+        <p:nvSpPr>
+          <p:cNvPr id="21" name="Text 19"/>
+          <p:cNvSpPr/>
+          <p:nvPr/>
+        </p:nvSpPr>
+        <p:spPr>
+          <a:xfrm>
+            <a:off x="6954012" y="4315968"/>
+            <a:ext cx="1234440" cy="502920"/>
+          </a:xfrm>
+          <a:prstGeom prst="rect">
+            <a:avLst/>
+          </a:prstGeom>
+          <a:noFill/>
+          <a:ln/>
+        </p:spPr>
+        <p:txBody>
+          <a:bodyPr wrap="square" rtlCol="0" anchor="ctr"/>
+          <a:lstStyle/>
+          <a:p>
+            <a:pPr algn="ctr" indent="0" marL="0">
+              <a:buNone/>
+            </a:pPr>
+            <a:r>
+              <a:rPr lang="en-US" sz="850" dirty="0">
+                <a:solidFill>
+                  <a:srgbClr val="78716C"/>
+                </a:solidFill>
+                <a:latin typeface="Arial" pitchFamily="34" charset="0"/>
+                <a:ea typeface="Arial" pitchFamily="34" charset="-122"/>
+                <a:cs typeface="Arial" pitchFamily="34" charset="-120"/>
+              </a:rPr>
+              <a:t>Initial Investment</a:t>
+            </a:r>
+            <a:endParaRPr lang="en-US" sz="850" dirty="0"/>
           </a:p>
         </p:txBody>
       </p:sp>

--- a/docs/fmva/packs/day7-slides.pptx
+++ b/docs/fmva/packs/day7-slides.pptx
@@ -17,11 +17,9 @@
     <p:sldId id="265" r:id="rId11"/>
     <p:sldId id="266" r:id="rId12"/>
     <p:sldId id="267" r:id="rId13"/>
-    <p:sldId id="268" r:id="rId14"/>
-    <p:sldId id="269" r:id="rId15"/>
   </p:sldIdLst>
   <p:notesMasterIdLst>
-    <p:notesMasterId r:id="rId16"/>
+    <p:notesMasterId r:id="rId14"/>
   </p:notesMasterIdLst>
   <p:sldSz cx="9144000" cy="5148072"/>
   <p:notesSz cx="5148072" cy="9144000"/>
@@ -803,182 +801,6 @@
             <a:fld id="{F7021451-1387-4CA6-816F-3879F97B5CBC}" type="slidenum">
               <a:rPr lang="en-US"/>
               <a:t>12</a:t>
-            </a:fld>
-            <a:endParaRPr lang="en-US"/>
-          </a:p>
-        </p:txBody>
-      </p:sp>
-    </p:spTree>
-    <p:extLst>
-      <p:ext uri="{BB962C8B-B14F-4D97-AF65-F5344CB8AC3E}">
-        <p14:creationId xmlns:p14="http://schemas.microsoft.com/office/powerpoint/2010/main" val="1024086991"/>
-      </p:ext>
-    </p:extLst>
-  </p:cSld>
-  <p:clrMapOvr>
-    <a:masterClrMapping/>
-  </p:clrMapOvr>
-</p:notes>
-</file>
-
-<file path=ppt/notesSlides/notesSlide13.xml><?xml version="1.0" encoding="utf-8"?>
-<p:notes xmlns:a="http://schemas.openxmlformats.org/drawingml/2006/main" xmlns:r="http://schemas.openxmlformats.org/officeDocument/2006/relationships" xmlns:p="http://schemas.openxmlformats.org/presentationml/2006/main">
-  <p:cSld>
-    <p:spTree>
-      <p:nvGrpSpPr>
-        <p:cNvPr id="1" name=""/>
-        <p:cNvGrpSpPr/>
-        <p:nvPr/>
-      </p:nvGrpSpPr>
-      <p:grpSpPr>
-        <a:xfrm>
-          <a:off x="0" y="0"/>
-          <a:ext cx="0" cy="0"/>
-          <a:chOff x="0" y="0"/>
-          <a:chExt cx="0" cy="0"/>
-        </a:xfrm>
-      </p:grpSpPr>
-      <p:sp>
-        <p:nvSpPr>
-          <p:cNvPr id="2" name="Slide Image Placeholder 1"/>
-          <p:cNvSpPr>
-            <a:spLocks noGrp="1" noRot="1" noChangeAspect="1"/>
-          </p:cNvSpPr>
-          <p:nvPr>
-            <p:ph type="sldImg"/>
-          </p:nvPr>
-        </p:nvSpPr>
-        <p:spPr/>
-      </p:sp>
-      <p:sp>
-        <p:nvSpPr>
-          <p:cNvPr id="3" name="Notes Placeholder 2"/>
-          <p:cNvSpPr>
-            <a:spLocks noGrp="1"/>
-          </p:cNvSpPr>
-          <p:nvPr>
-            <p:ph type="body" idx="1"/>
-          </p:nvPr>
-        </p:nvSpPr>
-        <p:spPr/>
-        <p:txBody>
-          <a:bodyPr/>
-          <a:lstStyle/>
-          <a:p>
-            <a:r>
-              <a:rPr lang="en-US" dirty="0"/>
-              <a:t/>
-            </a:r>
-            <a:endParaRPr lang="en-US" dirty="0"/>
-          </a:p>
-        </p:txBody>
-      </p:sp>
-      <p:sp>
-        <p:nvSpPr>
-          <p:cNvPr id="4" name="Slide Number Placeholder 3"/>
-          <p:cNvSpPr>
-            <a:spLocks noGrp="1"/>
-          </p:cNvSpPr>
-          <p:nvPr>
-            <p:ph type="sldNum" sz="quarter" idx="10"/>
-          </p:nvPr>
-        </p:nvSpPr>
-        <p:spPr/>
-        <p:txBody>
-          <a:bodyPr/>
-          <a:lstStyle/>
-          <a:p>
-            <a:fld id="{F7021451-1387-4CA6-816F-3879F97B5CBC}" type="slidenum">
-              <a:rPr lang="en-US"/>
-              <a:t>13</a:t>
-            </a:fld>
-            <a:endParaRPr lang="en-US"/>
-          </a:p>
-        </p:txBody>
-      </p:sp>
-    </p:spTree>
-    <p:extLst>
-      <p:ext uri="{BB962C8B-B14F-4D97-AF65-F5344CB8AC3E}">
-        <p14:creationId xmlns:p14="http://schemas.microsoft.com/office/powerpoint/2010/main" val="1024086991"/>
-      </p:ext>
-    </p:extLst>
-  </p:cSld>
-  <p:clrMapOvr>
-    <a:masterClrMapping/>
-  </p:clrMapOvr>
-</p:notes>
-</file>
-
-<file path=ppt/notesSlides/notesSlide14.xml><?xml version="1.0" encoding="utf-8"?>
-<p:notes xmlns:a="http://schemas.openxmlformats.org/drawingml/2006/main" xmlns:r="http://schemas.openxmlformats.org/officeDocument/2006/relationships" xmlns:p="http://schemas.openxmlformats.org/presentationml/2006/main">
-  <p:cSld>
-    <p:spTree>
-      <p:nvGrpSpPr>
-        <p:cNvPr id="1" name=""/>
-        <p:cNvGrpSpPr/>
-        <p:nvPr/>
-      </p:nvGrpSpPr>
-      <p:grpSpPr>
-        <a:xfrm>
-          <a:off x="0" y="0"/>
-          <a:ext cx="0" cy="0"/>
-          <a:chOff x="0" y="0"/>
-          <a:chExt cx="0" cy="0"/>
-        </a:xfrm>
-      </p:grpSpPr>
-      <p:sp>
-        <p:nvSpPr>
-          <p:cNvPr id="2" name="Slide Image Placeholder 1"/>
-          <p:cNvSpPr>
-            <a:spLocks noGrp="1" noRot="1" noChangeAspect="1"/>
-          </p:cNvSpPr>
-          <p:nvPr>
-            <p:ph type="sldImg"/>
-          </p:nvPr>
-        </p:nvSpPr>
-        <p:spPr/>
-      </p:sp>
-      <p:sp>
-        <p:nvSpPr>
-          <p:cNvPr id="3" name="Notes Placeholder 2"/>
-          <p:cNvSpPr>
-            <a:spLocks noGrp="1"/>
-          </p:cNvSpPr>
-          <p:nvPr>
-            <p:ph type="body" idx="1"/>
-          </p:nvPr>
-        </p:nvSpPr>
-        <p:spPr/>
-        <p:txBody>
-          <a:bodyPr/>
-          <a:lstStyle/>
-          <a:p>
-            <a:r>
-              <a:rPr lang="en-US" dirty="0"/>
-              <a:t/>
-            </a:r>
-            <a:endParaRPr lang="en-US" dirty="0"/>
-          </a:p>
-        </p:txBody>
-      </p:sp>
-      <p:sp>
-        <p:nvSpPr>
-          <p:cNvPr id="4" name="Slide Number Placeholder 3"/>
-          <p:cNvSpPr>
-            <a:spLocks noGrp="1"/>
-          </p:cNvSpPr>
-          <p:nvPr>
-            <p:ph type="sldNum" sz="quarter" idx="10"/>
-          </p:nvPr>
-        </p:nvSpPr>
-        <p:spPr/>
-        <p:txBody>
-          <a:bodyPr/>
-          <a:lstStyle/>
-          <a:p>
-            <a:fld id="{F7021451-1387-4CA6-816F-3879F97B5CBC}" type="slidenum">
-              <a:rPr lang="en-US"/>
-              <a:t>14</a:t>
             </a:fld>
             <a:endParaRPr lang="en-US"/>
           </a:p>
@@ -2309,8 +2131,8 @@
         </p:nvSpPr>
         <p:spPr>
           <a:xfrm>
-            <a:off x="411480" y="402336"/>
-            <a:ext cx="82296" cy="329184"/>
+            <a:off x="411480" y="384048"/>
+            <a:ext cx="82296" cy="310896"/>
           </a:xfrm>
           <a:prstGeom prst="rect">
             <a:avLst/>
@@ -2330,7 +2152,7 @@
         <p:spPr>
           <a:xfrm>
             <a:off x="566928" y="292608"/>
-            <a:ext cx="8138160" cy="548640"/>
+            <a:ext cx="8138160" cy="502920"/>
           </a:xfrm>
           <a:prstGeom prst="rect">
             <a:avLst/>
@@ -2346,7 +2168,7 @@
               <a:buNone/>
             </a:pPr>
             <a:r>
-              <a:rPr lang="en-US" sz="2100" b="1" dirty="0">
+              <a:rPr lang="en-US" sz="2000" b="1" dirty="0">
                 <a:solidFill>
                   <a:srgbClr val="1C1917"/>
                 </a:solidFill>
@@ -2354,34 +2176,50 @@
                 <a:ea typeface="Arial" pitchFamily="34" charset="-122"/>
                 <a:cs typeface="Arial" pitchFamily="34" charset="-120"/>
               </a:rPr>
-              <a:t>The standard procedure</a:t>
-            </a:r>
-            <a:endParaRPr lang="en-US" sz="2100" dirty="0"/>
-          </a:p>
-        </p:txBody>
-      </p:sp>
-      <p:sp>
-        <p:nvSpPr>
-          <p:cNvPr id="4" name="Shape 2"/>
-          <p:cNvSpPr/>
-          <p:nvPr/>
-        </p:nvSpPr>
-        <p:spPr>
-          <a:xfrm>
-            <a:off x="411480" y="960120"/>
-            <a:ext cx="8321040" cy="0"/>
-          </a:xfrm>
-          <a:prstGeom prst="line">
-            <a:avLst/>
-          </a:prstGeom>
-          <a:noFill/>
-          <a:ln w="12700">
-            <a:solidFill>
-              <a:srgbClr val="E7E5E4"/>
-            </a:solidFill>
-            <a:prstDash val="solid"/>
-          </a:ln>
-        </p:spPr>
+              <a:t>DCF Free Cash Flow Build-Up</a:t>
+            </a:r>
+            <a:endParaRPr lang="en-US" sz="2000" dirty="0"/>
+          </a:p>
+        </p:txBody>
+      </p:sp>
+      <p:sp>
+        <p:nvSpPr>
+          <p:cNvPr id="4" name="Text 2"/>
+          <p:cNvSpPr/>
+          <p:nvPr/>
+        </p:nvSpPr>
+        <p:spPr>
+          <a:xfrm>
+            <a:off x="566928" y="4681728"/>
+            <a:ext cx="8138160" cy="320040"/>
+          </a:xfrm>
+          <a:prstGeom prst="rect">
+            <a:avLst/>
+          </a:prstGeom>
+          <a:noFill/>
+          <a:ln/>
+        </p:spPr>
+        <p:txBody>
+          <a:bodyPr wrap="square" rtlCol="0" anchor="ctr"/>
+          <a:lstStyle/>
+          <a:p>
+            <a:pPr indent="0" marL="0">
+              <a:buNone/>
+            </a:pPr>
+            <a:r>
+              <a:rPr lang="en-US" sz="1000" i="1" dirty="0">
+                <a:solidFill>
+                  <a:srgbClr val="78716C"/>
+                </a:solidFill>
+                <a:latin typeface="Arial" pitchFamily="34" charset="0"/>
+                <a:ea typeface="Arial" pitchFamily="34" charset="-122"/>
+                <a:cs typeface="Arial" pitchFamily="34" charset="-120"/>
+              </a:rPr>
+              <a:t>Each layer adjusts EBIT toward true cash generation for valuation</a:t>
+            </a:r>
+            <a:endParaRPr lang="en-US" sz="1000" dirty="0"/>
+          </a:p>
+        </p:txBody>
       </p:sp>
       <p:sp>
         <p:nvSpPr>
@@ -2391,8 +2229,8 @@
         </p:nvSpPr>
         <p:spPr>
           <a:xfrm>
-            <a:off x="411480" y="4864608"/>
-            <a:ext cx="8321040" cy="237744"/>
+            <a:off x="411480" y="4919472"/>
+            <a:ext cx="8321040" cy="219456"/>
           </a:xfrm>
           <a:prstGeom prst="rect">
             <a:avLst/>
@@ -2424,65 +2262,501 @@
       </p:sp>
       <p:sp>
         <p:nvSpPr>
-          <p:cNvPr id="6" name="Text 4"/>
-          <p:cNvSpPr/>
-          <p:nvPr/>
-        </p:nvSpPr>
-        <p:spPr>
-          <a:xfrm>
-            <a:off x="731520" y="1188720"/>
-            <a:ext cx="7680960" cy="3383280"/>
-          </a:xfrm>
-          <a:prstGeom prst="rect">
-            <a:avLst/>
-          </a:prstGeom>
-          <a:noFill/>
-          <a:ln/>
-        </p:spPr>
-        <p:txBody>
-          <a:bodyPr wrap="square" rtlCol="0" anchor="t"/>
-          <a:lstStyle/>
-          <a:p>
-            <a:pPr marL="152400" indent="-152400">
-              <a:spcAft>
-                <a:spcPts val="800"/>
-              </a:spcAft>
-              <a:buSzPct val="100000"/>
-              <a:buChar char="•"/>
-            </a:pPr>
-            <a:r>
-              <a:rPr lang="en-US" sz="1500" dirty="0">
-                <a:solidFill>
-                  <a:srgbClr val="1C1917"/>
-                </a:solidFill>
-                <a:latin typeface="Arial" pitchFamily="34" charset="0"/>
-                <a:ea typeface="Arial" pitchFamily="34" charset="-122"/>
-                <a:cs typeface="Arial" pitchFamily="34" charset="-120"/>
-              </a:rPr>
-              <a:t>Every well-built financial model follows a repeatable, auditable procedure. Mastering that procedure—inputs, s</a:t>
-            </a:r>
-            <a:endParaRPr lang="en-US" sz="1500" dirty="0"/>
-          </a:p>
-          <a:p>
-            <a:pPr marL="152400" indent="-152400">
-              <a:spcAft>
-                <a:spcPts val="800"/>
-              </a:spcAft>
-              <a:buSzPct val="100000"/>
-              <a:buChar char="•"/>
-            </a:pPr>
-            <a:r>
-              <a:rPr lang="en-US" sz="1500" dirty="0">
-                <a:solidFill>
-                  <a:srgbClr val="1C1917"/>
-                </a:solidFill>
-                <a:latin typeface="Arial" pitchFamily="34" charset="0"/>
-                <a:ea typeface="Arial" pitchFamily="34" charset="-122"/>
-                <a:cs typeface="Arial" pitchFamily="34" charset="-120"/>
-              </a:rPr>
-              <a:t>---</a:t>
-            </a:r>
-            <a:endParaRPr lang="en-US" sz="1500" dirty="0"/>
+          <p:cNvPr id="6" name="Shape 4"/>
+          <p:cNvSpPr/>
+          <p:nvPr/>
+        </p:nvSpPr>
+        <p:spPr>
+          <a:xfrm flipV="1">
+            <a:off x="2084832" y="1234440"/>
+            <a:ext cx="2048256" cy="658368"/>
+          </a:xfrm>
+          <a:prstGeom prst="trapezoid">
+            <a:avLst/>
+          </a:prstGeom>
+          <a:solidFill>
+            <a:srgbClr val="B45309">
+              <a:alpha val="40000"/>
+            </a:srgbClr>
+          </a:solidFill>
+          <a:ln/>
+        </p:spPr>
+      </p:sp>
+      <p:sp>
+        <p:nvSpPr>
+          <p:cNvPr id="7" name="Text 5"/>
+          <p:cNvSpPr/>
+          <p:nvPr/>
+        </p:nvSpPr>
+        <p:spPr>
+          <a:xfrm>
+            <a:off x="2084832" y="1289304"/>
+            <a:ext cx="2048256" cy="566928"/>
+          </a:xfrm>
+          <a:prstGeom prst="rect">
+            <a:avLst/>
+          </a:prstGeom>
+          <a:noFill/>
+          <a:ln/>
+        </p:spPr>
+        <p:txBody>
+          <a:bodyPr wrap="square" rtlCol="0" anchor="ctr"/>
+          <a:lstStyle/>
+          <a:p>
+            <a:pPr algn="ctr" indent="0" marL="0">
+              <a:buNone/>
+            </a:pPr>
+            <a:r>
+              <a:rPr lang="en-US" sz="1200" b="1" dirty="0">
+                <a:solidFill>
+                  <a:srgbClr val="FFFFFF"/>
+                </a:solidFill>
+                <a:latin typeface="Arial" pitchFamily="34" charset="0"/>
+                <a:ea typeface="Arial" pitchFamily="34" charset="-122"/>
+                <a:cs typeface="Arial" pitchFamily="34" charset="-120"/>
+              </a:rPr>
+              <a:t>EBIT × (1–t)</a:t>
+            </a:r>
+            <a:endParaRPr lang="en-US" sz="1200" dirty="0"/>
+          </a:p>
+        </p:txBody>
+      </p:sp>
+      <p:sp>
+        <p:nvSpPr>
+          <p:cNvPr id="8" name="Text 6"/>
+          <p:cNvSpPr/>
+          <p:nvPr/>
+        </p:nvSpPr>
+        <p:spPr>
+          <a:xfrm>
+            <a:off x="5760720" y="1417320"/>
+            <a:ext cx="2926080" cy="310896"/>
+          </a:xfrm>
+          <a:prstGeom prst="rect">
+            <a:avLst/>
+          </a:prstGeom>
+          <a:noFill/>
+          <a:ln/>
+        </p:spPr>
+        <p:txBody>
+          <a:bodyPr wrap="square" rtlCol="0" anchor="ctr"/>
+          <a:lstStyle/>
+          <a:p>
+            <a:pPr indent="0" marL="0">
+              <a:buNone/>
+            </a:pPr>
+            <a:r>
+              <a:rPr lang="en-US" sz="1000" dirty="0">
+                <a:solidFill>
+                  <a:srgbClr val="78716C"/>
+                </a:solidFill>
+                <a:latin typeface="Arial" pitchFamily="34" charset="0"/>
+                <a:ea typeface="Arial" pitchFamily="34" charset="-122"/>
+                <a:cs typeface="Arial" pitchFamily="34" charset="-120"/>
+              </a:rPr>
+              <a:t>Net operating profit after tax baseline</a:t>
+            </a:r>
+            <a:endParaRPr lang="en-US" sz="1000" dirty="0"/>
+          </a:p>
+        </p:txBody>
+      </p:sp>
+      <p:sp>
+        <p:nvSpPr>
+          <p:cNvPr id="9" name="Shape 7"/>
+          <p:cNvSpPr/>
+          <p:nvPr/>
+        </p:nvSpPr>
+        <p:spPr>
+          <a:xfrm flipV="1">
+            <a:off x="1700784" y="1984248"/>
+            <a:ext cx="2816352" cy="658368"/>
+          </a:xfrm>
+          <a:prstGeom prst="trapezoid">
+            <a:avLst/>
+          </a:prstGeom>
+          <a:solidFill>
+            <a:srgbClr val="B45309">
+              <a:alpha val="54000"/>
+            </a:srgbClr>
+          </a:solidFill>
+          <a:ln/>
+        </p:spPr>
+      </p:sp>
+      <p:sp>
+        <p:nvSpPr>
+          <p:cNvPr id="10" name="Text 8"/>
+          <p:cNvSpPr/>
+          <p:nvPr/>
+        </p:nvSpPr>
+        <p:spPr>
+          <a:xfrm>
+            <a:off x="1700784" y="2039112"/>
+            <a:ext cx="2816352" cy="566928"/>
+          </a:xfrm>
+          <a:prstGeom prst="rect">
+            <a:avLst/>
+          </a:prstGeom>
+          <a:noFill/>
+          <a:ln/>
+        </p:spPr>
+        <p:txBody>
+          <a:bodyPr wrap="square" rtlCol="0" anchor="ctr"/>
+          <a:lstStyle/>
+          <a:p>
+            <a:pPr algn="ctr" indent="0" marL="0">
+              <a:buNone/>
+            </a:pPr>
+            <a:r>
+              <a:rPr lang="en-US" sz="1200" b="1" dirty="0">
+                <a:solidFill>
+                  <a:srgbClr val="FFFFFF"/>
+                </a:solidFill>
+                <a:latin typeface="Arial" pitchFamily="34" charset="0"/>
+                <a:ea typeface="Arial" pitchFamily="34" charset="-122"/>
+                <a:cs typeface="Arial" pitchFamily="34" charset="-120"/>
+              </a:rPr>
+              <a:t>Add D&amp;A</a:t>
+            </a:r>
+            <a:endParaRPr lang="en-US" sz="1200" dirty="0"/>
+          </a:p>
+        </p:txBody>
+      </p:sp>
+      <p:sp>
+        <p:nvSpPr>
+          <p:cNvPr id="11" name="Text 9"/>
+          <p:cNvSpPr/>
+          <p:nvPr/>
+        </p:nvSpPr>
+        <p:spPr>
+          <a:xfrm>
+            <a:off x="5760720" y="2167128"/>
+            <a:ext cx="2926080" cy="310896"/>
+          </a:xfrm>
+          <a:prstGeom prst="rect">
+            <a:avLst/>
+          </a:prstGeom>
+          <a:noFill/>
+          <a:ln/>
+        </p:spPr>
+        <p:txBody>
+          <a:bodyPr wrap="square" rtlCol="0" anchor="ctr"/>
+          <a:lstStyle/>
+          <a:p>
+            <a:pPr indent="0" marL="0">
+              <a:buNone/>
+            </a:pPr>
+            <a:r>
+              <a:rPr lang="en-US" sz="1000" dirty="0">
+                <a:solidFill>
+                  <a:srgbClr val="78716C"/>
+                </a:solidFill>
+                <a:latin typeface="Arial" pitchFamily="34" charset="0"/>
+                <a:ea typeface="Arial" pitchFamily="34" charset="-122"/>
+                <a:cs typeface="Arial" pitchFamily="34" charset="-120"/>
+              </a:rPr>
+              <a:t>Non-cash charge added back to NOPAT</a:t>
+            </a:r>
+            <a:endParaRPr lang="en-US" sz="1000" dirty="0"/>
+          </a:p>
+        </p:txBody>
+      </p:sp>
+      <p:sp>
+        <p:nvSpPr>
+          <p:cNvPr id="12" name="Shape 10"/>
+          <p:cNvSpPr/>
+          <p:nvPr/>
+        </p:nvSpPr>
+        <p:spPr>
+          <a:xfrm flipV="1">
+            <a:off x="1316736" y="2734056"/>
+            <a:ext cx="3584448" cy="658368"/>
+          </a:xfrm>
+          <a:prstGeom prst="trapezoid">
+            <a:avLst/>
+          </a:prstGeom>
+          <a:solidFill>
+            <a:srgbClr val="B45309">
+              <a:alpha val="67000"/>
+            </a:srgbClr>
+          </a:solidFill>
+          <a:ln/>
+        </p:spPr>
+      </p:sp>
+      <p:sp>
+        <p:nvSpPr>
+          <p:cNvPr id="13" name="Text 11"/>
+          <p:cNvSpPr/>
+          <p:nvPr/>
+        </p:nvSpPr>
+        <p:spPr>
+          <a:xfrm>
+            <a:off x="1316736" y="2788920"/>
+            <a:ext cx="3584448" cy="566928"/>
+          </a:xfrm>
+          <a:prstGeom prst="rect">
+            <a:avLst/>
+          </a:prstGeom>
+          <a:noFill/>
+          <a:ln/>
+        </p:spPr>
+        <p:txBody>
+          <a:bodyPr wrap="square" rtlCol="0" anchor="ctr"/>
+          <a:lstStyle/>
+          <a:p>
+            <a:pPr algn="ctr" indent="0" marL="0">
+              <a:buNone/>
+            </a:pPr>
+            <a:r>
+              <a:rPr lang="en-US" sz="1200" b="1" dirty="0">
+                <a:solidFill>
+                  <a:srgbClr val="FFFFFF"/>
+                </a:solidFill>
+                <a:latin typeface="Arial" pitchFamily="34" charset="0"/>
+                <a:ea typeface="Arial" pitchFamily="34" charset="-122"/>
+                <a:cs typeface="Arial" pitchFamily="34" charset="-120"/>
+              </a:rPr>
+              <a:t>Subtract ΔNWC</a:t>
+            </a:r>
+            <a:endParaRPr lang="en-US" sz="1200" dirty="0"/>
+          </a:p>
+        </p:txBody>
+      </p:sp>
+      <p:sp>
+        <p:nvSpPr>
+          <p:cNvPr id="14" name="Text 12"/>
+          <p:cNvSpPr/>
+          <p:nvPr/>
+        </p:nvSpPr>
+        <p:spPr>
+          <a:xfrm>
+            <a:off x="5760720" y="2916936"/>
+            <a:ext cx="2926080" cy="310896"/>
+          </a:xfrm>
+          <a:prstGeom prst="rect">
+            <a:avLst/>
+          </a:prstGeom>
+          <a:noFill/>
+          <a:ln/>
+        </p:spPr>
+        <p:txBody>
+          <a:bodyPr wrap="square" rtlCol="0" anchor="ctr"/>
+          <a:lstStyle/>
+          <a:p>
+            <a:pPr indent="0" marL="0">
+              <a:buNone/>
+            </a:pPr>
+            <a:r>
+              <a:rPr lang="en-US" sz="1000" dirty="0">
+                <a:solidFill>
+                  <a:srgbClr val="78716C"/>
+                </a:solidFill>
+                <a:latin typeface="Arial" pitchFamily="34" charset="0"/>
+                <a:ea typeface="Arial" pitchFamily="34" charset="-122"/>
+                <a:cs typeface="Arial" pitchFamily="34" charset="-120"/>
+              </a:rPr>
+              <a:t>Cash consumed by working capital growth</a:t>
+            </a:r>
+            <a:endParaRPr lang="en-US" sz="1000" dirty="0"/>
+          </a:p>
+        </p:txBody>
+      </p:sp>
+      <p:sp>
+        <p:nvSpPr>
+          <p:cNvPr id="15" name="Shape 13"/>
+          <p:cNvSpPr/>
+          <p:nvPr/>
+        </p:nvSpPr>
+        <p:spPr>
+          <a:xfrm flipV="1">
+            <a:off x="932688" y="3483864"/>
+            <a:ext cx="4352544" cy="658368"/>
+          </a:xfrm>
+          <a:prstGeom prst="trapezoid">
+            <a:avLst/>
+          </a:prstGeom>
+          <a:solidFill>
+            <a:srgbClr val="B45309">
+              <a:alpha val="81000"/>
+            </a:srgbClr>
+          </a:solidFill>
+          <a:ln/>
+        </p:spPr>
+      </p:sp>
+      <p:sp>
+        <p:nvSpPr>
+          <p:cNvPr id="16" name="Text 14"/>
+          <p:cNvSpPr/>
+          <p:nvPr/>
+        </p:nvSpPr>
+        <p:spPr>
+          <a:xfrm>
+            <a:off x="932688" y="3538728"/>
+            <a:ext cx="4352544" cy="566928"/>
+          </a:xfrm>
+          <a:prstGeom prst="rect">
+            <a:avLst/>
+          </a:prstGeom>
+          <a:noFill/>
+          <a:ln/>
+        </p:spPr>
+        <p:txBody>
+          <a:bodyPr wrap="square" rtlCol="0" anchor="ctr"/>
+          <a:lstStyle/>
+          <a:p>
+            <a:pPr algn="ctr" indent="0" marL="0">
+              <a:buNone/>
+            </a:pPr>
+            <a:r>
+              <a:rPr lang="en-US" sz="1200" b="1" dirty="0">
+                <a:solidFill>
+                  <a:srgbClr val="FFFFFF"/>
+                </a:solidFill>
+                <a:latin typeface="Arial" pitchFamily="34" charset="0"/>
+                <a:ea typeface="Arial" pitchFamily="34" charset="-122"/>
+                <a:cs typeface="Arial" pitchFamily="34" charset="-120"/>
+              </a:rPr>
+              <a:t>Subtract Capex</a:t>
+            </a:r>
+            <a:endParaRPr lang="en-US" sz="1200" dirty="0"/>
+          </a:p>
+        </p:txBody>
+      </p:sp>
+      <p:sp>
+        <p:nvSpPr>
+          <p:cNvPr id="17" name="Text 15"/>
+          <p:cNvSpPr/>
+          <p:nvPr/>
+        </p:nvSpPr>
+        <p:spPr>
+          <a:xfrm>
+            <a:off x="5760720" y="3666744"/>
+            <a:ext cx="2926080" cy="310896"/>
+          </a:xfrm>
+          <a:prstGeom prst="rect">
+            <a:avLst/>
+          </a:prstGeom>
+          <a:noFill/>
+          <a:ln/>
+        </p:spPr>
+        <p:txBody>
+          <a:bodyPr wrap="square" rtlCol="0" anchor="ctr"/>
+          <a:lstStyle/>
+          <a:p>
+            <a:pPr indent="0" marL="0">
+              <a:buNone/>
+            </a:pPr>
+            <a:r>
+              <a:rPr lang="en-US" sz="1000" dirty="0">
+                <a:solidFill>
+                  <a:srgbClr val="78716C"/>
+                </a:solidFill>
+                <a:latin typeface="Arial" pitchFamily="34" charset="0"/>
+                <a:ea typeface="Arial" pitchFamily="34" charset="-122"/>
+                <a:cs typeface="Arial" pitchFamily="34" charset="-120"/>
+              </a:rPr>
+              <a:t>Real cash outflows for asset investment</a:t>
+            </a:r>
+            <a:endParaRPr lang="en-US" sz="1000" dirty="0"/>
+          </a:p>
+        </p:txBody>
+      </p:sp>
+      <p:sp>
+        <p:nvSpPr>
+          <p:cNvPr id="18" name="Shape 16"/>
+          <p:cNvSpPr/>
+          <p:nvPr/>
+        </p:nvSpPr>
+        <p:spPr>
+          <a:xfrm flipV="1">
+            <a:off x="548640" y="4233672"/>
+            <a:ext cx="5120640" cy="658368"/>
+          </a:xfrm>
+          <a:prstGeom prst="trapezoid">
+            <a:avLst/>
+          </a:prstGeom>
+          <a:solidFill>
+            <a:srgbClr val="B45309">
+              <a:alpha val="95000"/>
+            </a:srgbClr>
+          </a:solidFill>
+          <a:ln/>
+        </p:spPr>
+      </p:sp>
+      <p:sp>
+        <p:nvSpPr>
+          <p:cNvPr id="19" name="Text 17"/>
+          <p:cNvSpPr/>
+          <p:nvPr/>
+        </p:nvSpPr>
+        <p:spPr>
+          <a:xfrm>
+            <a:off x="548640" y="4288536"/>
+            <a:ext cx="5120640" cy="566928"/>
+          </a:xfrm>
+          <a:prstGeom prst="rect">
+            <a:avLst/>
+          </a:prstGeom>
+          <a:noFill/>
+          <a:ln/>
+        </p:spPr>
+        <p:txBody>
+          <a:bodyPr wrap="square" rtlCol="0" anchor="ctr"/>
+          <a:lstStyle/>
+          <a:p>
+            <a:pPr algn="ctr" indent="0" marL="0">
+              <a:buNone/>
+            </a:pPr>
+            <a:r>
+              <a:rPr lang="en-US" sz="1200" b="1" dirty="0">
+                <a:solidFill>
+                  <a:srgbClr val="FFFFFF"/>
+                </a:solidFill>
+                <a:latin typeface="Arial" pitchFamily="34" charset="0"/>
+                <a:ea typeface="Arial" pitchFamily="34" charset="-122"/>
+                <a:cs typeface="Arial" pitchFamily="34" charset="-120"/>
+              </a:rPr>
+              <a:t>UFCF</a:t>
+            </a:r>
+            <a:endParaRPr lang="en-US" sz="1200" dirty="0"/>
+          </a:p>
+        </p:txBody>
+      </p:sp>
+      <p:sp>
+        <p:nvSpPr>
+          <p:cNvPr id="20" name="Text 18"/>
+          <p:cNvSpPr/>
+          <p:nvPr/>
+        </p:nvSpPr>
+        <p:spPr>
+          <a:xfrm>
+            <a:off x="5760720" y="4416552"/>
+            <a:ext cx="2926080" cy="310896"/>
+          </a:xfrm>
+          <a:prstGeom prst="rect">
+            <a:avLst/>
+          </a:prstGeom>
+          <a:noFill/>
+          <a:ln/>
+        </p:spPr>
+        <p:txBody>
+          <a:bodyPr wrap="square" rtlCol="0" anchor="ctr"/>
+          <a:lstStyle/>
+          <a:p>
+            <a:pPr indent="0" marL="0">
+              <a:buNone/>
+            </a:pPr>
+            <a:r>
+              <a:rPr lang="en-US" sz="1000" dirty="0">
+                <a:solidFill>
+                  <a:srgbClr val="78716C"/>
+                </a:solidFill>
+                <a:latin typeface="Arial" pitchFamily="34" charset="0"/>
+                <a:ea typeface="Arial" pitchFamily="34" charset="-122"/>
+                <a:cs typeface="Arial" pitchFamily="34" charset="-120"/>
+              </a:rPr>
+              <a:t>Cash available to all capital providers</a:t>
+            </a:r>
+            <a:endParaRPr lang="en-US" sz="1000" dirty="0"/>
           </a:p>
         </p:txBody>
       </p:sp>
@@ -2571,7 +2845,7 @@
                 <a:ea typeface="Arial" pitchFamily="34" charset="-122"/>
                 <a:cs typeface="Arial" pitchFamily="34" charset="-120"/>
               </a:rPr>
-              <a:t>Inputs</a:t>
+              <a:t>Final Project Integration: Building and Defending a Full Valuation Case</a:t>
             </a:r>
             <a:endParaRPr lang="en-US" sz="2100" dirty="0"/>
           </a:p>
@@ -2648,7 +2922,7 @@
         <p:spPr>
           <a:xfrm>
             <a:off x="731520" y="1188720"/>
-            <a:ext cx="7680960" cy="3383280"/>
+            <a:ext cx="7680960" cy="2743200"/>
           </a:xfrm>
           <a:prstGeom prst="rect">
             <a:avLst/>
@@ -2676,7 +2950,7 @@
                 <a:ea typeface="Arial" pitchFamily="34" charset="-122"/>
                 <a:cs typeface="Arial" pitchFamily="34" charset="-120"/>
               </a:rPr>
-              <a:t>Before a single formula is written, gather and document every assumption explicitly. Best practice separates i</a:t>
+              <a:t>Choose a public company with three or more years of audited financials.</a:t>
             </a:r>
             <a:endParaRPr lang="en-US" sz="1500" dirty="0"/>
           </a:p>
@@ -2697,7 +2971,7 @@
                 <a:ea typeface="Arial" pitchFamily="34" charset="-122"/>
                 <a:cs typeface="Arial" pitchFamily="34" charset="-120"/>
               </a:rPr>
-              <a:t>For a discounted cash flow (DCF) valuation, the standard inputs are:</a:t>
+              <a:t>Pull income statement, balance sheet, and cash flow from SEC EDGAR.</a:t>
             </a:r>
             <a:endParaRPr lang="en-US" sz="1500" dirty="0"/>
           </a:p>
@@ -2718,7 +2992,7 @@
                 <a:ea typeface="Arial" pitchFamily="34" charset="-122"/>
                 <a:cs typeface="Arial" pitchFamily="34" charset="-120"/>
               </a:rPr>
-              <a:t>Revenue base and growth rates (historical actuals plus forward assumptions)</a:t>
+              <a:t>Historical data anchors every forecast assumption with empirical evidence.</a:t>
             </a:r>
             <a:endParaRPr lang="en-US" sz="1500" dirty="0"/>
           </a:p>
@@ -2739,9 +3013,112 @@
                 <a:ea typeface="Arial" pitchFamily="34" charset="-122"/>
                 <a:cs typeface="Arial" pitchFamily="34" charset="-120"/>
               </a:rPr>
-              <a:t>Operating margin (EBIT or EBITDA margin, sourced from management guidance or industry benchmarks)</a:t>
+              <a:t>Reconcile conflicts across valuation frameworks honestly and explicitly.</a:t>
             </a:r>
             <a:endParaRPr lang="en-US" sz="1500" dirty="0"/>
+          </a:p>
+          <a:p>
+            <a:pPr marL="152400" indent="-152400">
+              <a:spcAft>
+                <a:spcPts val="800"/>
+              </a:spcAft>
+              <a:buSzPct val="100000"/>
+              <a:buChar char="•"/>
+            </a:pPr>
+            <a:r>
+              <a:rPr lang="en-US" sz="1500" dirty="0">
+                <a:solidFill>
+                  <a:srgbClr val="1C1917"/>
+                </a:solidFill>
+                <a:latin typeface="Arial" pitchFamily="34" charset="0"/>
+                <a:ea typeface="Arial" pitchFamily="34" charset="-122"/>
+                <a:cs typeface="Arial" pitchFamily="34" charset="-120"/>
+              </a:rPr>
+              <a:t>Defend conclusions with confidence earned through rigorous stress-testing.</a:t>
+            </a:r>
+            <a:endParaRPr lang="en-US" sz="1500" dirty="0"/>
+          </a:p>
+        </p:txBody>
+      </p:sp>
+      <p:sp>
+        <p:nvSpPr>
+          <p:cNvPr id="7" name="Shape 5"/>
+          <p:cNvSpPr/>
+          <p:nvPr/>
+        </p:nvSpPr>
+        <p:spPr>
+          <a:xfrm>
+            <a:off x="731520" y="4041648"/>
+            <a:ext cx="7680960" cy="566928"/>
+          </a:xfrm>
+          <a:prstGeom prst="roundRect">
+            <a:avLst>
+              <a:gd name="adj" fmla="val 12903"/>
+            </a:avLst>
+          </a:prstGeom>
+          <a:solidFill>
+            <a:srgbClr val="B45309">
+              <a:alpha val="12000"/>
+            </a:srgbClr>
+          </a:solidFill>
+          <a:ln w="12700">
+            <a:solidFill>
+              <a:srgbClr val="B45309"/>
+            </a:solidFill>
+            <a:prstDash val="solid"/>
+          </a:ln>
+        </p:spPr>
+      </p:sp>
+      <p:sp>
+        <p:nvSpPr>
+          <p:cNvPr id="8" name="Text 6"/>
+          <p:cNvSpPr/>
+          <p:nvPr/>
+        </p:nvSpPr>
+        <p:spPr>
+          <a:xfrm>
+            <a:off x="868680" y="4087368"/>
+            <a:ext cx="7406640" cy="475488"/>
+          </a:xfrm>
+          <a:prstGeom prst="rect">
+            <a:avLst/>
+          </a:prstGeom>
+          <a:noFill/>
+          <a:ln/>
+        </p:spPr>
+        <p:txBody>
+          <a:bodyPr wrap="square" rtlCol="0" anchor="ctr"/>
+          <a:lstStyle/>
+          <a:p>
+            <a:pPr indent="0" marL="0">
+              <a:buNone/>
+            </a:pPr>
+            <a:r>
+              <a:rPr lang="en-US" sz="1100" b="1" dirty="0">
+                <a:solidFill>
+                  <a:srgbClr val="B45309"/>
+                </a:solidFill>
+                <a:latin typeface="Arial" pitchFamily="34" charset="0"/>
+                <a:ea typeface="Arial" pitchFamily="34" charset="-122"/>
+                <a:cs typeface="Arial" pitchFamily="34" charset="-120"/>
+              </a:rPr>
+              <a:t>Takeaway  </a:t>
+            </a:r>
+            <a:pPr indent="0" marL="0">
+              <a:buNone/>
+            </a:pPr>
+            <a:r>
+              <a:rPr lang="en-US" sz="1150" dirty="0">
+                <a:solidFill>
+                  <a:srgbClr val="1C1917"/>
+                </a:solidFill>
+                <a:latin typeface="Arial" pitchFamily="34" charset="0"/>
+                <a:ea typeface="Arial" pitchFamily="34" charset="-122"/>
+                <a:cs typeface="Arial" pitchFamily="34" charset="-120"/>
+              </a:rPr>
+              <a:t>A defensible valuation case moves fluidly from historical data through multiple frameworks to a clearly communicated, stress-tested conclusion.</a:t>
+            </a:r>
+            <a:endParaRPr lang="en-US" sz="1100" dirty="0"/>
           </a:p>
         </p:txBody>
       </p:sp>
@@ -2785,934 +3162,6 @@
         </p:nvSpPr>
         <p:spPr>
           <a:xfrm>
-            <a:off x="411480" y="384048"/>
-            <a:ext cx="82296" cy="310896"/>
-          </a:xfrm>
-          <a:prstGeom prst="rect">
-            <a:avLst/>
-          </a:prstGeom>
-          <a:solidFill>
-            <a:srgbClr val="B45309"/>
-          </a:solidFill>
-          <a:ln/>
-        </p:spPr>
-      </p:sp>
-      <p:sp>
-        <p:nvSpPr>
-          <p:cNvPr id="3" name="Text 1"/>
-          <p:cNvSpPr/>
-          <p:nvPr/>
-        </p:nvSpPr>
-        <p:spPr>
-          <a:xfrm>
-            <a:off x="566928" y="292608"/>
-            <a:ext cx="8138160" cy="502920"/>
-          </a:xfrm>
-          <a:prstGeom prst="rect">
-            <a:avLst/>
-          </a:prstGeom>
-          <a:noFill/>
-          <a:ln/>
-        </p:spPr>
-        <p:txBody>
-          <a:bodyPr wrap="square" rtlCol="0" anchor="ctr"/>
-          <a:lstStyle/>
-          <a:p>
-            <a:pPr indent="0" marL="0">
-              <a:buNone/>
-            </a:pPr>
-            <a:r>
-              <a:rPr lang="en-US" sz="2000" b="1" dirty="0">
-                <a:solidFill>
-                  <a:srgbClr val="1C1917"/>
-                </a:solidFill>
-                <a:latin typeface="Arial" pitchFamily="34" charset="0"/>
-                <a:ea typeface="Arial" pitchFamily="34" charset="-122"/>
-                <a:cs typeface="Arial" pitchFamily="34" charset="-120"/>
-              </a:rPr>
-              <a:t>Financial Model Vocabulary Hierarchy</a:t>
-            </a:r>
-            <a:endParaRPr lang="en-US" sz="2000" dirty="0"/>
-          </a:p>
-        </p:txBody>
-      </p:sp>
-      <p:sp>
-        <p:nvSpPr>
-          <p:cNvPr id="4" name="Text 2"/>
-          <p:cNvSpPr/>
-          <p:nvPr/>
-        </p:nvSpPr>
-        <p:spPr>
-          <a:xfrm>
-            <a:off x="566928" y="4681728"/>
-            <a:ext cx="8138160" cy="320040"/>
-          </a:xfrm>
-          <a:prstGeom prst="rect">
-            <a:avLst/>
-          </a:prstGeom>
-          <a:noFill/>
-          <a:ln/>
-        </p:spPr>
-        <p:txBody>
-          <a:bodyPr wrap="square" rtlCol="0" anchor="ctr"/>
-          <a:lstStyle/>
-          <a:p>
-            <a:pPr indent="0" marL="0">
-              <a:buNone/>
-            </a:pPr>
-            <a:r>
-              <a:rPr lang="en-US" sz="1000" i="1" dirty="0">
-                <a:solidFill>
-                  <a:srgbClr val="78716C"/>
-                </a:solidFill>
-                <a:latin typeface="Arial" pitchFamily="34" charset="0"/>
-                <a:ea typeface="Arial" pitchFamily="34" charset="-122"/>
-                <a:cs typeface="Arial" pitchFamily="34" charset="-120"/>
-              </a:rPr>
-              <a:t>Assumptions underpin everything; outputs are only as reliable as inputs below</a:t>
-            </a:r>
-            <a:endParaRPr lang="en-US" sz="1000" dirty="0"/>
-          </a:p>
-        </p:txBody>
-      </p:sp>
-      <p:sp>
-        <p:nvSpPr>
-          <p:cNvPr id="5" name="Text 3"/>
-          <p:cNvSpPr/>
-          <p:nvPr/>
-        </p:nvSpPr>
-        <p:spPr>
-          <a:xfrm>
-            <a:off x="411480" y="4919472"/>
-            <a:ext cx="8321040" cy="219456"/>
-          </a:xfrm>
-          <a:prstGeom prst="rect">
-            <a:avLst/>
-          </a:prstGeom>
-          <a:noFill/>
-          <a:ln/>
-        </p:spPr>
-        <p:txBody>
-          <a:bodyPr wrap="square" rtlCol="0" anchor="ctr"/>
-          <a:lstStyle/>
-          <a:p>
-            <a:pPr indent="0" marL="0">
-              <a:buNone/>
-            </a:pPr>
-            <a:r>
-              <a:rPr lang="en-US" sz="750" dirty="0">
-                <a:solidFill>
-                  <a:srgbClr val="AAAAAA"/>
-                </a:solidFill>
-                <a:latin typeface="Arial" pitchFamily="34" charset="0"/>
-                <a:ea typeface="Arial" pitchFamily="34" charset="-122"/>
-                <a:cs typeface="Arial" pitchFamily="34" charset="-120"/>
-              </a:rPr>
-              <a:t>Lesson Forge Pro (owner) — This content is educational material only and does not constitute financial, investment, or trading advice.</a:t>
-            </a:r>
-            <a:endParaRPr lang="en-US" sz="750" dirty="0"/>
-          </a:p>
-        </p:txBody>
-      </p:sp>
-      <p:sp>
-        <p:nvSpPr>
-          <p:cNvPr id="6" name="Shape 4"/>
-          <p:cNvSpPr/>
-          <p:nvPr/>
-        </p:nvSpPr>
-        <p:spPr>
-          <a:xfrm flipV="1">
-            <a:off x="2084832" y="1234440"/>
-            <a:ext cx="2048256" cy="658368"/>
-          </a:xfrm>
-          <a:prstGeom prst="trapezoid">
-            <a:avLst/>
-          </a:prstGeom>
-          <a:solidFill>
-            <a:srgbClr val="B45309">
-              <a:alpha val="40000"/>
-            </a:srgbClr>
-          </a:solidFill>
-          <a:ln/>
-        </p:spPr>
-      </p:sp>
-      <p:sp>
-        <p:nvSpPr>
-          <p:cNvPr id="7" name="Text 5"/>
-          <p:cNvSpPr/>
-          <p:nvPr/>
-        </p:nvSpPr>
-        <p:spPr>
-          <a:xfrm>
-            <a:off x="2084832" y="1289304"/>
-            <a:ext cx="2048256" cy="566928"/>
-          </a:xfrm>
-          <a:prstGeom prst="rect">
-            <a:avLst/>
-          </a:prstGeom>
-          <a:noFill/>
-          <a:ln/>
-        </p:spPr>
-        <p:txBody>
-          <a:bodyPr wrap="square" rtlCol="0" anchor="ctr"/>
-          <a:lstStyle/>
-          <a:p>
-            <a:pPr algn="ctr" indent="0" marL="0">
-              <a:buNone/>
-            </a:pPr>
-            <a:r>
-              <a:rPr lang="en-US" sz="1200" b="1" dirty="0">
-                <a:solidFill>
-                  <a:srgbClr val="FFFFFF"/>
-                </a:solidFill>
-                <a:latin typeface="Arial" pitchFamily="34" charset="0"/>
-                <a:ea typeface="Arial" pitchFamily="34" charset="-122"/>
-                <a:cs typeface="Arial" pitchFamily="34" charset="-120"/>
-              </a:rPr>
-              <a:t>Output (NPV/Value)</a:t>
-            </a:r>
-            <a:endParaRPr lang="en-US" sz="1200" dirty="0"/>
-          </a:p>
-        </p:txBody>
-      </p:sp>
-      <p:sp>
-        <p:nvSpPr>
-          <p:cNvPr id="8" name="Text 6"/>
-          <p:cNvSpPr/>
-          <p:nvPr/>
-        </p:nvSpPr>
-        <p:spPr>
-          <a:xfrm>
-            <a:off x="5760720" y="1417320"/>
-            <a:ext cx="2926080" cy="310896"/>
-          </a:xfrm>
-          <a:prstGeom prst="rect">
-            <a:avLst/>
-          </a:prstGeom>
-          <a:noFill/>
-          <a:ln/>
-        </p:spPr>
-        <p:txBody>
-          <a:bodyPr wrap="square" rtlCol="0" anchor="ctr"/>
-          <a:lstStyle/>
-          <a:p>
-            <a:pPr indent="0" marL="0">
-              <a:buNone/>
-            </a:pPr>
-            <a:r>
-              <a:rPr lang="en-US" sz="1000" dirty="0">
-                <a:solidFill>
-                  <a:srgbClr val="78716C"/>
-                </a:solidFill>
-                <a:latin typeface="Arial" pitchFamily="34" charset="0"/>
-                <a:ea typeface="Arial" pitchFamily="34" charset="-122"/>
-                <a:cs typeface="Arial" pitchFamily="34" charset="-120"/>
-              </a:rPr>
-              <a:t>Final decision metric the model produces</a:t>
-            </a:r>
-            <a:endParaRPr lang="en-US" sz="1000" dirty="0"/>
-          </a:p>
-        </p:txBody>
-      </p:sp>
-      <p:sp>
-        <p:nvSpPr>
-          <p:cNvPr id="9" name="Shape 7"/>
-          <p:cNvSpPr/>
-          <p:nvPr/>
-        </p:nvSpPr>
-        <p:spPr>
-          <a:xfrm flipV="1">
-            <a:off x="1700784" y="1984248"/>
-            <a:ext cx="2816352" cy="658368"/>
-          </a:xfrm>
-          <a:prstGeom prst="trapezoid">
-            <a:avLst/>
-          </a:prstGeom>
-          <a:solidFill>
-            <a:srgbClr val="B45309">
-              <a:alpha val="54000"/>
-            </a:srgbClr>
-          </a:solidFill>
-          <a:ln/>
-        </p:spPr>
-      </p:sp>
-      <p:sp>
-        <p:nvSpPr>
-          <p:cNvPr id="10" name="Text 8"/>
-          <p:cNvSpPr/>
-          <p:nvPr/>
-        </p:nvSpPr>
-        <p:spPr>
-          <a:xfrm>
-            <a:off x="1700784" y="2039112"/>
-            <a:ext cx="2816352" cy="566928"/>
-          </a:xfrm>
-          <a:prstGeom prst="rect">
-            <a:avLst/>
-          </a:prstGeom>
-          <a:noFill/>
-          <a:ln/>
-        </p:spPr>
-        <p:txBody>
-          <a:bodyPr wrap="square" rtlCol="0" anchor="ctr"/>
-          <a:lstStyle/>
-          <a:p>
-            <a:pPr algn="ctr" indent="0" marL="0">
-              <a:buNone/>
-            </a:pPr>
-            <a:r>
-              <a:rPr lang="en-US" sz="1200" b="1" dirty="0">
-                <a:solidFill>
-                  <a:srgbClr val="FFFFFF"/>
-                </a:solidFill>
-                <a:latin typeface="Arial" pitchFamily="34" charset="0"/>
-                <a:ea typeface="Arial" pitchFamily="34" charset="-122"/>
-                <a:cs typeface="Arial" pitchFamily="34" charset="-120"/>
-              </a:rPr>
-              <a:t>Scenario Analysis</a:t>
-            </a:r>
-            <a:endParaRPr lang="en-US" sz="1200" dirty="0"/>
-          </a:p>
-        </p:txBody>
-      </p:sp>
-      <p:sp>
-        <p:nvSpPr>
-          <p:cNvPr id="11" name="Text 9"/>
-          <p:cNvSpPr/>
-          <p:nvPr/>
-        </p:nvSpPr>
-        <p:spPr>
-          <a:xfrm>
-            <a:off x="5760720" y="2167128"/>
-            <a:ext cx="2926080" cy="310896"/>
-          </a:xfrm>
-          <a:prstGeom prst="rect">
-            <a:avLst/>
-          </a:prstGeom>
-          <a:noFill/>
-          <a:ln/>
-        </p:spPr>
-        <p:txBody>
-          <a:bodyPr wrap="square" rtlCol="0" anchor="ctr"/>
-          <a:lstStyle/>
-          <a:p>
-            <a:pPr indent="0" marL="0">
-              <a:buNone/>
-            </a:pPr>
-            <a:r>
-              <a:rPr lang="en-US" sz="1000" dirty="0">
-                <a:solidFill>
-                  <a:srgbClr val="78716C"/>
-                </a:solidFill>
-                <a:latin typeface="Arial" pitchFamily="34" charset="0"/>
-                <a:ea typeface="Arial" pitchFamily="34" charset="-122"/>
-                <a:cs typeface="Arial" pitchFamily="34" charset="-120"/>
-              </a:rPr>
-              <a:t>Base, upside, downside coherent assumption sets</a:t>
-            </a:r>
-            <a:endParaRPr lang="en-US" sz="1000" dirty="0"/>
-          </a:p>
-        </p:txBody>
-      </p:sp>
-      <p:sp>
-        <p:nvSpPr>
-          <p:cNvPr id="12" name="Shape 10"/>
-          <p:cNvSpPr/>
-          <p:nvPr/>
-        </p:nvSpPr>
-        <p:spPr>
-          <a:xfrm flipV="1">
-            <a:off x="1316736" y="2734056"/>
-            <a:ext cx="3584448" cy="658368"/>
-          </a:xfrm>
-          <a:prstGeom prst="trapezoid">
-            <a:avLst/>
-          </a:prstGeom>
-          <a:solidFill>
-            <a:srgbClr val="B45309">
-              <a:alpha val="67000"/>
-            </a:srgbClr>
-          </a:solidFill>
-          <a:ln/>
-        </p:spPr>
-      </p:sp>
-      <p:sp>
-        <p:nvSpPr>
-          <p:cNvPr id="13" name="Text 11"/>
-          <p:cNvSpPr/>
-          <p:nvPr/>
-        </p:nvSpPr>
-        <p:spPr>
-          <a:xfrm>
-            <a:off x="1316736" y="2788920"/>
-            <a:ext cx="3584448" cy="566928"/>
-          </a:xfrm>
-          <a:prstGeom prst="rect">
-            <a:avLst/>
-          </a:prstGeom>
-          <a:noFill/>
-          <a:ln/>
-        </p:spPr>
-        <p:txBody>
-          <a:bodyPr wrap="square" rtlCol="0" anchor="ctr"/>
-          <a:lstStyle/>
-          <a:p>
-            <a:pPr algn="ctr" indent="0" marL="0">
-              <a:buNone/>
-            </a:pPr>
-            <a:r>
-              <a:rPr lang="en-US" sz="1200" b="1" dirty="0">
-                <a:solidFill>
-                  <a:srgbClr val="FFFFFF"/>
-                </a:solidFill>
-                <a:latin typeface="Arial" pitchFamily="34" charset="0"/>
-                <a:ea typeface="Arial" pitchFamily="34" charset="-122"/>
-                <a:cs typeface="Arial" pitchFamily="34" charset="-120"/>
-              </a:rPr>
-              <a:t>Sensitivity Analysis</a:t>
-            </a:r>
-            <a:endParaRPr lang="en-US" sz="1200" dirty="0"/>
-          </a:p>
-        </p:txBody>
-      </p:sp>
-      <p:sp>
-        <p:nvSpPr>
-          <p:cNvPr id="14" name="Text 12"/>
-          <p:cNvSpPr/>
-          <p:nvPr/>
-        </p:nvSpPr>
-        <p:spPr>
-          <a:xfrm>
-            <a:off x="5760720" y="2916936"/>
-            <a:ext cx="2926080" cy="310896"/>
-          </a:xfrm>
-          <a:prstGeom prst="rect">
-            <a:avLst/>
-          </a:prstGeom>
-          <a:noFill/>
-          <a:ln/>
-        </p:spPr>
-        <p:txBody>
-          <a:bodyPr wrap="square" rtlCol="0" anchor="ctr"/>
-          <a:lstStyle/>
-          <a:p>
-            <a:pPr indent="0" marL="0">
-              <a:buNone/>
-            </a:pPr>
-            <a:r>
-              <a:rPr lang="en-US" sz="1000" dirty="0">
-                <a:solidFill>
-                  <a:srgbClr val="78716C"/>
-                </a:solidFill>
-                <a:latin typeface="Arial" pitchFamily="34" charset="0"/>
-                <a:ea typeface="Arial" pitchFamily="34" charset="-122"/>
-                <a:cs typeface="Arial" pitchFamily="34" charset="-120"/>
-              </a:rPr>
-              <a:t>Isolate one driver's effect on output</a:t>
-            </a:r>
-            <a:endParaRPr lang="en-US" sz="1000" dirty="0"/>
-          </a:p>
-        </p:txBody>
-      </p:sp>
-      <p:sp>
-        <p:nvSpPr>
-          <p:cNvPr id="15" name="Shape 13"/>
-          <p:cNvSpPr/>
-          <p:nvPr/>
-        </p:nvSpPr>
-        <p:spPr>
-          <a:xfrm flipV="1">
-            <a:off x="932688" y="3483864"/>
-            <a:ext cx="4352544" cy="658368"/>
-          </a:xfrm>
-          <a:prstGeom prst="trapezoid">
-            <a:avLst/>
-          </a:prstGeom>
-          <a:solidFill>
-            <a:srgbClr val="B45309">
-              <a:alpha val="81000"/>
-            </a:srgbClr>
-          </a:solidFill>
-          <a:ln/>
-        </p:spPr>
-      </p:sp>
-      <p:sp>
-        <p:nvSpPr>
-          <p:cNvPr id="16" name="Text 14"/>
-          <p:cNvSpPr/>
-          <p:nvPr/>
-        </p:nvSpPr>
-        <p:spPr>
-          <a:xfrm>
-            <a:off x="932688" y="3538728"/>
-            <a:ext cx="4352544" cy="566928"/>
-          </a:xfrm>
-          <a:prstGeom prst="rect">
-            <a:avLst/>
-          </a:prstGeom>
-          <a:noFill/>
-          <a:ln/>
-        </p:spPr>
-        <p:txBody>
-          <a:bodyPr wrap="square" rtlCol="0" anchor="ctr"/>
-          <a:lstStyle/>
-          <a:p>
-            <a:pPr algn="ctr" indent="0" marL="0">
-              <a:buNone/>
-            </a:pPr>
-            <a:r>
-              <a:rPr lang="en-US" sz="1200" b="1" dirty="0">
-                <a:solidFill>
-                  <a:srgbClr val="FFFFFF"/>
-                </a:solidFill>
-                <a:latin typeface="Arial" pitchFamily="34" charset="0"/>
-                <a:ea typeface="Arial" pitchFamily="34" charset="-122"/>
-                <a:cs typeface="Arial" pitchFamily="34" charset="-120"/>
-              </a:rPr>
-              <a:t>Drivers</a:t>
-            </a:r>
-            <a:endParaRPr lang="en-US" sz="1200" dirty="0"/>
-          </a:p>
-        </p:txBody>
-      </p:sp>
-      <p:sp>
-        <p:nvSpPr>
-          <p:cNvPr id="17" name="Text 15"/>
-          <p:cNvSpPr/>
-          <p:nvPr/>
-        </p:nvSpPr>
-        <p:spPr>
-          <a:xfrm>
-            <a:off x="5760720" y="3666744"/>
-            <a:ext cx="2926080" cy="310896"/>
-          </a:xfrm>
-          <a:prstGeom prst="rect">
-            <a:avLst/>
-          </a:prstGeom>
-          <a:noFill/>
-          <a:ln/>
-        </p:spPr>
-        <p:txBody>
-          <a:bodyPr wrap="square" rtlCol="0" anchor="ctr"/>
-          <a:lstStyle/>
-          <a:p>
-            <a:pPr indent="0" marL="0">
-              <a:buNone/>
-            </a:pPr>
-            <a:r>
-              <a:rPr lang="en-US" sz="1000" dirty="0">
-                <a:solidFill>
-                  <a:srgbClr val="78716C"/>
-                </a:solidFill>
-                <a:latin typeface="Arial" pitchFamily="34" charset="0"/>
-                <a:ea typeface="Arial" pitchFamily="34" charset="-122"/>
-                <a:cs typeface="Arial" pitchFamily="34" charset="-120"/>
-              </a:rPr>
-              <a:t>Variables that meaningfully move the output</a:t>
-            </a:r>
-            <a:endParaRPr lang="en-US" sz="1000" dirty="0"/>
-          </a:p>
-        </p:txBody>
-      </p:sp>
-      <p:sp>
-        <p:nvSpPr>
-          <p:cNvPr id="18" name="Shape 16"/>
-          <p:cNvSpPr/>
-          <p:nvPr/>
-        </p:nvSpPr>
-        <p:spPr>
-          <a:xfrm flipV="1">
-            <a:off x="548640" y="4233672"/>
-            <a:ext cx="5120640" cy="658368"/>
-          </a:xfrm>
-          <a:prstGeom prst="trapezoid">
-            <a:avLst/>
-          </a:prstGeom>
-          <a:solidFill>
-            <a:srgbClr val="B45309">
-              <a:alpha val="95000"/>
-            </a:srgbClr>
-          </a:solidFill>
-          <a:ln/>
-        </p:spPr>
-      </p:sp>
-      <p:sp>
-        <p:nvSpPr>
-          <p:cNvPr id="19" name="Text 17"/>
-          <p:cNvSpPr/>
-          <p:nvPr/>
-        </p:nvSpPr>
-        <p:spPr>
-          <a:xfrm>
-            <a:off x="548640" y="4288536"/>
-            <a:ext cx="5120640" cy="566928"/>
-          </a:xfrm>
-          <a:prstGeom prst="rect">
-            <a:avLst/>
-          </a:prstGeom>
-          <a:noFill/>
-          <a:ln/>
-        </p:spPr>
-        <p:txBody>
-          <a:bodyPr wrap="square" rtlCol="0" anchor="ctr"/>
-          <a:lstStyle/>
-          <a:p>
-            <a:pPr algn="ctr" indent="0" marL="0">
-              <a:buNone/>
-            </a:pPr>
-            <a:r>
-              <a:rPr lang="en-US" sz="1200" b="1" dirty="0">
-                <a:solidFill>
-                  <a:srgbClr val="FFFFFF"/>
-                </a:solidFill>
-                <a:latin typeface="Arial" pitchFamily="34" charset="0"/>
-                <a:ea typeface="Arial" pitchFamily="34" charset="-122"/>
-                <a:cs typeface="Arial" pitchFamily="34" charset="-120"/>
-              </a:rPr>
-              <a:t>Assumptions</a:t>
-            </a:r>
-            <a:endParaRPr lang="en-US" sz="1200" dirty="0"/>
-          </a:p>
-        </p:txBody>
-      </p:sp>
-      <p:sp>
-        <p:nvSpPr>
-          <p:cNvPr id="20" name="Text 18"/>
-          <p:cNvSpPr/>
-          <p:nvPr/>
-        </p:nvSpPr>
-        <p:spPr>
-          <a:xfrm>
-            <a:off x="5760720" y="4416552"/>
-            <a:ext cx="2926080" cy="310896"/>
-          </a:xfrm>
-          <a:prstGeom prst="rect">
-            <a:avLst/>
-          </a:prstGeom>
-          <a:noFill/>
-          <a:ln/>
-        </p:spPr>
-        <p:txBody>
-          <a:bodyPr wrap="square" rtlCol="0" anchor="ctr"/>
-          <a:lstStyle/>
-          <a:p>
-            <a:pPr indent="0" marL="0">
-              <a:buNone/>
-            </a:pPr>
-            <a:r>
-              <a:rPr lang="en-US" sz="1000" dirty="0">
-                <a:solidFill>
-                  <a:srgbClr val="78716C"/>
-                </a:solidFill>
-                <a:latin typeface="Arial" pitchFamily="34" charset="0"/>
-                <a:ea typeface="Arial" pitchFamily="34" charset="-122"/>
-                <a:cs typeface="Arial" pitchFamily="34" charset="-120"/>
-              </a:rPr>
-              <a:t>Foundation inputs accepted as true for modeling</a:t>
-            </a:r>
-            <a:endParaRPr lang="en-US" sz="1000" dirty="0"/>
-          </a:p>
-        </p:txBody>
-      </p:sp>
-    </p:spTree>
-  </p:cSld>
-  <p:clrMapOvr>
-    <a:masterClrMapping/>
-  </p:clrMapOvr>
-</p:sld>
-</file>
-
-<file path=ppt/slides/slide13.xml><?xml version="1.0" encoding="utf-8"?>
-<p:sld xmlns:a="http://schemas.openxmlformats.org/drawingml/2006/main" xmlns:r="http://schemas.openxmlformats.org/officeDocument/2006/relationships" xmlns:p="http://schemas.openxmlformats.org/presentationml/2006/main">
-  <p:cSld name="Slide 13">
-    <p:bg>
-      <p:bgPr>
-        <a:solidFill>
-          <a:srgbClr val="FFFFFF"/>
-        </a:solidFill>
-      </p:bgPr>
-    </p:bg>
-    <p:spTree>
-      <p:nvGrpSpPr>
-        <p:cNvPr id="1" name=""/>
-        <p:cNvGrpSpPr/>
-        <p:nvPr/>
-      </p:nvGrpSpPr>
-      <p:grpSpPr>
-        <a:xfrm>
-          <a:off x="0" y="0"/>
-          <a:ext cx="0" cy="0"/>
-          <a:chOff x="0" y="0"/>
-          <a:chExt cx="0" cy="0"/>
-        </a:xfrm>
-      </p:grpSpPr>
-      <p:sp>
-        <p:nvSpPr>
-          <p:cNvPr id="2" name="Shape 0"/>
-          <p:cNvSpPr/>
-          <p:nvPr/>
-        </p:nvSpPr>
-        <p:spPr>
-          <a:xfrm>
-            <a:off x="411480" y="402336"/>
-            <a:ext cx="82296" cy="329184"/>
-          </a:xfrm>
-          <a:prstGeom prst="rect">
-            <a:avLst/>
-          </a:prstGeom>
-          <a:solidFill>
-            <a:srgbClr val="B45309"/>
-          </a:solidFill>
-          <a:ln/>
-        </p:spPr>
-      </p:sp>
-      <p:sp>
-        <p:nvSpPr>
-          <p:cNvPr id="3" name="Text 1"/>
-          <p:cNvSpPr/>
-          <p:nvPr/>
-        </p:nvSpPr>
-        <p:spPr>
-          <a:xfrm>
-            <a:off x="566928" y="292608"/>
-            <a:ext cx="8138160" cy="548640"/>
-          </a:xfrm>
-          <a:prstGeom prst="rect">
-            <a:avLst/>
-          </a:prstGeom>
-          <a:noFill/>
-          <a:ln/>
-        </p:spPr>
-        <p:txBody>
-          <a:bodyPr wrap="square" rtlCol="0" anchor="ctr"/>
-          <a:lstStyle/>
-          <a:p>
-            <a:pPr indent="0" marL="0">
-              <a:buNone/>
-            </a:pPr>
-            <a:r>
-              <a:rPr lang="en-US" sz="2100" b="1" dirty="0">
-                <a:solidFill>
-                  <a:srgbClr val="1C1917"/>
-                </a:solidFill>
-                <a:latin typeface="Arial" pitchFamily="34" charset="0"/>
-                <a:ea typeface="Arial" pitchFamily="34" charset="-122"/>
-                <a:cs typeface="Arial" pitchFamily="34" charset="-120"/>
-              </a:rPr>
-              <a:t>Steps</a:t>
-            </a:r>
-            <a:endParaRPr lang="en-US" sz="2100" dirty="0"/>
-          </a:p>
-        </p:txBody>
-      </p:sp>
-      <p:sp>
-        <p:nvSpPr>
-          <p:cNvPr id="4" name="Shape 2"/>
-          <p:cNvSpPr/>
-          <p:nvPr/>
-        </p:nvSpPr>
-        <p:spPr>
-          <a:xfrm>
-            <a:off x="411480" y="960120"/>
-            <a:ext cx="8321040" cy="0"/>
-          </a:xfrm>
-          <a:prstGeom prst="line">
-            <a:avLst/>
-          </a:prstGeom>
-          <a:noFill/>
-          <a:ln w="12700">
-            <a:solidFill>
-              <a:srgbClr val="E7E5E4"/>
-            </a:solidFill>
-            <a:prstDash val="solid"/>
-          </a:ln>
-        </p:spPr>
-      </p:sp>
-      <p:sp>
-        <p:nvSpPr>
-          <p:cNvPr id="5" name="Text 3"/>
-          <p:cNvSpPr/>
-          <p:nvPr/>
-        </p:nvSpPr>
-        <p:spPr>
-          <a:xfrm>
-            <a:off x="411480" y="4864608"/>
-            <a:ext cx="8321040" cy="237744"/>
-          </a:xfrm>
-          <a:prstGeom prst="rect">
-            <a:avLst/>
-          </a:prstGeom>
-          <a:noFill/>
-          <a:ln/>
-        </p:spPr>
-        <p:txBody>
-          <a:bodyPr wrap="square" rtlCol="0" anchor="ctr"/>
-          <a:lstStyle/>
-          <a:p>
-            <a:pPr indent="0" marL="0">
-              <a:buNone/>
-            </a:pPr>
-            <a:r>
-              <a:rPr lang="en-US" sz="750" dirty="0">
-                <a:solidFill>
-                  <a:srgbClr val="AAAAAA"/>
-                </a:solidFill>
-                <a:latin typeface="Arial" pitchFamily="34" charset="0"/>
-                <a:ea typeface="Arial" pitchFamily="34" charset="-122"/>
-                <a:cs typeface="Arial" pitchFamily="34" charset="-120"/>
-              </a:rPr>
-              <a:t>Lesson Forge Pro (owner) — This content is educational material only and does not constitute financial, investment, or trading advice.</a:t>
-            </a:r>
-            <a:endParaRPr lang="en-US" sz="750" dirty="0"/>
-          </a:p>
-        </p:txBody>
-      </p:sp>
-      <p:sp>
-        <p:nvSpPr>
-          <p:cNvPr id="6" name="Text 4"/>
-          <p:cNvSpPr/>
-          <p:nvPr/>
-        </p:nvSpPr>
-        <p:spPr>
-          <a:xfrm>
-            <a:off x="731520" y="1188720"/>
-            <a:ext cx="7680960" cy="3383280"/>
-          </a:xfrm>
-          <a:prstGeom prst="rect">
-            <a:avLst/>
-          </a:prstGeom>
-          <a:noFill/>
-          <a:ln/>
-        </p:spPr>
-        <p:txBody>
-          <a:bodyPr wrap="square" rtlCol="0" anchor="t"/>
-          <a:lstStyle/>
-          <a:p>
-            <a:pPr marL="152400" indent="-152400">
-              <a:spcAft>
-                <a:spcPts val="800"/>
-              </a:spcAft>
-              <a:buSzPct val="100000"/>
-              <a:buChar char="•"/>
-            </a:pPr>
-            <a:r>
-              <a:rPr lang="en-US" sz="1500" dirty="0">
-                <a:solidFill>
-                  <a:srgbClr val="1C1917"/>
-                </a:solidFill>
-                <a:latin typeface="Arial" pitchFamily="34" charset="0"/>
-                <a:ea typeface="Arial" pitchFamily="34" charset="-122"/>
-                <a:cs typeface="Arial" pitchFamily="34" charset="-120"/>
-              </a:rPr>
-              <a:t>Build the income statement projection. Start with revenue, apply the growth rate, then layer in costs using th</a:t>
-            </a:r>
-            <a:endParaRPr lang="en-US" sz="1500" dirty="0"/>
-          </a:p>
-          <a:p>
-            <a:pPr marL="152400" indent="-152400">
-              <a:spcAft>
-                <a:spcPts val="800"/>
-              </a:spcAft>
-              <a:buSzPct val="100000"/>
-              <a:buChar char="•"/>
-            </a:pPr>
-            <a:r>
-              <a:rPr lang="en-US" sz="1500" dirty="0">
-                <a:solidFill>
-                  <a:srgbClr val="1C1917"/>
-                </a:solidFill>
-                <a:latin typeface="Arial" pitchFamily="34" charset="0"/>
-                <a:ea typeface="Arial" pitchFamily="34" charset="-122"/>
-                <a:cs typeface="Arial" pitchFamily="34" charset="-120"/>
-              </a:rPr>
-              <a:t>Calculate taxes and NOPAT. Apply the effective tax rate to EBIT to get Net Operating Profit After Tax.</a:t>
-            </a:r>
-            <a:endParaRPr lang="en-US" sz="1500" dirty="0"/>
-          </a:p>
-          <a:p>
-            <a:pPr marL="152400" indent="-152400">
-              <a:spcAft>
-                <a:spcPts val="800"/>
-              </a:spcAft>
-              <a:buSzPct val="100000"/>
-              <a:buChar char="•"/>
-            </a:pPr>
-            <a:r>
-              <a:rPr lang="en-US" sz="1500" dirty="0">
-                <a:solidFill>
-                  <a:srgbClr val="1C1917"/>
-                </a:solidFill>
-                <a:latin typeface="Arial" pitchFamily="34" charset="0"/>
-                <a:ea typeface="Arial" pitchFamily="34" charset="-122"/>
-                <a:cs typeface="Arial" pitchFamily="34" charset="-120"/>
-              </a:rPr>
-              <a:t>Derive free cash flow (FCF). Add back non-cash charges (depreciation), subtract capital expenditure, and adjus</a:t>
-            </a:r>
-            <a:endParaRPr lang="en-US" sz="1500" dirty="0"/>
-          </a:p>
-          <a:p>
-            <a:pPr marL="152400" indent="-152400">
-              <a:spcAft>
-                <a:spcPts val="800"/>
-              </a:spcAft>
-              <a:buSzPct val="100000"/>
-              <a:buChar char="•"/>
-            </a:pPr>
-            <a:r>
-              <a:rPr lang="en-US" sz="1500" dirty="0">
-                <a:solidFill>
-                  <a:srgbClr val="1C1917"/>
-                </a:solidFill>
-                <a:latin typeface="Arial" pitchFamily="34" charset="0"/>
-                <a:ea typeface="Arial" pitchFamily="34" charset="-122"/>
-                <a:cs typeface="Arial" pitchFamily="34" charset="-120"/>
-              </a:rPr>
-              <a:t>Discount each FCF to present value. Apply the WACC as the discount rate across the forecast horizon.</a:t>
-            </a:r>
-            <a:endParaRPr lang="en-US" sz="1500" dirty="0"/>
-          </a:p>
-        </p:txBody>
-      </p:sp>
-    </p:spTree>
-  </p:cSld>
-  <p:clrMapOvr>
-    <a:masterClrMapping/>
-  </p:clrMapOvr>
-</p:sld>
-</file>
-
-<file path=ppt/slides/slide14.xml><?xml version="1.0" encoding="utf-8"?>
-<p:sld xmlns:a="http://schemas.openxmlformats.org/drawingml/2006/main" xmlns:r="http://schemas.openxmlformats.org/officeDocument/2006/relationships" xmlns:p="http://schemas.openxmlformats.org/presentationml/2006/main">
-  <p:cSld name="Slide 14">
-    <p:bg>
-      <p:bgPr>
-        <a:solidFill>
-          <a:srgbClr val="FFFFFF"/>
-        </a:solidFill>
-      </p:bgPr>
-    </p:bg>
-    <p:spTree>
-      <p:nvGrpSpPr>
-        <p:cNvPr id="1" name=""/>
-        <p:cNvGrpSpPr/>
-        <p:nvPr/>
-      </p:nvGrpSpPr>
-      <p:grpSpPr>
-        <a:xfrm>
-          <a:off x="0" y="0"/>
-          <a:ext cx="0" cy="0"/>
-          <a:chOff x="0" y="0"/>
-          <a:chExt cx="0" cy="0"/>
-        </a:xfrm>
-      </p:grpSpPr>
-      <p:sp>
-        <p:nvSpPr>
-          <p:cNvPr id="2" name="Shape 0"/>
-          <p:cNvSpPr/>
-          <p:nvPr/>
-        </p:nvSpPr>
-        <p:spPr>
-          <a:xfrm>
             <a:off x="0" y="4480560"/>
             <a:ext cx="9144000" cy="667512"/>
           </a:xfrm>
@@ -3993,7 +3442,7 @@
                 <a:ea typeface="Arial" pitchFamily="34" charset="-122"/>
                 <a:cs typeface="Arial" pitchFamily="34" charset="-120"/>
               </a:rPr>
-              <a:t>Concepts and vocabulary</a:t>
+              <a:t>Architecting a Case-Study Model: Inputs, Calculations, and Outputs</a:t>
             </a:r>
             <a:endParaRPr lang="en-US" sz="1600" dirty="0"/>
           </a:p>
@@ -4014,7 +3463,7 @@
                 <a:ea typeface="Arial" pitchFamily="34" charset="-122"/>
                 <a:cs typeface="Arial" pitchFamily="34" charset="-120"/>
               </a:rPr>
-              <a:t>Core Definitions</a:t>
+              <a:t>DCF Valuation in Practice: Free Cash Flow Forecasting and Terminal Value</a:t>
             </a:r>
             <a:endParaRPr lang="en-US" sz="1600" dirty="0"/>
           </a:p>
@@ -4035,7 +3484,7 @@
                 <a:ea typeface="Arial" pitchFamily="34" charset="-122"/>
                 <a:cs typeface="Arial" pitchFamily="34" charset="-120"/>
               </a:rPr>
-              <a:t>Where It Fits in Practice</a:t>
+              <a:t>Scenario and Sensitivity Analysis: Stress-Testing Model Outputs</a:t>
             </a:r>
             <a:endParaRPr lang="en-US" sz="1600" dirty="0"/>
           </a:p>
@@ -4056,7 +3505,7 @@
                 <a:ea typeface="Arial" pitchFamily="34" charset="-122"/>
                 <a:cs typeface="Arial" pitchFamily="34" charset="-120"/>
               </a:rPr>
-              <a:t>Notation</a:t>
+              <a:t>Transaction Modeling: M&amp;A Accretion/Dilution and LBO Returns</a:t>
             </a:r>
             <a:endParaRPr lang="en-US" sz="1600" dirty="0"/>
           </a:p>
@@ -4077,7 +3526,7 @@
                 <a:ea typeface="Arial" pitchFamily="34" charset="-122"/>
                 <a:cs typeface="Arial" pitchFamily="34" charset="-120"/>
               </a:rPr>
-              <a:t>Worked Example — Terminology Applied to a Mini Scenario</a:t>
+              <a:t>Model Audit, Error-Proofing, and Presentation of Results</a:t>
             </a:r>
             <a:endParaRPr lang="en-US" sz="1600" dirty="0"/>
           </a:p>
@@ -4098,49 +3547,7 @@
                 <a:ea typeface="Arial" pitchFamily="34" charset="-122"/>
                 <a:cs typeface="Arial" pitchFamily="34" charset="-120"/>
               </a:rPr>
-              <a:t>The standard procedure</a:t>
-            </a:r>
-            <a:endParaRPr lang="en-US" sz="1600" dirty="0"/>
-          </a:p>
-          <a:p>
-            <a:pPr marL="177800" indent="-177800">
-              <a:spcAft>
-                <a:spcPts val="1000"/>
-              </a:spcAft>
-              <a:buSzPct val="100000"/>
-              <a:buChar char="▪"/>
-            </a:pPr>
-            <a:r>
-              <a:rPr lang="en-US" sz="1600" dirty="0">
-                <a:solidFill>
-                  <a:srgbClr val="1C1917"/>
-                </a:solidFill>
-                <a:latin typeface="Arial" pitchFamily="34" charset="0"/>
-                <a:ea typeface="Arial" pitchFamily="34" charset="-122"/>
-                <a:cs typeface="Arial" pitchFamily="34" charset="-120"/>
-              </a:rPr>
-              <a:t>Inputs</a:t>
-            </a:r>
-            <a:endParaRPr lang="en-US" sz="1600" dirty="0"/>
-          </a:p>
-          <a:p>
-            <a:pPr marL="177800" indent="-177800">
-              <a:spcAft>
-                <a:spcPts val="1000"/>
-              </a:spcAft>
-              <a:buSzPct val="100000"/>
-              <a:buChar char="▪"/>
-            </a:pPr>
-            <a:r>
-              <a:rPr lang="en-US" sz="1600" dirty="0">
-                <a:solidFill>
-                  <a:srgbClr val="1C1917"/>
-                </a:solidFill>
-                <a:latin typeface="Arial" pitchFamily="34" charset="0"/>
-                <a:ea typeface="Arial" pitchFamily="34" charset="-122"/>
-                <a:cs typeface="Arial" pitchFamily="34" charset="-120"/>
-              </a:rPr>
-              <a:t>Steps</a:t>
+              <a:t>Final Project Integration: Building and Defending a Full Valuation Case</a:t>
             </a:r>
             <a:endParaRPr lang="en-US" sz="1600" dirty="0"/>
           </a:p>
@@ -4231,7 +3638,7 @@
                 <a:ea typeface="Arial" pitchFamily="34" charset="-122"/>
                 <a:cs typeface="Arial" pitchFamily="34" charset="-120"/>
               </a:rPr>
-              <a:t>Concepts and vocabulary</a:t>
+              <a:t>Architecting a Case-Study Model: Inputs, Calculations, and Outputs</a:t>
             </a:r>
             <a:endParaRPr lang="en-US" sz="2100" dirty="0"/>
           </a:p>
@@ -4308,7 +3715,7 @@
         <p:spPr>
           <a:xfrm>
             <a:off x="731520" y="1188720"/>
-            <a:ext cx="7680960" cy="3383280"/>
+            <a:ext cx="7680960" cy="2743200"/>
           </a:xfrm>
           <a:prstGeom prst="rect">
             <a:avLst/>
@@ -4336,7 +3743,7 @@
                 <a:ea typeface="Arial" pitchFamily="34" charset="-122"/>
                 <a:cs typeface="Arial" pitchFamily="34" charset="-120"/>
               </a:rPr>
-              <a:t>Financial modeling sits at the intersection of accounting, finance, and analytical reasoning. Before you can b</a:t>
+              <a:t>Use three core tabs: Input, Calculation, and Output.</a:t>
             </a:r>
             <a:endParaRPr lang="en-US" sz="1500" dirty="0"/>
           </a:p>
@@ -4357,9 +3764,154 @@
                 <a:ea typeface="Arial" pitchFamily="34" charset="-122"/>
                 <a:cs typeface="Arial" pitchFamily="34" charset="-120"/>
               </a:rPr>
-              <a:t>---</a:t>
+              <a:t>Hard-coded values live exclusively on the Input tab.</a:t>
             </a:r>
             <a:endParaRPr lang="en-US" sz="1500" dirty="0"/>
+          </a:p>
+          <a:p>
+            <a:pPr marL="152400" indent="-152400">
+              <a:spcAft>
+                <a:spcPts val="800"/>
+              </a:spcAft>
+              <a:buSzPct val="100000"/>
+              <a:buChar char="•"/>
+            </a:pPr>
+            <a:r>
+              <a:rPr lang="en-US" sz="1500" dirty="0">
+                <a:solidFill>
+                  <a:srgbClr val="1C1917"/>
+                </a:solidFill>
+                <a:latin typeface="Arial" pitchFamily="34" charset="0"/>
+                <a:ea typeface="Arial" pitchFamily="34" charset="-122"/>
+                <a:cs typeface="Arial" pitchFamily="34" charset="-120"/>
+              </a:rPr>
+              <a:t>Calculation tab references inputs only — no raw numbers allowed.</a:t>
+            </a:r>
+            <a:endParaRPr lang="en-US" sz="1500" dirty="0"/>
+          </a:p>
+          <a:p>
+            <a:pPr marL="152400" indent="-152400">
+              <a:spcAft>
+                <a:spcPts val="800"/>
+              </a:spcAft>
+              <a:buSzPct val="100000"/>
+              <a:buChar char="•"/>
+            </a:pPr>
+            <a:r>
+              <a:rPr lang="en-US" sz="1500" dirty="0">
+                <a:solidFill>
+                  <a:srgbClr val="1C1917"/>
+                </a:solidFill>
+                <a:latin typeface="Arial" pitchFamily="34" charset="0"/>
+                <a:ea typeface="Arial" pitchFamily="34" charset="-122"/>
+                <a:cs typeface="Arial" pitchFamily="34" charset="-120"/>
+              </a:rPr>
+              <a:t>Output tab presents results clearly for stakeholders and auditors.</a:t>
+            </a:r>
+            <a:endParaRPr lang="en-US" sz="1500" dirty="0"/>
+          </a:p>
+          <a:p>
+            <a:pPr marL="152400" indent="-152400">
+              <a:spcAft>
+                <a:spcPts val="800"/>
+              </a:spcAft>
+              <a:buSzPct val="100000"/>
+              <a:buChar char="•"/>
+            </a:pPr>
+            <a:r>
+              <a:rPr lang="en-US" sz="1500" dirty="0">
+                <a:solidFill>
+                  <a:srgbClr val="1C1917"/>
+                </a:solidFill>
+                <a:latin typeface="Arial" pitchFamily="34" charset="0"/>
+                <a:ea typeface="Arial" pitchFamily="34" charset="-122"/>
+                <a:cs typeface="Arial" pitchFamily="34" charset="-120"/>
+              </a:rPr>
+              <a:t>Transparency is structural, not an afterthought.</a:t>
+            </a:r>
+            <a:endParaRPr lang="en-US" sz="1500" dirty="0"/>
+          </a:p>
+        </p:txBody>
+      </p:sp>
+      <p:sp>
+        <p:nvSpPr>
+          <p:cNvPr id="7" name="Shape 5"/>
+          <p:cNvSpPr/>
+          <p:nvPr/>
+        </p:nvSpPr>
+        <p:spPr>
+          <a:xfrm>
+            <a:off x="731520" y="4041648"/>
+            <a:ext cx="7680960" cy="566928"/>
+          </a:xfrm>
+          <a:prstGeom prst="roundRect">
+            <a:avLst>
+              <a:gd name="adj" fmla="val 12903"/>
+            </a:avLst>
+          </a:prstGeom>
+          <a:solidFill>
+            <a:srgbClr val="B45309">
+              <a:alpha val="12000"/>
+            </a:srgbClr>
+          </a:solidFill>
+          <a:ln w="12700">
+            <a:solidFill>
+              <a:srgbClr val="B45309"/>
+            </a:solidFill>
+            <a:prstDash val="solid"/>
+          </a:ln>
+        </p:spPr>
+      </p:sp>
+      <p:sp>
+        <p:nvSpPr>
+          <p:cNvPr id="8" name="Text 6"/>
+          <p:cNvSpPr/>
+          <p:nvPr/>
+        </p:nvSpPr>
+        <p:spPr>
+          <a:xfrm>
+            <a:off x="868680" y="4087368"/>
+            <a:ext cx="7406640" cy="475488"/>
+          </a:xfrm>
+          <a:prstGeom prst="rect">
+            <a:avLst/>
+          </a:prstGeom>
+          <a:noFill/>
+          <a:ln/>
+        </p:spPr>
+        <p:txBody>
+          <a:bodyPr wrap="square" rtlCol="0" anchor="ctr"/>
+          <a:lstStyle/>
+          <a:p>
+            <a:pPr indent="0" marL="0">
+              <a:buNone/>
+            </a:pPr>
+            <a:r>
+              <a:rPr lang="en-US" sz="1100" b="1" dirty="0">
+                <a:solidFill>
+                  <a:srgbClr val="B45309"/>
+                </a:solidFill>
+                <a:latin typeface="Arial" pitchFamily="34" charset="0"/>
+                <a:ea typeface="Arial" pitchFamily="34" charset="-122"/>
+                <a:cs typeface="Arial" pitchFamily="34" charset="-120"/>
+              </a:rPr>
+              <a:t>Takeaway  </a:t>
+            </a:r>
+            <a:pPr indent="0" marL="0">
+              <a:buNone/>
+            </a:pPr>
+            <a:r>
+              <a:rPr lang="en-US" sz="1150" dirty="0">
+                <a:solidFill>
+                  <a:srgbClr val="1C1917"/>
+                </a:solidFill>
+                <a:latin typeface="Arial" pitchFamily="34" charset="0"/>
+                <a:ea typeface="Arial" pitchFamily="34" charset="-122"/>
+                <a:cs typeface="Arial" pitchFamily="34" charset="-120"/>
+              </a:rPr>
+              <a:t>A three-tab architecture forces traceability from every assumption to every output.</a:t>
+            </a:r>
+            <a:endParaRPr lang="en-US" sz="1100" dirty="0"/>
           </a:p>
         </p:txBody>
       </p:sp>
@@ -4448,7 +4000,7 @@
                 <a:ea typeface="Arial" pitchFamily="34" charset="-122"/>
                 <a:cs typeface="Arial" pitchFamily="34" charset="-120"/>
               </a:rPr>
-              <a:t>Core Definitions</a:t>
+              <a:t>DCF Valuation in Practice: Free Cash Flow Forecasting and Terminal Value</a:t>
             </a:r>
             <a:endParaRPr lang="en-US" sz="2100" dirty="0"/>
           </a:p>
@@ -4525,7 +4077,7 @@
         <p:spPr>
           <a:xfrm>
             <a:off x="731520" y="1188720"/>
-            <a:ext cx="7680960" cy="3383280"/>
+            <a:ext cx="7680960" cy="2743200"/>
           </a:xfrm>
           <a:prstGeom prst="rect">
             <a:avLst/>
@@ -4553,7 +4105,7 @@
                 <a:ea typeface="Arial" pitchFamily="34" charset="-122"/>
                 <a:cs typeface="Arial" pitchFamily="34" charset="-120"/>
               </a:rPr>
-              <a:t>A financial model is a structured, quantitative representation of a business, project, or transaction, built t</a:t>
+              <a:t>UFCF = EBIT × (1 – t) + D&amp;A – ΔNWC – Capex.</a:t>
             </a:r>
             <a:endParaRPr lang="en-US" sz="1500" dirty="0"/>
           </a:p>
@@ -4574,7 +4126,7 @@
                 <a:ea typeface="Arial" pitchFamily="34" charset="-122"/>
                 <a:cs typeface="Arial" pitchFamily="34" charset="-120"/>
               </a:rPr>
-              <a:t>Key vocabulary you must own:</a:t>
+              <a:t>NOPAT isolates operating profit after tax, before financing effects.</a:t>
             </a:r>
             <a:endParaRPr lang="en-US" sz="1500" dirty="0"/>
           </a:p>
@@ -4595,7 +4147,7 @@
                 <a:ea typeface="Arial" pitchFamily="34" charset="-122"/>
                 <a:cs typeface="Arial" pitchFamily="34" charset="-120"/>
               </a:rPr>
-              <a:t>Assumption — an input value or relationship accepted as true for modeling purposes (e.g., revenue growth rate </a:t>
+              <a:t>Add back D&amp;A — it is a non-cash charge reducing reported profit.</a:t>
             </a:r>
             <a:endParaRPr lang="en-US" sz="1500" dirty="0"/>
           </a:p>
@@ -4616,9 +4168,112 @@
                 <a:ea typeface="Arial" pitchFamily="34" charset="-122"/>
                 <a:cs typeface="Arial" pitchFamily="34" charset="-120"/>
               </a:rPr>
-              <a:t>Driver — a variable whose change meaningfully moves an output (e.g., unit volume is a revenue driver).</a:t>
+              <a:t>Rising receivables and inventory consume cash; subtract NWC increases.</a:t>
             </a:r>
             <a:endParaRPr lang="en-US" sz="1500" dirty="0"/>
+          </a:p>
+          <a:p>
+            <a:pPr marL="152400" indent="-152400">
+              <a:spcAft>
+                <a:spcPts val="800"/>
+              </a:spcAft>
+              <a:buSzPct val="100000"/>
+              <a:buChar char="•"/>
+            </a:pPr>
+            <a:r>
+              <a:rPr lang="en-US" sz="1500" dirty="0">
+                <a:solidFill>
+                  <a:srgbClr val="1C1917"/>
+                </a:solidFill>
+                <a:latin typeface="Arial" pitchFamily="34" charset="0"/>
+                <a:ea typeface="Arial" pitchFamily="34" charset="-122"/>
+                <a:cs typeface="Arial" pitchFamily="34" charset="-120"/>
+              </a:rPr>
+              <a:t>Terminal value typically drives the majority of total DCF value.</a:t>
+            </a:r>
+            <a:endParaRPr lang="en-US" sz="1500" dirty="0"/>
+          </a:p>
+        </p:txBody>
+      </p:sp>
+      <p:sp>
+        <p:nvSpPr>
+          <p:cNvPr id="7" name="Shape 5"/>
+          <p:cNvSpPr/>
+          <p:nvPr/>
+        </p:nvSpPr>
+        <p:spPr>
+          <a:xfrm>
+            <a:off x="731520" y="4041648"/>
+            <a:ext cx="7680960" cy="566928"/>
+          </a:xfrm>
+          <a:prstGeom prst="roundRect">
+            <a:avLst>
+              <a:gd name="adj" fmla="val 12903"/>
+            </a:avLst>
+          </a:prstGeom>
+          <a:solidFill>
+            <a:srgbClr val="B45309">
+              <a:alpha val="12000"/>
+            </a:srgbClr>
+          </a:solidFill>
+          <a:ln w="12700">
+            <a:solidFill>
+              <a:srgbClr val="B45309"/>
+            </a:solidFill>
+            <a:prstDash val="solid"/>
+          </a:ln>
+        </p:spPr>
+      </p:sp>
+      <p:sp>
+        <p:nvSpPr>
+          <p:cNvPr id="8" name="Text 6"/>
+          <p:cNvSpPr/>
+          <p:nvPr/>
+        </p:nvSpPr>
+        <p:spPr>
+          <a:xfrm>
+            <a:off x="868680" y="4087368"/>
+            <a:ext cx="7406640" cy="475488"/>
+          </a:xfrm>
+          <a:prstGeom prst="rect">
+            <a:avLst/>
+          </a:prstGeom>
+          <a:noFill/>
+          <a:ln/>
+        </p:spPr>
+        <p:txBody>
+          <a:bodyPr wrap="square" rtlCol="0" anchor="ctr"/>
+          <a:lstStyle/>
+          <a:p>
+            <a:pPr indent="0" marL="0">
+              <a:buNone/>
+            </a:pPr>
+            <a:r>
+              <a:rPr lang="en-US" sz="1100" b="1" dirty="0">
+                <a:solidFill>
+                  <a:srgbClr val="B45309"/>
+                </a:solidFill>
+                <a:latin typeface="Arial" pitchFamily="34" charset="0"/>
+                <a:ea typeface="Arial" pitchFamily="34" charset="-122"/>
+                <a:cs typeface="Arial" pitchFamily="34" charset="-120"/>
+              </a:rPr>
+              <a:t>Takeaway  </a:t>
+            </a:r>
+            <a:pPr indent="0" marL="0">
+              <a:buNone/>
+            </a:pPr>
+            <a:r>
+              <a:rPr lang="en-US" sz="1150" dirty="0">
+                <a:solidFill>
+                  <a:srgbClr val="1C1917"/>
+                </a:solidFill>
+                <a:latin typeface="Arial" pitchFamily="34" charset="0"/>
+                <a:ea typeface="Arial" pitchFamily="34" charset="-122"/>
+                <a:cs typeface="Arial" pitchFamily="34" charset="-120"/>
+              </a:rPr>
+              <a:t>A DCF is a structured argument about future cash generation, built layer by layer from EBIT to equity value.</a:t>
+            </a:r>
+            <a:endParaRPr lang="en-US" sz="1100" dirty="0"/>
           </a:p>
         </p:txBody>
       </p:sp>
@@ -4662,8 +4317,8 @@
         </p:nvSpPr>
         <p:spPr>
           <a:xfrm>
-            <a:off x="411480" y="402336"/>
-            <a:ext cx="82296" cy="329184"/>
+            <a:off x="411480" y="384048"/>
+            <a:ext cx="82296" cy="310896"/>
           </a:xfrm>
           <a:prstGeom prst="rect">
             <a:avLst/>
@@ -4683,7 +4338,7 @@
         <p:spPr>
           <a:xfrm>
             <a:off x="566928" y="292608"/>
-            <a:ext cx="8138160" cy="548640"/>
+            <a:ext cx="8138160" cy="502920"/>
           </a:xfrm>
           <a:prstGeom prst="rect">
             <a:avLst/>
@@ -4699,7 +4354,7 @@
               <a:buNone/>
             </a:pPr>
             <a:r>
-              <a:rPr lang="en-US" sz="2100" b="1" dirty="0">
+              <a:rPr lang="en-US" sz="2000" b="1" dirty="0">
                 <a:solidFill>
                   <a:srgbClr val="1C1917"/>
                 </a:solidFill>
@@ -4707,30 +4362,112 @@
                 <a:ea typeface="Arial" pitchFamily="34" charset="-122"/>
                 <a:cs typeface="Arial" pitchFamily="34" charset="-120"/>
               </a:rPr>
-              <a:t>Where It Fits in Practice</a:t>
-            </a:r>
-            <a:endParaRPr lang="en-US" sz="2100" dirty="0"/>
-          </a:p>
-        </p:txBody>
-      </p:sp>
-      <p:sp>
-        <p:nvSpPr>
-          <p:cNvPr id="4" name="Shape 2"/>
-          <p:cNvSpPr/>
-          <p:nvPr/>
-        </p:nvSpPr>
-        <p:spPr>
-          <a:xfrm>
-            <a:off x="411480" y="960120"/>
-            <a:ext cx="8321040" cy="0"/>
-          </a:xfrm>
-          <a:prstGeom prst="line">
-            <a:avLst/>
-          </a:prstGeom>
-          <a:noFill/>
-          <a:ln w="12700">
+              <a:t>Three-Tab Model Architecture</a:t>
+            </a:r>
+            <a:endParaRPr lang="en-US" sz="2000" dirty="0"/>
+          </a:p>
+        </p:txBody>
+      </p:sp>
+      <p:sp>
+        <p:nvSpPr>
+          <p:cNvPr id="4" name="Text 2"/>
+          <p:cNvSpPr/>
+          <p:nvPr/>
+        </p:nvSpPr>
+        <p:spPr>
+          <a:xfrm>
+            <a:off x="566928" y="4681728"/>
+            <a:ext cx="8138160" cy="320040"/>
+          </a:xfrm>
+          <a:prstGeom prst="rect">
+            <a:avLst/>
+          </a:prstGeom>
+          <a:noFill/>
+          <a:ln/>
+        </p:spPr>
+        <p:txBody>
+          <a:bodyPr wrap="square" rtlCol="0" anchor="ctr"/>
+          <a:lstStyle/>
+          <a:p>
+            <a:pPr indent="0" marL="0">
+              <a:buNone/>
+            </a:pPr>
+            <a:r>
+              <a:rPr lang="en-US" sz="1000" i="1" dirty="0">
+                <a:solidFill>
+                  <a:srgbClr val="78716C"/>
+                </a:solidFill>
+                <a:latin typeface="Arial" pitchFamily="34" charset="0"/>
+                <a:ea typeface="Arial" pitchFamily="34" charset="-122"/>
+                <a:cs typeface="Arial" pitchFamily="34" charset="-120"/>
+              </a:rPr>
+              <a:t>Every number traces from Input through Calculation to Output</a:t>
+            </a:r>
+            <a:endParaRPr lang="en-US" sz="1000" dirty="0"/>
+          </a:p>
+        </p:txBody>
+      </p:sp>
+      <p:sp>
+        <p:nvSpPr>
+          <p:cNvPr id="5" name="Text 3"/>
+          <p:cNvSpPr/>
+          <p:nvPr/>
+        </p:nvSpPr>
+        <p:spPr>
+          <a:xfrm>
+            <a:off x="411480" y="4919472"/>
+            <a:ext cx="8321040" cy="219456"/>
+          </a:xfrm>
+          <a:prstGeom prst="rect">
+            <a:avLst/>
+          </a:prstGeom>
+          <a:noFill/>
+          <a:ln/>
+        </p:spPr>
+        <p:txBody>
+          <a:bodyPr wrap="square" rtlCol="0" anchor="ctr"/>
+          <a:lstStyle/>
+          <a:p>
+            <a:pPr indent="0" marL="0">
+              <a:buNone/>
+            </a:pPr>
+            <a:r>
+              <a:rPr lang="en-US" sz="750" dirty="0">
+                <a:solidFill>
+                  <a:srgbClr val="AAAAAA"/>
+                </a:solidFill>
+                <a:latin typeface="Arial" pitchFamily="34" charset="0"/>
+                <a:ea typeface="Arial" pitchFamily="34" charset="-122"/>
+                <a:cs typeface="Arial" pitchFamily="34" charset="-120"/>
+              </a:rPr>
+              <a:t>Lesson Forge Pro (owner) — This content is educational material only and does not constitute financial, investment, or trading advice.</a:t>
+            </a:r>
+            <a:endParaRPr lang="en-US" sz="750" dirty="0"/>
+          </a:p>
+        </p:txBody>
+      </p:sp>
+      <p:sp>
+        <p:nvSpPr>
+          <p:cNvPr id="6" name="Shape 4"/>
+          <p:cNvSpPr/>
+          <p:nvPr/>
+        </p:nvSpPr>
+        <p:spPr>
+          <a:xfrm>
+            <a:off x="411480" y="2194560"/>
+            <a:ext cx="1771650" cy="960120"/>
+          </a:xfrm>
+          <a:prstGeom prst="roundRect">
+            <a:avLst>
+              <a:gd name="adj" fmla="val 7619"/>
+            </a:avLst>
+          </a:prstGeom>
+          <a:solidFill>
+            <a:srgbClr val="F5F5F4"/>
+          </a:solidFill>
+          <a:ln w="15240">
             <a:solidFill>
-              <a:srgbClr val="E7E5E4"/>
+              <a:srgbClr val="B45309"/>
             </a:solidFill>
             <a:prstDash val="solid"/>
           </a:ln>
@@ -4738,73 +4475,71 @@
       </p:sp>
       <p:sp>
         <p:nvSpPr>
-          <p:cNvPr id="5" name="Text 3"/>
-          <p:cNvSpPr/>
-          <p:nvPr/>
-        </p:nvSpPr>
-        <p:spPr>
-          <a:xfrm>
-            <a:off x="411480" y="4864608"/>
-            <a:ext cx="8321040" cy="237744"/>
-          </a:xfrm>
-          <a:prstGeom prst="rect">
-            <a:avLst/>
-          </a:prstGeom>
-          <a:noFill/>
+          <p:cNvPr id="7" name="Text 5"/>
+          <p:cNvSpPr/>
+          <p:nvPr/>
+        </p:nvSpPr>
+        <p:spPr>
+          <a:xfrm>
+            <a:off x="484632" y="2267712"/>
+            <a:ext cx="310896" cy="274320"/>
+          </a:xfrm>
+          <a:prstGeom prst="rect">
+            <a:avLst/>
+          </a:prstGeom>
+          <a:solidFill>
+            <a:srgbClr val="B45309"/>
+          </a:solidFill>
           <a:ln/>
         </p:spPr>
         <p:txBody>
           <a:bodyPr wrap="square" rtlCol="0" anchor="ctr"/>
           <a:lstStyle/>
           <a:p>
-            <a:pPr indent="0" marL="0">
-              <a:buNone/>
-            </a:pPr>
-            <a:r>
-              <a:rPr lang="en-US" sz="750" dirty="0">
-                <a:solidFill>
-                  <a:srgbClr val="AAAAAA"/>
-                </a:solidFill>
-                <a:latin typeface="Arial" pitchFamily="34" charset="0"/>
-                <a:ea typeface="Arial" pitchFamily="34" charset="-122"/>
-                <a:cs typeface="Arial" pitchFamily="34" charset="-120"/>
-              </a:rPr>
-              <a:t>Lesson Forge Pro (owner) — This content is educational material only and does not constitute financial, investment, or trading advice.</a:t>
-            </a:r>
-            <a:endParaRPr lang="en-US" sz="750" dirty="0"/>
-          </a:p>
-        </p:txBody>
-      </p:sp>
-      <p:sp>
-        <p:nvSpPr>
-          <p:cNvPr id="6" name="Text 4"/>
-          <p:cNvSpPr/>
-          <p:nvPr/>
-        </p:nvSpPr>
-        <p:spPr>
-          <a:xfrm>
-            <a:off x="731520" y="1188720"/>
-            <a:ext cx="7680960" cy="3383280"/>
-          </a:xfrm>
-          <a:prstGeom prst="rect">
-            <a:avLst/>
-          </a:prstGeom>
-          <a:noFill/>
-          <a:ln/>
-        </p:spPr>
-        <p:txBody>
-          <a:bodyPr wrap="square" rtlCol="0" anchor="t"/>
-          <a:lstStyle/>
-          <a:p>
-            <a:pPr marL="152400" indent="-152400">
-              <a:spcAft>
-                <a:spcPts val="800"/>
-              </a:spcAft>
-              <a:buSzPct val="100000"/>
-              <a:buChar char="•"/>
-            </a:pPr>
-            <a:r>
-              <a:rPr lang="en-US" sz="1500" dirty="0">
+            <a:pPr algn="ctr" indent="0" marL="0">
+              <a:buNone/>
+            </a:pPr>
+            <a:r>
+              <a:rPr lang="en-US" sz="1000" b="1" dirty="0">
+                <a:solidFill>
+                  <a:srgbClr val="FFFFFF"/>
+                </a:solidFill>
+                <a:latin typeface="Arial" pitchFamily="34" charset="0"/>
+                <a:ea typeface="Arial" pitchFamily="34" charset="-122"/>
+                <a:cs typeface="Arial" pitchFamily="34" charset="-120"/>
+              </a:rPr>
+              <a:t>1</a:t>
+            </a:r>
+            <a:endParaRPr lang="en-US" sz="1000" dirty="0"/>
+          </a:p>
+        </p:txBody>
+      </p:sp>
+      <p:sp>
+        <p:nvSpPr>
+          <p:cNvPr id="8" name="Text 6"/>
+          <p:cNvSpPr/>
+          <p:nvPr/>
+        </p:nvSpPr>
+        <p:spPr>
+          <a:xfrm>
+            <a:off x="411480" y="2468880"/>
+            <a:ext cx="1771650" cy="384048"/>
+          </a:xfrm>
+          <a:prstGeom prst="rect">
+            <a:avLst/>
+          </a:prstGeom>
+          <a:noFill/>
+          <a:ln/>
+        </p:spPr>
+        <p:txBody>
+          <a:bodyPr wrap="square" rtlCol="0" anchor="ctr"/>
+          <a:lstStyle/>
+          <a:p>
+            <a:pPr algn="ctr" indent="0" marL="0">
+              <a:buNone/>
+            </a:pPr>
+            <a:r>
+              <a:rPr lang="en-US" sz="1200" b="1" dirty="0">
                 <a:solidFill>
                   <a:srgbClr val="1C1917"/>
                 </a:solidFill>
@@ -4812,20 +4547,165 @@
                 <a:ea typeface="Arial" pitchFamily="34" charset="-122"/>
                 <a:cs typeface="Arial" pitchFamily="34" charset="-120"/>
               </a:rPr>
-              <a:t>Financial models appear across virtually every finance function: business and project valuation, M&amp;A transacti</a:t>
-            </a:r>
-            <a:endParaRPr lang="en-US" sz="1500" dirty="0"/>
-          </a:p>
-          <a:p>
-            <a:pPr marL="152400" indent="-152400">
-              <a:spcAft>
-                <a:spcPts val="800"/>
-              </a:spcAft>
-              <a:buSzPct val="100000"/>
-              <a:buChar char="•"/>
-            </a:pPr>
-            <a:r>
-              <a:rPr lang="en-US" sz="1500" dirty="0">
+              <a:t>Cover Tab</a:t>
+            </a:r>
+            <a:endParaRPr lang="en-US" sz="1200" dirty="0"/>
+          </a:p>
+        </p:txBody>
+      </p:sp>
+      <p:sp>
+        <p:nvSpPr>
+          <p:cNvPr id="9" name="Text 7"/>
+          <p:cNvSpPr/>
+          <p:nvPr/>
+        </p:nvSpPr>
+        <p:spPr>
+          <a:xfrm>
+            <a:off x="411480" y="2816352"/>
+            <a:ext cx="1771650" cy="310896"/>
+          </a:xfrm>
+          <a:prstGeom prst="rect">
+            <a:avLst/>
+          </a:prstGeom>
+          <a:noFill/>
+          <a:ln/>
+        </p:spPr>
+        <p:txBody>
+          <a:bodyPr wrap="square" rtlCol="0" anchor="ctr"/>
+          <a:lstStyle/>
+          <a:p>
+            <a:pPr algn="ctr" indent="0" marL="0">
+              <a:buNone/>
+            </a:pPr>
+            <a:r>
+              <a:rPr lang="en-US" sz="900" dirty="0">
+                <a:solidFill>
+                  <a:srgbClr val="78716C"/>
+                </a:solidFill>
+                <a:latin typeface="Arial" pitchFamily="34" charset="0"/>
+                <a:ea typeface="Arial" pitchFamily="34" charset="-122"/>
+                <a:cs typeface="Arial" pitchFamily="34" charset="-120"/>
+              </a:rPr>
+              <a:t>Records name, version, date, analyst</a:t>
+            </a:r>
+            <a:endParaRPr lang="en-US" sz="900" dirty="0"/>
+          </a:p>
+        </p:txBody>
+      </p:sp>
+      <p:sp>
+        <p:nvSpPr>
+          <p:cNvPr id="10" name="Shape 8"/>
+          <p:cNvSpPr/>
+          <p:nvPr/>
+        </p:nvSpPr>
+        <p:spPr>
+          <a:xfrm>
+            <a:off x="2237994" y="2574036"/>
+            <a:ext cx="301752" cy="201168"/>
+          </a:xfrm>
+          <a:prstGeom prst="rightArrow">
+            <a:avLst/>
+          </a:prstGeom>
+          <a:solidFill>
+            <a:srgbClr val="B45309"/>
+          </a:solidFill>
+          <a:ln/>
+        </p:spPr>
+      </p:sp>
+      <p:sp>
+        <p:nvSpPr>
+          <p:cNvPr id="11" name="Shape 9"/>
+          <p:cNvSpPr/>
+          <p:nvPr/>
+        </p:nvSpPr>
+        <p:spPr>
+          <a:xfrm>
+            <a:off x="2594610" y="2194560"/>
+            <a:ext cx="1771650" cy="960120"/>
+          </a:xfrm>
+          <a:prstGeom prst="roundRect">
+            <a:avLst>
+              <a:gd name="adj" fmla="val 7619"/>
+            </a:avLst>
+          </a:prstGeom>
+          <a:solidFill>
+            <a:srgbClr val="F5F5F4"/>
+          </a:solidFill>
+          <a:ln w="15240">
+            <a:solidFill>
+              <a:srgbClr val="B45309"/>
+            </a:solidFill>
+            <a:prstDash val="solid"/>
+          </a:ln>
+        </p:spPr>
+      </p:sp>
+      <p:sp>
+        <p:nvSpPr>
+          <p:cNvPr id="12" name="Text 10"/>
+          <p:cNvSpPr/>
+          <p:nvPr/>
+        </p:nvSpPr>
+        <p:spPr>
+          <a:xfrm>
+            <a:off x="2667762" y="2267712"/>
+            <a:ext cx="310896" cy="274320"/>
+          </a:xfrm>
+          <a:prstGeom prst="rect">
+            <a:avLst/>
+          </a:prstGeom>
+          <a:solidFill>
+            <a:srgbClr val="B45309"/>
+          </a:solidFill>
+          <a:ln/>
+        </p:spPr>
+        <p:txBody>
+          <a:bodyPr wrap="square" rtlCol="0" anchor="ctr"/>
+          <a:lstStyle/>
+          <a:p>
+            <a:pPr algn="ctr" indent="0" marL="0">
+              <a:buNone/>
+            </a:pPr>
+            <a:r>
+              <a:rPr lang="en-US" sz="1000" b="1" dirty="0">
+                <a:solidFill>
+                  <a:srgbClr val="FFFFFF"/>
+                </a:solidFill>
+                <a:latin typeface="Arial" pitchFamily="34" charset="0"/>
+                <a:ea typeface="Arial" pitchFamily="34" charset="-122"/>
+                <a:cs typeface="Arial" pitchFamily="34" charset="-120"/>
+              </a:rPr>
+              <a:t>2</a:t>
+            </a:r>
+            <a:endParaRPr lang="en-US" sz="1000" dirty="0"/>
+          </a:p>
+        </p:txBody>
+      </p:sp>
+      <p:sp>
+        <p:nvSpPr>
+          <p:cNvPr id="13" name="Text 11"/>
+          <p:cNvSpPr/>
+          <p:nvPr/>
+        </p:nvSpPr>
+        <p:spPr>
+          <a:xfrm>
+            <a:off x="2594610" y="2468880"/>
+            <a:ext cx="1771650" cy="384048"/>
+          </a:xfrm>
+          <a:prstGeom prst="rect">
+            <a:avLst/>
+          </a:prstGeom>
+          <a:noFill/>
+          <a:ln/>
+        </p:spPr>
+        <p:txBody>
+          <a:bodyPr wrap="square" rtlCol="0" anchor="ctr"/>
+          <a:lstStyle/>
+          <a:p>
+            <a:pPr algn="ctr" indent="0" marL="0">
+              <a:buNone/>
+            </a:pPr>
+            <a:r>
+              <a:rPr lang="en-US" sz="1200" b="1" dirty="0">
                 <a:solidFill>
                   <a:srgbClr val="1C1917"/>
                 </a:solidFill>
@@ -4833,9 +4713,380 @@
                 <a:ea typeface="Arial" pitchFamily="34" charset="-122"/>
                 <a:cs typeface="Arial" pitchFamily="34" charset="-120"/>
               </a:rPr>
-              <a:t>---</a:t>
-            </a:r>
-            <a:endParaRPr lang="en-US" sz="1500" dirty="0"/>
+              <a:t>Input Tab</a:t>
+            </a:r>
+            <a:endParaRPr lang="en-US" sz="1200" dirty="0"/>
+          </a:p>
+        </p:txBody>
+      </p:sp>
+      <p:sp>
+        <p:nvSpPr>
+          <p:cNvPr id="14" name="Text 12"/>
+          <p:cNvSpPr/>
+          <p:nvPr/>
+        </p:nvSpPr>
+        <p:spPr>
+          <a:xfrm>
+            <a:off x="2594610" y="2816352"/>
+            <a:ext cx="1771650" cy="310896"/>
+          </a:xfrm>
+          <a:prstGeom prst="rect">
+            <a:avLst/>
+          </a:prstGeom>
+          <a:noFill/>
+          <a:ln/>
+        </p:spPr>
+        <p:txBody>
+          <a:bodyPr wrap="square" rtlCol="0" anchor="ctr"/>
+          <a:lstStyle/>
+          <a:p>
+            <a:pPr algn="ctr" indent="0" marL="0">
+              <a:buNone/>
+            </a:pPr>
+            <a:r>
+              <a:rPr lang="en-US" sz="900" dirty="0">
+                <a:solidFill>
+                  <a:srgbClr val="78716C"/>
+                </a:solidFill>
+                <a:latin typeface="Arial" pitchFamily="34" charset="0"/>
+                <a:ea typeface="Arial" pitchFamily="34" charset="-122"/>
+                <a:cs typeface="Arial" pitchFamily="34" charset="-120"/>
+              </a:rPr>
+              <a:t>All hard-coded blue-font assumptions only</a:t>
+            </a:r>
+            <a:endParaRPr lang="en-US" sz="900" dirty="0"/>
+          </a:p>
+        </p:txBody>
+      </p:sp>
+      <p:sp>
+        <p:nvSpPr>
+          <p:cNvPr id="15" name="Shape 13"/>
+          <p:cNvSpPr/>
+          <p:nvPr/>
+        </p:nvSpPr>
+        <p:spPr>
+          <a:xfrm>
+            <a:off x="4421124" y="2574036"/>
+            <a:ext cx="301752" cy="201168"/>
+          </a:xfrm>
+          <a:prstGeom prst="rightArrow">
+            <a:avLst/>
+          </a:prstGeom>
+          <a:solidFill>
+            <a:srgbClr val="B45309"/>
+          </a:solidFill>
+          <a:ln/>
+        </p:spPr>
+      </p:sp>
+      <p:sp>
+        <p:nvSpPr>
+          <p:cNvPr id="16" name="Shape 14"/>
+          <p:cNvSpPr/>
+          <p:nvPr/>
+        </p:nvSpPr>
+        <p:spPr>
+          <a:xfrm>
+            <a:off x="4777740" y="2194560"/>
+            <a:ext cx="1771650" cy="960120"/>
+          </a:xfrm>
+          <a:prstGeom prst="roundRect">
+            <a:avLst>
+              <a:gd name="adj" fmla="val 7619"/>
+            </a:avLst>
+          </a:prstGeom>
+          <a:solidFill>
+            <a:srgbClr val="F5F5F4"/>
+          </a:solidFill>
+          <a:ln w="15240">
+            <a:solidFill>
+              <a:srgbClr val="B45309"/>
+            </a:solidFill>
+            <a:prstDash val="solid"/>
+          </a:ln>
+        </p:spPr>
+      </p:sp>
+      <p:sp>
+        <p:nvSpPr>
+          <p:cNvPr id="17" name="Text 15"/>
+          <p:cNvSpPr/>
+          <p:nvPr/>
+        </p:nvSpPr>
+        <p:spPr>
+          <a:xfrm>
+            <a:off x="4850892" y="2267712"/>
+            <a:ext cx="310896" cy="274320"/>
+          </a:xfrm>
+          <a:prstGeom prst="rect">
+            <a:avLst/>
+          </a:prstGeom>
+          <a:solidFill>
+            <a:srgbClr val="B45309"/>
+          </a:solidFill>
+          <a:ln/>
+        </p:spPr>
+        <p:txBody>
+          <a:bodyPr wrap="square" rtlCol="0" anchor="ctr"/>
+          <a:lstStyle/>
+          <a:p>
+            <a:pPr algn="ctr" indent="0" marL="0">
+              <a:buNone/>
+            </a:pPr>
+            <a:r>
+              <a:rPr lang="en-US" sz="1000" b="1" dirty="0">
+                <a:solidFill>
+                  <a:srgbClr val="FFFFFF"/>
+                </a:solidFill>
+                <a:latin typeface="Arial" pitchFamily="34" charset="0"/>
+                <a:ea typeface="Arial" pitchFamily="34" charset="-122"/>
+                <a:cs typeface="Arial" pitchFamily="34" charset="-120"/>
+              </a:rPr>
+              <a:t>3</a:t>
+            </a:r>
+            <a:endParaRPr lang="en-US" sz="1000" dirty="0"/>
+          </a:p>
+        </p:txBody>
+      </p:sp>
+      <p:sp>
+        <p:nvSpPr>
+          <p:cNvPr id="18" name="Text 16"/>
+          <p:cNvSpPr/>
+          <p:nvPr/>
+        </p:nvSpPr>
+        <p:spPr>
+          <a:xfrm>
+            <a:off x="4777740" y="2468880"/>
+            <a:ext cx="1771650" cy="384048"/>
+          </a:xfrm>
+          <a:prstGeom prst="rect">
+            <a:avLst/>
+          </a:prstGeom>
+          <a:noFill/>
+          <a:ln/>
+        </p:spPr>
+        <p:txBody>
+          <a:bodyPr wrap="square" rtlCol="0" anchor="ctr"/>
+          <a:lstStyle/>
+          <a:p>
+            <a:pPr algn="ctr" indent="0" marL="0">
+              <a:buNone/>
+            </a:pPr>
+            <a:r>
+              <a:rPr lang="en-US" sz="1200" b="1" dirty="0">
+                <a:solidFill>
+                  <a:srgbClr val="1C1917"/>
+                </a:solidFill>
+                <a:latin typeface="Arial" pitchFamily="34" charset="0"/>
+                <a:ea typeface="Arial" pitchFamily="34" charset="-122"/>
+                <a:cs typeface="Arial" pitchFamily="34" charset="-120"/>
+              </a:rPr>
+              <a:t>Calculation Tab</a:t>
+            </a:r>
+            <a:endParaRPr lang="en-US" sz="1200" dirty="0"/>
+          </a:p>
+        </p:txBody>
+      </p:sp>
+      <p:sp>
+        <p:nvSpPr>
+          <p:cNvPr id="19" name="Text 17"/>
+          <p:cNvSpPr/>
+          <p:nvPr/>
+        </p:nvSpPr>
+        <p:spPr>
+          <a:xfrm>
+            <a:off x="4777740" y="2816352"/>
+            <a:ext cx="1771650" cy="310896"/>
+          </a:xfrm>
+          <a:prstGeom prst="rect">
+            <a:avLst/>
+          </a:prstGeom>
+          <a:noFill/>
+          <a:ln/>
+        </p:spPr>
+        <p:txBody>
+          <a:bodyPr wrap="square" rtlCol="0" anchor="ctr"/>
+          <a:lstStyle/>
+          <a:p>
+            <a:pPr algn="ctr" indent="0" marL="0">
+              <a:buNone/>
+            </a:pPr>
+            <a:r>
+              <a:rPr lang="en-US" sz="900" dirty="0">
+                <a:solidFill>
+                  <a:srgbClr val="78716C"/>
+                </a:solidFill>
+                <a:latin typeface="Arial" pitchFamily="34" charset="0"/>
+                <a:ea typeface="Arial" pitchFamily="34" charset="-122"/>
+                <a:cs typeface="Arial" pitchFamily="34" charset="-120"/>
+              </a:rPr>
+              <a:t>Formulas link back to Input tab</a:t>
+            </a:r>
+            <a:endParaRPr lang="en-US" sz="900" dirty="0"/>
+          </a:p>
+        </p:txBody>
+      </p:sp>
+      <p:sp>
+        <p:nvSpPr>
+          <p:cNvPr id="20" name="Shape 18"/>
+          <p:cNvSpPr/>
+          <p:nvPr/>
+        </p:nvSpPr>
+        <p:spPr>
+          <a:xfrm>
+            <a:off x="6604254" y="2574036"/>
+            <a:ext cx="301752" cy="201168"/>
+          </a:xfrm>
+          <a:prstGeom prst="rightArrow">
+            <a:avLst/>
+          </a:prstGeom>
+          <a:solidFill>
+            <a:srgbClr val="B45309"/>
+          </a:solidFill>
+          <a:ln/>
+        </p:spPr>
+      </p:sp>
+      <p:sp>
+        <p:nvSpPr>
+          <p:cNvPr id="21" name="Shape 19"/>
+          <p:cNvSpPr/>
+          <p:nvPr/>
+        </p:nvSpPr>
+        <p:spPr>
+          <a:xfrm>
+            <a:off x="6960870" y="2194560"/>
+            <a:ext cx="1771650" cy="960120"/>
+          </a:xfrm>
+          <a:prstGeom prst="roundRect">
+            <a:avLst>
+              <a:gd name="adj" fmla="val 7619"/>
+            </a:avLst>
+          </a:prstGeom>
+          <a:solidFill>
+            <a:srgbClr val="F5F5F4"/>
+          </a:solidFill>
+          <a:ln w="15240">
+            <a:solidFill>
+              <a:srgbClr val="B45309"/>
+            </a:solidFill>
+            <a:prstDash val="solid"/>
+          </a:ln>
+        </p:spPr>
+      </p:sp>
+      <p:sp>
+        <p:nvSpPr>
+          <p:cNvPr id="22" name="Text 20"/>
+          <p:cNvSpPr/>
+          <p:nvPr/>
+        </p:nvSpPr>
+        <p:spPr>
+          <a:xfrm>
+            <a:off x="7034022" y="2267712"/>
+            <a:ext cx="310896" cy="274320"/>
+          </a:xfrm>
+          <a:prstGeom prst="rect">
+            <a:avLst/>
+          </a:prstGeom>
+          <a:solidFill>
+            <a:srgbClr val="B45309"/>
+          </a:solidFill>
+          <a:ln/>
+        </p:spPr>
+        <p:txBody>
+          <a:bodyPr wrap="square" rtlCol="0" anchor="ctr"/>
+          <a:lstStyle/>
+          <a:p>
+            <a:pPr algn="ctr" indent="0" marL="0">
+              <a:buNone/>
+            </a:pPr>
+            <a:r>
+              <a:rPr lang="en-US" sz="1000" b="1" dirty="0">
+                <a:solidFill>
+                  <a:srgbClr val="FFFFFF"/>
+                </a:solidFill>
+                <a:latin typeface="Arial" pitchFamily="34" charset="0"/>
+                <a:ea typeface="Arial" pitchFamily="34" charset="-122"/>
+                <a:cs typeface="Arial" pitchFamily="34" charset="-120"/>
+              </a:rPr>
+              <a:t>4</a:t>
+            </a:r>
+            <a:endParaRPr lang="en-US" sz="1000" dirty="0"/>
+          </a:p>
+        </p:txBody>
+      </p:sp>
+      <p:sp>
+        <p:nvSpPr>
+          <p:cNvPr id="23" name="Text 21"/>
+          <p:cNvSpPr/>
+          <p:nvPr/>
+        </p:nvSpPr>
+        <p:spPr>
+          <a:xfrm>
+            <a:off x="6960870" y="2468880"/>
+            <a:ext cx="1771650" cy="384048"/>
+          </a:xfrm>
+          <a:prstGeom prst="rect">
+            <a:avLst/>
+          </a:prstGeom>
+          <a:noFill/>
+          <a:ln/>
+        </p:spPr>
+        <p:txBody>
+          <a:bodyPr wrap="square" rtlCol="0" anchor="ctr"/>
+          <a:lstStyle/>
+          <a:p>
+            <a:pPr algn="ctr" indent="0" marL="0">
+              <a:buNone/>
+            </a:pPr>
+            <a:r>
+              <a:rPr lang="en-US" sz="1200" b="1" dirty="0">
+                <a:solidFill>
+                  <a:srgbClr val="1C1917"/>
+                </a:solidFill>
+                <a:latin typeface="Arial" pitchFamily="34" charset="0"/>
+                <a:ea typeface="Arial" pitchFamily="34" charset="-122"/>
+                <a:cs typeface="Arial" pitchFamily="34" charset="-120"/>
+              </a:rPr>
+              <a:t>Output Tab</a:t>
+            </a:r>
+            <a:endParaRPr lang="en-US" sz="1200" dirty="0"/>
+          </a:p>
+        </p:txBody>
+      </p:sp>
+      <p:sp>
+        <p:nvSpPr>
+          <p:cNvPr id="24" name="Text 22"/>
+          <p:cNvSpPr/>
+          <p:nvPr/>
+        </p:nvSpPr>
+        <p:spPr>
+          <a:xfrm>
+            <a:off x="6960870" y="2816352"/>
+            <a:ext cx="1771650" cy="310896"/>
+          </a:xfrm>
+          <a:prstGeom prst="rect">
+            <a:avLst/>
+          </a:prstGeom>
+          <a:noFill/>
+          <a:ln/>
+        </p:spPr>
+        <p:txBody>
+          <a:bodyPr wrap="square" rtlCol="0" anchor="ctr"/>
+          <a:lstStyle/>
+          <a:p>
+            <a:pPr algn="ctr" indent="0" marL="0">
+              <a:buNone/>
+            </a:pPr>
+            <a:r>
+              <a:rPr lang="en-US" sz="900" dirty="0">
+                <a:solidFill>
+                  <a:srgbClr val="78716C"/>
+                </a:solidFill>
+                <a:latin typeface="Arial" pitchFamily="34" charset="0"/>
+                <a:ea typeface="Arial" pitchFamily="34" charset="-122"/>
+                <a:cs typeface="Arial" pitchFamily="34" charset="-120"/>
+              </a:rPr>
+              <a:t>Display only, no new calculations</a:t>
+            </a:r>
+            <a:endParaRPr lang="en-US" sz="900" dirty="0"/>
           </a:p>
         </p:txBody>
       </p:sp>
@@ -4879,8 +5130,8 @@
         </p:nvSpPr>
         <p:spPr>
           <a:xfrm>
-            <a:off x="411480" y="384048"/>
-            <a:ext cx="82296" cy="310896"/>
+            <a:off x="411480" y="402336"/>
+            <a:ext cx="82296" cy="329184"/>
           </a:xfrm>
           <a:prstGeom prst="rect">
             <a:avLst/>
@@ -4900,7 +5151,7 @@
         <p:spPr>
           <a:xfrm>
             <a:off x="566928" y="292608"/>
-            <a:ext cx="8138160" cy="502920"/>
+            <a:ext cx="8138160" cy="548640"/>
           </a:xfrm>
           <a:prstGeom prst="rect">
             <a:avLst/>
@@ -4916,7 +5167,7 @@
               <a:buNone/>
             </a:pPr>
             <a:r>
-              <a:rPr lang="en-US" sz="2000" b="1" dirty="0">
+              <a:rPr lang="en-US" sz="2100" b="1" dirty="0">
                 <a:solidFill>
                   <a:srgbClr val="1C1917"/>
                 </a:solidFill>
@@ -4924,22 +5175,45 @@
                 <a:ea typeface="Arial" pitchFamily="34" charset="-122"/>
                 <a:cs typeface="Arial" pitchFamily="34" charset="-120"/>
               </a:rPr>
-              <a:t>DCF Model Standard Procedure</a:t>
-            </a:r>
-            <a:endParaRPr lang="en-US" sz="2000" dirty="0"/>
-          </a:p>
-        </p:txBody>
-      </p:sp>
-      <p:sp>
-        <p:nvSpPr>
-          <p:cNvPr id="4" name="Text 2"/>
-          <p:cNvSpPr/>
-          <p:nvPr/>
-        </p:nvSpPr>
-        <p:spPr>
-          <a:xfrm>
-            <a:off x="566928" y="4681728"/>
-            <a:ext cx="8138160" cy="320040"/>
+              <a:t>Scenario and Sensitivity Analysis: Stress-Testing Model Outputs</a:t>
+            </a:r>
+            <a:endParaRPr lang="en-US" sz="2100" dirty="0"/>
+          </a:p>
+        </p:txBody>
+      </p:sp>
+      <p:sp>
+        <p:nvSpPr>
+          <p:cNvPr id="4" name="Shape 2"/>
+          <p:cNvSpPr/>
+          <p:nvPr/>
+        </p:nvSpPr>
+        <p:spPr>
+          <a:xfrm>
+            <a:off x="411480" y="960120"/>
+            <a:ext cx="8321040" cy="0"/>
+          </a:xfrm>
+          <a:prstGeom prst="line">
+            <a:avLst/>
+          </a:prstGeom>
+          <a:noFill/>
+          <a:ln w="12700">
+            <a:solidFill>
+              <a:srgbClr val="E7E5E4"/>
+            </a:solidFill>
+            <a:prstDash val="solid"/>
+          </a:ln>
+        </p:spPr>
+      </p:sp>
+      <p:sp>
+        <p:nvSpPr>
+          <p:cNvPr id="5" name="Text 3"/>
+          <p:cNvSpPr/>
+          <p:nvPr/>
+        </p:nvSpPr>
+        <p:spPr>
+          <a:xfrm>
+            <a:off x="411480" y="4864608"/>
+            <a:ext cx="8321040" cy="237744"/>
           </a:xfrm>
           <a:prstGeom prst="rect">
             <a:avLst/>
@@ -4955,45 +5229,6 @@
               <a:buNone/>
             </a:pPr>
             <a:r>
-              <a:rPr lang="en-US" sz="1000" i="1" dirty="0">
-                <a:solidFill>
-                  <a:srgbClr val="78716C"/>
-                </a:solidFill>
-                <a:latin typeface="Arial" pitchFamily="34" charset="0"/>
-                <a:ea typeface="Arial" pitchFamily="34" charset="-122"/>
-                <a:cs typeface="Arial" pitchFamily="34" charset="-120"/>
-              </a:rPr>
-              <a:t>Follow steps in order; each output feeds the next calculation layer</a:t>
-            </a:r>
-            <a:endParaRPr lang="en-US" sz="1000" dirty="0"/>
-          </a:p>
-        </p:txBody>
-      </p:sp>
-      <p:sp>
-        <p:nvSpPr>
-          <p:cNvPr id="5" name="Text 3"/>
-          <p:cNvSpPr/>
-          <p:nvPr/>
-        </p:nvSpPr>
-        <p:spPr>
-          <a:xfrm>
-            <a:off x="411480" y="4919472"/>
-            <a:ext cx="8321040" cy="219456"/>
-          </a:xfrm>
-          <a:prstGeom prst="rect">
-            <a:avLst/>
-          </a:prstGeom>
-          <a:noFill/>
-          <a:ln/>
-        </p:spPr>
-        <p:txBody>
-          <a:bodyPr wrap="square" rtlCol="0" anchor="ctr"/>
-          <a:lstStyle/>
-          <a:p>
-            <a:pPr indent="0" marL="0">
-              <a:buNone/>
-            </a:pPr>
-            <a:r>
               <a:rPr lang="en-US" sz="750" dirty="0">
                 <a:solidFill>
                   <a:srgbClr val="AAAAAA"/>
@@ -5010,24 +5245,153 @@
       </p:sp>
       <p:sp>
         <p:nvSpPr>
-          <p:cNvPr id="6" name="Shape 4"/>
-          <p:cNvSpPr/>
-          <p:nvPr/>
-        </p:nvSpPr>
-        <p:spPr>
-          <a:xfrm>
-            <a:off x="411480" y="1463040"/>
-            <a:ext cx="2011680" cy="960120"/>
+          <p:cNvPr id="6" name="Text 4"/>
+          <p:cNvSpPr/>
+          <p:nvPr/>
+        </p:nvSpPr>
+        <p:spPr>
+          <a:xfrm>
+            <a:off x="731520" y="1188720"/>
+            <a:ext cx="7680960" cy="2743200"/>
+          </a:xfrm>
+          <a:prstGeom prst="rect">
+            <a:avLst/>
+          </a:prstGeom>
+          <a:noFill/>
+          <a:ln/>
+        </p:spPr>
+        <p:txBody>
+          <a:bodyPr wrap="square" rtlCol="0" anchor="t"/>
+          <a:lstStyle/>
+          <a:p>
+            <a:pPr marL="152400" indent="-152400">
+              <a:spcAft>
+                <a:spcPts val="800"/>
+              </a:spcAft>
+              <a:buSzPct val="100000"/>
+              <a:buChar char="•"/>
+            </a:pPr>
+            <a:r>
+              <a:rPr lang="en-US" sz="1500" dirty="0">
+                <a:solidFill>
+                  <a:srgbClr val="1C1917"/>
+                </a:solidFill>
+                <a:latin typeface="Arial" pitchFamily="34" charset="0"/>
+                <a:ea typeface="Arial" pitchFamily="34" charset="-122"/>
+                <a:cs typeface="Arial" pitchFamily="34" charset="-120"/>
+              </a:rPr>
+              <a:t>Identify two or three key value drivers before building scenarios.</a:t>
+            </a:r>
+            <a:endParaRPr lang="en-US" sz="1500" dirty="0"/>
+          </a:p>
+          <a:p>
+            <a:pPr marL="152400" indent="-152400">
+              <a:spcAft>
+                <a:spcPts val="800"/>
+              </a:spcAft>
+              <a:buSzPct val="100000"/>
+              <a:buChar char="•"/>
+            </a:pPr>
+            <a:r>
+              <a:rPr lang="en-US" sz="1500" dirty="0">
+                <a:solidFill>
+                  <a:srgbClr val="1C1917"/>
+                </a:solidFill>
+                <a:latin typeface="Arial" pitchFamily="34" charset="0"/>
+                <a:ea typeface="Arial" pitchFamily="34" charset="-122"/>
+                <a:cs typeface="Arial" pitchFamily="34" charset="-120"/>
+              </a:rPr>
+              <a:t>Define Bear, Base, and Bull cases with explicit numeric assumptions.</a:t>
+            </a:r>
+            <a:endParaRPr lang="en-US" sz="1500" dirty="0"/>
+          </a:p>
+          <a:p>
+            <a:pPr marL="152400" indent="-152400">
+              <a:spcAft>
+                <a:spcPts val="800"/>
+              </a:spcAft>
+              <a:buSzPct val="100000"/>
+              <a:buChar char="•"/>
+            </a:pPr>
+            <a:r>
+              <a:rPr lang="en-US" sz="1500" dirty="0">
+                <a:solidFill>
+                  <a:srgbClr val="1C1917"/>
+                </a:solidFill>
+                <a:latin typeface="Arial" pitchFamily="34" charset="0"/>
+                <a:ea typeface="Arial" pitchFamily="34" charset="-122"/>
+                <a:cs typeface="Arial" pitchFamily="34" charset="-120"/>
+              </a:rPr>
+              <a:t>Document narrative logic beside each scenario, not just numbers.</a:t>
+            </a:r>
+            <a:endParaRPr lang="en-US" sz="1500" dirty="0"/>
+          </a:p>
+          <a:p>
+            <a:pPr marL="152400" indent="-152400">
+              <a:spcAft>
+                <a:spcPts val="800"/>
+              </a:spcAft>
+              <a:buSzPct val="100000"/>
+              <a:buChar char="•"/>
+            </a:pPr>
+            <a:r>
+              <a:rPr lang="en-US" sz="1500" dirty="0">
+                <a:solidFill>
+                  <a:srgbClr val="1C1917"/>
+                </a:solidFill>
+                <a:latin typeface="Arial" pitchFamily="34" charset="0"/>
+                <a:ea typeface="Arial" pitchFamily="34" charset="-122"/>
+                <a:cs typeface="Arial" pitchFamily="34" charset="-120"/>
+              </a:rPr>
+              <a:t>Sensitivity tables reveal which single assumption carries the most risk.</a:t>
+            </a:r>
+            <a:endParaRPr lang="en-US" sz="1500" dirty="0"/>
+          </a:p>
+          <a:p>
+            <a:pPr marL="152400" indent="-152400">
+              <a:spcAft>
+                <a:spcPts val="800"/>
+              </a:spcAft>
+              <a:buSzPct val="100000"/>
+              <a:buChar char="•"/>
+            </a:pPr>
+            <a:r>
+              <a:rPr lang="en-US" sz="1500" dirty="0">
+                <a:solidFill>
+                  <a:srgbClr val="1C1917"/>
+                </a:solidFill>
+                <a:latin typeface="Arial" pitchFamily="34" charset="0"/>
+                <a:ea typeface="Arial" pitchFamily="34" charset="-122"/>
+                <a:cs typeface="Arial" pitchFamily="34" charset="-120"/>
+              </a:rPr>
+              <a:t>Static models give one answer; scenario models map the full outcome range.</a:t>
+            </a:r>
+            <a:endParaRPr lang="en-US" sz="1500" dirty="0"/>
+          </a:p>
+        </p:txBody>
+      </p:sp>
+      <p:sp>
+        <p:nvSpPr>
+          <p:cNvPr id="7" name="Shape 5"/>
+          <p:cNvSpPr/>
+          <p:nvPr/>
+        </p:nvSpPr>
+        <p:spPr>
+          <a:xfrm>
+            <a:off x="731520" y="4041648"/>
+            <a:ext cx="7680960" cy="566928"/>
           </a:xfrm>
           <a:prstGeom prst="roundRect">
             <a:avLst>
-              <a:gd name="adj" fmla="val 7619"/>
+              <a:gd name="adj" fmla="val 12903"/>
             </a:avLst>
           </a:prstGeom>
           <a:solidFill>
-            <a:srgbClr val="F5F5F4"/>
+            <a:srgbClr val="B45309">
+              <a:alpha val="12000"/>
+            </a:srgbClr>
           </a:solidFill>
-          <a:ln w="15240">
+          <a:ln w="12700">
             <a:solidFill>
               <a:srgbClr val="B45309"/>
             </a:solidFill>
@@ -5037,71 +5401,44 @@
       </p:sp>
       <p:sp>
         <p:nvSpPr>
-          <p:cNvPr id="7" name="Text 5"/>
-          <p:cNvSpPr/>
-          <p:nvPr/>
-        </p:nvSpPr>
-        <p:spPr>
-          <a:xfrm>
-            <a:off x="484632" y="1536192"/>
-            <a:ext cx="310896" cy="274320"/>
-          </a:xfrm>
-          <a:prstGeom prst="rect">
-            <a:avLst/>
-          </a:prstGeom>
-          <a:solidFill>
-            <a:srgbClr val="B45309"/>
-          </a:solidFill>
+          <p:cNvPr id="8" name="Text 6"/>
+          <p:cNvSpPr/>
+          <p:nvPr/>
+        </p:nvSpPr>
+        <p:spPr>
+          <a:xfrm>
+            <a:off x="868680" y="4087368"/>
+            <a:ext cx="7406640" cy="475488"/>
+          </a:xfrm>
+          <a:prstGeom prst="rect">
+            <a:avLst/>
+          </a:prstGeom>
+          <a:noFill/>
           <a:ln/>
         </p:spPr>
         <p:txBody>
           <a:bodyPr wrap="square" rtlCol="0" anchor="ctr"/>
           <a:lstStyle/>
           <a:p>
-            <a:pPr algn="ctr" indent="0" marL="0">
-              <a:buNone/>
-            </a:pPr>
-            <a:r>
-              <a:rPr lang="en-US" sz="1000" b="1" dirty="0">
-                <a:solidFill>
-                  <a:srgbClr val="FFFFFF"/>
-                </a:solidFill>
-                <a:latin typeface="Arial" pitchFamily="34" charset="0"/>
-                <a:ea typeface="Arial" pitchFamily="34" charset="-122"/>
-                <a:cs typeface="Arial" pitchFamily="34" charset="-120"/>
-              </a:rPr>
-              <a:t>1</a:t>
-            </a:r>
-            <a:endParaRPr lang="en-US" sz="1000" dirty="0"/>
-          </a:p>
-        </p:txBody>
-      </p:sp>
-      <p:sp>
-        <p:nvSpPr>
-          <p:cNvPr id="8" name="Text 6"/>
-          <p:cNvSpPr/>
-          <p:nvPr/>
-        </p:nvSpPr>
-        <p:spPr>
-          <a:xfrm>
-            <a:off x="411480" y="1737360"/>
-            <a:ext cx="2011680" cy="384048"/>
-          </a:xfrm>
-          <a:prstGeom prst="rect">
-            <a:avLst/>
-          </a:prstGeom>
-          <a:noFill/>
-          <a:ln/>
-        </p:spPr>
-        <p:txBody>
-          <a:bodyPr wrap="square" rtlCol="0" anchor="ctr"/>
-          <a:lstStyle/>
-          <a:p>
-            <a:pPr algn="ctr" indent="0" marL="0">
-              <a:buNone/>
-            </a:pPr>
-            <a:r>
-              <a:rPr lang="en-US" sz="1200" b="1" dirty="0">
+            <a:pPr indent="0" marL="0">
+              <a:buNone/>
+            </a:pPr>
+            <a:r>
+              <a:rPr lang="en-US" sz="1100" b="1" dirty="0">
+                <a:solidFill>
+                  <a:srgbClr val="B45309"/>
+                </a:solidFill>
+                <a:latin typeface="Arial" pitchFamily="34" charset="0"/>
+                <a:ea typeface="Arial" pitchFamily="34" charset="-122"/>
+                <a:cs typeface="Arial" pitchFamily="34" charset="-120"/>
+              </a:rPr>
+              <a:t>Takeaway  </a:t>
+            </a:r>
+            <a:pPr indent="0" marL="0">
+              <a:buNone/>
+            </a:pPr>
+            <a:r>
+              <a:rPr lang="en-US" sz="1150" dirty="0">
                 <a:solidFill>
                   <a:srgbClr val="1C1917"/>
                 </a:solidFill>
@@ -5109,878 +5446,9 @@
                 <a:ea typeface="Arial" pitchFamily="34" charset="-122"/>
                 <a:cs typeface="Arial" pitchFamily="34" charset="-120"/>
               </a:rPr>
-              <a:t>Document Inputs</a:t>
-            </a:r>
-            <a:endParaRPr lang="en-US" sz="1200" dirty="0"/>
-          </a:p>
-        </p:txBody>
-      </p:sp>
-      <p:sp>
-        <p:nvSpPr>
-          <p:cNvPr id="9" name="Text 7"/>
-          <p:cNvSpPr/>
-          <p:nvPr/>
-        </p:nvSpPr>
-        <p:spPr>
-          <a:xfrm>
-            <a:off x="411480" y="2084832"/>
-            <a:ext cx="2011680" cy="310896"/>
-          </a:xfrm>
-          <a:prstGeom prst="rect">
-            <a:avLst/>
-          </a:prstGeom>
-          <a:noFill/>
-          <a:ln/>
-        </p:spPr>
-        <p:txBody>
-          <a:bodyPr wrap="square" rtlCol="0" anchor="ctr"/>
-          <a:lstStyle/>
-          <a:p>
-            <a:pPr algn="ctr" indent="0" marL="0">
-              <a:buNone/>
-            </a:pPr>
-            <a:r>
-              <a:rPr lang="en-US" sz="900" dirty="0">
-                <a:solidFill>
-                  <a:srgbClr val="78716C"/>
-                </a:solidFill>
-                <a:latin typeface="Arial" pitchFamily="34" charset="0"/>
-                <a:ea typeface="Arial" pitchFamily="34" charset="-122"/>
-                <a:cs typeface="Arial" pitchFamily="34" charset="-120"/>
-              </a:rPr>
-              <a:t>Revenue, margins, WACC, growth rates</a:t>
-            </a:r>
-            <a:endParaRPr lang="en-US" sz="900" dirty="0"/>
-          </a:p>
-        </p:txBody>
-      </p:sp>
-      <p:sp>
-        <p:nvSpPr>
-          <p:cNvPr id="10" name="Shape 8"/>
-          <p:cNvSpPr/>
-          <p:nvPr/>
-        </p:nvSpPr>
-        <p:spPr>
-          <a:xfrm>
-            <a:off x="2478024" y="1842516"/>
-            <a:ext cx="301752" cy="201168"/>
-          </a:xfrm>
-          <a:prstGeom prst="rightArrow">
-            <a:avLst/>
-          </a:prstGeom>
-          <a:solidFill>
-            <a:srgbClr val="B45309"/>
-          </a:solidFill>
-          <a:ln/>
-        </p:spPr>
-      </p:sp>
-      <p:sp>
-        <p:nvSpPr>
-          <p:cNvPr id="11" name="Shape 9"/>
-          <p:cNvSpPr/>
-          <p:nvPr/>
-        </p:nvSpPr>
-        <p:spPr>
-          <a:xfrm>
-            <a:off x="2834640" y="1463040"/>
-            <a:ext cx="2011680" cy="960120"/>
-          </a:xfrm>
-          <a:prstGeom prst="roundRect">
-            <a:avLst>
-              <a:gd name="adj" fmla="val 7619"/>
-            </a:avLst>
-          </a:prstGeom>
-          <a:solidFill>
-            <a:srgbClr val="F5F5F4"/>
-          </a:solidFill>
-          <a:ln w="15240">
-            <a:solidFill>
-              <a:srgbClr val="B45309"/>
-            </a:solidFill>
-            <a:prstDash val="solid"/>
-          </a:ln>
-        </p:spPr>
-      </p:sp>
-      <p:sp>
-        <p:nvSpPr>
-          <p:cNvPr id="12" name="Text 10"/>
-          <p:cNvSpPr/>
-          <p:nvPr/>
-        </p:nvSpPr>
-        <p:spPr>
-          <a:xfrm>
-            <a:off x="2907792" y="1536192"/>
-            <a:ext cx="310896" cy="274320"/>
-          </a:xfrm>
-          <a:prstGeom prst="rect">
-            <a:avLst/>
-          </a:prstGeom>
-          <a:solidFill>
-            <a:srgbClr val="B45309"/>
-          </a:solidFill>
-          <a:ln/>
-        </p:spPr>
-        <p:txBody>
-          <a:bodyPr wrap="square" rtlCol="0" anchor="ctr"/>
-          <a:lstStyle/>
-          <a:p>
-            <a:pPr algn="ctr" indent="0" marL="0">
-              <a:buNone/>
-            </a:pPr>
-            <a:r>
-              <a:rPr lang="en-US" sz="1000" b="1" dirty="0">
-                <a:solidFill>
-                  <a:srgbClr val="FFFFFF"/>
-                </a:solidFill>
-                <a:latin typeface="Arial" pitchFamily="34" charset="0"/>
-                <a:ea typeface="Arial" pitchFamily="34" charset="-122"/>
-                <a:cs typeface="Arial" pitchFamily="34" charset="-120"/>
-              </a:rPr>
-              <a:t>2</a:t>
-            </a:r>
-            <a:endParaRPr lang="en-US" sz="1000" dirty="0"/>
-          </a:p>
-        </p:txBody>
-      </p:sp>
-      <p:sp>
-        <p:nvSpPr>
-          <p:cNvPr id="13" name="Text 11"/>
-          <p:cNvSpPr/>
-          <p:nvPr/>
-        </p:nvSpPr>
-        <p:spPr>
-          <a:xfrm>
-            <a:off x="2834640" y="1737360"/>
-            <a:ext cx="2011680" cy="384048"/>
-          </a:xfrm>
-          <a:prstGeom prst="rect">
-            <a:avLst/>
-          </a:prstGeom>
-          <a:noFill/>
-          <a:ln/>
-        </p:spPr>
-        <p:txBody>
-          <a:bodyPr wrap="square" rtlCol="0" anchor="ctr"/>
-          <a:lstStyle/>
-          <a:p>
-            <a:pPr algn="ctr" indent="0" marL="0">
-              <a:buNone/>
-            </a:pPr>
-            <a:r>
-              <a:rPr lang="en-US" sz="1200" b="1" dirty="0">
-                <a:solidFill>
-                  <a:srgbClr val="1C1917"/>
-                </a:solidFill>
-                <a:latin typeface="Arial" pitchFamily="34" charset="0"/>
-                <a:ea typeface="Arial" pitchFamily="34" charset="-122"/>
-                <a:cs typeface="Arial" pitchFamily="34" charset="-120"/>
-              </a:rPr>
-              <a:t>Build Income Statement</a:t>
-            </a:r>
-            <a:endParaRPr lang="en-US" sz="1200" dirty="0"/>
-          </a:p>
-        </p:txBody>
-      </p:sp>
-      <p:sp>
-        <p:nvSpPr>
-          <p:cNvPr id="14" name="Text 12"/>
-          <p:cNvSpPr/>
-          <p:nvPr/>
-        </p:nvSpPr>
-        <p:spPr>
-          <a:xfrm>
-            <a:off x="2834640" y="2084832"/>
-            <a:ext cx="2011680" cy="310896"/>
-          </a:xfrm>
-          <a:prstGeom prst="rect">
-            <a:avLst/>
-          </a:prstGeom>
-          <a:noFill/>
-          <a:ln/>
-        </p:spPr>
-        <p:txBody>
-          <a:bodyPr wrap="square" rtlCol="0" anchor="ctr"/>
-          <a:lstStyle/>
-          <a:p>
-            <a:pPr algn="ctr" indent="0" marL="0">
-              <a:buNone/>
-            </a:pPr>
-            <a:r>
-              <a:rPr lang="en-US" sz="900" dirty="0">
-                <a:solidFill>
-                  <a:srgbClr val="78716C"/>
-                </a:solidFill>
-                <a:latin typeface="Arial" pitchFamily="34" charset="0"/>
-                <a:ea typeface="Arial" pitchFamily="34" charset="-122"/>
-                <a:cs typeface="Arial" pitchFamily="34" charset="-120"/>
-              </a:rPr>
-              <a:t>Revenue × growth, apply margin to get EBIT</a:t>
-            </a:r>
-            <a:endParaRPr lang="en-US" sz="900" dirty="0"/>
-          </a:p>
-        </p:txBody>
-      </p:sp>
-      <p:sp>
-        <p:nvSpPr>
-          <p:cNvPr id="15" name="Shape 13"/>
-          <p:cNvSpPr/>
-          <p:nvPr/>
-        </p:nvSpPr>
-        <p:spPr>
-          <a:xfrm>
-            <a:off x="4901184" y="1842516"/>
-            <a:ext cx="301752" cy="201168"/>
-          </a:xfrm>
-          <a:prstGeom prst="rightArrow">
-            <a:avLst/>
-          </a:prstGeom>
-          <a:solidFill>
-            <a:srgbClr val="B45309"/>
-          </a:solidFill>
-          <a:ln/>
-        </p:spPr>
-      </p:sp>
-      <p:sp>
-        <p:nvSpPr>
-          <p:cNvPr id="16" name="Shape 14"/>
-          <p:cNvSpPr/>
-          <p:nvPr/>
-        </p:nvSpPr>
-        <p:spPr>
-          <a:xfrm>
-            <a:off x="5257800" y="1463040"/>
-            <a:ext cx="2011680" cy="960120"/>
-          </a:xfrm>
-          <a:prstGeom prst="roundRect">
-            <a:avLst>
-              <a:gd name="adj" fmla="val 7619"/>
-            </a:avLst>
-          </a:prstGeom>
-          <a:solidFill>
-            <a:srgbClr val="F5F5F4"/>
-          </a:solidFill>
-          <a:ln w="15240">
-            <a:solidFill>
-              <a:srgbClr val="B45309"/>
-            </a:solidFill>
-            <a:prstDash val="solid"/>
-          </a:ln>
-        </p:spPr>
-      </p:sp>
-      <p:sp>
-        <p:nvSpPr>
-          <p:cNvPr id="17" name="Text 15"/>
-          <p:cNvSpPr/>
-          <p:nvPr/>
-        </p:nvSpPr>
-        <p:spPr>
-          <a:xfrm>
-            <a:off x="5330952" y="1536192"/>
-            <a:ext cx="310896" cy="274320"/>
-          </a:xfrm>
-          <a:prstGeom prst="rect">
-            <a:avLst/>
-          </a:prstGeom>
-          <a:solidFill>
-            <a:srgbClr val="B45309"/>
-          </a:solidFill>
-          <a:ln/>
-        </p:spPr>
-        <p:txBody>
-          <a:bodyPr wrap="square" rtlCol="0" anchor="ctr"/>
-          <a:lstStyle/>
-          <a:p>
-            <a:pPr algn="ctr" indent="0" marL="0">
-              <a:buNone/>
-            </a:pPr>
-            <a:r>
-              <a:rPr lang="en-US" sz="1000" b="1" dirty="0">
-                <a:solidFill>
-                  <a:srgbClr val="FFFFFF"/>
-                </a:solidFill>
-                <a:latin typeface="Arial" pitchFamily="34" charset="0"/>
-                <a:ea typeface="Arial" pitchFamily="34" charset="-122"/>
-                <a:cs typeface="Arial" pitchFamily="34" charset="-120"/>
-              </a:rPr>
-              <a:t>3</a:t>
-            </a:r>
-            <a:endParaRPr lang="en-US" sz="1000" dirty="0"/>
-          </a:p>
-        </p:txBody>
-      </p:sp>
-      <p:sp>
-        <p:nvSpPr>
-          <p:cNvPr id="18" name="Text 16"/>
-          <p:cNvSpPr/>
-          <p:nvPr/>
-        </p:nvSpPr>
-        <p:spPr>
-          <a:xfrm>
-            <a:off x="5257800" y="1737360"/>
-            <a:ext cx="2011680" cy="384048"/>
-          </a:xfrm>
-          <a:prstGeom prst="rect">
-            <a:avLst/>
-          </a:prstGeom>
-          <a:noFill/>
-          <a:ln/>
-        </p:spPr>
-        <p:txBody>
-          <a:bodyPr wrap="square" rtlCol="0" anchor="ctr"/>
-          <a:lstStyle/>
-          <a:p>
-            <a:pPr algn="ctr" indent="0" marL="0">
-              <a:buNone/>
-            </a:pPr>
-            <a:r>
-              <a:rPr lang="en-US" sz="1200" b="1" dirty="0">
-                <a:solidFill>
-                  <a:srgbClr val="1C1917"/>
-                </a:solidFill>
-                <a:latin typeface="Arial" pitchFamily="34" charset="0"/>
-                <a:ea typeface="Arial" pitchFamily="34" charset="-122"/>
-                <a:cs typeface="Arial" pitchFamily="34" charset="-120"/>
-              </a:rPr>
-              <a:t>Derive Free Cash Flow</a:t>
-            </a:r>
-            <a:endParaRPr lang="en-US" sz="1200" dirty="0"/>
-          </a:p>
-        </p:txBody>
-      </p:sp>
-      <p:sp>
-        <p:nvSpPr>
-          <p:cNvPr id="19" name="Text 17"/>
-          <p:cNvSpPr/>
-          <p:nvPr/>
-        </p:nvSpPr>
-        <p:spPr>
-          <a:xfrm>
-            <a:off x="5257800" y="2084832"/>
-            <a:ext cx="2011680" cy="310896"/>
-          </a:xfrm>
-          <a:prstGeom prst="rect">
-            <a:avLst/>
-          </a:prstGeom>
-          <a:noFill/>
-          <a:ln/>
-        </p:spPr>
-        <p:txBody>
-          <a:bodyPr wrap="square" rtlCol="0" anchor="ctr"/>
-          <a:lstStyle/>
-          <a:p>
-            <a:pPr algn="ctr" indent="0" marL="0">
-              <a:buNone/>
-            </a:pPr>
-            <a:r>
-              <a:rPr lang="en-US" sz="900" dirty="0">
-                <a:solidFill>
-                  <a:srgbClr val="78716C"/>
-                </a:solidFill>
-                <a:latin typeface="Arial" pitchFamily="34" charset="0"/>
-                <a:ea typeface="Arial" pitchFamily="34" charset="-122"/>
-                <a:cs typeface="Arial" pitchFamily="34" charset="-120"/>
-              </a:rPr>
-              <a:t>NOPAT + depreciation − capex ± NWC</a:t>
-            </a:r>
-            <a:endParaRPr lang="en-US" sz="900" dirty="0"/>
-          </a:p>
-        </p:txBody>
-      </p:sp>
-      <p:sp>
-        <p:nvSpPr>
-          <p:cNvPr id="20" name="Shape 18"/>
-          <p:cNvSpPr/>
-          <p:nvPr/>
-        </p:nvSpPr>
-        <p:spPr>
-          <a:xfrm>
-            <a:off x="6163056" y="2496312"/>
-            <a:ext cx="201168" cy="548640"/>
-          </a:xfrm>
-          <a:prstGeom prst="downArrow">
-            <a:avLst/>
-          </a:prstGeom>
-          <a:solidFill>
-            <a:srgbClr val="B45309"/>
-          </a:solidFill>
-          <a:ln/>
-        </p:spPr>
-      </p:sp>
-      <p:sp>
-        <p:nvSpPr>
-          <p:cNvPr id="21" name="Shape 19"/>
-          <p:cNvSpPr/>
-          <p:nvPr/>
-        </p:nvSpPr>
-        <p:spPr>
-          <a:xfrm>
-            <a:off x="5257800" y="3108960"/>
-            <a:ext cx="2011680" cy="960120"/>
-          </a:xfrm>
-          <a:prstGeom prst="roundRect">
-            <a:avLst>
-              <a:gd name="adj" fmla="val 7619"/>
-            </a:avLst>
-          </a:prstGeom>
-          <a:solidFill>
-            <a:srgbClr val="F5F5F4"/>
-          </a:solidFill>
-          <a:ln w="15240">
-            <a:solidFill>
-              <a:srgbClr val="B45309"/>
-            </a:solidFill>
-            <a:prstDash val="solid"/>
-          </a:ln>
-        </p:spPr>
-      </p:sp>
-      <p:sp>
-        <p:nvSpPr>
-          <p:cNvPr id="22" name="Text 20"/>
-          <p:cNvSpPr/>
-          <p:nvPr/>
-        </p:nvSpPr>
-        <p:spPr>
-          <a:xfrm>
-            <a:off x="5330952" y="3182112"/>
-            <a:ext cx="310896" cy="274320"/>
-          </a:xfrm>
-          <a:prstGeom prst="rect">
-            <a:avLst/>
-          </a:prstGeom>
-          <a:solidFill>
-            <a:srgbClr val="B45309"/>
-          </a:solidFill>
-          <a:ln/>
-        </p:spPr>
-        <p:txBody>
-          <a:bodyPr wrap="square" rtlCol="0" anchor="ctr"/>
-          <a:lstStyle/>
-          <a:p>
-            <a:pPr algn="ctr" indent="0" marL="0">
-              <a:buNone/>
-            </a:pPr>
-            <a:r>
-              <a:rPr lang="en-US" sz="1000" b="1" dirty="0">
-                <a:solidFill>
-                  <a:srgbClr val="FFFFFF"/>
-                </a:solidFill>
-                <a:latin typeface="Arial" pitchFamily="34" charset="0"/>
-                <a:ea typeface="Arial" pitchFamily="34" charset="-122"/>
-                <a:cs typeface="Arial" pitchFamily="34" charset="-120"/>
-              </a:rPr>
-              <a:t>4</a:t>
-            </a:r>
-            <a:endParaRPr lang="en-US" sz="1000" dirty="0"/>
-          </a:p>
-        </p:txBody>
-      </p:sp>
-      <p:sp>
-        <p:nvSpPr>
-          <p:cNvPr id="23" name="Text 21"/>
-          <p:cNvSpPr/>
-          <p:nvPr/>
-        </p:nvSpPr>
-        <p:spPr>
-          <a:xfrm>
-            <a:off x="5257800" y="3383280"/>
-            <a:ext cx="2011680" cy="384048"/>
-          </a:xfrm>
-          <a:prstGeom prst="rect">
-            <a:avLst/>
-          </a:prstGeom>
-          <a:noFill/>
-          <a:ln/>
-        </p:spPr>
-        <p:txBody>
-          <a:bodyPr wrap="square" rtlCol="0" anchor="ctr"/>
-          <a:lstStyle/>
-          <a:p>
-            <a:pPr algn="ctr" indent="0" marL="0">
-              <a:buNone/>
-            </a:pPr>
-            <a:r>
-              <a:rPr lang="en-US" sz="1200" b="1" dirty="0">
-                <a:solidFill>
-                  <a:srgbClr val="1C1917"/>
-                </a:solidFill>
-                <a:latin typeface="Arial" pitchFamily="34" charset="0"/>
-                <a:ea typeface="Arial" pitchFamily="34" charset="-122"/>
-                <a:cs typeface="Arial" pitchFamily="34" charset="-120"/>
-              </a:rPr>
-              <a:t>Discount Cash Flows</a:t>
-            </a:r>
-            <a:endParaRPr lang="en-US" sz="1200" dirty="0"/>
-          </a:p>
-        </p:txBody>
-      </p:sp>
-      <p:sp>
-        <p:nvSpPr>
-          <p:cNvPr id="24" name="Text 22"/>
-          <p:cNvSpPr/>
-          <p:nvPr/>
-        </p:nvSpPr>
-        <p:spPr>
-          <a:xfrm>
-            <a:off x="5257800" y="3730752"/>
-            <a:ext cx="2011680" cy="310896"/>
-          </a:xfrm>
-          <a:prstGeom prst="rect">
-            <a:avLst/>
-          </a:prstGeom>
-          <a:noFill/>
-          <a:ln/>
-        </p:spPr>
-        <p:txBody>
-          <a:bodyPr wrap="square" rtlCol="0" anchor="ctr"/>
-          <a:lstStyle/>
-          <a:p>
-            <a:pPr algn="ctr" indent="0" marL="0">
-              <a:buNone/>
-            </a:pPr>
-            <a:r>
-              <a:rPr lang="en-US" sz="900" dirty="0">
-                <a:solidFill>
-                  <a:srgbClr val="78716C"/>
-                </a:solidFill>
-                <a:latin typeface="Arial" pitchFamily="34" charset="0"/>
-                <a:ea typeface="Arial" pitchFamily="34" charset="-122"/>
-                <a:cs typeface="Arial" pitchFamily="34" charset="-120"/>
-              </a:rPr>
-              <a:t>Divide each FCF by (1+WACC)^t</a:t>
-            </a:r>
-            <a:endParaRPr lang="en-US" sz="900" dirty="0"/>
-          </a:p>
-        </p:txBody>
-      </p:sp>
-      <p:sp>
-        <p:nvSpPr>
-          <p:cNvPr id="25" name="Shape 23"/>
-          <p:cNvSpPr/>
-          <p:nvPr/>
-        </p:nvSpPr>
-        <p:spPr>
-          <a:xfrm>
-            <a:off x="4901184" y="3488436"/>
-            <a:ext cx="301752" cy="201168"/>
-          </a:xfrm>
-          <a:prstGeom prst="leftArrow">
-            <a:avLst/>
-          </a:prstGeom>
-          <a:solidFill>
-            <a:srgbClr val="B45309"/>
-          </a:solidFill>
-          <a:ln/>
-        </p:spPr>
-      </p:sp>
-      <p:sp>
-        <p:nvSpPr>
-          <p:cNvPr id="26" name="Shape 24"/>
-          <p:cNvSpPr/>
-          <p:nvPr/>
-        </p:nvSpPr>
-        <p:spPr>
-          <a:xfrm>
-            <a:off x="2834640" y="3108960"/>
-            <a:ext cx="2011680" cy="960120"/>
-          </a:xfrm>
-          <a:prstGeom prst="roundRect">
-            <a:avLst>
-              <a:gd name="adj" fmla="val 7619"/>
-            </a:avLst>
-          </a:prstGeom>
-          <a:solidFill>
-            <a:srgbClr val="F5F5F4"/>
-          </a:solidFill>
-          <a:ln w="15240">
-            <a:solidFill>
-              <a:srgbClr val="B45309"/>
-            </a:solidFill>
-            <a:prstDash val="solid"/>
-          </a:ln>
-        </p:spPr>
-      </p:sp>
-      <p:sp>
-        <p:nvSpPr>
-          <p:cNvPr id="27" name="Text 25"/>
-          <p:cNvSpPr/>
-          <p:nvPr/>
-        </p:nvSpPr>
-        <p:spPr>
-          <a:xfrm>
-            <a:off x="2907792" y="3182112"/>
-            <a:ext cx="310896" cy="274320"/>
-          </a:xfrm>
-          <a:prstGeom prst="rect">
-            <a:avLst/>
-          </a:prstGeom>
-          <a:solidFill>
-            <a:srgbClr val="B45309"/>
-          </a:solidFill>
-          <a:ln/>
-        </p:spPr>
-        <p:txBody>
-          <a:bodyPr wrap="square" rtlCol="0" anchor="ctr"/>
-          <a:lstStyle/>
-          <a:p>
-            <a:pPr algn="ctr" indent="0" marL="0">
-              <a:buNone/>
-            </a:pPr>
-            <a:r>
-              <a:rPr lang="en-US" sz="1000" b="1" dirty="0">
-                <a:solidFill>
-                  <a:srgbClr val="FFFFFF"/>
-                </a:solidFill>
-                <a:latin typeface="Arial" pitchFamily="34" charset="0"/>
-                <a:ea typeface="Arial" pitchFamily="34" charset="-122"/>
-                <a:cs typeface="Arial" pitchFamily="34" charset="-120"/>
-              </a:rPr>
-              <a:t>5</a:t>
-            </a:r>
-            <a:endParaRPr lang="en-US" sz="1000" dirty="0"/>
-          </a:p>
-        </p:txBody>
-      </p:sp>
-      <p:sp>
-        <p:nvSpPr>
-          <p:cNvPr id="28" name="Text 26"/>
-          <p:cNvSpPr/>
-          <p:nvPr/>
-        </p:nvSpPr>
-        <p:spPr>
-          <a:xfrm>
-            <a:off x="2834640" y="3383280"/>
-            <a:ext cx="2011680" cy="384048"/>
-          </a:xfrm>
-          <a:prstGeom prst="rect">
-            <a:avLst/>
-          </a:prstGeom>
-          <a:noFill/>
-          <a:ln/>
-        </p:spPr>
-        <p:txBody>
-          <a:bodyPr wrap="square" rtlCol="0" anchor="ctr"/>
-          <a:lstStyle/>
-          <a:p>
-            <a:pPr algn="ctr" indent="0" marL="0">
-              <a:buNone/>
-            </a:pPr>
-            <a:r>
-              <a:rPr lang="en-US" sz="1200" b="1" dirty="0">
-                <a:solidFill>
-                  <a:srgbClr val="1C1917"/>
-                </a:solidFill>
-                <a:latin typeface="Arial" pitchFamily="34" charset="0"/>
-                <a:ea typeface="Arial" pitchFamily="34" charset="-122"/>
-                <a:cs typeface="Arial" pitchFamily="34" charset="-120"/>
-              </a:rPr>
-              <a:t>Add Terminal Value</a:t>
-            </a:r>
-            <a:endParaRPr lang="en-US" sz="1200" dirty="0"/>
-          </a:p>
-        </p:txBody>
-      </p:sp>
-      <p:sp>
-        <p:nvSpPr>
-          <p:cNvPr id="29" name="Text 27"/>
-          <p:cNvSpPr/>
-          <p:nvPr/>
-        </p:nvSpPr>
-        <p:spPr>
-          <a:xfrm>
-            <a:off x="2834640" y="3730752"/>
-            <a:ext cx="2011680" cy="310896"/>
-          </a:xfrm>
-          <a:prstGeom prst="rect">
-            <a:avLst/>
-          </a:prstGeom>
-          <a:noFill/>
-          <a:ln/>
-        </p:spPr>
-        <p:txBody>
-          <a:bodyPr wrap="square" rtlCol="0" anchor="ctr"/>
-          <a:lstStyle/>
-          <a:p>
-            <a:pPr algn="ctr" indent="0" marL="0">
-              <a:buNone/>
-            </a:pPr>
-            <a:r>
-              <a:rPr lang="en-US" sz="900" dirty="0">
-                <a:solidFill>
-                  <a:srgbClr val="78716C"/>
-                </a:solidFill>
-                <a:latin typeface="Arial" pitchFamily="34" charset="0"/>
-                <a:ea typeface="Arial" pitchFamily="34" charset="-122"/>
-                <a:cs typeface="Arial" pitchFamily="34" charset="-120"/>
-              </a:rPr>
-              <a:t>Gordon Growth or exit-multiple approach</a:t>
-            </a:r>
-            <a:endParaRPr lang="en-US" sz="900" dirty="0"/>
-          </a:p>
-        </p:txBody>
-      </p:sp>
-      <p:sp>
-        <p:nvSpPr>
-          <p:cNvPr id="30" name="Shape 28"/>
-          <p:cNvSpPr/>
-          <p:nvPr/>
-        </p:nvSpPr>
-        <p:spPr>
-          <a:xfrm>
-            <a:off x="2478024" y="3488436"/>
-            <a:ext cx="301752" cy="201168"/>
-          </a:xfrm>
-          <a:prstGeom prst="leftArrow">
-            <a:avLst/>
-          </a:prstGeom>
-          <a:solidFill>
-            <a:srgbClr val="B45309"/>
-          </a:solidFill>
-          <a:ln/>
-        </p:spPr>
-      </p:sp>
-      <p:sp>
-        <p:nvSpPr>
-          <p:cNvPr id="31" name="Shape 29"/>
-          <p:cNvSpPr/>
-          <p:nvPr/>
-        </p:nvSpPr>
-        <p:spPr>
-          <a:xfrm>
-            <a:off x="411480" y="3108960"/>
-            <a:ext cx="2011680" cy="960120"/>
-          </a:xfrm>
-          <a:prstGeom prst="roundRect">
-            <a:avLst>
-              <a:gd name="adj" fmla="val 7619"/>
-            </a:avLst>
-          </a:prstGeom>
-          <a:solidFill>
-            <a:srgbClr val="F5F5F4"/>
-          </a:solidFill>
-          <a:ln w="15240">
-            <a:solidFill>
-              <a:srgbClr val="B45309"/>
-            </a:solidFill>
-            <a:prstDash val="solid"/>
-          </a:ln>
-        </p:spPr>
-      </p:sp>
-      <p:sp>
-        <p:nvSpPr>
-          <p:cNvPr id="32" name="Text 30"/>
-          <p:cNvSpPr/>
-          <p:nvPr/>
-        </p:nvSpPr>
-        <p:spPr>
-          <a:xfrm>
-            <a:off x="484632" y="3182112"/>
-            <a:ext cx="310896" cy="274320"/>
-          </a:xfrm>
-          <a:prstGeom prst="rect">
-            <a:avLst/>
-          </a:prstGeom>
-          <a:solidFill>
-            <a:srgbClr val="B45309"/>
-          </a:solidFill>
-          <a:ln/>
-        </p:spPr>
-        <p:txBody>
-          <a:bodyPr wrap="square" rtlCol="0" anchor="ctr"/>
-          <a:lstStyle/>
-          <a:p>
-            <a:pPr algn="ctr" indent="0" marL="0">
-              <a:buNone/>
-            </a:pPr>
-            <a:r>
-              <a:rPr lang="en-US" sz="1000" b="1" dirty="0">
-                <a:solidFill>
-                  <a:srgbClr val="FFFFFF"/>
-                </a:solidFill>
-                <a:latin typeface="Arial" pitchFamily="34" charset="0"/>
-                <a:ea typeface="Arial" pitchFamily="34" charset="-122"/>
-                <a:cs typeface="Arial" pitchFamily="34" charset="-120"/>
-              </a:rPr>
-              <a:t>6</a:t>
-            </a:r>
-            <a:endParaRPr lang="en-US" sz="1000" dirty="0"/>
-          </a:p>
-        </p:txBody>
-      </p:sp>
-      <p:sp>
-        <p:nvSpPr>
-          <p:cNvPr id="33" name="Text 31"/>
-          <p:cNvSpPr/>
-          <p:nvPr/>
-        </p:nvSpPr>
-        <p:spPr>
-          <a:xfrm>
-            <a:off x="411480" y="3383280"/>
-            <a:ext cx="2011680" cy="384048"/>
-          </a:xfrm>
-          <a:prstGeom prst="rect">
-            <a:avLst/>
-          </a:prstGeom>
-          <a:noFill/>
-          <a:ln/>
-        </p:spPr>
-        <p:txBody>
-          <a:bodyPr wrap="square" rtlCol="0" anchor="ctr"/>
-          <a:lstStyle/>
-          <a:p>
-            <a:pPr algn="ctr" indent="0" marL="0">
-              <a:buNone/>
-            </a:pPr>
-            <a:r>
-              <a:rPr lang="en-US" sz="1200" b="1" dirty="0">
-                <a:solidFill>
-                  <a:srgbClr val="1C1917"/>
-                </a:solidFill>
-                <a:latin typeface="Arial" pitchFamily="34" charset="0"/>
-                <a:ea typeface="Arial" pitchFamily="34" charset="-122"/>
-                <a:cs typeface="Arial" pitchFamily="34" charset="-120"/>
-              </a:rPr>
-              <a:t>Bridge to Equity Value</a:t>
-            </a:r>
-            <a:endParaRPr lang="en-US" sz="1200" dirty="0"/>
-          </a:p>
-        </p:txBody>
-      </p:sp>
-      <p:sp>
-        <p:nvSpPr>
-          <p:cNvPr id="34" name="Text 32"/>
-          <p:cNvSpPr/>
-          <p:nvPr/>
-        </p:nvSpPr>
-        <p:spPr>
-          <a:xfrm>
-            <a:off x="411480" y="3730752"/>
-            <a:ext cx="2011680" cy="310896"/>
-          </a:xfrm>
-          <a:prstGeom prst="rect">
-            <a:avLst/>
-          </a:prstGeom>
-          <a:noFill/>
-          <a:ln/>
-        </p:spPr>
-        <p:txBody>
-          <a:bodyPr wrap="square" rtlCol="0" anchor="ctr"/>
-          <a:lstStyle/>
-          <a:p>
-            <a:pPr algn="ctr" indent="0" marL="0">
-              <a:buNone/>
-            </a:pPr>
-            <a:r>
-              <a:rPr lang="en-US" sz="900" dirty="0">
-                <a:solidFill>
-                  <a:srgbClr val="78716C"/>
-                </a:solidFill>
-                <a:latin typeface="Arial" pitchFamily="34" charset="0"/>
-                <a:ea typeface="Arial" pitchFamily="34" charset="-122"/>
-                <a:cs typeface="Arial" pitchFamily="34" charset="-120"/>
-              </a:rPr>
-              <a:t>Enterprise value minus net debt</a:t>
-            </a:r>
-            <a:endParaRPr lang="en-US" sz="900" dirty="0"/>
+              <a:t>Scenario and sensitivity analysis converts a single-point model into a genuine decision-support tool.</a:t>
+            </a:r>
+            <a:endParaRPr lang="en-US" sz="1100" dirty="0"/>
           </a:p>
         </p:txBody>
       </p:sp>
@@ -6069,7 +5537,7 @@
                 <a:ea typeface="Arial" pitchFamily="34" charset="-122"/>
                 <a:cs typeface="Arial" pitchFamily="34" charset="-120"/>
               </a:rPr>
-              <a:t>Notation</a:t>
+              <a:t>Transaction Modeling: M&amp;A Accretion/Dilution and LBO Returns</a:t>
             </a:r>
             <a:endParaRPr lang="en-US" sz="2100" dirty="0"/>
           </a:p>
@@ -6146,7 +5614,7 @@
         <p:spPr>
           <a:xfrm>
             <a:off x="731520" y="1188720"/>
-            <a:ext cx="7680960" cy="3383280"/>
+            <a:ext cx="7680960" cy="2743200"/>
           </a:xfrm>
           <a:prstGeom prst="rect">
             <a:avLst/>
@@ -6174,7 +5642,7 @@
                 <a:ea typeface="Arial" pitchFamily="34" charset="-122"/>
                 <a:cs typeface="Arial" pitchFamily="34" charset="-120"/>
               </a:rPr>
-              <a:t>Standard notation you will see in case studies:</a:t>
+              <a:t>Accretion/dilution tests whether combined EPS exceeds standalone acquirer EPS.</a:t>
             </a:r>
             <a:endParaRPr lang="en-US" sz="1500" dirty="0"/>
           </a:p>
@@ -6195,7 +5663,7 @@
                 <a:ea typeface="Arial" pitchFamily="34" charset="-122"/>
                 <a:cs typeface="Arial" pitchFamily="34" charset="-120"/>
               </a:rPr>
-              <a:t>`</a:t>
+              <a:t>Combine net incomes, add after-tax synergies, subtract incremental interest.</a:t>
             </a:r>
             <a:endParaRPr lang="en-US" sz="1500" dirty="0"/>
           </a:p>
@@ -6216,7 +5684,7 @@
                 <a:ea typeface="Arial" pitchFamily="34" charset="-122"/>
                 <a:cs typeface="Arial" pitchFamily="34" charset="-120"/>
               </a:rPr>
-              <a:t>NPV = Σ [FCFt / (1 + WACC)^t]  for t = 1 to n,  minus Initial Investment</a:t>
+              <a:t>Divide adjusted combined earnings by new fully diluted share count.</a:t>
             </a:r>
             <a:endParaRPr lang="en-US" sz="1500" dirty="0"/>
           </a:p>
@@ -6237,9 +5705,112 @@
                 <a:ea typeface="Arial" pitchFamily="34" charset="-122"/>
                 <a:cs typeface="Arial" pitchFamily="34" charset="-120"/>
               </a:rPr>
-              <a:t>`</a:t>
+              <a:t>LBO models evaluate financial sponsor returns via IRR and cash-on-cash multiple.</a:t>
             </a:r>
             <a:endParaRPr lang="en-US" sz="1500" dirty="0"/>
+          </a:p>
+          <a:p>
+            <a:pPr marL="152400" indent="-152400">
+              <a:spcAft>
+                <a:spcPts val="800"/>
+              </a:spcAft>
+              <a:buSzPct val="100000"/>
+              <a:buChar char="•"/>
+            </a:pPr>
+            <a:r>
+              <a:rPr lang="en-US" sz="1500" dirty="0">
+                <a:solidFill>
+                  <a:srgbClr val="1C1917"/>
+                </a:solidFill>
+                <a:latin typeface="Arial" pitchFamily="34" charset="0"/>
+                <a:ea typeface="Arial" pitchFamily="34" charset="-122"/>
+                <a:cs typeface="Arial" pitchFamily="34" charset="-120"/>
+              </a:rPr>
+              <a:t>Both frameworks answer distinct questions: strategic fit vs. investor return.</a:t>
+            </a:r>
+            <a:endParaRPr lang="en-US" sz="1500" dirty="0"/>
+          </a:p>
+        </p:txBody>
+      </p:sp>
+      <p:sp>
+        <p:nvSpPr>
+          <p:cNvPr id="7" name="Shape 5"/>
+          <p:cNvSpPr/>
+          <p:nvPr/>
+        </p:nvSpPr>
+        <p:spPr>
+          <a:xfrm>
+            <a:off x="731520" y="4041648"/>
+            <a:ext cx="7680960" cy="566928"/>
+          </a:xfrm>
+          <a:prstGeom prst="roundRect">
+            <a:avLst>
+              <a:gd name="adj" fmla="val 12903"/>
+            </a:avLst>
+          </a:prstGeom>
+          <a:solidFill>
+            <a:srgbClr val="B45309">
+              <a:alpha val="12000"/>
+            </a:srgbClr>
+          </a:solidFill>
+          <a:ln w="12700">
+            <a:solidFill>
+              <a:srgbClr val="B45309"/>
+            </a:solidFill>
+            <a:prstDash val="solid"/>
+          </a:ln>
+        </p:spPr>
+      </p:sp>
+      <p:sp>
+        <p:nvSpPr>
+          <p:cNvPr id="8" name="Text 6"/>
+          <p:cNvSpPr/>
+          <p:nvPr/>
+        </p:nvSpPr>
+        <p:spPr>
+          <a:xfrm>
+            <a:off x="868680" y="4087368"/>
+            <a:ext cx="7406640" cy="475488"/>
+          </a:xfrm>
+          <a:prstGeom prst="rect">
+            <a:avLst/>
+          </a:prstGeom>
+          <a:noFill/>
+          <a:ln/>
+        </p:spPr>
+        <p:txBody>
+          <a:bodyPr wrap="square" rtlCol="0" anchor="ctr"/>
+          <a:lstStyle/>
+          <a:p>
+            <a:pPr indent="0" marL="0">
+              <a:buNone/>
+            </a:pPr>
+            <a:r>
+              <a:rPr lang="en-US" sz="1100" b="1" dirty="0">
+                <a:solidFill>
+                  <a:srgbClr val="B45309"/>
+                </a:solidFill>
+                <a:latin typeface="Arial" pitchFamily="34" charset="0"/>
+                <a:ea typeface="Arial" pitchFamily="34" charset="-122"/>
+                <a:cs typeface="Arial" pitchFamily="34" charset="-120"/>
+              </a:rPr>
+              <a:t>Takeaway  </a:t>
+            </a:r>
+            <a:pPr indent="0" marL="0">
+              <a:buNone/>
+            </a:pPr>
+            <a:r>
+              <a:rPr lang="en-US" sz="1150" dirty="0">
+                <a:solidFill>
+                  <a:srgbClr val="1C1917"/>
+                </a:solidFill>
+                <a:latin typeface="Arial" pitchFamily="34" charset="0"/>
+                <a:ea typeface="Arial" pitchFamily="34" charset="-122"/>
+                <a:cs typeface="Arial" pitchFamily="34" charset="-120"/>
+              </a:rPr>
+              <a:t>Mastering accretion/dilution and LBO models gives analysts a complete toolkit for evaluating any corporate transaction.</a:t>
+            </a:r>
+            <a:endParaRPr lang="en-US" sz="1100" dirty="0"/>
           </a:p>
         </p:txBody>
       </p:sp>
@@ -6283,8 +5854,8 @@
         </p:nvSpPr>
         <p:spPr>
           <a:xfrm>
-            <a:off x="411480" y="402336"/>
-            <a:ext cx="82296" cy="329184"/>
+            <a:off x="411480" y="384048"/>
+            <a:ext cx="82296" cy="310896"/>
           </a:xfrm>
           <a:prstGeom prst="rect">
             <a:avLst/>
@@ -6304,7 +5875,7 @@
         <p:spPr>
           <a:xfrm>
             <a:off x="566928" y="292608"/>
-            <a:ext cx="8138160" cy="548640"/>
+            <a:ext cx="8138160" cy="502920"/>
           </a:xfrm>
           <a:prstGeom prst="rect">
             <a:avLst/>
@@ -6320,7 +5891,7 @@
               <a:buNone/>
             </a:pPr>
             <a:r>
-              <a:rPr lang="en-US" sz="2100" b="1" dirty="0">
+              <a:rPr lang="en-US" sz="2000" b="1" dirty="0">
                 <a:solidFill>
                   <a:srgbClr val="1C1917"/>
                 </a:solidFill>
@@ -6328,22 +5899,100 @@
                 <a:ea typeface="Arial" pitchFamily="34" charset="-122"/>
                 <a:cs typeface="Arial" pitchFamily="34" charset="-120"/>
               </a:rPr>
-              <a:t>Worked Example — Terminology Applied to a Mini Scenario</a:t>
-            </a:r>
-            <a:endParaRPr lang="en-US" sz="2100" dirty="0"/>
-          </a:p>
-        </p:txBody>
-      </p:sp>
-      <p:sp>
-        <p:nvSpPr>
-          <p:cNvPr id="4" name="Shape 2"/>
-          <p:cNvSpPr/>
-          <p:nvPr/>
-        </p:nvSpPr>
-        <p:spPr>
-          <a:xfrm>
-            <a:off x="411480" y="960120"/>
-            <a:ext cx="8321040" cy="0"/>
+              <a:t>SaaS 5-Year Revenue Forecast</a:t>
+            </a:r>
+            <a:endParaRPr lang="en-US" sz="2000" dirty="0"/>
+          </a:p>
+        </p:txBody>
+      </p:sp>
+      <p:sp>
+        <p:nvSpPr>
+          <p:cNvPr id="4" name="Text 2"/>
+          <p:cNvSpPr/>
+          <p:nvPr/>
+        </p:nvSpPr>
+        <p:spPr>
+          <a:xfrm>
+            <a:off x="566928" y="4681728"/>
+            <a:ext cx="8138160" cy="320040"/>
+          </a:xfrm>
+          <a:prstGeom prst="rect">
+            <a:avLst/>
+          </a:prstGeom>
+          <a:noFill/>
+          <a:ln/>
+        </p:spPr>
+        <p:txBody>
+          <a:bodyPr wrap="square" rtlCol="0" anchor="ctr"/>
+          <a:lstStyle/>
+          <a:p>
+            <a:pPr indent="0" marL="0">
+              <a:buNone/>
+            </a:pPr>
+            <a:r>
+              <a:rPr lang="en-US" sz="1000" i="1" dirty="0">
+                <a:solidFill>
+                  <a:srgbClr val="78716C"/>
+                </a:solidFill>
+                <a:latin typeface="Arial" pitchFamily="34" charset="0"/>
+                <a:ea typeface="Arial" pitchFamily="34" charset="-122"/>
+                <a:cs typeface="Arial" pitchFamily="34" charset="-120"/>
+              </a:rPr>
+              <a:t>Single growth-rate input drives all five years via compounding formula</a:t>
+            </a:r>
+            <a:endParaRPr lang="en-US" sz="1000" dirty="0"/>
+          </a:p>
+        </p:txBody>
+      </p:sp>
+      <p:sp>
+        <p:nvSpPr>
+          <p:cNvPr id="5" name="Text 3"/>
+          <p:cNvSpPr/>
+          <p:nvPr/>
+        </p:nvSpPr>
+        <p:spPr>
+          <a:xfrm>
+            <a:off x="411480" y="4919472"/>
+            <a:ext cx="8321040" cy="219456"/>
+          </a:xfrm>
+          <a:prstGeom prst="rect">
+            <a:avLst/>
+          </a:prstGeom>
+          <a:noFill/>
+          <a:ln/>
+        </p:spPr>
+        <p:txBody>
+          <a:bodyPr wrap="square" rtlCol="0" anchor="ctr"/>
+          <a:lstStyle/>
+          <a:p>
+            <a:pPr indent="0" marL="0">
+              <a:buNone/>
+            </a:pPr>
+            <a:r>
+              <a:rPr lang="en-US" sz="750" dirty="0">
+                <a:solidFill>
+                  <a:srgbClr val="AAAAAA"/>
+                </a:solidFill>
+                <a:latin typeface="Arial" pitchFamily="34" charset="0"/>
+                <a:ea typeface="Arial" pitchFamily="34" charset="-122"/>
+                <a:cs typeface="Arial" pitchFamily="34" charset="-120"/>
+              </a:rPr>
+              <a:t>Lesson Forge Pro (owner) — This content is educational material only and does not constitute financial, investment, or trading advice.</a:t>
+            </a:r>
+            <a:endParaRPr lang="en-US" sz="750" dirty="0"/>
+          </a:p>
+        </p:txBody>
+      </p:sp>
+      <p:sp>
+        <p:nvSpPr>
+          <p:cNvPr id="6" name="Shape 4"/>
+          <p:cNvSpPr/>
+          <p:nvPr/>
+        </p:nvSpPr>
+        <p:spPr>
+          <a:xfrm>
+            <a:off x="685800" y="4206240"/>
+            <a:ext cx="7772400" cy="0"/>
           </a:xfrm>
           <a:prstGeom prst="line">
             <a:avLst/>
@@ -6351,7 +6000,7 @@
           <a:noFill/>
           <a:ln w="12700">
             <a:solidFill>
-              <a:srgbClr val="E7E5E4"/>
+              <a:srgbClr val="1C1917"/>
             </a:solidFill>
             <a:prstDash val="solid"/>
           </a:ln>
@@ -6359,14 +6008,34 @@
       </p:sp>
       <p:sp>
         <p:nvSpPr>
-          <p:cNvPr id="5" name="Text 3"/>
-          <p:cNvSpPr/>
-          <p:nvPr/>
-        </p:nvSpPr>
-        <p:spPr>
-          <a:xfrm>
-            <a:off x="411480" y="4864608"/>
-            <a:ext cx="8321040" cy="237744"/>
+          <p:cNvPr id="7" name="Shape 5"/>
+          <p:cNvSpPr/>
+          <p:nvPr/>
+        </p:nvSpPr>
+        <p:spPr>
+          <a:xfrm>
+            <a:off x="1184148" y="2533244"/>
+            <a:ext cx="777240" cy="1672996"/>
+          </a:xfrm>
+          <a:prstGeom prst="rect">
+            <a:avLst/>
+          </a:prstGeom>
+          <a:solidFill>
+            <a:srgbClr val="B45309"/>
+          </a:solidFill>
+          <a:ln/>
+        </p:spPr>
+      </p:sp>
+      <p:sp>
+        <p:nvSpPr>
+          <p:cNvPr id="8" name="Text 6"/>
+          <p:cNvSpPr/>
+          <p:nvPr/>
+        </p:nvSpPr>
+        <p:spPr>
+          <a:xfrm>
+            <a:off x="1001268" y="2258924"/>
+            <a:ext cx="1143000" cy="237744"/>
           </a:xfrm>
           <a:prstGeom prst="rect">
             <a:avLst/>
@@ -6378,54 +6047,11 @@
           <a:bodyPr wrap="square" rtlCol="0" anchor="ctr"/>
           <a:lstStyle/>
           <a:p>
-            <a:pPr indent="0" marL="0">
-              <a:buNone/>
-            </a:pPr>
-            <a:r>
-              <a:rPr lang="en-US" sz="750" dirty="0">
-                <a:solidFill>
-                  <a:srgbClr val="AAAAAA"/>
-                </a:solidFill>
-                <a:latin typeface="Arial" pitchFamily="34" charset="0"/>
-                <a:ea typeface="Arial" pitchFamily="34" charset="-122"/>
-                <a:cs typeface="Arial" pitchFamily="34" charset="-120"/>
-              </a:rPr>
-              <a:t>Lesson Forge Pro (owner) — This content is educational material only and does not constitute financial, investment, or trading advice.</a:t>
-            </a:r>
-            <a:endParaRPr lang="en-US" sz="750" dirty="0"/>
-          </a:p>
-        </p:txBody>
-      </p:sp>
-      <p:sp>
-        <p:nvSpPr>
-          <p:cNvPr id="6" name="Text 4"/>
-          <p:cNvSpPr/>
-          <p:nvPr/>
-        </p:nvSpPr>
-        <p:spPr>
-          <a:xfrm>
-            <a:off x="731520" y="1188720"/>
-            <a:ext cx="7680960" cy="3383280"/>
-          </a:xfrm>
-          <a:prstGeom prst="rect">
-            <a:avLst/>
-          </a:prstGeom>
-          <a:noFill/>
-          <a:ln/>
-        </p:spPr>
-        <p:txBody>
-          <a:bodyPr wrap="square" rtlCol="0" anchor="t"/>
-          <a:lstStyle/>
-          <a:p>
-            <a:pPr marL="152400" indent="-152400">
-              <a:spcAft>
-                <a:spcPts val="800"/>
-              </a:spcAft>
-              <a:buSzPct val="100000"/>
-              <a:buChar char="•"/>
-            </a:pPr>
-            <a:r>
-              <a:rPr lang="en-US" sz="1500" dirty="0">
+            <a:pPr algn="ctr" indent="0" marL="0">
+              <a:buNone/>
+            </a:pPr>
+            <a:r>
+              <a:rPr lang="en-US" sz="950" b="1" dirty="0">
                 <a:solidFill>
                   <a:srgbClr val="1C1917"/>
                 </a:solidFill>
@@ -6433,20 +6059,97 @@
                 <a:ea typeface="Arial" pitchFamily="34" charset="-122"/>
                 <a:cs typeface="Arial" pitchFamily="34" charset="-120"/>
               </a:rPr>
-              <a:t>Scenario: A small logistics firm is evaluating a new delivery route requiring a $200,000 upfront investment. T</a:t>
-            </a:r>
-            <a:endParaRPr lang="en-US" sz="1500" dirty="0"/>
-          </a:p>
-          <a:p>
-            <a:pPr marL="152400" indent="-152400">
-              <a:spcAft>
-                <a:spcPts val="800"/>
-              </a:spcAft>
-              <a:buSzPct val="100000"/>
-              <a:buChar char="•"/>
-            </a:pPr>
-            <a:r>
-              <a:rPr lang="en-US" sz="1500" dirty="0">
+              <a:t>1440000</a:t>
+            </a:r>
+            <a:endParaRPr lang="en-US" sz="950" dirty="0"/>
+          </a:p>
+        </p:txBody>
+      </p:sp>
+      <p:sp>
+        <p:nvSpPr>
+          <p:cNvPr id="9" name="Text 7"/>
+          <p:cNvSpPr/>
+          <p:nvPr/>
+        </p:nvSpPr>
+        <p:spPr>
+          <a:xfrm>
+            <a:off x="955548" y="4315968"/>
+            <a:ext cx="1234440" cy="502920"/>
+          </a:xfrm>
+          <a:prstGeom prst="rect">
+            <a:avLst/>
+          </a:prstGeom>
+          <a:noFill/>
+          <a:ln/>
+        </p:spPr>
+        <p:txBody>
+          <a:bodyPr wrap="square" rtlCol="0" anchor="ctr"/>
+          <a:lstStyle/>
+          <a:p>
+            <a:pPr algn="ctr" indent="0" marL="0">
+              <a:buNone/>
+            </a:pPr>
+            <a:r>
+              <a:rPr lang="en-US" sz="850" dirty="0">
+                <a:solidFill>
+                  <a:srgbClr val="78716C"/>
+                </a:solidFill>
+                <a:latin typeface="Arial" pitchFamily="34" charset="0"/>
+                <a:ea typeface="Arial" pitchFamily="34" charset="-122"/>
+                <a:cs typeface="Arial" pitchFamily="34" charset="-120"/>
+              </a:rPr>
+              <a:t>Year 1</a:t>
+            </a:r>
+            <a:endParaRPr lang="en-US" sz="850" dirty="0"/>
+          </a:p>
+        </p:txBody>
+      </p:sp>
+      <p:sp>
+        <p:nvSpPr>
+          <p:cNvPr id="10" name="Shape 8"/>
+          <p:cNvSpPr/>
+          <p:nvPr/>
+        </p:nvSpPr>
+        <p:spPr>
+          <a:xfrm>
+            <a:off x="2683764" y="2282295"/>
+            <a:ext cx="777240" cy="1923945"/>
+          </a:xfrm>
+          <a:prstGeom prst="rect">
+            <a:avLst/>
+          </a:prstGeom>
+          <a:solidFill>
+            <a:srgbClr val="B45309"/>
+          </a:solidFill>
+          <a:ln/>
+        </p:spPr>
+      </p:sp>
+      <p:sp>
+        <p:nvSpPr>
+          <p:cNvPr id="11" name="Text 9"/>
+          <p:cNvSpPr/>
+          <p:nvPr/>
+        </p:nvSpPr>
+        <p:spPr>
+          <a:xfrm>
+            <a:off x="2500884" y="2007975"/>
+            <a:ext cx="1143000" cy="237744"/>
+          </a:xfrm>
+          <a:prstGeom prst="rect">
+            <a:avLst/>
+          </a:prstGeom>
+          <a:noFill/>
+          <a:ln/>
+        </p:spPr>
+        <p:txBody>
+          <a:bodyPr wrap="square" rtlCol="0" anchor="ctr"/>
+          <a:lstStyle/>
+          <a:p>
+            <a:pPr algn="ctr" indent="0" marL="0">
+              <a:buNone/>
+            </a:pPr>
+            <a:r>
+              <a:rPr lang="en-US" sz="950" b="1" dirty="0">
                 <a:solidFill>
                   <a:srgbClr val="1C1917"/>
                 </a:solidFill>
@@ -6454,20 +6157,97 @@
                 <a:ea typeface="Arial" pitchFamily="34" charset="-122"/>
                 <a:cs typeface="Arial" pitchFamily="34" charset="-120"/>
               </a:rPr>
-              <a:t>Step 1 — Identify the assumption.</a:t>
-            </a:r>
-            <a:endParaRPr lang="en-US" sz="1500" dirty="0"/>
-          </a:p>
-          <a:p>
-            <a:pPr marL="152400" indent="-152400">
-              <a:spcAft>
-                <a:spcPts val="800"/>
-              </a:spcAft>
-              <a:buSzPct val="100000"/>
-              <a:buChar char="•"/>
-            </a:pPr>
-            <a:r>
-              <a:rPr lang="en-US" sz="1500" dirty="0">
+              <a:t>1656000</a:t>
+            </a:r>
+            <a:endParaRPr lang="en-US" sz="950" dirty="0"/>
+          </a:p>
+        </p:txBody>
+      </p:sp>
+      <p:sp>
+        <p:nvSpPr>
+          <p:cNvPr id="12" name="Text 10"/>
+          <p:cNvSpPr/>
+          <p:nvPr/>
+        </p:nvSpPr>
+        <p:spPr>
+          <a:xfrm>
+            <a:off x="2455164" y="4315968"/>
+            <a:ext cx="1234440" cy="502920"/>
+          </a:xfrm>
+          <a:prstGeom prst="rect">
+            <a:avLst/>
+          </a:prstGeom>
+          <a:noFill/>
+          <a:ln/>
+        </p:spPr>
+        <p:txBody>
+          <a:bodyPr wrap="square" rtlCol="0" anchor="ctr"/>
+          <a:lstStyle/>
+          <a:p>
+            <a:pPr algn="ctr" indent="0" marL="0">
+              <a:buNone/>
+            </a:pPr>
+            <a:r>
+              <a:rPr lang="en-US" sz="850" dirty="0">
+                <a:solidFill>
+                  <a:srgbClr val="78716C"/>
+                </a:solidFill>
+                <a:latin typeface="Arial" pitchFamily="34" charset="0"/>
+                <a:ea typeface="Arial" pitchFamily="34" charset="-122"/>
+                <a:cs typeface="Arial" pitchFamily="34" charset="-120"/>
+              </a:rPr>
+              <a:t>Year 2</a:t>
+            </a:r>
+            <a:endParaRPr lang="en-US" sz="850" dirty="0"/>
+          </a:p>
+        </p:txBody>
+      </p:sp>
+      <p:sp>
+        <p:nvSpPr>
+          <p:cNvPr id="13" name="Shape 11"/>
+          <p:cNvSpPr/>
+          <p:nvPr/>
+        </p:nvSpPr>
+        <p:spPr>
+          <a:xfrm>
+            <a:off x="4183380" y="1993703"/>
+            <a:ext cx="777240" cy="2212537"/>
+          </a:xfrm>
+          <a:prstGeom prst="rect">
+            <a:avLst/>
+          </a:prstGeom>
+          <a:solidFill>
+            <a:srgbClr val="B45309"/>
+          </a:solidFill>
+          <a:ln/>
+        </p:spPr>
+      </p:sp>
+      <p:sp>
+        <p:nvSpPr>
+          <p:cNvPr id="14" name="Text 12"/>
+          <p:cNvSpPr/>
+          <p:nvPr/>
+        </p:nvSpPr>
+        <p:spPr>
+          <a:xfrm>
+            <a:off x="4000500" y="1719383"/>
+            <a:ext cx="1143000" cy="237744"/>
+          </a:xfrm>
+          <a:prstGeom prst="rect">
+            <a:avLst/>
+          </a:prstGeom>
+          <a:noFill/>
+          <a:ln/>
+        </p:spPr>
+        <p:txBody>
+          <a:bodyPr wrap="square" rtlCol="0" anchor="ctr"/>
+          <a:lstStyle/>
+          <a:p>
+            <a:pPr algn="ctr" indent="0" marL="0">
+              <a:buNone/>
+            </a:pPr>
+            <a:r>
+              <a:rPr lang="en-US" sz="950" b="1" dirty="0">
                 <a:solidFill>
                   <a:srgbClr val="1C1917"/>
                 </a:solidFill>
@@ -6475,20 +6255,97 @@
                 <a:ea typeface="Arial" pitchFamily="34" charset="-122"/>
                 <a:cs typeface="Arial" pitchFamily="34" charset="-120"/>
               </a:rPr>
-              <a:t>The growth in cash flows (from $70K to $80K to $90K) and the 10% WACC are the model's assumptions. If either c</a:t>
-            </a:r>
-            <a:endParaRPr lang="en-US" sz="1500" dirty="0"/>
-          </a:p>
-          <a:p>
-            <a:pPr marL="152400" indent="-152400">
-              <a:spcAft>
-                <a:spcPts val="800"/>
-              </a:spcAft>
-              <a:buSzPct val="100000"/>
-              <a:buChar char="•"/>
-            </a:pPr>
-            <a:r>
-              <a:rPr lang="en-US" sz="1500" dirty="0">
+              <a:t>1904400</a:t>
+            </a:r>
+            <a:endParaRPr lang="en-US" sz="950" dirty="0"/>
+          </a:p>
+        </p:txBody>
+      </p:sp>
+      <p:sp>
+        <p:nvSpPr>
+          <p:cNvPr id="15" name="Text 13"/>
+          <p:cNvSpPr/>
+          <p:nvPr/>
+        </p:nvSpPr>
+        <p:spPr>
+          <a:xfrm>
+            <a:off x="3954780" y="4315968"/>
+            <a:ext cx="1234440" cy="502920"/>
+          </a:xfrm>
+          <a:prstGeom prst="rect">
+            <a:avLst/>
+          </a:prstGeom>
+          <a:noFill/>
+          <a:ln/>
+        </p:spPr>
+        <p:txBody>
+          <a:bodyPr wrap="square" rtlCol="0" anchor="ctr"/>
+          <a:lstStyle/>
+          <a:p>
+            <a:pPr algn="ctr" indent="0" marL="0">
+              <a:buNone/>
+            </a:pPr>
+            <a:r>
+              <a:rPr lang="en-US" sz="850" dirty="0">
+                <a:solidFill>
+                  <a:srgbClr val="78716C"/>
+                </a:solidFill>
+                <a:latin typeface="Arial" pitchFamily="34" charset="0"/>
+                <a:ea typeface="Arial" pitchFamily="34" charset="-122"/>
+                <a:cs typeface="Arial" pitchFamily="34" charset="-120"/>
+              </a:rPr>
+              <a:t>Year 3</a:t>
+            </a:r>
+            <a:endParaRPr lang="en-US" sz="850" dirty="0"/>
+          </a:p>
+        </p:txBody>
+      </p:sp>
+      <p:sp>
+        <p:nvSpPr>
+          <p:cNvPr id="16" name="Shape 14"/>
+          <p:cNvSpPr/>
+          <p:nvPr/>
+        </p:nvSpPr>
+        <p:spPr>
+          <a:xfrm>
+            <a:off x="5682996" y="1661823"/>
+            <a:ext cx="777240" cy="2544417"/>
+          </a:xfrm>
+          <a:prstGeom prst="rect">
+            <a:avLst/>
+          </a:prstGeom>
+          <a:solidFill>
+            <a:srgbClr val="B45309"/>
+          </a:solidFill>
+          <a:ln/>
+        </p:spPr>
+      </p:sp>
+      <p:sp>
+        <p:nvSpPr>
+          <p:cNvPr id="17" name="Text 15"/>
+          <p:cNvSpPr/>
+          <p:nvPr/>
+        </p:nvSpPr>
+        <p:spPr>
+          <a:xfrm>
+            <a:off x="5500116" y="1387503"/>
+            <a:ext cx="1143000" cy="237744"/>
+          </a:xfrm>
+          <a:prstGeom prst="rect">
+            <a:avLst/>
+          </a:prstGeom>
+          <a:noFill/>
+          <a:ln/>
+        </p:spPr>
+        <p:txBody>
+          <a:bodyPr wrap="square" rtlCol="0" anchor="ctr"/>
+          <a:lstStyle/>
+          <a:p>
+            <a:pPr algn="ctr" indent="0" marL="0">
+              <a:buNone/>
+            </a:pPr>
+            <a:r>
+              <a:rPr lang="en-US" sz="950" b="1" dirty="0">
                 <a:solidFill>
                   <a:srgbClr val="1C1917"/>
                 </a:solidFill>
@@ -6496,9 +6353,146 @@
                 <a:ea typeface="Arial" pitchFamily="34" charset="-122"/>
                 <a:cs typeface="Arial" pitchFamily="34" charset="-120"/>
               </a:rPr>
-              <a:t>Step 2 — Identify the drivers.</a:t>
-            </a:r>
-            <a:endParaRPr lang="en-US" sz="1500" dirty="0"/>
+              <a:t>2190060</a:t>
+            </a:r>
+            <a:endParaRPr lang="en-US" sz="950" dirty="0"/>
+          </a:p>
+        </p:txBody>
+      </p:sp>
+      <p:sp>
+        <p:nvSpPr>
+          <p:cNvPr id="18" name="Text 16"/>
+          <p:cNvSpPr/>
+          <p:nvPr/>
+        </p:nvSpPr>
+        <p:spPr>
+          <a:xfrm>
+            <a:off x="5454396" y="4315968"/>
+            <a:ext cx="1234440" cy="502920"/>
+          </a:xfrm>
+          <a:prstGeom prst="rect">
+            <a:avLst/>
+          </a:prstGeom>
+          <a:noFill/>
+          <a:ln/>
+        </p:spPr>
+        <p:txBody>
+          <a:bodyPr wrap="square" rtlCol="0" anchor="ctr"/>
+          <a:lstStyle/>
+          <a:p>
+            <a:pPr algn="ctr" indent="0" marL="0">
+              <a:buNone/>
+            </a:pPr>
+            <a:r>
+              <a:rPr lang="en-US" sz="850" dirty="0">
+                <a:solidFill>
+                  <a:srgbClr val="78716C"/>
+                </a:solidFill>
+                <a:latin typeface="Arial" pitchFamily="34" charset="0"/>
+                <a:ea typeface="Arial" pitchFamily="34" charset="-122"/>
+                <a:cs typeface="Arial" pitchFamily="34" charset="-120"/>
+              </a:rPr>
+              <a:t>Year 4</a:t>
+            </a:r>
+            <a:endParaRPr lang="en-US" sz="850" dirty="0"/>
+          </a:p>
+        </p:txBody>
+      </p:sp>
+      <p:sp>
+        <p:nvSpPr>
+          <p:cNvPr id="19" name="Shape 17"/>
+          <p:cNvSpPr/>
+          <p:nvPr/>
+        </p:nvSpPr>
+        <p:spPr>
+          <a:xfrm>
+            <a:off x="7182612" y="1280160"/>
+            <a:ext cx="777240" cy="2926080"/>
+          </a:xfrm>
+          <a:prstGeom prst="rect">
+            <a:avLst/>
+          </a:prstGeom>
+          <a:solidFill>
+            <a:srgbClr val="B45309"/>
+          </a:solidFill>
+          <a:ln/>
+        </p:spPr>
+      </p:sp>
+      <p:sp>
+        <p:nvSpPr>
+          <p:cNvPr id="20" name="Text 18"/>
+          <p:cNvSpPr/>
+          <p:nvPr/>
+        </p:nvSpPr>
+        <p:spPr>
+          <a:xfrm>
+            <a:off x="6999732" y="1005840"/>
+            <a:ext cx="1143000" cy="237744"/>
+          </a:xfrm>
+          <a:prstGeom prst="rect">
+            <a:avLst/>
+          </a:prstGeom>
+          <a:noFill/>
+          <a:ln/>
+        </p:spPr>
+        <p:txBody>
+          <a:bodyPr wrap="square" rtlCol="0" anchor="ctr"/>
+          <a:lstStyle/>
+          <a:p>
+            <a:pPr algn="ctr" indent="0" marL="0">
+              <a:buNone/>
+            </a:pPr>
+            <a:r>
+              <a:rPr lang="en-US" sz="950" b="1" dirty="0">
+                <a:solidFill>
+                  <a:srgbClr val="1C1917"/>
+                </a:solidFill>
+                <a:latin typeface="Arial" pitchFamily="34" charset="0"/>
+                <a:ea typeface="Arial" pitchFamily="34" charset="-122"/>
+                <a:cs typeface="Arial" pitchFamily="34" charset="-120"/>
+              </a:rPr>
+              <a:t>2518569</a:t>
+            </a:r>
+            <a:endParaRPr lang="en-US" sz="950" dirty="0"/>
+          </a:p>
+        </p:txBody>
+      </p:sp>
+      <p:sp>
+        <p:nvSpPr>
+          <p:cNvPr id="21" name="Text 19"/>
+          <p:cNvSpPr/>
+          <p:nvPr/>
+        </p:nvSpPr>
+        <p:spPr>
+          <a:xfrm>
+            <a:off x="6954012" y="4315968"/>
+            <a:ext cx="1234440" cy="502920"/>
+          </a:xfrm>
+          <a:prstGeom prst="rect">
+            <a:avLst/>
+          </a:prstGeom>
+          <a:noFill/>
+          <a:ln/>
+        </p:spPr>
+        <p:txBody>
+          <a:bodyPr wrap="square" rtlCol="0" anchor="ctr"/>
+          <a:lstStyle/>
+          <a:p>
+            <a:pPr algn="ctr" indent="0" marL="0">
+              <a:buNone/>
+            </a:pPr>
+            <a:r>
+              <a:rPr lang="en-US" sz="850" dirty="0">
+                <a:solidFill>
+                  <a:srgbClr val="78716C"/>
+                </a:solidFill>
+                <a:latin typeface="Arial" pitchFamily="34" charset="0"/>
+                <a:ea typeface="Arial" pitchFamily="34" charset="-122"/>
+                <a:cs typeface="Arial" pitchFamily="34" charset="-120"/>
+              </a:rPr>
+              <a:t>Year 5</a:t>
+            </a:r>
+            <a:endParaRPr lang="en-US" sz="850" dirty="0"/>
           </a:p>
         </p:txBody>
       </p:sp>
@@ -6542,8 +6536,8 @@
         </p:nvSpPr>
         <p:spPr>
           <a:xfrm>
-            <a:off x="411480" y="384048"/>
-            <a:ext cx="82296" cy="310896"/>
+            <a:off x="411480" y="402336"/>
+            <a:ext cx="82296" cy="329184"/>
           </a:xfrm>
           <a:prstGeom prst="rect">
             <a:avLst/>
@@ -6563,7 +6557,7 @@
         <p:spPr>
           <a:xfrm>
             <a:off x="566928" y="292608"/>
-            <a:ext cx="8138160" cy="502920"/>
+            <a:ext cx="8138160" cy="548640"/>
           </a:xfrm>
           <a:prstGeom prst="rect">
             <a:avLst/>
@@ -6579,7 +6573,7 @@
               <a:buNone/>
             </a:pPr>
             <a:r>
-              <a:rPr lang="en-US" sz="2000" b="1" dirty="0">
+              <a:rPr lang="en-US" sz="2100" b="1" dirty="0">
                 <a:solidFill>
                   <a:srgbClr val="1C1917"/>
                 </a:solidFill>
@@ -6587,100 +6581,22 @@
                 <a:ea typeface="Arial" pitchFamily="34" charset="-122"/>
                 <a:cs typeface="Arial" pitchFamily="34" charset="-120"/>
               </a:rPr>
-              <a:t>DCF Example: Cash Flow Present Values</a:t>
-            </a:r>
-            <a:endParaRPr lang="en-US" sz="2000" dirty="0"/>
-          </a:p>
-        </p:txBody>
-      </p:sp>
-      <p:sp>
-        <p:nvSpPr>
-          <p:cNvPr id="4" name="Text 2"/>
-          <p:cNvSpPr/>
-          <p:nvPr/>
-        </p:nvSpPr>
-        <p:spPr>
-          <a:xfrm>
-            <a:off x="566928" y="4681728"/>
-            <a:ext cx="8138160" cy="320040"/>
-          </a:xfrm>
-          <a:prstGeom prst="rect">
-            <a:avLst/>
-          </a:prstGeom>
-          <a:noFill/>
-          <a:ln/>
-        </p:spPr>
-        <p:txBody>
-          <a:bodyPr wrap="square" rtlCol="0" anchor="ctr"/>
-          <a:lstStyle/>
-          <a:p>
-            <a:pPr indent="0" marL="0">
-              <a:buNone/>
-            </a:pPr>
-            <a:r>
-              <a:rPr lang="en-US" sz="1000" i="1" dirty="0">
-                <a:solidFill>
-                  <a:srgbClr val="78716C"/>
-                </a:solidFill>
-                <a:latin typeface="Arial" pitchFamily="34" charset="0"/>
-                <a:ea typeface="Arial" pitchFamily="34" charset="-122"/>
-                <a:cs typeface="Arial" pitchFamily="34" charset="-120"/>
-              </a:rPr>
-              <a:t>Total PV $197,370 minus $200,000 investment yields NPV of −$2,630</a:t>
-            </a:r>
-            <a:endParaRPr lang="en-US" sz="1000" dirty="0"/>
-          </a:p>
-        </p:txBody>
-      </p:sp>
-      <p:sp>
-        <p:nvSpPr>
-          <p:cNvPr id="5" name="Text 3"/>
-          <p:cNvSpPr/>
-          <p:nvPr/>
-        </p:nvSpPr>
-        <p:spPr>
-          <a:xfrm>
-            <a:off x="411480" y="4919472"/>
-            <a:ext cx="8321040" cy="219456"/>
-          </a:xfrm>
-          <a:prstGeom prst="rect">
-            <a:avLst/>
-          </a:prstGeom>
-          <a:noFill/>
-          <a:ln/>
-        </p:spPr>
-        <p:txBody>
-          <a:bodyPr wrap="square" rtlCol="0" anchor="ctr"/>
-          <a:lstStyle/>
-          <a:p>
-            <a:pPr indent="0" marL="0">
-              <a:buNone/>
-            </a:pPr>
-            <a:r>
-              <a:rPr lang="en-US" sz="750" dirty="0">
-                <a:solidFill>
-                  <a:srgbClr val="AAAAAA"/>
-                </a:solidFill>
-                <a:latin typeface="Arial" pitchFamily="34" charset="0"/>
-                <a:ea typeface="Arial" pitchFamily="34" charset="-122"/>
-                <a:cs typeface="Arial" pitchFamily="34" charset="-120"/>
-              </a:rPr>
-              <a:t>Lesson Forge Pro (owner) — This content is educational material only and does not constitute financial, investment, or trading advice.</a:t>
-            </a:r>
-            <a:endParaRPr lang="en-US" sz="750" dirty="0"/>
-          </a:p>
-        </p:txBody>
-      </p:sp>
-      <p:sp>
-        <p:nvSpPr>
-          <p:cNvPr id="6" name="Shape 4"/>
-          <p:cNvSpPr/>
-          <p:nvPr/>
-        </p:nvSpPr>
-        <p:spPr>
-          <a:xfrm>
-            <a:off x="685800" y="4206240"/>
-            <a:ext cx="7772400" cy="0"/>
+              <a:t>Model Audit, Error-Proofing, and Presentation of Results</a:t>
+            </a:r>
+            <a:endParaRPr lang="en-US" sz="2100" dirty="0"/>
+          </a:p>
+        </p:txBody>
+      </p:sp>
+      <p:sp>
+        <p:nvSpPr>
+          <p:cNvPr id="4" name="Shape 2"/>
+          <p:cNvSpPr/>
+          <p:nvPr/>
+        </p:nvSpPr>
+        <p:spPr>
+          <a:xfrm>
+            <a:off x="411480" y="960120"/>
+            <a:ext cx="8321040" cy="0"/>
           </a:xfrm>
           <a:prstGeom prst="line">
             <a:avLst/>
@@ -6688,7 +6604,7 @@
           <a:noFill/>
           <a:ln w="12700">
             <a:solidFill>
-              <a:srgbClr val="1C1917"/>
+              <a:srgbClr val="E7E5E4"/>
             </a:solidFill>
             <a:prstDash val="solid"/>
           </a:ln>
@@ -6696,22 +6612,197 @@
       </p:sp>
       <p:sp>
         <p:nvSpPr>
+          <p:cNvPr id="5" name="Text 3"/>
+          <p:cNvSpPr/>
+          <p:nvPr/>
+        </p:nvSpPr>
+        <p:spPr>
+          <a:xfrm>
+            <a:off x="411480" y="4864608"/>
+            <a:ext cx="8321040" cy="237744"/>
+          </a:xfrm>
+          <a:prstGeom prst="rect">
+            <a:avLst/>
+          </a:prstGeom>
+          <a:noFill/>
+          <a:ln/>
+        </p:spPr>
+        <p:txBody>
+          <a:bodyPr wrap="square" rtlCol="0" anchor="ctr"/>
+          <a:lstStyle/>
+          <a:p>
+            <a:pPr indent="0" marL="0">
+              <a:buNone/>
+            </a:pPr>
+            <a:r>
+              <a:rPr lang="en-US" sz="750" dirty="0">
+                <a:solidFill>
+                  <a:srgbClr val="AAAAAA"/>
+                </a:solidFill>
+                <a:latin typeface="Arial" pitchFamily="34" charset="0"/>
+                <a:ea typeface="Arial" pitchFamily="34" charset="-122"/>
+                <a:cs typeface="Arial" pitchFamily="34" charset="-120"/>
+              </a:rPr>
+              <a:t>Lesson Forge Pro (owner) — This content is educational material only and does not constitute financial, investment, or trading advice.</a:t>
+            </a:r>
+            <a:endParaRPr lang="en-US" sz="750" dirty="0"/>
+          </a:p>
+        </p:txBody>
+      </p:sp>
+      <p:sp>
+        <p:nvSpPr>
+          <p:cNvPr id="6" name="Text 4"/>
+          <p:cNvSpPr/>
+          <p:nvPr/>
+        </p:nvSpPr>
+        <p:spPr>
+          <a:xfrm>
+            <a:off x="731520" y="1188720"/>
+            <a:ext cx="7680960" cy="2743200"/>
+          </a:xfrm>
+          <a:prstGeom prst="rect">
+            <a:avLst/>
+          </a:prstGeom>
+          <a:noFill/>
+          <a:ln/>
+        </p:spPr>
+        <p:txBody>
+          <a:bodyPr wrap="square" rtlCol="0" anchor="t"/>
+          <a:lstStyle/>
+          <a:p>
+            <a:pPr marL="152400" indent="-152400">
+              <a:spcAft>
+                <a:spcPts val="800"/>
+              </a:spcAft>
+              <a:buSzPct val="100000"/>
+              <a:buChar char="•"/>
+            </a:pPr>
+            <a:r>
+              <a:rPr lang="en-US" sz="1500" dirty="0">
+                <a:solidFill>
+                  <a:srgbClr val="1C1917"/>
+                </a:solidFill>
+                <a:latin typeface="Arial" pitchFamily="34" charset="0"/>
+                <a:ea typeface="Arial" pitchFamily="34" charset="-122"/>
+                <a:cs typeface="Arial" pitchFamily="34" charset="-120"/>
+              </a:rPr>
+              <a:t>Over 90% of large spreadsheets contain at least one material error.</a:t>
+            </a:r>
+            <a:endParaRPr lang="en-US" sz="1500" dirty="0"/>
+          </a:p>
+          <a:p>
+            <a:pPr marL="152400" indent="-152400">
+              <a:spcAft>
+                <a:spcPts val="800"/>
+              </a:spcAft>
+              <a:buSzPct val="100000"/>
+              <a:buChar char="•"/>
+            </a:pPr>
+            <a:r>
+              <a:rPr lang="en-US" sz="1500" dirty="0">
+                <a:solidFill>
+                  <a:srgbClr val="1C1917"/>
+                </a:solidFill>
+                <a:latin typeface="Arial" pitchFamily="34" charset="0"/>
+                <a:ea typeface="Arial" pitchFamily="34" charset="-122"/>
+                <a:cs typeface="Arial" pitchFamily="34" charset="-120"/>
+              </a:rPr>
+              <a:t>Build a balance sheet check cell: Assets – (Liabilities + Equity) = 0.</a:t>
+            </a:r>
+            <a:endParaRPr lang="en-US" sz="1500" dirty="0"/>
+          </a:p>
+          <a:p>
+            <a:pPr marL="152400" indent="-152400">
+              <a:spcAft>
+                <a:spcPts val="800"/>
+              </a:spcAft>
+              <a:buSzPct val="100000"/>
+              <a:buChar char="•"/>
+            </a:pPr>
+            <a:r>
+              <a:rPr lang="en-US" sz="1500" dirty="0">
+                <a:solidFill>
+                  <a:srgbClr val="1C1917"/>
+                </a:solidFill>
+                <a:latin typeface="Arial" pitchFamily="34" charset="0"/>
+                <a:ea typeface="Arial" pitchFamily="34" charset="-122"/>
+                <a:cs typeface="Arial" pitchFamily="34" charset="-120"/>
+              </a:rPr>
+              <a:t>Use conditional formatting — red for imbalance, green for zero.</a:t>
+            </a:r>
+            <a:endParaRPr lang="en-US" sz="1500" dirty="0"/>
+          </a:p>
+          <a:p>
+            <a:pPr marL="152400" indent="-152400">
+              <a:spcAft>
+                <a:spcPts val="800"/>
+              </a:spcAft>
+              <a:buSzPct val="100000"/>
+              <a:buChar char="•"/>
+            </a:pPr>
+            <a:r>
+              <a:rPr lang="en-US" sz="1500" dirty="0">
+                <a:solidFill>
+                  <a:srgbClr val="1C1917"/>
+                </a:solidFill>
+                <a:latin typeface="Arial" pitchFamily="34" charset="0"/>
+                <a:ea typeface="Arial" pitchFamily="34" charset="-122"/>
+                <a:cs typeface="Arial" pitchFamily="34" charset="-120"/>
+              </a:rPr>
+              <a:t>Place audit flags where they cannot be scrolled off-screen.</a:t>
+            </a:r>
+            <a:endParaRPr lang="en-US" sz="1500" dirty="0"/>
+          </a:p>
+          <a:p>
+            <a:pPr marL="152400" indent="-152400">
+              <a:spcAft>
+                <a:spcPts val="800"/>
+              </a:spcAft>
+              <a:buSzPct val="100000"/>
+              <a:buChar char="•"/>
+            </a:pPr>
+            <a:r>
+              <a:rPr lang="en-US" sz="1500" dirty="0">
+                <a:solidFill>
+                  <a:srgbClr val="1C1917"/>
+                </a:solidFill>
+                <a:latin typeface="Arial" pitchFamily="34" charset="0"/>
+                <a:ea typeface="Arial" pitchFamily="34" charset="-122"/>
+                <a:cs typeface="Arial" pitchFamily="34" charset="-120"/>
+              </a:rPr>
+              <a:t>Run a full audit routine before every high-stakes presentation.</a:t>
+            </a:r>
+            <a:endParaRPr lang="en-US" sz="1500" dirty="0"/>
+          </a:p>
+        </p:txBody>
+      </p:sp>
+      <p:sp>
+        <p:nvSpPr>
           <p:cNvPr id="7" name="Shape 5"/>
           <p:cNvSpPr/>
           <p:nvPr/>
         </p:nvSpPr>
         <p:spPr>
           <a:xfrm>
-            <a:off x="1184148" y="3275220"/>
-            <a:ext cx="777240" cy="931020"/>
-          </a:xfrm>
-          <a:prstGeom prst="rect">
-            <a:avLst/>
+            <a:off x="731520" y="4041648"/>
+            <a:ext cx="7680960" cy="566928"/>
+          </a:xfrm>
+          <a:prstGeom prst="roundRect">
+            <a:avLst>
+              <a:gd name="adj" fmla="val 12903"/>
+            </a:avLst>
           </a:prstGeom>
           <a:solidFill>
-            <a:srgbClr val="B45309"/>
+            <a:srgbClr val="B45309">
+              <a:alpha val="12000"/>
+            </a:srgbClr>
           </a:solidFill>
-          <a:ln/>
+          <a:ln w="12700">
+            <a:solidFill>
+              <a:srgbClr val="B45309"/>
+            </a:solidFill>
+            <a:prstDash val="solid"/>
+          </a:ln>
         </p:spPr>
       </p:sp>
       <p:sp>
@@ -6722,8 +6813,8 @@
         </p:nvSpPr>
         <p:spPr>
           <a:xfrm>
-            <a:off x="1001268" y="3000900"/>
-            <a:ext cx="1143000" cy="237744"/>
+            <a:off x="868680" y="4087368"/>
+            <a:ext cx="7406640" cy="475488"/>
           </a:xfrm>
           <a:prstGeom prst="rect">
             <a:avLst/>
@@ -6735,11 +6826,25 @@
           <a:bodyPr wrap="square" rtlCol="0" anchor="ctr"/>
           <a:lstStyle/>
           <a:p>
-            <a:pPr algn="ctr" indent="0" marL="0">
-              <a:buNone/>
-            </a:pPr>
-            <a:r>
-              <a:rPr lang="en-US" sz="950" b="1" dirty="0">
+            <a:pPr indent="0" marL="0">
+              <a:buNone/>
+            </a:pPr>
+            <a:r>
+              <a:rPr lang="en-US" sz="1100" b="1" dirty="0">
+                <a:solidFill>
+                  <a:srgbClr val="B45309"/>
+                </a:solidFill>
+                <a:latin typeface="Arial" pitchFamily="34" charset="0"/>
+                <a:ea typeface="Arial" pitchFamily="34" charset="-122"/>
+                <a:cs typeface="Arial" pitchFamily="34" charset="-120"/>
+              </a:rPr>
+              <a:t>Takeaway  </a:t>
+            </a:r>
+            <a:pPr indent="0" marL="0">
+              <a:buNone/>
+            </a:pPr>
+            <a:r>
+              <a:rPr lang="en-US" sz="1150" dirty="0">
                 <a:solidFill>
                   <a:srgbClr val="1C1917"/>
                 </a:solidFill>
@@ -6747,440 +6852,9 @@
                 <a:ea typeface="Arial" pitchFamily="34" charset="-122"/>
                 <a:cs typeface="Arial" pitchFamily="34" charset="-120"/>
               </a:rPr>
-              <a:t>63636</a:t>
-            </a:r>
-            <a:endParaRPr lang="en-US" sz="950" dirty="0"/>
-          </a:p>
-        </p:txBody>
-      </p:sp>
-      <p:sp>
-        <p:nvSpPr>
-          <p:cNvPr id="9" name="Text 7"/>
-          <p:cNvSpPr/>
-          <p:nvPr/>
-        </p:nvSpPr>
-        <p:spPr>
-          <a:xfrm>
-            <a:off x="955548" y="4315968"/>
-            <a:ext cx="1234440" cy="502920"/>
-          </a:xfrm>
-          <a:prstGeom prst="rect">
-            <a:avLst/>
-          </a:prstGeom>
-          <a:noFill/>
-          <a:ln/>
-        </p:spPr>
-        <p:txBody>
-          <a:bodyPr wrap="square" rtlCol="0" anchor="ctr"/>
-          <a:lstStyle/>
-          <a:p>
-            <a:pPr algn="ctr" indent="0" marL="0">
-              <a:buNone/>
-            </a:pPr>
-            <a:r>
-              <a:rPr lang="en-US" sz="850" dirty="0">
-                <a:solidFill>
-                  <a:srgbClr val="78716C"/>
-                </a:solidFill>
-                <a:latin typeface="Arial" pitchFamily="34" charset="0"/>
-                <a:ea typeface="Arial" pitchFamily="34" charset="-122"/>
-                <a:cs typeface="Arial" pitchFamily="34" charset="-120"/>
-              </a:rPr>
-              <a:t>Year 1 FCF</a:t>
-            </a:r>
-            <a:endParaRPr lang="en-US" sz="850" dirty="0"/>
-          </a:p>
-        </p:txBody>
-      </p:sp>
-      <p:sp>
-        <p:nvSpPr>
-          <p:cNvPr id="10" name="Shape 8"/>
-          <p:cNvSpPr/>
-          <p:nvPr/>
-        </p:nvSpPr>
-        <p:spPr>
-          <a:xfrm>
-            <a:off x="2683764" y="3238936"/>
-            <a:ext cx="777240" cy="967304"/>
-          </a:xfrm>
-          <a:prstGeom prst="rect">
-            <a:avLst/>
-          </a:prstGeom>
-          <a:solidFill>
-            <a:srgbClr val="B45309"/>
-          </a:solidFill>
-          <a:ln/>
-        </p:spPr>
-      </p:sp>
-      <p:sp>
-        <p:nvSpPr>
-          <p:cNvPr id="11" name="Text 9"/>
-          <p:cNvSpPr/>
-          <p:nvPr/>
-        </p:nvSpPr>
-        <p:spPr>
-          <a:xfrm>
-            <a:off x="2500884" y="2964616"/>
-            <a:ext cx="1143000" cy="237744"/>
-          </a:xfrm>
-          <a:prstGeom prst="rect">
-            <a:avLst/>
-          </a:prstGeom>
-          <a:noFill/>
-          <a:ln/>
-        </p:spPr>
-        <p:txBody>
-          <a:bodyPr wrap="square" rtlCol="0" anchor="ctr"/>
-          <a:lstStyle/>
-          <a:p>
-            <a:pPr algn="ctr" indent="0" marL="0">
-              <a:buNone/>
-            </a:pPr>
-            <a:r>
-              <a:rPr lang="en-US" sz="950" b="1" dirty="0">
-                <a:solidFill>
-                  <a:srgbClr val="1C1917"/>
-                </a:solidFill>
-                <a:latin typeface="Arial" pitchFamily="34" charset="0"/>
-                <a:ea typeface="Arial" pitchFamily="34" charset="-122"/>
-                <a:cs typeface="Arial" pitchFamily="34" charset="-120"/>
-              </a:rPr>
-              <a:t>66116</a:t>
-            </a:r>
-            <a:endParaRPr lang="en-US" sz="950" dirty="0"/>
-          </a:p>
-        </p:txBody>
-      </p:sp>
-      <p:sp>
-        <p:nvSpPr>
-          <p:cNvPr id="12" name="Text 10"/>
-          <p:cNvSpPr/>
-          <p:nvPr/>
-        </p:nvSpPr>
-        <p:spPr>
-          <a:xfrm>
-            <a:off x="2455164" y="4315968"/>
-            <a:ext cx="1234440" cy="502920"/>
-          </a:xfrm>
-          <a:prstGeom prst="rect">
-            <a:avLst/>
-          </a:prstGeom>
-          <a:noFill/>
-          <a:ln/>
-        </p:spPr>
-        <p:txBody>
-          <a:bodyPr wrap="square" rtlCol="0" anchor="ctr"/>
-          <a:lstStyle/>
-          <a:p>
-            <a:pPr algn="ctr" indent="0" marL="0">
-              <a:buNone/>
-            </a:pPr>
-            <a:r>
-              <a:rPr lang="en-US" sz="850" dirty="0">
-                <a:solidFill>
-                  <a:srgbClr val="78716C"/>
-                </a:solidFill>
-                <a:latin typeface="Arial" pitchFamily="34" charset="0"/>
-                <a:ea typeface="Arial" pitchFamily="34" charset="-122"/>
-                <a:cs typeface="Arial" pitchFamily="34" charset="-120"/>
-              </a:rPr>
-              <a:t>Year 2 FCF</a:t>
-            </a:r>
-            <a:endParaRPr lang="en-US" sz="850" dirty="0"/>
-          </a:p>
-        </p:txBody>
-      </p:sp>
-      <p:sp>
-        <p:nvSpPr>
-          <p:cNvPr id="13" name="Shape 11"/>
-          <p:cNvSpPr/>
-          <p:nvPr/>
-        </p:nvSpPr>
-        <p:spPr>
-          <a:xfrm>
-            <a:off x="4183380" y="3216962"/>
-            <a:ext cx="777240" cy="989278"/>
-          </a:xfrm>
-          <a:prstGeom prst="rect">
-            <a:avLst/>
-          </a:prstGeom>
-          <a:solidFill>
-            <a:srgbClr val="B45309"/>
-          </a:solidFill>
-          <a:ln/>
-        </p:spPr>
-      </p:sp>
-      <p:sp>
-        <p:nvSpPr>
-          <p:cNvPr id="14" name="Text 12"/>
-          <p:cNvSpPr/>
-          <p:nvPr/>
-        </p:nvSpPr>
-        <p:spPr>
-          <a:xfrm>
-            <a:off x="4000500" y="2942642"/>
-            <a:ext cx="1143000" cy="237744"/>
-          </a:xfrm>
-          <a:prstGeom prst="rect">
-            <a:avLst/>
-          </a:prstGeom>
-          <a:noFill/>
-          <a:ln/>
-        </p:spPr>
-        <p:txBody>
-          <a:bodyPr wrap="square" rtlCol="0" anchor="ctr"/>
-          <a:lstStyle/>
-          <a:p>
-            <a:pPr algn="ctr" indent="0" marL="0">
-              <a:buNone/>
-            </a:pPr>
-            <a:r>
-              <a:rPr lang="en-US" sz="950" b="1" dirty="0">
-                <a:solidFill>
-                  <a:srgbClr val="1C1917"/>
-                </a:solidFill>
-                <a:latin typeface="Arial" pitchFamily="34" charset="0"/>
-                <a:ea typeface="Arial" pitchFamily="34" charset="-122"/>
-                <a:cs typeface="Arial" pitchFamily="34" charset="-120"/>
-              </a:rPr>
-              <a:t>67618</a:t>
-            </a:r>
-            <a:endParaRPr lang="en-US" sz="950" dirty="0"/>
-          </a:p>
-        </p:txBody>
-      </p:sp>
-      <p:sp>
-        <p:nvSpPr>
-          <p:cNvPr id="15" name="Text 13"/>
-          <p:cNvSpPr/>
-          <p:nvPr/>
-        </p:nvSpPr>
-        <p:spPr>
-          <a:xfrm>
-            <a:off x="3954780" y="4315968"/>
-            <a:ext cx="1234440" cy="502920"/>
-          </a:xfrm>
-          <a:prstGeom prst="rect">
-            <a:avLst/>
-          </a:prstGeom>
-          <a:noFill/>
-          <a:ln/>
-        </p:spPr>
-        <p:txBody>
-          <a:bodyPr wrap="square" rtlCol="0" anchor="ctr"/>
-          <a:lstStyle/>
-          <a:p>
-            <a:pPr algn="ctr" indent="0" marL="0">
-              <a:buNone/>
-            </a:pPr>
-            <a:r>
-              <a:rPr lang="en-US" sz="850" dirty="0">
-                <a:solidFill>
-                  <a:srgbClr val="78716C"/>
-                </a:solidFill>
-                <a:latin typeface="Arial" pitchFamily="34" charset="0"/>
-                <a:ea typeface="Arial" pitchFamily="34" charset="-122"/>
-                <a:cs typeface="Arial" pitchFamily="34" charset="-120"/>
-              </a:rPr>
-              <a:t>Year 3 FCF</a:t>
-            </a:r>
-            <a:endParaRPr lang="en-US" sz="850" dirty="0"/>
-          </a:p>
-        </p:txBody>
-      </p:sp>
-      <p:sp>
-        <p:nvSpPr>
-          <p:cNvPr id="16" name="Shape 14"/>
-          <p:cNvSpPr/>
-          <p:nvPr/>
-        </p:nvSpPr>
-        <p:spPr>
-          <a:xfrm>
-            <a:off x="5682996" y="1318638"/>
-            <a:ext cx="777240" cy="2887602"/>
-          </a:xfrm>
-          <a:prstGeom prst="rect">
-            <a:avLst/>
-          </a:prstGeom>
-          <a:solidFill>
-            <a:srgbClr val="B45309"/>
-          </a:solidFill>
-          <a:ln/>
-        </p:spPr>
-      </p:sp>
-      <p:sp>
-        <p:nvSpPr>
-          <p:cNvPr id="17" name="Text 15"/>
-          <p:cNvSpPr/>
-          <p:nvPr/>
-        </p:nvSpPr>
-        <p:spPr>
-          <a:xfrm>
-            <a:off x="5500116" y="1044318"/>
-            <a:ext cx="1143000" cy="237744"/>
-          </a:xfrm>
-          <a:prstGeom prst="rect">
-            <a:avLst/>
-          </a:prstGeom>
-          <a:noFill/>
-          <a:ln/>
-        </p:spPr>
-        <p:txBody>
-          <a:bodyPr wrap="square" rtlCol="0" anchor="ctr"/>
-          <a:lstStyle/>
-          <a:p>
-            <a:pPr algn="ctr" indent="0" marL="0">
-              <a:buNone/>
-            </a:pPr>
-            <a:r>
-              <a:rPr lang="en-US" sz="950" b="1" dirty="0">
-                <a:solidFill>
-                  <a:srgbClr val="1C1917"/>
-                </a:solidFill>
-                <a:latin typeface="Arial" pitchFamily="34" charset="0"/>
-                <a:ea typeface="Arial" pitchFamily="34" charset="-122"/>
-                <a:cs typeface="Arial" pitchFamily="34" charset="-120"/>
-              </a:rPr>
-              <a:t>197370</a:t>
-            </a:r>
-            <a:endParaRPr lang="en-US" sz="950" dirty="0"/>
-          </a:p>
-        </p:txBody>
-      </p:sp>
-      <p:sp>
-        <p:nvSpPr>
-          <p:cNvPr id="18" name="Text 16"/>
-          <p:cNvSpPr/>
-          <p:nvPr/>
-        </p:nvSpPr>
-        <p:spPr>
-          <a:xfrm>
-            <a:off x="5454396" y="4315968"/>
-            <a:ext cx="1234440" cy="502920"/>
-          </a:xfrm>
-          <a:prstGeom prst="rect">
-            <a:avLst/>
-          </a:prstGeom>
-          <a:noFill/>
-          <a:ln/>
-        </p:spPr>
-        <p:txBody>
-          <a:bodyPr wrap="square" rtlCol="0" anchor="ctr"/>
-          <a:lstStyle/>
-          <a:p>
-            <a:pPr algn="ctr" indent="0" marL="0">
-              <a:buNone/>
-            </a:pPr>
-            <a:r>
-              <a:rPr lang="en-US" sz="850" dirty="0">
-                <a:solidFill>
-                  <a:srgbClr val="78716C"/>
-                </a:solidFill>
-                <a:latin typeface="Arial" pitchFamily="34" charset="0"/>
-                <a:ea typeface="Arial" pitchFamily="34" charset="-122"/>
-                <a:cs typeface="Arial" pitchFamily="34" charset="-120"/>
-              </a:rPr>
-              <a:t>Total PV</a:t>
-            </a:r>
-            <a:endParaRPr lang="en-US" sz="850" dirty="0"/>
-          </a:p>
-        </p:txBody>
-      </p:sp>
-      <p:sp>
-        <p:nvSpPr>
-          <p:cNvPr id="19" name="Shape 17"/>
-          <p:cNvSpPr/>
-          <p:nvPr/>
-        </p:nvSpPr>
-        <p:spPr>
-          <a:xfrm>
-            <a:off x="7182612" y="1280160"/>
-            <a:ext cx="777240" cy="2926080"/>
-          </a:xfrm>
-          <a:prstGeom prst="rect">
-            <a:avLst/>
-          </a:prstGeom>
-          <a:solidFill>
-            <a:srgbClr val="B45309"/>
-          </a:solidFill>
-          <a:ln/>
-        </p:spPr>
-      </p:sp>
-      <p:sp>
-        <p:nvSpPr>
-          <p:cNvPr id="20" name="Text 18"/>
-          <p:cNvSpPr/>
-          <p:nvPr/>
-        </p:nvSpPr>
-        <p:spPr>
-          <a:xfrm>
-            <a:off x="6999732" y="1005840"/>
-            <a:ext cx="1143000" cy="237744"/>
-          </a:xfrm>
-          <a:prstGeom prst="rect">
-            <a:avLst/>
-          </a:prstGeom>
-          <a:noFill/>
-          <a:ln/>
-        </p:spPr>
-        <p:txBody>
-          <a:bodyPr wrap="square" rtlCol="0" anchor="ctr"/>
-          <a:lstStyle/>
-          <a:p>
-            <a:pPr algn="ctr" indent="0" marL="0">
-              <a:buNone/>
-            </a:pPr>
-            <a:r>
-              <a:rPr lang="en-US" sz="950" b="1" dirty="0">
-                <a:solidFill>
-                  <a:srgbClr val="1C1917"/>
-                </a:solidFill>
-                <a:latin typeface="Arial" pitchFamily="34" charset="0"/>
-                <a:ea typeface="Arial" pitchFamily="34" charset="-122"/>
-                <a:cs typeface="Arial" pitchFamily="34" charset="-120"/>
-              </a:rPr>
-              <a:t>200000</a:t>
-            </a:r>
-            <a:endParaRPr lang="en-US" sz="950" dirty="0"/>
-          </a:p>
-        </p:txBody>
-      </p:sp>
-      <p:sp>
-        <p:nvSpPr>
-          <p:cNvPr id="21" name="Text 19"/>
-          <p:cNvSpPr/>
-          <p:nvPr/>
-        </p:nvSpPr>
-        <p:spPr>
-          <a:xfrm>
-            <a:off x="6954012" y="4315968"/>
-            <a:ext cx="1234440" cy="502920"/>
-          </a:xfrm>
-          <a:prstGeom prst="rect">
-            <a:avLst/>
-          </a:prstGeom>
-          <a:noFill/>
-          <a:ln/>
-        </p:spPr>
-        <p:txBody>
-          <a:bodyPr wrap="square" rtlCol="0" anchor="ctr"/>
-          <a:lstStyle/>
-          <a:p>
-            <a:pPr algn="ctr" indent="0" marL="0">
-              <a:buNone/>
-            </a:pPr>
-            <a:r>
-              <a:rPr lang="en-US" sz="850" dirty="0">
-                <a:solidFill>
-                  <a:srgbClr val="78716C"/>
-                </a:solidFill>
-                <a:latin typeface="Arial" pitchFamily="34" charset="0"/>
-                <a:ea typeface="Arial" pitchFamily="34" charset="-122"/>
-                <a:cs typeface="Arial" pitchFamily="34" charset="-120"/>
-              </a:rPr>
-              <a:t>Initial Investment</a:t>
-            </a:r>
-            <a:endParaRPr lang="en-US" sz="850" dirty="0"/>
+              <a:t>A single broken formula can invalidate an entire valuation, making a disciplined audit routine non-negotiable.</a:t>
+            </a:r>
+            <a:endParaRPr lang="en-US" sz="1100" dirty="0"/>
           </a:p>
         </p:txBody>
       </p:sp>
